--- a/5_Montecarlo Simulation.pptx
+++ b/5_Montecarlo Simulation.pptx
@@ -5,10 +5,10 @@
     <p:sldMasterId id="2147483648" r:id="rId4"/>
   </p:sldMasterIdLst>
   <p:notesMasterIdLst>
-    <p:notesMasterId r:id="rId11"/>
+    <p:notesMasterId r:id="rId12"/>
   </p:notesMasterIdLst>
   <p:handoutMasterIdLst>
-    <p:handoutMasterId r:id="rId12"/>
+    <p:handoutMasterId r:id="rId13"/>
   </p:handoutMasterIdLst>
   <p:sldIdLst>
     <p:sldId id="256" r:id="rId5"/>
@@ -17,6 +17,7 @@
     <p:sldId id="305" r:id="rId8"/>
     <p:sldId id="307" r:id="rId9"/>
     <p:sldId id="306" r:id="rId10"/>
+    <p:sldId id="308" r:id="rId11"/>
   </p:sldIdLst>
   <p:sldSz cx="12188825" cy="6858000"/>
   <p:notesSz cx="6858000" cy="9144000"/>
@@ -238,7 +239,7 @@
                 <a:latin typeface="맑은 고딕" panose="020B0503020000020004" pitchFamily="50" charset="-127"/>
                 <a:ea typeface="맑은 고딕" panose="020B0503020000020004" pitchFamily="50" charset="-127"/>
               </a:rPr>
-              <a:t>2026-02-28</a:t>
+              <a:t>2026-03-23</a:t>
             </a:fld>
             <a:endParaRPr lang="ko-KR" altLang="en-US" dirty="0">
               <a:latin typeface="맑은 고딕" panose="020B0503020000020004" pitchFamily="50" charset="-127"/>
@@ -425,7 +426,7 @@
             <a:fld id="{39DBE7D5-AA2D-4B26-8C69-8B60D39FD5EE}" type="datetime1">
               <a:rPr lang="ko-KR" altLang="en-US" smtClean="0"/>
               <a:pPr/>
-              <a:t>2026-02-28</a:t>
+              <a:t>2026-03-23</a:t>
             </a:fld>
             <a:endParaRPr lang="ko-KR" altLang="en-US" dirty="0"/>
           </a:p>
@@ -1307,6 +1308,115 @@
 </p:notes>
 </file>
 
+<file path=ppt/notesSlides/notesSlide7.xml><?xml version="1.0" encoding="utf-8"?>
+<p:notes xmlns:a="http://schemas.openxmlformats.org/drawingml/2006/main" xmlns:r="http://schemas.openxmlformats.org/officeDocument/2006/relationships" xmlns:p="http://schemas.openxmlformats.org/presentationml/2006/main">
+  <p:cSld>
+    <p:spTree>
+      <p:nvGrpSpPr>
+        <p:cNvPr id="1" name="">
+          <a:extLst>
+            <a:ext uri="{FF2B5EF4-FFF2-40B4-BE49-F238E27FC236}">
+              <a16:creationId xmlns:a16="http://schemas.microsoft.com/office/drawing/2014/main" id="{FC427E54-28B2-8C19-528B-8C781240BA4D}"/>
+            </a:ext>
+          </a:extLst>
+        </p:cNvPr>
+        <p:cNvGrpSpPr/>
+        <p:nvPr/>
+      </p:nvGrpSpPr>
+      <p:grpSpPr>
+        <a:xfrm>
+          <a:off x="0" y="0"/>
+          <a:ext cx="0" cy="0"/>
+          <a:chOff x="0" y="0"/>
+          <a:chExt cx="0" cy="0"/>
+        </a:xfrm>
+      </p:grpSpPr>
+      <p:sp>
+        <p:nvSpPr>
+          <p:cNvPr id="2" name="슬라이드 이미지 개체 틀 1">
+            <a:extLst>
+              <a:ext uri="{FF2B5EF4-FFF2-40B4-BE49-F238E27FC236}">
+                <a16:creationId xmlns:a16="http://schemas.microsoft.com/office/drawing/2014/main" id="{7E4D7B0C-202C-6E21-08C8-5AB3D9339807}"/>
+              </a:ext>
+            </a:extLst>
+          </p:cNvPr>
+          <p:cNvSpPr>
+            <a:spLocks noGrp="1" noRot="1" noChangeAspect="1"/>
+          </p:cNvSpPr>
+          <p:nvPr>
+            <p:ph type="sldImg"/>
+          </p:nvPr>
+        </p:nvSpPr>
+        <p:spPr/>
+      </p:sp>
+      <p:sp>
+        <p:nvSpPr>
+          <p:cNvPr id="3" name="슬라이드 노트 개체 틀 2">
+            <a:extLst>
+              <a:ext uri="{FF2B5EF4-FFF2-40B4-BE49-F238E27FC236}">
+                <a16:creationId xmlns:a16="http://schemas.microsoft.com/office/drawing/2014/main" id="{F888F541-3E50-4ACF-17EA-E0DC1F891A6A}"/>
+              </a:ext>
+            </a:extLst>
+          </p:cNvPr>
+          <p:cNvSpPr>
+            <a:spLocks noGrp="1"/>
+          </p:cNvSpPr>
+          <p:nvPr>
+            <p:ph type="body" idx="1"/>
+          </p:nvPr>
+        </p:nvSpPr>
+        <p:spPr/>
+        <p:txBody>
+          <a:bodyPr/>
+          <a:lstStyle/>
+          <a:p>
+            <a:endParaRPr lang="ko-KR" altLang="en-US" dirty="0"/>
+          </a:p>
+        </p:txBody>
+      </p:sp>
+      <p:sp>
+        <p:nvSpPr>
+          <p:cNvPr id="4" name="슬라이드 번호 개체 틀 3">
+            <a:extLst>
+              <a:ext uri="{FF2B5EF4-FFF2-40B4-BE49-F238E27FC236}">
+                <a16:creationId xmlns:a16="http://schemas.microsoft.com/office/drawing/2014/main" id="{45B0BA84-50CA-6F67-619A-3B549011D178}"/>
+              </a:ext>
+            </a:extLst>
+          </p:cNvPr>
+          <p:cNvSpPr>
+            <a:spLocks noGrp="1"/>
+          </p:cNvSpPr>
+          <p:nvPr>
+            <p:ph type="sldNum" sz="quarter" idx="10"/>
+          </p:nvPr>
+        </p:nvSpPr>
+        <p:spPr/>
+        <p:txBody>
+          <a:bodyPr/>
+          <a:lstStyle/>
+          <a:p>
+            <a:pPr rtl="0"/>
+            <a:fld id="{5FB91549-43BF-425A-AF25-75262019208C}" type="slidenum">
+              <a:rPr lang="en-US" altLang="ko-KR" smtClean="0"/>
+              <a:t>7</a:t>
+            </a:fld>
+            <a:endParaRPr lang="ko-KR" altLang="en-US" dirty="0"/>
+          </a:p>
+        </p:txBody>
+      </p:sp>
+    </p:spTree>
+    <p:extLst>
+      <p:ext uri="{BB962C8B-B14F-4D97-AF65-F5344CB8AC3E}">
+        <p14:creationId xmlns:p14="http://schemas.microsoft.com/office/powerpoint/2010/main" val="1878932704"/>
+      </p:ext>
+    </p:extLst>
+  </p:cSld>
+  <p:clrMapOvr>
+    <a:masterClrMapping/>
+  </p:clrMapOvr>
+</p:notes>
+</file>
+
 <file path=ppt/slideLayouts/slideLayout1.xml><?xml version="1.0" encoding="utf-8"?>
 <p:sldLayout xmlns:a="http://schemas.openxmlformats.org/drawingml/2006/main" xmlns:r="http://schemas.openxmlformats.org/officeDocument/2006/relationships" xmlns:p="http://schemas.openxmlformats.org/presentationml/2006/main" type="title" preserve="1">
   <p:cSld name="제목 슬라이드">
@@ -1545,7 +1655,7 @@
           <a:p>
             <a:fld id="{4B229CEB-779D-4AB3-81CB-8FCEEAE03F61}" type="datetime1">
               <a:rPr lang="ko-KR" altLang="en-US" smtClean="0"/>
-              <a:t>2026-02-28</a:t>
+              <a:t>2026-03-23</a:t>
             </a:fld>
             <a:endParaRPr lang="ko-KR" altLang="en-US" dirty="0"/>
           </a:p>
@@ -1783,7 +1893,7 @@
             <a:pPr rtl="0"/>
             <a:fld id="{C3B7A883-0BF0-4B4B-84D5-D747A0111A56}" type="datetime1">
               <a:rPr lang="ko-KR" altLang="en-US" noProof="0" smtClean="0"/>
-              <a:t>2026-02-28</a:t>
+              <a:t>2026-03-23</a:t>
             </a:fld>
             <a:endParaRPr lang="ko-KR" altLang="en-US" noProof="0" dirty="0"/>
           </a:p>
@@ -2001,7 +2111,7 @@
             <a:pPr rtl="0"/>
             <a:fld id="{3DA7EA29-F2BB-4FB1-BB4B-C55A7FA3FC5C}" type="datetime1">
               <a:rPr lang="ko-KR" altLang="en-US" noProof="0" smtClean="0"/>
-              <a:t>2026-02-28</a:t>
+              <a:t>2026-03-23</a:t>
             </a:fld>
             <a:endParaRPr lang="ko-KR" altLang="en-US" noProof="0" dirty="0"/>
           </a:p>
@@ -2210,7 +2320,7 @@
             <a:pPr rtl="0"/>
             <a:fld id="{D76306AB-75A0-421C-B431-0E4E30A5C28E}" type="datetime1">
               <a:rPr lang="ko-KR" altLang="en-US" noProof="0" smtClean="0"/>
-              <a:t>2026-02-28</a:t>
+              <a:t>2026-03-23</a:t>
             </a:fld>
             <a:endParaRPr lang="ko-KR" altLang="en-US" noProof="0" dirty="0"/>
           </a:p>
@@ -2480,7 +2590,7 @@
             <a:pPr rtl="0"/>
             <a:fld id="{E1D969EE-F1EB-462E-B70D-5B36B3806A4E}" type="datetime1">
               <a:rPr lang="ko-KR" altLang="en-US" noProof="0" smtClean="0"/>
-              <a:t>2026-02-28</a:t>
+              <a:t>2026-03-23</a:t>
             </a:fld>
             <a:endParaRPr lang="ko-KR" altLang="en-US" noProof="0" dirty="0"/>
           </a:p>
@@ -2788,7 +2898,7 @@
             <a:pPr rtl="0"/>
             <a:fld id="{E8CBB1B7-E0A1-46A3-B5B5-C69931095FF6}" type="datetime1">
               <a:rPr lang="ko-KR" altLang="en-US" noProof="0" smtClean="0"/>
-              <a:t>2026-02-28</a:t>
+              <a:t>2026-03-23</a:t>
             </a:fld>
             <a:endParaRPr lang="ko-KR" altLang="en-US" noProof="0" dirty="0"/>
           </a:p>
@@ -3239,7 +3349,7 @@
             <a:pPr rtl="0"/>
             <a:fld id="{DAFC0E65-06AB-44D7-AAEE-8F4C7ED84A0C}" type="datetime1">
               <a:rPr lang="ko-KR" altLang="en-US" noProof="0" smtClean="0"/>
-              <a:t>2026-02-28</a:t>
+              <a:t>2026-03-23</a:t>
             </a:fld>
             <a:endParaRPr lang="ko-KR" altLang="en-US" noProof="0" dirty="0"/>
           </a:p>
@@ -3376,7 +3486,7 @@
             <a:pPr rtl="0"/>
             <a:fld id="{30189E66-D439-4767-B911-EB49CB20E313}" type="datetime1">
               <a:rPr lang="ko-KR" altLang="en-US" noProof="0" smtClean="0"/>
-              <a:t>2026-02-28</a:t>
+              <a:t>2026-03-23</a:t>
             </a:fld>
             <a:endParaRPr lang="ko-KR" altLang="en-US" noProof="0" dirty="0"/>
           </a:p>
@@ -3489,7 +3599,7 @@
             <a:pPr rtl="0"/>
             <a:fld id="{D4E4FFC0-DB28-4291-80A0-63DBF8428320}" type="datetime1">
               <a:rPr lang="ko-KR" altLang="en-US" noProof="0" smtClean="0"/>
-              <a:t>2026-02-28</a:t>
+              <a:t>2026-03-23</a:t>
             </a:fld>
             <a:endParaRPr lang="ko-KR" altLang="en-US" noProof="0" dirty="0"/>
           </a:p>
@@ -3794,7 +3904,7 @@
             <a:pPr rtl="0"/>
             <a:fld id="{3AB5804B-C38E-4214-93DF-3E6DA00134E8}" type="datetime1">
               <a:rPr lang="ko-KR" altLang="en-US" noProof="0" smtClean="0"/>
-              <a:t>2026-02-28</a:t>
+              <a:t>2026-03-23</a:t>
             </a:fld>
             <a:endParaRPr lang="ko-KR" altLang="en-US" noProof="0" dirty="0"/>
           </a:p>
@@ -4088,7 +4198,7 @@
             <a:pPr rtl="0"/>
             <a:fld id="{CABEE384-F18F-4153-AC21-608599869F84}" type="datetime1">
               <a:rPr lang="ko-KR" altLang="en-US" noProof="0" smtClean="0"/>
-              <a:t>2026-02-28</a:t>
+              <a:t>2026-03-23</a:t>
             </a:fld>
             <a:endParaRPr lang="ko-KR" altLang="en-US" noProof="0" dirty="0"/>
           </a:p>
@@ -4320,7 +4430,7 @@
           <a:p>
             <a:fld id="{667A4C69-65FB-481C-AC2A-84D254D33675}" type="datetime1">
               <a:rPr lang="ko-KR" altLang="en-US" smtClean="0"/>
-              <a:t>2026-02-28</a:t>
+              <a:t>2026-03-23</a:t>
             </a:fld>
             <a:endParaRPr lang="ko-KR" altLang="en-US" dirty="0"/>
           </a:p>
@@ -6305,6 +6415,204 @@
     <p:extLst>
       <p:ext uri="{BB962C8B-B14F-4D97-AF65-F5344CB8AC3E}">
         <p14:creationId xmlns:p14="http://schemas.microsoft.com/office/powerpoint/2010/main" val="1646032272"/>
+      </p:ext>
+    </p:extLst>
+  </p:cSld>
+  <p:clrMapOvr>
+    <a:masterClrMapping/>
+  </p:clrMapOvr>
+  <mc:AlternateContent xmlns:mc="http://schemas.openxmlformats.org/markup-compatibility/2006" xmlns:p14="http://schemas.microsoft.com/office/powerpoint/2010/main">
+    <mc:Choice Requires="p14">
+      <p:transition spd="med" p14:dur="700">
+        <p:fade/>
+      </p:transition>
+    </mc:Choice>
+    <mc:Fallback xmlns="">
+      <p:transition spd="med">
+        <p:fade/>
+      </p:transition>
+    </mc:Fallback>
+  </mc:AlternateContent>
+</p:sld>
+</file>
+
+<file path=ppt/slides/slide7.xml><?xml version="1.0" encoding="utf-8"?>
+<p:sld xmlns:a="http://schemas.openxmlformats.org/drawingml/2006/main" xmlns:r="http://schemas.openxmlformats.org/officeDocument/2006/relationships" xmlns:p="http://schemas.openxmlformats.org/presentationml/2006/main">
+  <p:cSld>
+    <p:spTree>
+      <p:nvGrpSpPr>
+        <p:cNvPr id="1" name="">
+          <a:extLst>
+            <a:ext uri="{FF2B5EF4-FFF2-40B4-BE49-F238E27FC236}">
+              <a16:creationId xmlns:a16="http://schemas.microsoft.com/office/drawing/2014/main" id="{DA1C777C-D922-8895-688C-C5D8CB36E7A9}"/>
+            </a:ext>
+          </a:extLst>
+        </p:cNvPr>
+        <p:cNvGrpSpPr/>
+        <p:nvPr/>
+      </p:nvGrpSpPr>
+      <p:grpSpPr>
+        <a:xfrm>
+          <a:off x="0" y="0"/>
+          <a:ext cx="0" cy="0"/>
+          <a:chOff x="0" y="0"/>
+          <a:chExt cx="0" cy="0"/>
+        </a:xfrm>
+      </p:grpSpPr>
+      <p:sp>
+        <p:nvSpPr>
+          <p:cNvPr id="2" name="슬라이드 번호 개체 틀 1">
+            <a:extLst>
+              <a:ext uri="{FF2B5EF4-FFF2-40B4-BE49-F238E27FC236}">
+                <a16:creationId xmlns:a16="http://schemas.microsoft.com/office/drawing/2014/main" id="{AEB2C61B-EEC0-7491-DD5B-4008A55D9FCA}"/>
+              </a:ext>
+            </a:extLst>
+          </p:cNvPr>
+          <p:cNvSpPr>
+            <a:spLocks noGrp="1"/>
+          </p:cNvSpPr>
+          <p:nvPr>
+            <p:ph type="sldNum" sz="quarter" idx="12"/>
+          </p:nvPr>
+        </p:nvSpPr>
+        <p:spPr/>
+        <p:txBody>
+          <a:bodyPr/>
+          <a:lstStyle/>
+          <a:p>
+            <a:pPr rtl="0"/>
+            <a:fld id="{A3F31473-23EB-4724-8B59-FE6D21D89FA4}" type="slidenum">
+              <a:rPr lang="en-US" altLang="ko-KR" noProof="0" smtClean="0"/>
+              <a:t>7</a:t>
+            </a:fld>
+            <a:endParaRPr lang="en-US" altLang="ko-KR" noProof="0" dirty="0"/>
+          </a:p>
+        </p:txBody>
+      </p:sp>
+      <p:sp>
+        <p:nvSpPr>
+          <p:cNvPr id="4" name="TextBox 3">
+            <a:extLst>
+              <a:ext uri="{FF2B5EF4-FFF2-40B4-BE49-F238E27FC236}">
+                <a16:creationId xmlns:a16="http://schemas.microsoft.com/office/drawing/2014/main" id="{B46F664B-D509-3189-2815-157CC6374EF1}"/>
+              </a:ext>
+            </a:extLst>
+          </p:cNvPr>
+          <p:cNvSpPr txBox="1"/>
+          <p:nvPr/>
+        </p:nvSpPr>
+        <p:spPr>
+          <a:xfrm>
+            <a:off x="765820" y="1196752"/>
+            <a:ext cx="11233248" cy="509178"/>
+          </a:xfrm>
+          <a:prstGeom prst="rect">
+            <a:avLst/>
+          </a:prstGeom>
+          <a:solidFill>
+            <a:schemeClr val="tx1">
+              <a:lumMod val="20000"/>
+              <a:lumOff val="80000"/>
+            </a:schemeClr>
+          </a:solidFill>
+        </p:spPr>
+        <p:txBody>
+          <a:bodyPr wrap="square" rtlCol="0">
+            <a:spAutoFit/>
+          </a:bodyPr>
+          <a:lstStyle/>
+          <a:p>
+            <a:pPr marL="285750" indent="-285750">
+              <a:lnSpc>
+                <a:spcPct val="150000"/>
+              </a:lnSpc>
+              <a:buFont typeface="Wingdings" panose="05000000000000000000" pitchFamily="2" charset="2"/>
+              <a:buChar char="v"/>
+            </a:pPr>
+            <a:r>
+              <a:rPr lang="ko-KR" altLang="en-US" sz="2000" dirty="0">
+                <a:latin typeface="휴먼모음T" panose="02030504000101010101" pitchFamily="18" charset="-127"/>
+                <a:ea typeface="휴먼모음T" panose="02030504000101010101" pitchFamily="18" charset="-127"/>
+              </a:rPr>
+              <a:t>평생 미팅하는 상대방이 </a:t>
+            </a:r>
+            <a:r>
+              <a:rPr lang="en-US" altLang="ko-KR" sz="2000" dirty="0">
+                <a:latin typeface="휴먼모음T" panose="02030504000101010101" pitchFamily="18" charset="-127"/>
+                <a:ea typeface="휴먼모음T" panose="02030504000101010101" pitchFamily="18" charset="-127"/>
+              </a:rPr>
+              <a:t>N</a:t>
+            </a:r>
+            <a:r>
+              <a:rPr lang="ko-KR" altLang="en-US" sz="2000" dirty="0">
+                <a:latin typeface="휴먼모음T" panose="02030504000101010101" pitchFamily="18" charset="-127"/>
+                <a:ea typeface="휴먼모음T" panose="02030504000101010101" pitchFamily="18" charset="-127"/>
+              </a:rPr>
+              <a:t>명이라면 몇 번째 만난 사람과 </a:t>
+            </a:r>
+            <a:r>
+              <a:rPr lang="ko-KR" altLang="en-US" sz="2000" dirty="0" err="1">
+                <a:latin typeface="휴먼모음T" panose="02030504000101010101" pitchFamily="18" charset="-127"/>
+                <a:ea typeface="휴먼모음T" panose="02030504000101010101" pitchFamily="18" charset="-127"/>
+              </a:rPr>
+              <a:t>결혼을해야</a:t>
+            </a:r>
+            <a:r>
+              <a:rPr lang="ko-KR" altLang="en-US" sz="2000" dirty="0">
+                <a:latin typeface="휴먼모음T" panose="02030504000101010101" pitchFamily="18" charset="-127"/>
+                <a:ea typeface="휴먼모음T" panose="02030504000101010101" pitchFamily="18" charset="-127"/>
+              </a:rPr>
+              <a:t> 최적의 선택인가</a:t>
+            </a:r>
+            <a:r>
+              <a:rPr lang="en-US" altLang="ko-KR" sz="2000" dirty="0">
+                <a:latin typeface="휴먼모음T" panose="02030504000101010101" pitchFamily="18" charset="-127"/>
+                <a:ea typeface="휴먼모음T" panose="02030504000101010101" pitchFamily="18" charset="-127"/>
+              </a:rPr>
+              <a:t>?</a:t>
+            </a:r>
+          </a:p>
+        </p:txBody>
+      </p:sp>
+      <p:sp>
+        <p:nvSpPr>
+          <p:cNvPr id="9" name="TextBox 8">
+            <a:extLst>
+              <a:ext uri="{FF2B5EF4-FFF2-40B4-BE49-F238E27FC236}">
+                <a16:creationId xmlns:a16="http://schemas.microsoft.com/office/drawing/2014/main" id="{1A89527C-5F15-5354-51AE-303E2EF56CBE}"/>
+              </a:ext>
+            </a:extLst>
+          </p:cNvPr>
+          <p:cNvSpPr txBox="1"/>
+          <p:nvPr/>
+        </p:nvSpPr>
+        <p:spPr>
+          <a:xfrm>
+            <a:off x="117748" y="260648"/>
+            <a:ext cx="2592288" cy="584775"/>
+          </a:xfrm>
+          <a:prstGeom prst="rect">
+            <a:avLst/>
+          </a:prstGeom>
+          <a:noFill/>
+        </p:spPr>
+        <p:txBody>
+          <a:bodyPr wrap="square" rtlCol="0">
+            <a:spAutoFit/>
+          </a:bodyPr>
+          <a:lstStyle/>
+          <a:p>
+            <a:r>
+              <a:rPr lang="ko-KR" altLang="en-US" sz="3200" b="1"/>
+              <a:t>문제 풀이</a:t>
+            </a:r>
+          </a:p>
+        </p:txBody>
+      </p:sp>
+    </p:spTree>
+    <p:extLst>
+      <p:ext uri="{BB962C8B-B14F-4D97-AF65-F5344CB8AC3E}">
+        <p14:creationId xmlns:p14="http://schemas.microsoft.com/office/powerpoint/2010/main" val="1127705894"/>
       </p:ext>
     </p:extLst>
   </p:cSld>
@@ -7127,26 +7435,6 @@
 </file>
 
 <file path=customXml/item1.xml><?xml version="1.0" encoding="utf-8"?>
-<p:properties xmlns:p="http://schemas.microsoft.com/office/2006/metadata/properties" xmlns:xsi="http://www.w3.org/2001/XMLSchema-instance" xmlns:pc="http://schemas.microsoft.com/office/infopath/2007/PartnerControls">
-  <documentManagement>
-    <VSO_x0020_item_x0020_id xmlns="40262f94-9f35-4ac3-9a90-690165a166b7" xsi:nil="true"/>
-    <Assetid_x0020_ xmlns="40262f94-9f35-4ac3-9a90-690165a166b7" xsi:nil="true"/>
-    <Item_x0020_Details xmlns="40262f94-9f35-4ac3-9a90-690165a166b7" xsi:nil="true"/>
-    <Template_x0020_details xmlns="40262f94-9f35-4ac3-9a90-690165a166b7" xsi:nil="true"/>
-  </documentManagement>
-</p:properties>
-</file>
-
-<file path=customXml/item2.xml><?xml version="1.0" encoding="utf-8"?>
-<?mso-contentType ?>
-<FormTemplates xmlns="http://schemas.microsoft.com/sharepoint/v3/contenttype/forms">
-  <Display>DocumentLibraryForm</Display>
-  <Edit>DocumentLibraryForm</Edit>
-  <New>DocumentLibraryForm</New>
-</FormTemplates>
-</file>
-
-<file path=customXml/item3.xml><?xml version="1.0" encoding="utf-8"?>
 <ct:contentTypeSchema xmlns:ct="http://schemas.microsoft.com/office/2006/metadata/contentType" xmlns:ma="http://schemas.microsoft.com/office/2006/metadata/properties/metaAttributes" ct:_="" ma:_="" ma:contentTypeName="Document" ma:contentTypeID="0x010100AA3F7D94069FF64A86F7DFF56D60E3BE" ma:contentTypeVersion="6" ma:contentTypeDescription="Create a new document." ma:contentTypeScope="" ma:versionID="c32302c77d4085ecf495bdddb7f5e889">
   <xsd:schema xmlns:xsd="http://www.w3.org/2001/XMLSchema" xmlns:xs="http://www.w3.org/2001/XMLSchema" xmlns:p="http://schemas.microsoft.com/office/2006/metadata/properties" xmlns:ns2="a4f35948-e619-41b3-aa29-22878b09cfd2" xmlns:ns3="40262f94-9f35-4ac3-9a90-690165a166b7" targetNamespace="http://schemas.microsoft.com/office/2006/metadata/properties" ma:root="true" ma:fieldsID="4ab5ae46be95f9d0be6107e8200be7a2" ns2:_="" ns3:_="">
     <xsd:import namespace="a4f35948-e619-41b3-aa29-22878b09cfd2"/>
@@ -7327,32 +7615,27 @@
 </ct:contentTypeSchema>
 </file>
 
-<file path=customXml/itemProps1.xml><?xml version="1.0" encoding="utf-8"?>
-<ds:datastoreItem xmlns:ds="http://schemas.openxmlformats.org/officeDocument/2006/customXml" ds:itemID="{50AACE6D-8EB6-447A-8DFD-C2C0C52916AC}">
-  <ds:schemaRefs>
-    <ds:schemaRef ds:uri="a4f35948-e619-41b3-aa29-22878b09cfd2"/>
-    <ds:schemaRef ds:uri="http://purl.org/dc/elements/1.1/"/>
-    <ds:schemaRef ds:uri="http://schemas.microsoft.com/office/infopath/2007/PartnerControls"/>
-    <ds:schemaRef ds:uri="40262f94-9f35-4ac3-9a90-690165a166b7"/>
-    <ds:schemaRef ds:uri="http://purl.org/dc/dcmitype/"/>
-    <ds:schemaRef ds:uri="http://schemas.microsoft.com/office/2006/documentManagement/types"/>
-    <ds:schemaRef ds:uri="http://schemas.microsoft.com/office/2006/metadata/properties"/>
-    <ds:schemaRef ds:uri="http://schemas.openxmlformats.org/package/2006/metadata/core-properties"/>
-    <ds:schemaRef ds:uri="http://www.w3.org/XML/1998/namespace"/>
-    <ds:schemaRef ds:uri="http://purl.org/dc/terms/"/>
-  </ds:schemaRefs>
-</ds:datastoreItem>
+<file path=customXml/item2.xml><?xml version="1.0" encoding="utf-8"?>
+<?mso-contentType ?>
+<FormTemplates xmlns="http://schemas.microsoft.com/sharepoint/v3/contenttype/forms">
+  <Display>DocumentLibraryForm</Display>
+  <Edit>DocumentLibraryForm</Edit>
+  <New>DocumentLibraryForm</New>
+</FormTemplates>
 </file>
 
-<file path=customXml/itemProps2.xml><?xml version="1.0" encoding="utf-8"?>
-<ds:datastoreItem xmlns:ds="http://schemas.openxmlformats.org/officeDocument/2006/customXml" ds:itemID="{7F9B8BCC-BF24-4800-92E1-9F891BBB27E6}">
-  <ds:schemaRefs>
-    <ds:schemaRef ds:uri="http://schemas.microsoft.com/sharepoint/v3/contenttype/forms"/>
-  </ds:schemaRefs>
-</ds:datastoreItem>
+<file path=customXml/item3.xml><?xml version="1.0" encoding="utf-8"?>
+<p:properties xmlns:p="http://schemas.microsoft.com/office/2006/metadata/properties" xmlns:xsi="http://www.w3.org/2001/XMLSchema-instance" xmlns:pc="http://schemas.microsoft.com/office/infopath/2007/PartnerControls">
+  <documentManagement>
+    <VSO_x0020_item_x0020_id xmlns="40262f94-9f35-4ac3-9a90-690165a166b7" xsi:nil="true"/>
+    <Assetid_x0020_ xmlns="40262f94-9f35-4ac3-9a90-690165a166b7" xsi:nil="true"/>
+    <Item_x0020_Details xmlns="40262f94-9f35-4ac3-9a90-690165a166b7" xsi:nil="true"/>
+    <Template_x0020_details xmlns="40262f94-9f35-4ac3-9a90-690165a166b7" xsi:nil="true"/>
+  </documentManagement>
+</p:properties>
 </file>
 
-<file path=customXml/itemProps3.xml><?xml version="1.0" encoding="utf-8"?>
+<file path=customXml/itemProps1.xml><?xml version="1.0" encoding="utf-8"?>
 <ds:datastoreItem xmlns:ds="http://schemas.openxmlformats.org/officeDocument/2006/customXml" ds:itemID="{5CCB2C71-1ED8-4540-B003-293B5E75C71F}">
   <ds:schemaRefs>
     <ds:schemaRef ds:uri="http://schemas.microsoft.com/office/2006/metadata/contentType"/>
@@ -7369,4 +7652,29 @@
     <ds:schemaRef ds:uri="http://schemas.microsoft.com/internal/obd"/>
   </ds:schemaRefs>
 </ds:datastoreItem>
+</file>
+
+<file path=customXml/itemProps2.xml><?xml version="1.0" encoding="utf-8"?>
+<ds:datastoreItem xmlns:ds="http://schemas.openxmlformats.org/officeDocument/2006/customXml" ds:itemID="{7F9B8BCC-BF24-4800-92E1-9F891BBB27E6}">
+  <ds:schemaRefs>
+    <ds:schemaRef ds:uri="http://schemas.microsoft.com/sharepoint/v3/contenttype/forms"/>
+  </ds:schemaRefs>
+</ds:datastoreItem>
+</file>
+
+<file path=customXml/itemProps3.xml><?xml version="1.0" encoding="utf-8"?>
+<ds:datastoreItem xmlns:ds="http://schemas.openxmlformats.org/officeDocument/2006/customXml" ds:itemID="{50AACE6D-8EB6-447A-8DFD-C2C0C52916AC}">
+  <ds:schemaRefs>
+    <ds:schemaRef ds:uri="a4f35948-e619-41b3-aa29-22878b09cfd2"/>
+    <ds:schemaRef ds:uri="http://purl.org/dc/elements/1.1/"/>
+    <ds:schemaRef ds:uri="http://schemas.microsoft.com/office/infopath/2007/PartnerControls"/>
+    <ds:schemaRef ds:uri="40262f94-9f35-4ac3-9a90-690165a166b7"/>
+    <ds:schemaRef ds:uri="http://purl.org/dc/dcmitype/"/>
+    <ds:schemaRef ds:uri="http://schemas.microsoft.com/office/2006/documentManagement/types"/>
+    <ds:schemaRef ds:uri="http://schemas.microsoft.com/office/2006/metadata/properties"/>
+    <ds:schemaRef ds:uri="http://schemas.openxmlformats.org/package/2006/metadata/core-properties"/>
+    <ds:schemaRef ds:uri="http://www.w3.org/XML/1998/namespace"/>
+    <ds:schemaRef ds:uri="http://purl.org/dc/terms/"/>
+  </ds:schemaRefs>
+</ds:datastoreItem>
 </file>
--- a/5_Montecarlo Simulation.pptx
+++ b/5_Montecarlo Simulation.pptx
@@ -5,10 +5,10 @@
     <p:sldMasterId id="2147483648" r:id="rId4"/>
   </p:sldMasterIdLst>
   <p:notesMasterIdLst>
-    <p:notesMasterId r:id="rId12"/>
+    <p:notesMasterId r:id="rId14"/>
   </p:notesMasterIdLst>
   <p:handoutMasterIdLst>
-    <p:handoutMasterId r:id="rId13"/>
+    <p:handoutMasterId r:id="rId15"/>
   </p:handoutMasterIdLst>
   <p:sldIdLst>
     <p:sldId id="256" r:id="rId5"/>
@@ -18,6 +18,8 @@
     <p:sldId id="307" r:id="rId9"/>
     <p:sldId id="306" r:id="rId10"/>
     <p:sldId id="308" r:id="rId11"/>
+    <p:sldId id="309" r:id="rId12"/>
+    <p:sldId id="310" r:id="rId13"/>
   </p:sldIdLst>
   <p:sldSz cx="12188825" cy="6858000"/>
   <p:notesSz cx="6858000" cy="9144000"/>
@@ -239,7 +241,7 @@
                 <a:latin typeface="맑은 고딕" panose="020B0503020000020004" pitchFamily="50" charset="-127"/>
                 <a:ea typeface="맑은 고딕" panose="020B0503020000020004" pitchFamily="50" charset="-127"/>
               </a:rPr>
-              <a:t>2026-03-23</a:t>
+              <a:t>2026-03-24</a:t>
             </a:fld>
             <a:endParaRPr lang="ko-KR" altLang="en-US" dirty="0">
               <a:latin typeface="맑은 고딕" panose="020B0503020000020004" pitchFamily="50" charset="-127"/>
@@ -426,7 +428,7 @@
             <a:fld id="{39DBE7D5-AA2D-4B26-8C69-8B60D39FD5EE}" type="datetime1">
               <a:rPr lang="ko-KR" altLang="en-US" smtClean="0"/>
               <a:pPr/>
-              <a:t>2026-03-23</a:t>
+              <a:t>2026-03-24</a:t>
             </a:fld>
             <a:endParaRPr lang="ko-KR" altLang="en-US" dirty="0"/>
           </a:p>
@@ -1417,6 +1419,224 @@
 </p:notes>
 </file>
 
+<file path=ppt/notesSlides/notesSlide8.xml><?xml version="1.0" encoding="utf-8"?>
+<p:notes xmlns:a="http://schemas.openxmlformats.org/drawingml/2006/main" xmlns:r="http://schemas.openxmlformats.org/officeDocument/2006/relationships" xmlns:p="http://schemas.openxmlformats.org/presentationml/2006/main">
+  <p:cSld>
+    <p:spTree>
+      <p:nvGrpSpPr>
+        <p:cNvPr id="1" name="">
+          <a:extLst>
+            <a:ext uri="{FF2B5EF4-FFF2-40B4-BE49-F238E27FC236}">
+              <a16:creationId xmlns:a16="http://schemas.microsoft.com/office/drawing/2014/main" id="{97800921-2A98-58A1-77F4-D8659C0BA353}"/>
+            </a:ext>
+          </a:extLst>
+        </p:cNvPr>
+        <p:cNvGrpSpPr/>
+        <p:nvPr/>
+      </p:nvGrpSpPr>
+      <p:grpSpPr>
+        <a:xfrm>
+          <a:off x="0" y="0"/>
+          <a:ext cx="0" cy="0"/>
+          <a:chOff x="0" y="0"/>
+          <a:chExt cx="0" cy="0"/>
+        </a:xfrm>
+      </p:grpSpPr>
+      <p:sp>
+        <p:nvSpPr>
+          <p:cNvPr id="2" name="슬라이드 이미지 개체 틀 1">
+            <a:extLst>
+              <a:ext uri="{FF2B5EF4-FFF2-40B4-BE49-F238E27FC236}">
+                <a16:creationId xmlns:a16="http://schemas.microsoft.com/office/drawing/2014/main" id="{748269F1-DD08-6BF5-8344-47DF8E22EB29}"/>
+              </a:ext>
+            </a:extLst>
+          </p:cNvPr>
+          <p:cNvSpPr>
+            <a:spLocks noGrp="1" noRot="1" noChangeAspect="1"/>
+          </p:cNvSpPr>
+          <p:nvPr>
+            <p:ph type="sldImg"/>
+          </p:nvPr>
+        </p:nvSpPr>
+        <p:spPr/>
+      </p:sp>
+      <p:sp>
+        <p:nvSpPr>
+          <p:cNvPr id="3" name="슬라이드 노트 개체 틀 2">
+            <a:extLst>
+              <a:ext uri="{FF2B5EF4-FFF2-40B4-BE49-F238E27FC236}">
+                <a16:creationId xmlns:a16="http://schemas.microsoft.com/office/drawing/2014/main" id="{3496A4B6-DC7D-FF48-46FC-7358B9C8159D}"/>
+              </a:ext>
+            </a:extLst>
+          </p:cNvPr>
+          <p:cNvSpPr>
+            <a:spLocks noGrp="1"/>
+          </p:cNvSpPr>
+          <p:nvPr>
+            <p:ph type="body" idx="1"/>
+          </p:nvPr>
+        </p:nvSpPr>
+        <p:spPr/>
+        <p:txBody>
+          <a:bodyPr/>
+          <a:lstStyle/>
+          <a:p>
+            <a:endParaRPr lang="ko-KR" altLang="en-US" dirty="0"/>
+          </a:p>
+        </p:txBody>
+      </p:sp>
+      <p:sp>
+        <p:nvSpPr>
+          <p:cNvPr id="4" name="슬라이드 번호 개체 틀 3">
+            <a:extLst>
+              <a:ext uri="{FF2B5EF4-FFF2-40B4-BE49-F238E27FC236}">
+                <a16:creationId xmlns:a16="http://schemas.microsoft.com/office/drawing/2014/main" id="{8F61E27B-EE8E-0361-5AEB-07842FCFA0C5}"/>
+              </a:ext>
+            </a:extLst>
+          </p:cNvPr>
+          <p:cNvSpPr>
+            <a:spLocks noGrp="1"/>
+          </p:cNvSpPr>
+          <p:nvPr>
+            <p:ph type="sldNum" sz="quarter" idx="10"/>
+          </p:nvPr>
+        </p:nvSpPr>
+        <p:spPr/>
+        <p:txBody>
+          <a:bodyPr/>
+          <a:lstStyle/>
+          <a:p>
+            <a:pPr rtl="0"/>
+            <a:fld id="{5FB91549-43BF-425A-AF25-75262019208C}" type="slidenum">
+              <a:rPr lang="en-US" altLang="ko-KR" smtClean="0"/>
+              <a:t>8</a:t>
+            </a:fld>
+            <a:endParaRPr lang="ko-KR" altLang="en-US" dirty="0"/>
+          </a:p>
+        </p:txBody>
+      </p:sp>
+    </p:spTree>
+    <p:extLst>
+      <p:ext uri="{BB962C8B-B14F-4D97-AF65-F5344CB8AC3E}">
+        <p14:creationId xmlns:p14="http://schemas.microsoft.com/office/powerpoint/2010/main" val="2303346903"/>
+      </p:ext>
+    </p:extLst>
+  </p:cSld>
+  <p:clrMapOvr>
+    <a:masterClrMapping/>
+  </p:clrMapOvr>
+</p:notes>
+</file>
+
+<file path=ppt/notesSlides/notesSlide9.xml><?xml version="1.0" encoding="utf-8"?>
+<p:notes xmlns:a="http://schemas.openxmlformats.org/drawingml/2006/main" xmlns:r="http://schemas.openxmlformats.org/officeDocument/2006/relationships" xmlns:p="http://schemas.openxmlformats.org/presentationml/2006/main">
+  <p:cSld>
+    <p:spTree>
+      <p:nvGrpSpPr>
+        <p:cNvPr id="1" name="">
+          <a:extLst>
+            <a:ext uri="{FF2B5EF4-FFF2-40B4-BE49-F238E27FC236}">
+              <a16:creationId xmlns:a16="http://schemas.microsoft.com/office/drawing/2014/main" id="{3932FD5E-B683-05F5-2A8F-95FE369808B2}"/>
+            </a:ext>
+          </a:extLst>
+        </p:cNvPr>
+        <p:cNvGrpSpPr/>
+        <p:nvPr/>
+      </p:nvGrpSpPr>
+      <p:grpSpPr>
+        <a:xfrm>
+          <a:off x="0" y="0"/>
+          <a:ext cx="0" cy="0"/>
+          <a:chOff x="0" y="0"/>
+          <a:chExt cx="0" cy="0"/>
+        </a:xfrm>
+      </p:grpSpPr>
+      <p:sp>
+        <p:nvSpPr>
+          <p:cNvPr id="2" name="슬라이드 이미지 개체 틀 1">
+            <a:extLst>
+              <a:ext uri="{FF2B5EF4-FFF2-40B4-BE49-F238E27FC236}">
+                <a16:creationId xmlns:a16="http://schemas.microsoft.com/office/drawing/2014/main" id="{1F914573-C36D-346C-F5A7-A95CE5ED020F}"/>
+              </a:ext>
+            </a:extLst>
+          </p:cNvPr>
+          <p:cNvSpPr>
+            <a:spLocks noGrp="1" noRot="1" noChangeAspect="1"/>
+          </p:cNvSpPr>
+          <p:nvPr>
+            <p:ph type="sldImg"/>
+          </p:nvPr>
+        </p:nvSpPr>
+        <p:spPr/>
+      </p:sp>
+      <p:sp>
+        <p:nvSpPr>
+          <p:cNvPr id="3" name="슬라이드 노트 개체 틀 2">
+            <a:extLst>
+              <a:ext uri="{FF2B5EF4-FFF2-40B4-BE49-F238E27FC236}">
+                <a16:creationId xmlns:a16="http://schemas.microsoft.com/office/drawing/2014/main" id="{75B6A3A6-E1B1-4542-BD9E-843AF4A37863}"/>
+              </a:ext>
+            </a:extLst>
+          </p:cNvPr>
+          <p:cNvSpPr>
+            <a:spLocks noGrp="1"/>
+          </p:cNvSpPr>
+          <p:nvPr>
+            <p:ph type="body" idx="1"/>
+          </p:nvPr>
+        </p:nvSpPr>
+        <p:spPr/>
+        <p:txBody>
+          <a:bodyPr/>
+          <a:lstStyle/>
+          <a:p>
+            <a:endParaRPr lang="ko-KR" altLang="en-US" dirty="0"/>
+          </a:p>
+        </p:txBody>
+      </p:sp>
+      <p:sp>
+        <p:nvSpPr>
+          <p:cNvPr id="4" name="슬라이드 번호 개체 틀 3">
+            <a:extLst>
+              <a:ext uri="{FF2B5EF4-FFF2-40B4-BE49-F238E27FC236}">
+                <a16:creationId xmlns:a16="http://schemas.microsoft.com/office/drawing/2014/main" id="{E63E6ECA-8F6F-B8DE-C544-C72743D3729C}"/>
+              </a:ext>
+            </a:extLst>
+          </p:cNvPr>
+          <p:cNvSpPr>
+            <a:spLocks noGrp="1"/>
+          </p:cNvSpPr>
+          <p:nvPr>
+            <p:ph type="sldNum" sz="quarter" idx="10"/>
+          </p:nvPr>
+        </p:nvSpPr>
+        <p:spPr/>
+        <p:txBody>
+          <a:bodyPr/>
+          <a:lstStyle/>
+          <a:p>
+            <a:pPr rtl="0"/>
+            <a:fld id="{5FB91549-43BF-425A-AF25-75262019208C}" type="slidenum">
+              <a:rPr lang="en-US" altLang="ko-KR" smtClean="0"/>
+              <a:t>9</a:t>
+            </a:fld>
+            <a:endParaRPr lang="ko-KR" altLang="en-US" dirty="0"/>
+          </a:p>
+        </p:txBody>
+      </p:sp>
+    </p:spTree>
+    <p:extLst>
+      <p:ext uri="{BB962C8B-B14F-4D97-AF65-F5344CB8AC3E}">
+        <p14:creationId xmlns:p14="http://schemas.microsoft.com/office/powerpoint/2010/main" val="215676295"/>
+      </p:ext>
+    </p:extLst>
+  </p:cSld>
+  <p:clrMapOvr>
+    <a:masterClrMapping/>
+  </p:clrMapOvr>
+</p:notes>
+</file>
+
 <file path=ppt/slideLayouts/slideLayout1.xml><?xml version="1.0" encoding="utf-8"?>
 <p:sldLayout xmlns:a="http://schemas.openxmlformats.org/drawingml/2006/main" xmlns:r="http://schemas.openxmlformats.org/officeDocument/2006/relationships" xmlns:p="http://schemas.openxmlformats.org/presentationml/2006/main" type="title" preserve="1">
   <p:cSld name="제목 슬라이드">
@@ -1655,7 +1875,7 @@
           <a:p>
             <a:fld id="{4B229CEB-779D-4AB3-81CB-8FCEEAE03F61}" type="datetime1">
               <a:rPr lang="ko-KR" altLang="en-US" smtClean="0"/>
-              <a:t>2026-03-23</a:t>
+              <a:t>2026-03-24</a:t>
             </a:fld>
             <a:endParaRPr lang="ko-KR" altLang="en-US" dirty="0"/>
           </a:p>
@@ -1893,7 +2113,7 @@
             <a:pPr rtl="0"/>
             <a:fld id="{C3B7A883-0BF0-4B4B-84D5-D747A0111A56}" type="datetime1">
               <a:rPr lang="ko-KR" altLang="en-US" noProof="0" smtClean="0"/>
-              <a:t>2026-03-23</a:t>
+              <a:t>2026-03-24</a:t>
             </a:fld>
             <a:endParaRPr lang="ko-KR" altLang="en-US" noProof="0" dirty="0"/>
           </a:p>
@@ -2111,7 +2331,7 @@
             <a:pPr rtl="0"/>
             <a:fld id="{3DA7EA29-F2BB-4FB1-BB4B-C55A7FA3FC5C}" type="datetime1">
               <a:rPr lang="ko-KR" altLang="en-US" noProof="0" smtClean="0"/>
-              <a:t>2026-03-23</a:t>
+              <a:t>2026-03-24</a:t>
             </a:fld>
             <a:endParaRPr lang="ko-KR" altLang="en-US" noProof="0" dirty="0"/>
           </a:p>
@@ -2320,7 +2540,7 @@
             <a:pPr rtl="0"/>
             <a:fld id="{D76306AB-75A0-421C-B431-0E4E30A5C28E}" type="datetime1">
               <a:rPr lang="ko-KR" altLang="en-US" noProof="0" smtClean="0"/>
-              <a:t>2026-03-23</a:t>
+              <a:t>2026-03-24</a:t>
             </a:fld>
             <a:endParaRPr lang="ko-KR" altLang="en-US" noProof="0" dirty="0"/>
           </a:p>
@@ -2590,7 +2810,7 @@
             <a:pPr rtl="0"/>
             <a:fld id="{E1D969EE-F1EB-462E-B70D-5B36B3806A4E}" type="datetime1">
               <a:rPr lang="ko-KR" altLang="en-US" noProof="0" smtClean="0"/>
-              <a:t>2026-03-23</a:t>
+              <a:t>2026-03-24</a:t>
             </a:fld>
             <a:endParaRPr lang="ko-KR" altLang="en-US" noProof="0" dirty="0"/>
           </a:p>
@@ -2898,7 +3118,7 @@
             <a:pPr rtl="0"/>
             <a:fld id="{E8CBB1B7-E0A1-46A3-B5B5-C69931095FF6}" type="datetime1">
               <a:rPr lang="ko-KR" altLang="en-US" noProof="0" smtClean="0"/>
-              <a:t>2026-03-23</a:t>
+              <a:t>2026-03-24</a:t>
             </a:fld>
             <a:endParaRPr lang="ko-KR" altLang="en-US" noProof="0" dirty="0"/>
           </a:p>
@@ -3349,7 +3569,7 @@
             <a:pPr rtl="0"/>
             <a:fld id="{DAFC0E65-06AB-44D7-AAEE-8F4C7ED84A0C}" type="datetime1">
               <a:rPr lang="ko-KR" altLang="en-US" noProof="0" smtClean="0"/>
-              <a:t>2026-03-23</a:t>
+              <a:t>2026-03-24</a:t>
             </a:fld>
             <a:endParaRPr lang="ko-KR" altLang="en-US" noProof="0" dirty="0"/>
           </a:p>
@@ -3486,7 +3706,7 @@
             <a:pPr rtl="0"/>
             <a:fld id="{30189E66-D439-4767-B911-EB49CB20E313}" type="datetime1">
               <a:rPr lang="ko-KR" altLang="en-US" noProof="0" smtClean="0"/>
-              <a:t>2026-03-23</a:t>
+              <a:t>2026-03-24</a:t>
             </a:fld>
             <a:endParaRPr lang="ko-KR" altLang="en-US" noProof="0" dirty="0"/>
           </a:p>
@@ -3599,7 +3819,7 @@
             <a:pPr rtl="0"/>
             <a:fld id="{D4E4FFC0-DB28-4291-80A0-63DBF8428320}" type="datetime1">
               <a:rPr lang="ko-KR" altLang="en-US" noProof="0" smtClean="0"/>
-              <a:t>2026-03-23</a:t>
+              <a:t>2026-03-24</a:t>
             </a:fld>
             <a:endParaRPr lang="ko-KR" altLang="en-US" noProof="0" dirty="0"/>
           </a:p>
@@ -3904,7 +4124,7 @@
             <a:pPr rtl="0"/>
             <a:fld id="{3AB5804B-C38E-4214-93DF-3E6DA00134E8}" type="datetime1">
               <a:rPr lang="ko-KR" altLang="en-US" noProof="0" smtClean="0"/>
-              <a:t>2026-03-23</a:t>
+              <a:t>2026-03-24</a:t>
             </a:fld>
             <a:endParaRPr lang="ko-KR" altLang="en-US" noProof="0" dirty="0"/>
           </a:p>
@@ -4198,7 +4418,7 @@
             <a:pPr rtl="0"/>
             <a:fld id="{CABEE384-F18F-4153-AC21-608599869F84}" type="datetime1">
               <a:rPr lang="ko-KR" altLang="en-US" noProof="0" smtClean="0"/>
-              <a:t>2026-03-23</a:t>
+              <a:t>2026-03-24</a:t>
             </a:fld>
             <a:endParaRPr lang="ko-KR" altLang="en-US" noProof="0" dirty="0"/>
           </a:p>
@@ -4430,7 +4650,7 @@
           <a:p>
             <a:fld id="{667A4C69-65FB-481C-AC2A-84D254D33675}" type="datetime1">
               <a:rPr lang="ko-KR" altLang="en-US" smtClean="0"/>
-              <a:t>2026-03-23</a:t>
+              <a:t>2026-03-24</a:t>
             </a:fld>
             <a:endParaRPr lang="ko-KR" altLang="en-US" dirty="0"/>
           </a:p>
@@ -6613,6 +6833,1584 @@
     <p:extLst>
       <p:ext uri="{BB962C8B-B14F-4D97-AF65-F5344CB8AC3E}">
         <p14:creationId xmlns:p14="http://schemas.microsoft.com/office/powerpoint/2010/main" val="1127705894"/>
+      </p:ext>
+    </p:extLst>
+  </p:cSld>
+  <p:clrMapOvr>
+    <a:masterClrMapping/>
+  </p:clrMapOvr>
+  <mc:AlternateContent xmlns:mc="http://schemas.openxmlformats.org/markup-compatibility/2006" xmlns:p14="http://schemas.microsoft.com/office/powerpoint/2010/main">
+    <mc:Choice Requires="p14">
+      <p:transition spd="med" p14:dur="700">
+        <p:fade/>
+      </p:transition>
+    </mc:Choice>
+    <mc:Fallback xmlns="">
+      <p:transition spd="med">
+        <p:fade/>
+      </p:transition>
+    </mc:Fallback>
+  </mc:AlternateContent>
+</p:sld>
+</file>
+
+<file path=ppt/slides/slide8.xml><?xml version="1.0" encoding="utf-8"?>
+<p:sld xmlns:a="http://schemas.openxmlformats.org/drawingml/2006/main" xmlns:r="http://schemas.openxmlformats.org/officeDocument/2006/relationships" xmlns:p="http://schemas.openxmlformats.org/presentationml/2006/main">
+  <p:cSld>
+    <p:spTree>
+      <p:nvGrpSpPr>
+        <p:cNvPr id="1" name="">
+          <a:extLst>
+            <a:ext uri="{FF2B5EF4-FFF2-40B4-BE49-F238E27FC236}">
+              <a16:creationId xmlns:a16="http://schemas.microsoft.com/office/drawing/2014/main" id="{014016E6-4DF5-97F6-9486-23E46F5C4A36}"/>
+            </a:ext>
+          </a:extLst>
+        </p:cNvPr>
+        <p:cNvGrpSpPr/>
+        <p:nvPr/>
+      </p:nvGrpSpPr>
+      <p:grpSpPr>
+        <a:xfrm>
+          <a:off x="0" y="0"/>
+          <a:ext cx="0" cy="0"/>
+          <a:chOff x="0" y="0"/>
+          <a:chExt cx="0" cy="0"/>
+        </a:xfrm>
+      </p:grpSpPr>
+      <p:sp>
+        <p:nvSpPr>
+          <p:cNvPr id="2" name="슬라이드 번호 개체 틀 1">
+            <a:extLst>
+              <a:ext uri="{FF2B5EF4-FFF2-40B4-BE49-F238E27FC236}">
+                <a16:creationId xmlns:a16="http://schemas.microsoft.com/office/drawing/2014/main" id="{A39D4B50-D754-79A0-CD51-823002DF348F}"/>
+              </a:ext>
+            </a:extLst>
+          </p:cNvPr>
+          <p:cNvSpPr>
+            <a:spLocks noGrp="1"/>
+          </p:cNvSpPr>
+          <p:nvPr>
+            <p:ph type="sldNum" sz="quarter" idx="12"/>
+          </p:nvPr>
+        </p:nvSpPr>
+        <p:spPr/>
+        <p:txBody>
+          <a:bodyPr/>
+          <a:lstStyle/>
+          <a:p>
+            <a:pPr rtl="0"/>
+            <a:fld id="{A3F31473-23EB-4724-8B59-FE6D21D89FA4}" type="slidenum">
+              <a:rPr lang="en-US" altLang="ko-KR" noProof="0" smtClean="0"/>
+              <a:t>8</a:t>
+            </a:fld>
+            <a:endParaRPr lang="en-US" altLang="ko-KR" noProof="0" dirty="0"/>
+          </a:p>
+        </p:txBody>
+      </p:sp>
+      <p:sp>
+        <p:nvSpPr>
+          <p:cNvPr id="4" name="TextBox 3">
+            <a:extLst>
+              <a:ext uri="{FF2B5EF4-FFF2-40B4-BE49-F238E27FC236}">
+                <a16:creationId xmlns:a16="http://schemas.microsoft.com/office/drawing/2014/main" id="{6843735A-526C-E0D0-66F8-62A3BD4EC82F}"/>
+              </a:ext>
+            </a:extLst>
+          </p:cNvPr>
+          <p:cNvSpPr txBox="1"/>
+          <p:nvPr/>
+        </p:nvSpPr>
+        <p:spPr>
+          <a:xfrm>
+            <a:off x="693812" y="2276872"/>
+            <a:ext cx="11233248" cy="3976153"/>
+          </a:xfrm>
+          <a:prstGeom prst="rect">
+            <a:avLst/>
+          </a:prstGeom>
+          <a:solidFill>
+            <a:schemeClr val="tx1">
+              <a:lumMod val="20000"/>
+              <a:lumOff val="80000"/>
+            </a:schemeClr>
+          </a:solidFill>
+        </p:spPr>
+        <p:txBody>
+          <a:bodyPr wrap="square" rtlCol="0">
+            <a:spAutoFit/>
+          </a:bodyPr>
+          <a:lstStyle/>
+          <a:p>
+            <a:pPr marL="285750" indent="-285750">
+              <a:lnSpc>
+                <a:spcPct val="150000"/>
+              </a:lnSpc>
+              <a:buFont typeface="Wingdings" panose="05000000000000000000" pitchFamily="2" charset="2"/>
+              <a:buChar char="v"/>
+            </a:pPr>
+            <a:r>
+              <a:rPr lang="ko-KR" altLang="en-US" dirty="0">
+                <a:latin typeface="휴먼모음T" panose="02030504000101010101" pitchFamily="18" charset="-127"/>
+                <a:ea typeface="휴먼모음T" panose="02030504000101010101" pitchFamily="18" charset="-127"/>
+              </a:rPr>
+              <a:t>모델 학습의 안정성 확보”</a:t>
+            </a:r>
+            <a:endParaRPr lang="en-US" altLang="ko-KR" dirty="0">
+              <a:latin typeface="휴먼모음T" panose="02030504000101010101" pitchFamily="18" charset="-127"/>
+              <a:ea typeface="휴먼모음T" panose="02030504000101010101" pitchFamily="18" charset="-127"/>
+            </a:endParaRPr>
+          </a:p>
+          <a:p>
+            <a:pPr marL="742950" lvl="1" indent="-285750">
+              <a:lnSpc>
+                <a:spcPct val="150000"/>
+              </a:lnSpc>
+              <a:buFont typeface="Wingdings" panose="05000000000000000000" pitchFamily="2" charset="2"/>
+              <a:buChar char="v"/>
+            </a:pPr>
+            <a:r>
+              <a:rPr lang="en-US" altLang="ko-KR" sz="1600" dirty="0">
+                <a:latin typeface="휴먼모음T" panose="02030504000101010101" pitchFamily="18" charset="-127"/>
+                <a:ea typeface="휴먼모음T" panose="02030504000101010101" pitchFamily="18" charset="-127"/>
+              </a:rPr>
+              <a:t>MSE , Cross-Entropy, Log-loss </a:t>
+            </a:r>
+            <a:endParaRPr lang="en-US" altLang="ko-KR" dirty="0">
+              <a:latin typeface="휴먼모음T" panose="02030504000101010101" pitchFamily="18" charset="-127"/>
+              <a:ea typeface="휴먼모음T" panose="02030504000101010101" pitchFamily="18" charset="-127"/>
+            </a:endParaRPr>
+          </a:p>
+          <a:p>
+            <a:pPr marL="285750" indent="-285750">
+              <a:lnSpc>
+                <a:spcPct val="150000"/>
+              </a:lnSpc>
+              <a:buFont typeface="Wingdings" panose="05000000000000000000" pitchFamily="2" charset="2"/>
+              <a:buChar char="v"/>
+            </a:pPr>
+            <a:r>
+              <a:rPr lang="en-US" altLang="ko-KR" dirty="0">
+                <a:latin typeface="휴먼모음T" panose="02030504000101010101" pitchFamily="18" charset="-127"/>
+                <a:ea typeface="휴먼모음T" panose="02030504000101010101" pitchFamily="18" charset="-127"/>
+              </a:rPr>
+              <a:t>Mini-batch </a:t>
+            </a:r>
+            <a:r>
+              <a:rPr lang="ko-KR" altLang="en-US" dirty="0">
+                <a:latin typeface="휴먼모음T" panose="02030504000101010101" pitchFamily="18" charset="-127"/>
+                <a:ea typeface="휴먼모음T" panose="02030504000101010101" pitchFamily="18" charset="-127"/>
+              </a:rPr>
+              <a:t>학습이 가능한 이유”</a:t>
+            </a:r>
+            <a:endParaRPr lang="en-US" altLang="ko-KR" dirty="0">
+              <a:latin typeface="휴먼모음T" panose="02030504000101010101" pitchFamily="18" charset="-127"/>
+              <a:ea typeface="휴먼모음T" panose="02030504000101010101" pitchFamily="18" charset="-127"/>
+            </a:endParaRPr>
+          </a:p>
+          <a:p>
+            <a:pPr marL="742950" lvl="1" indent="-285750">
+              <a:lnSpc>
+                <a:spcPct val="150000"/>
+              </a:lnSpc>
+              <a:buFont typeface="Wingdings" panose="05000000000000000000" pitchFamily="2" charset="2"/>
+              <a:buChar char="v"/>
+            </a:pPr>
+            <a:r>
+              <a:rPr lang="en-US" altLang="ko-KR" sz="1600" dirty="0">
+                <a:latin typeface="휴먼모음T" panose="02030504000101010101" pitchFamily="18" charset="-127"/>
+                <a:ea typeface="휴먼모음T" panose="02030504000101010101" pitchFamily="18" charset="-127"/>
+              </a:rPr>
+              <a:t>Mini-batch = </a:t>
+            </a:r>
+            <a:r>
+              <a:rPr lang="ko-KR" altLang="en-US" sz="1600" dirty="0">
+                <a:latin typeface="휴먼모음T" panose="02030504000101010101" pitchFamily="18" charset="-127"/>
+                <a:ea typeface="휴먼모음T" panose="02030504000101010101" pitchFamily="18" charset="-127"/>
+              </a:rPr>
+              <a:t>작은 샘플 평균</a:t>
+            </a:r>
+            <a:r>
+              <a:rPr lang="en-US" altLang="ko-KR" sz="1600" dirty="0">
+                <a:latin typeface="휴먼모음T" panose="02030504000101010101" pitchFamily="18" charset="-127"/>
+                <a:ea typeface="휴먼모음T" panose="02030504000101010101" pitchFamily="18" charset="-127"/>
+              </a:rPr>
+              <a:t>, CLT</a:t>
+            </a:r>
+            <a:r>
+              <a:rPr lang="ko-KR" altLang="en-US" sz="1600" dirty="0">
+                <a:latin typeface="휴먼모음T" panose="02030504000101010101" pitchFamily="18" charset="-127"/>
+                <a:ea typeface="휴먼모음T" panose="02030504000101010101" pitchFamily="18" charset="-127"/>
+              </a:rPr>
+              <a:t>없이는 </a:t>
+            </a:r>
+            <a:r>
+              <a:rPr lang="en-US" altLang="ko-KR" sz="1600" dirty="0">
+                <a:latin typeface="휴먼모음T" panose="02030504000101010101" pitchFamily="18" charset="-127"/>
+                <a:ea typeface="휴먼모음T" panose="02030504000101010101" pitchFamily="18" charset="-127"/>
+              </a:rPr>
+              <a:t>mini</a:t>
+            </a:r>
+            <a:r>
+              <a:rPr lang="ko-KR" altLang="en-US" sz="1600" dirty="0">
+                <a:latin typeface="휴먼모음T" panose="02030504000101010101" pitchFamily="18" charset="-127"/>
+                <a:ea typeface="휴먼모음T" panose="02030504000101010101" pitchFamily="18" charset="-127"/>
+              </a:rPr>
+              <a:t> </a:t>
+            </a:r>
+            <a:r>
+              <a:rPr lang="en-US" altLang="ko-KR" sz="1600" dirty="0">
+                <a:latin typeface="휴먼모음T" panose="02030504000101010101" pitchFamily="18" charset="-127"/>
+                <a:ea typeface="휴먼모음T" panose="02030504000101010101" pitchFamily="18" charset="-127"/>
+              </a:rPr>
+              <a:t>batch </a:t>
+            </a:r>
+            <a:r>
+              <a:rPr lang="ko-KR" altLang="en-US" sz="1600" dirty="0">
+                <a:latin typeface="휴먼모음T" panose="02030504000101010101" pitchFamily="18" charset="-127"/>
+                <a:ea typeface="휴먼모음T" panose="02030504000101010101" pitchFamily="18" charset="-127"/>
+              </a:rPr>
+              <a:t>도 없음</a:t>
+            </a:r>
+            <a:endParaRPr lang="en-US" altLang="ko-KR" dirty="0">
+              <a:latin typeface="휴먼모음T" panose="02030504000101010101" pitchFamily="18" charset="-127"/>
+              <a:ea typeface="휴먼모음T" panose="02030504000101010101" pitchFamily="18" charset="-127"/>
+            </a:endParaRPr>
+          </a:p>
+          <a:p>
+            <a:pPr marL="285750" indent="-285750">
+              <a:lnSpc>
+                <a:spcPct val="150000"/>
+              </a:lnSpc>
+              <a:buFont typeface="Wingdings" panose="05000000000000000000" pitchFamily="2" charset="2"/>
+              <a:buChar char="v"/>
+            </a:pPr>
+            <a:r>
+              <a:rPr lang="ko-KR" altLang="en-US" dirty="0">
+                <a:latin typeface="휴먼모음T" panose="02030504000101010101" pitchFamily="18" charset="-127"/>
+                <a:ea typeface="휴먼모음T" panose="02030504000101010101" pitchFamily="18" charset="-127"/>
+              </a:rPr>
+              <a:t>교차검증을 통한 모델의 평가</a:t>
+            </a:r>
+            <a:endParaRPr lang="en-US" altLang="ko-KR" dirty="0">
+              <a:latin typeface="휴먼모음T" panose="02030504000101010101" pitchFamily="18" charset="-127"/>
+              <a:ea typeface="휴먼모음T" panose="02030504000101010101" pitchFamily="18" charset="-127"/>
+            </a:endParaRPr>
+          </a:p>
+          <a:p>
+            <a:pPr marL="742950" lvl="1" indent="-285750">
+              <a:lnSpc>
+                <a:spcPct val="150000"/>
+              </a:lnSpc>
+              <a:buFont typeface="Wingdings" panose="05000000000000000000" pitchFamily="2" charset="2"/>
+              <a:buChar char="v"/>
+            </a:pPr>
+            <a:r>
+              <a:rPr lang="ko-KR" altLang="en-US" sz="1600" dirty="0">
+                <a:latin typeface="휴먼모음T" panose="02030504000101010101" pitchFamily="18" charset="-127"/>
+                <a:ea typeface="휴먼모음T" panose="02030504000101010101" pitchFamily="18" charset="-127"/>
+              </a:rPr>
+              <a:t>평균 </a:t>
+            </a:r>
+            <a:r>
+              <a:rPr lang="en-US" altLang="ko-KR" sz="1600" dirty="0">
+                <a:latin typeface="휴먼모음T" panose="02030504000101010101" pitchFamily="18" charset="-127"/>
+                <a:ea typeface="휴먼모음T" panose="02030504000101010101" pitchFamily="18" charset="-127"/>
+              </a:rPr>
+              <a:t>accuracy, </a:t>
+            </a:r>
+            <a:r>
+              <a:rPr lang="ko-KR" altLang="en-US" sz="1600" dirty="0">
+                <a:latin typeface="휴먼모음T" panose="02030504000101010101" pitchFamily="18" charset="-127"/>
+                <a:ea typeface="휴먼모음T" panose="02030504000101010101" pitchFamily="18" charset="-127"/>
+              </a:rPr>
+              <a:t>평균 </a:t>
+            </a:r>
+            <a:r>
+              <a:rPr lang="en-US" altLang="ko-KR" sz="1600" dirty="0">
+                <a:latin typeface="휴먼모음T" panose="02030504000101010101" pitchFamily="18" charset="-127"/>
+                <a:ea typeface="휴먼모음T" panose="02030504000101010101" pitchFamily="18" charset="-127"/>
+              </a:rPr>
+              <a:t>loss, </a:t>
+            </a:r>
+            <a:r>
+              <a:rPr lang="ko-KR" altLang="en-US" sz="1600" dirty="0">
+                <a:latin typeface="휴먼모음T" panose="02030504000101010101" pitchFamily="18" charset="-127"/>
+                <a:ea typeface="휴먼모음T" panose="02030504000101010101" pitchFamily="18" charset="-127"/>
+              </a:rPr>
+              <a:t>교차검증 평균 등 </a:t>
+            </a:r>
+            <a:r>
+              <a:rPr lang="en-US" altLang="ko-KR" sz="1600" dirty="0">
+                <a:latin typeface="휴먼모음T" panose="02030504000101010101" pitchFamily="18" charset="-127"/>
+                <a:ea typeface="휴먼모음T" panose="02030504000101010101" pitchFamily="18" charset="-127"/>
+              </a:rPr>
+              <a:t>CLT </a:t>
+            </a:r>
+            <a:r>
+              <a:rPr lang="ko-KR" altLang="en-US" sz="1600" dirty="0">
+                <a:latin typeface="휴먼모음T" panose="02030504000101010101" pitchFamily="18" charset="-127"/>
+                <a:ea typeface="휴먼모음T" panose="02030504000101010101" pitchFamily="18" charset="-127"/>
+              </a:rPr>
+              <a:t>적용으로 이  평균들은 → 정규분포 근사</a:t>
+            </a:r>
+            <a:r>
+              <a:rPr lang="en-US" altLang="ko-KR" sz="1600" dirty="0">
+                <a:latin typeface="휴먼모음T" panose="02030504000101010101" pitchFamily="18" charset="-127"/>
+                <a:ea typeface="휴먼모음T" panose="02030504000101010101" pitchFamily="18" charset="-127"/>
+              </a:rPr>
+              <a:t> </a:t>
+            </a:r>
+            <a:r>
+              <a:rPr lang="ko-KR" altLang="en-US" sz="1600" dirty="0">
+                <a:latin typeface="휴먼모음T" panose="02030504000101010101" pitchFamily="18" charset="-127"/>
+                <a:ea typeface="휴먼모음T" panose="02030504000101010101" pitchFamily="18" charset="-127"/>
+              </a:rPr>
+              <a:t>→ 신뢰구간</a:t>
+            </a:r>
+            <a:r>
+              <a:rPr lang="en-US" altLang="ko-KR" sz="1600" dirty="0">
+                <a:latin typeface="휴먼모음T" panose="02030504000101010101" pitchFamily="18" charset="-127"/>
+                <a:ea typeface="휴먼모음T" panose="02030504000101010101" pitchFamily="18" charset="-127"/>
+              </a:rPr>
+              <a:t> </a:t>
+            </a:r>
+            <a:r>
+              <a:rPr lang="ko-KR" altLang="en-US" sz="1600" dirty="0">
+                <a:latin typeface="휴먼모음T" panose="02030504000101010101" pitchFamily="18" charset="-127"/>
+                <a:ea typeface="휴먼모음T" panose="02030504000101010101" pitchFamily="18" charset="-127"/>
+              </a:rPr>
+              <a:t>→</a:t>
+            </a:r>
+            <a:r>
+              <a:rPr lang="en-US" altLang="ko-KR" sz="1600" dirty="0">
+                <a:latin typeface="휴먼모음T" panose="02030504000101010101" pitchFamily="18" charset="-127"/>
+                <a:ea typeface="휴먼모음T" panose="02030504000101010101" pitchFamily="18" charset="-127"/>
+              </a:rPr>
+              <a:t> </a:t>
+            </a:r>
+            <a:r>
+              <a:rPr lang="ko-KR" altLang="en-US" sz="1600" dirty="0">
+                <a:latin typeface="휴먼모음T" panose="02030504000101010101" pitchFamily="18" charset="-127"/>
+                <a:ea typeface="휴먼모음T" panose="02030504000101010101" pitchFamily="18" charset="-127"/>
+              </a:rPr>
+              <a:t>통계적 비교 가능</a:t>
+            </a:r>
+            <a:endParaRPr lang="en-US" altLang="ko-KR" dirty="0">
+              <a:latin typeface="휴먼모음T" panose="02030504000101010101" pitchFamily="18" charset="-127"/>
+              <a:ea typeface="휴먼모음T" panose="02030504000101010101" pitchFamily="18" charset="-127"/>
+            </a:endParaRPr>
+          </a:p>
+          <a:p>
+            <a:pPr marL="285750" indent="-285750">
+              <a:lnSpc>
+                <a:spcPct val="150000"/>
+              </a:lnSpc>
+              <a:buFont typeface="Wingdings" panose="05000000000000000000" pitchFamily="2" charset="2"/>
+              <a:buChar char="v"/>
+            </a:pPr>
+            <a:r>
+              <a:rPr lang="en-US" altLang="ko-KR" dirty="0">
+                <a:latin typeface="휴먼모음T" panose="02030504000101010101" pitchFamily="18" charset="-127"/>
+                <a:ea typeface="휴먼모음T" panose="02030504000101010101" pitchFamily="18" charset="-127"/>
+              </a:rPr>
+              <a:t>A/B </a:t>
+            </a:r>
+            <a:r>
+              <a:rPr lang="ko-KR" altLang="en-US" dirty="0">
+                <a:latin typeface="휴먼모음T" panose="02030504000101010101" pitchFamily="18" charset="-127"/>
+                <a:ea typeface="휴먼모음T" panose="02030504000101010101" pitchFamily="18" charset="-127"/>
+              </a:rPr>
+              <a:t>테스트와 실험 설계의 핵심</a:t>
+            </a:r>
+            <a:endParaRPr lang="en-US" altLang="ko-KR" dirty="0">
+              <a:latin typeface="휴먼모음T" panose="02030504000101010101" pitchFamily="18" charset="-127"/>
+              <a:ea typeface="휴먼모음T" panose="02030504000101010101" pitchFamily="18" charset="-127"/>
+            </a:endParaRPr>
+          </a:p>
+          <a:p>
+            <a:pPr marL="742950" lvl="1" indent="-285750">
+              <a:lnSpc>
+                <a:spcPct val="150000"/>
+              </a:lnSpc>
+              <a:buFont typeface="Wingdings" panose="05000000000000000000" pitchFamily="2" charset="2"/>
+              <a:buChar char="v"/>
+            </a:pPr>
+            <a:r>
+              <a:rPr lang="ko-KR" altLang="en-US" sz="1600" dirty="0">
+                <a:latin typeface="휴먼모음T" panose="02030504000101010101" pitchFamily="18" charset="-127"/>
+                <a:ea typeface="휴먼모음T" panose="02030504000101010101" pitchFamily="18" charset="-127"/>
+              </a:rPr>
+              <a:t>광고 효과 비교</a:t>
+            </a:r>
+            <a:r>
+              <a:rPr lang="en-US" altLang="ko-KR" sz="1600" dirty="0">
+                <a:latin typeface="휴먼모음T" panose="02030504000101010101" pitchFamily="18" charset="-127"/>
+                <a:ea typeface="휴먼모음T" panose="02030504000101010101" pitchFamily="18" charset="-127"/>
+              </a:rPr>
+              <a:t>, </a:t>
+            </a:r>
+            <a:r>
+              <a:rPr lang="ko-KR" altLang="en-US" sz="1600" dirty="0">
+                <a:latin typeface="휴먼모음T" panose="02030504000101010101" pitchFamily="18" charset="-127"/>
+                <a:ea typeface="휴먼모음T" panose="02030504000101010101" pitchFamily="18" charset="-127"/>
+              </a:rPr>
+              <a:t>추천 알고리즘 비교</a:t>
+            </a:r>
+            <a:r>
+              <a:rPr lang="en-US" altLang="ko-KR" sz="1600" dirty="0">
+                <a:latin typeface="휴먼모음T" panose="02030504000101010101" pitchFamily="18" charset="-127"/>
+                <a:ea typeface="휴먼모음T" panose="02030504000101010101" pitchFamily="18" charset="-127"/>
+              </a:rPr>
+              <a:t>, UI </a:t>
+            </a:r>
+            <a:r>
+              <a:rPr lang="ko-KR" altLang="en-US" sz="1600" dirty="0">
+                <a:latin typeface="휴먼모음T" panose="02030504000101010101" pitchFamily="18" charset="-127"/>
+                <a:ea typeface="휴먼모음T" panose="02030504000101010101" pitchFamily="18" charset="-127"/>
+              </a:rPr>
+              <a:t>개선 효과 측정  등 전부 평균 비교 문제로 </a:t>
+            </a:r>
+            <a:r>
+              <a:rPr lang="en-US" altLang="ko-KR" sz="1600" dirty="0">
+                <a:latin typeface="휴먼모음T" panose="02030504000101010101" pitchFamily="18" charset="-127"/>
+                <a:ea typeface="휴먼모음T" panose="02030504000101010101" pitchFamily="18" charset="-127"/>
+              </a:rPr>
+              <a:t>CLT </a:t>
+            </a:r>
+            <a:r>
+              <a:rPr lang="ko-KR" altLang="en-US" sz="1600" dirty="0">
+                <a:latin typeface="휴먼모음T" panose="02030504000101010101" pitchFamily="18" charset="-127"/>
+                <a:ea typeface="휴먼모음T" panose="02030504000101010101" pitchFamily="18" charset="-127"/>
+              </a:rPr>
+              <a:t>덕분에</a:t>
+            </a:r>
+            <a:r>
+              <a:rPr lang="en-US" altLang="ko-KR" sz="1600" dirty="0">
+                <a:latin typeface="휴먼모음T" panose="02030504000101010101" pitchFamily="18" charset="-127"/>
+                <a:ea typeface="휴먼모음T" panose="02030504000101010101" pitchFamily="18" charset="-127"/>
+              </a:rPr>
+              <a:t> </a:t>
+            </a:r>
+            <a:r>
+              <a:rPr lang="ko-KR" altLang="en-US" sz="1600" dirty="0">
+                <a:latin typeface="휴먼모음T" panose="02030504000101010101" pitchFamily="18" charset="-127"/>
+                <a:ea typeface="휴먼모음T" panose="02030504000101010101" pitchFamily="18" charset="-127"/>
+              </a:rPr>
+              <a:t>두 평균 차이 → 정규분포 근사 → </a:t>
+            </a:r>
+            <a:r>
+              <a:rPr lang="en-US" altLang="ko-KR" sz="1600" dirty="0">
+                <a:latin typeface="휴먼모음T" panose="02030504000101010101" pitchFamily="18" charset="-127"/>
+                <a:ea typeface="휴먼모음T" panose="02030504000101010101" pitchFamily="18" charset="-127"/>
+              </a:rPr>
+              <a:t>p-value </a:t>
+            </a:r>
+            <a:r>
+              <a:rPr lang="ko-KR" altLang="en-US" sz="1600" dirty="0">
+                <a:latin typeface="휴먼모음T" panose="02030504000101010101" pitchFamily="18" charset="-127"/>
+                <a:ea typeface="휴먼모음T" panose="02030504000101010101" pitchFamily="18" charset="-127"/>
+              </a:rPr>
+              <a:t>계산 가능</a:t>
+            </a:r>
+            <a:r>
+              <a:rPr lang="ko-KR" altLang="en-US" dirty="0">
+                <a:latin typeface="휴먼모음T" panose="02030504000101010101" pitchFamily="18" charset="-127"/>
+                <a:ea typeface="휴먼모음T" panose="02030504000101010101" pitchFamily="18" charset="-127"/>
+              </a:rPr>
+              <a:t> </a:t>
+            </a:r>
+            <a:endParaRPr lang="en-US" altLang="ko-KR" sz="2000" dirty="0">
+              <a:latin typeface="휴먼모음T" panose="02030504000101010101" pitchFamily="18" charset="-127"/>
+              <a:ea typeface="휴먼모음T" panose="02030504000101010101" pitchFamily="18" charset="-127"/>
+            </a:endParaRPr>
+          </a:p>
+        </p:txBody>
+      </p:sp>
+      <p:sp>
+        <p:nvSpPr>
+          <p:cNvPr id="9" name="TextBox 8">
+            <a:extLst>
+              <a:ext uri="{FF2B5EF4-FFF2-40B4-BE49-F238E27FC236}">
+                <a16:creationId xmlns:a16="http://schemas.microsoft.com/office/drawing/2014/main" id="{185A9784-515E-A3E4-8F67-F24BA80B28DC}"/>
+              </a:ext>
+            </a:extLst>
+          </p:cNvPr>
+          <p:cNvSpPr txBox="1"/>
+          <p:nvPr/>
+        </p:nvSpPr>
+        <p:spPr>
+          <a:xfrm>
+            <a:off x="117748" y="260648"/>
+            <a:ext cx="2592288" cy="584775"/>
+          </a:xfrm>
+          <a:prstGeom prst="rect">
+            <a:avLst/>
+          </a:prstGeom>
+          <a:noFill/>
+        </p:spPr>
+        <p:txBody>
+          <a:bodyPr wrap="square" rtlCol="0">
+            <a:spAutoFit/>
+          </a:bodyPr>
+          <a:lstStyle/>
+          <a:p>
+            <a:r>
+              <a:rPr lang="ko-KR" altLang="en-US" sz="3200" b="1"/>
+              <a:t>문제 풀이</a:t>
+            </a:r>
+          </a:p>
+        </p:txBody>
+      </p:sp>
+      <p:sp>
+        <p:nvSpPr>
+          <p:cNvPr id="5" name="TextBox 4">
+            <a:extLst>
+              <a:ext uri="{FF2B5EF4-FFF2-40B4-BE49-F238E27FC236}">
+                <a16:creationId xmlns:a16="http://schemas.microsoft.com/office/drawing/2014/main" id="{52039815-B66C-C01C-F725-1707E5711FCB}"/>
+              </a:ext>
+            </a:extLst>
+          </p:cNvPr>
+          <p:cNvSpPr txBox="1"/>
+          <p:nvPr/>
+        </p:nvSpPr>
+        <p:spPr>
+          <a:xfrm>
+            <a:off x="549796" y="858989"/>
+            <a:ext cx="11377264" cy="970843"/>
+          </a:xfrm>
+          <a:prstGeom prst="rect">
+            <a:avLst/>
+          </a:prstGeom>
+          <a:noFill/>
+        </p:spPr>
+        <p:txBody>
+          <a:bodyPr wrap="square">
+            <a:spAutoFit/>
+          </a:bodyPr>
+          <a:lstStyle/>
+          <a:p>
+            <a:pPr marL="285750" indent="-285750">
+              <a:lnSpc>
+                <a:spcPct val="150000"/>
+              </a:lnSpc>
+              <a:buFont typeface="Wingdings" panose="05000000000000000000" pitchFamily="2" charset="2"/>
+              <a:buChar char="v"/>
+            </a:pPr>
+            <a:r>
+              <a:rPr lang="ko-KR" altLang="en-US" sz="2000" dirty="0">
+                <a:latin typeface="휴먼모음T" panose="02030504000101010101" pitchFamily="18" charset="-127"/>
+                <a:ea typeface="휴먼모음T" panose="02030504000101010101" pitchFamily="18" charset="-127"/>
+              </a:rPr>
+              <a:t>중심극한정리</a:t>
+            </a:r>
+            <a:r>
+              <a:rPr lang="en-US" altLang="ko-KR" sz="2000" dirty="0">
+                <a:latin typeface="휴먼모음T" panose="02030504000101010101" pitchFamily="18" charset="-127"/>
+                <a:ea typeface="휴먼모음T" panose="02030504000101010101" pitchFamily="18" charset="-127"/>
+              </a:rPr>
+              <a:t>(</a:t>
+            </a:r>
+            <a:r>
+              <a:rPr lang="ko-KR" altLang="en-US" sz="2000" dirty="0">
+                <a:latin typeface="휴먼모음T" panose="02030504000101010101" pitchFamily="18" charset="-127"/>
+                <a:ea typeface="휴먼모음T" panose="02030504000101010101" pitchFamily="18" charset="-127"/>
+              </a:rPr>
+              <a:t>데이터는 불규칙하지만</a:t>
+            </a:r>
+            <a:r>
+              <a:rPr lang="en-US" altLang="ko-KR" sz="2000" dirty="0">
+                <a:latin typeface="휴먼모음T" panose="02030504000101010101" pitchFamily="18" charset="-127"/>
+                <a:ea typeface="휴먼모음T" panose="02030504000101010101" pitchFamily="18" charset="-127"/>
+              </a:rPr>
+              <a:t>, </a:t>
+            </a:r>
+            <a:r>
+              <a:rPr lang="ko-KR" altLang="en-US" sz="2000" dirty="0">
+                <a:latin typeface="휴먼모음T" panose="02030504000101010101" pitchFamily="18" charset="-127"/>
+                <a:ea typeface="휴먼모음T" panose="02030504000101010101" pitchFamily="18" charset="-127"/>
+              </a:rPr>
+              <a:t>평균은 예측 가능하다 → 그래서 학습이 가능하다</a:t>
+            </a:r>
+            <a:r>
+              <a:rPr lang="en-US" altLang="ko-KR" sz="2000" dirty="0">
+                <a:latin typeface="휴먼모음T" panose="02030504000101010101" pitchFamily="18" charset="-127"/>
+                <a:ea typeface="휴먼모음T" panose="02030504000101010101" pitchFamily="18" charset="-127"/>
+              </a:rPr>
+              <a:t>)</a:t>
+            </a:r>
+            <a:r>
+              <a:rPr lang="ko-KR" altLang="en-US" sz="2000" dirty="0">
+                <a:latin typeface="휴먼모음T" panose="02030504000101010101" pitchFamily="18" charset="-127"/>
+                <a:ea typeface="휴먼모음T" panose="02030504000101010101" pitchFamily="18" charset="-127"/>
+              </a:rPr>
+              <a:t>가 </a:t>
+            </a:r>
+            <a:r>
+              <a:rPr lang="ko-KR" altLang="en-US" sz="2000" dirty="0" err="1">
+                <a:latin typeface="휴먼모음T" panose="02030504000101010101" pitchFamily="18" charset="-127"/>
+                <a:ea typeface="휴먼모음T" panose="02030504000101010101" pitchFamily="18" charset="-127"/>
+              </a:rPr>
+              <a:t>머신러닝에</a:t>
+            </a:r>
+            <a:r>
+              <a:rPr lang="ko-KR" altLang="en-US" sz="2000" dirty="0">
+                <a:latin typeface="휴먼모음T" panose="02030504000101010101" pitchFamily="18" charset="-127"/>
+                <a:ea typeface="휴먼모음T" panose="02030504000101010101" pitchFamily="18" charset="-127"/>
+              </a:rPr>
+              <a:t> 접목하는 내용을 모의실험으로 파이썬 코드로 제시하라</a:t>
+            </a:r>
+            <a:endParaRPr lang="en-US" altLang="ko-KR" sz="2000" dirty="0">
+              <a:latin typeface="휴먼모음T" panose="02030504000101010101" pitchFamily="18" charset="-127"/>
+              <a:ea typeface="휴먼모음T" panose="02030504000101010101" pitchFamily="18" charset="-127"/>
+            </a:endParaRPr>
+          </a:p>
+        </p:txBody>
+      </p:sp>
+    </p:spTree>
+    <p:extLst>
+      <p:ext uri="{BB962C8B-B14F-4D97-AF65-F5344CB8AC3E}">
+        <p14:creationId xmlns:p14="http://schemas.microsoft.com/office/powerpoint/2010/main" val="2559646205"/>
+      </p:ext>
+    </p:extLst>
+  </p:cSld>
+  <p:clrMapOvr>
+    <a:masterClrMapping/>
+  </p:clrMapOvr>
+  <mc:AlternateContent xmlns:mc="http://schemas.openxmlformats.org/markup-compatibility/2006" xmlns:p14="http://schemas.microsoft.com/office/powerpoint/2010/main">
+    <mc:Choice Requires="p14">
+      <p:transition spd="med" p14:dur="700">
+        <p:fade/>
+      </p:transition>
+    </mc:Choice>
+    <mc:Fallback xmlns="">
+      <p:transition spd="med">
+        <p:fade/>
+      </p:transition>
+    </mc:Fallback>
+  </mc:AlternateContent>
+</p:sld>
+</file>
+
+<file path=ppt/slides/slide9.xml><?xml version="1.0" encoding="utf-8"?>
+<p:sld xmlns:a="http://schemas.openxmlformats.org/drawingml/2006/main" xmlns:r="http://schemas.openxmlformats.org/officeDocument/2006/relationships" xmlns:p="http://schemas.openxmlformats.org/presentationml/2006/main">
+  <p:cSld>
+    <p:spTree>
+      <p:nvGrpSpPr>
+        <p:cNvPr id="1" name="">
+          <a:extLst>
+            <a:ext uri="{FF2B5EF4-FFF2-40B4-BE49-F238E27FC236}">
+              <a16:creationId xmlns:a16="http://schemas.microsoft.com/office/drawing/2014/main" id="{9BBFE75F-6515-E02E-0A0F-4F2429757FE5}"/>
+            </a:ext>
+          </a:extLst>
+        </p:cNvPr>
+        <p:cNvGrpSpPr/>
+        <p:nvPr/>
+      </p:nvGrpSpPr>
+      <p:grpSpPr>
+        <a:xfrm>
+          <a:off x="0" y="0"/>
+          <a:ext cx="0" cy="0"/>
+          <a:chOff x="0" y="0"/>
+          <a:chExt cx="0" cy="0"/>
+        </a:xfrm>
+      </p:grpSpPr>
+      <p:sp>
+        <p:nvSpPr>
+          <p:cNvPr id="2" name="슬라이드 번호 개체 틀 1">
+            <a:extLst>
+              <a:ext uri="{FF2B5EF4-FFF2-40B4-BE49-F238E27FC236}">
+                <a16:creationId xmlns:a16="http://schemas.microsoft.com/office/drawing/2014/main" id="{E21E95A9-2DB2-F8F6-CA7C-3363C9348A3E}"/>
+              </a:ext>
+            </a:extLst>
+          </p:cNvPr>
+          <p:cNvSpPr>
+            <a:spLocks noGrp="1"/>
+          </p:cNvSpPr>
+          <p:nvPr>
+            <p:ph type="sldNum" sz="quarter" idx="12"/>
+          </p:nvPr>
+        </p:nvSpPr>
+        <p:spPr/>
+        <p:txBody>
+          <a:bodyPr/>
+          <a:lstStyle/>
+          <a:p>
+            <a:pPr rtl="0"/>
+            <a:fld id="{A3F31473-23EB-4724-8B59-FE6D21D89FA4}" type="slidenum">
+              <a:rPr lang="en-US" altLang="ko-KR" noProof="0" smtClean="0"/>
+              <a:t>9</a:t>
+            </a:fld>
+            <a:endParaRPr lang="en-US" altLang="ko-KR" noProof="0" dirty="0"/>
+          </a:p>
+        </p:txBody>
+      </p:sp>
+      <p:sp>
+        <p:nvSpPr>
+          <p:cNvPr id="9" name="TextBox 8">
+            <a:extLst>
+              <a:ext uri="{FF2B5EF4-FFF2-40B4-BE49-F238E27FC236}">
+                <a16:creationId xmlns:a16="http://schemas.microsoft.com/office/drawing/2014/main" id="{0EB4EAF7-599C-1643-17BE-529CB7DB3BDF}"/>
+              </a:ext>
+            </a:extLst>
+          </p:cNvPr>
+          <p:cNvSpPr txBox="1"/>
+          <p:nvPr/>
+        </p:nvSpPr>
+        <p:spPr>
+          <a:xfrm>
+            <a:off x="117748" y="260648"/>
+            <a:ext cx="2592288" cy="584775"/>
+          </a:xfrm>
+          <a:prstGeom prst="rect">
+            <a:avLst/>
+          </a:prstGeom>
+          <a:noFill/>
+        </p:spPr>
+        <p:txBody>
+          <a:bodyPr wrap="square" rtlCol="0">
+            <a:spAutoFit/>
+          </a:bodyPr>
+          <a:lstStyle/>
+          <a:p>
+            <a:r>
+              <a:rPr lang="ko-KR" altLang="en-US" sz="3200" b="1"/>
+              <a:t>문제 풀이</a:t>
+            </a:r>
+          </a:p>
+        </p:txBody>
+      </p:sp>
+      <p:graphicFrame>
+        <p:nvGraphicFramePr>
+          <p:cNvPr id="3" name="표 2">
+            <a:extLst>
+              <a:ext uri="{FF2B5EF4-FFF2-40B4-BE49-F238E27FC236}">
+                <a16:creationId xmlns:a16="http://schemas.microsoft.com/office/drawing/2014/main" id="{FC8FE015-7FE6-7957-1A9B-65A97D8020B8}"/>
+              </a:ext>
+            </a:extLst>
+          </p:cNvPr>
+          <p:cNvGraphicFramePr>
+            <a:graphicFrameLocks noGrp="1"/>
+          </p:cNvGraphicFramePr>
+          <p:nvPr>
+            <p:extLst>
+              <p:ext uri="{D42A27DB-BD31-4B8C-83A1-F6EECF244321}">
+                <p14:modId xmlns:p14="http://schemas.microsoft.com/office/powerpoint/2010/main" val="831614442"/>
+              </p:ext>
+            </p:extLst>
+          </p:nvPr>
+        </p:nvGraphicFramePr>
+        <p:xfrm>
+          <a:off x="333772" y="1916832"/>
+          <a:ext cx="11449273" cy="3312368"/>
+        </p:xfrm>
+        <a:graphic>
+          <a:graphicData uri="http://schemas.openxmlformats.org/drawingml/2006/table">
+            <a:tbl>
+              <a:tblPr>
+                <a:tableStyleId>{BDBED569-4797-4DF1-A0F4-6AAB3CD982D8}</a:tableStyleId>
+              </a:tblPr>
+              <a:tblGrid>
+                <a:gridCol w="2278453">
+                  <a:extLst>
+                    <a:ext uri="{9D8B030D-6E8A-4147-A177-3AD203B41FA5}">
+                      <a16:colId xmlns:a16="http://schemas.microsoft.com/office/drawing/2014/main" val="2839673302"/>
+                    </a:ext>
+                  </a:extLst>
+                </a:gridCol>
+                <a:gridCol w="3045465">
+                  <a:extLst>
+                    <a:ext uri="{9D8B030D-6E8A-4147-A177-3AD203B41FA5}">
+                      <a16:colId xmlns:a16="http://schemas.microsoft.com/office/drawing/2014/main" val="3265452535"/>
+                    </a:ext>
+                  </a:extLst>
+                </a:gridCol>
+                <a:gridCol w="3263037">
+                  <a:extLst>
+                    <a:ext uri="{9D8B030D-6E8A-4147-A177-3AD203B41FA5}">
+                      <a16:colId xmlns:a16="http://schemas.microsoft.com/office/drawing/2014/main" val="3151376771"/>
+                    </a:ext>
+                  </a:extLst>
+                </a:gridCol>
+                <a:gridCol w="2862318">
+                  <a:extLst>
+                    <a:ext uri="{9D8B030D-6E8A-4147-A177-3AD203B41FA5}">
+                      <a16:colId xmlns:a16="http://schemas.microsoft.com/office/drawing/2014/main" val="2539893238"/>
+                    </a:ext>
+                  </a:extLst>
+                </a:gridCol>
+              </a:tblGrid>
+              <a:tr h="444342">
+                <a:tc>
+                  <a:txBody>
+                    <a:bodyPr/>
+                    <a:lstStyle/>
+                    <a:p>
+                      <a:pPr>
+                        <a:buNone/>
+                      </a:pPr>
+                      <a:r>
+                        <a:rPr lang="ko-KR" altLang="en-US" sz="1600" dirty="0"/>
+                        <a:t>구분</a:t>
+                      </a:r>
+                      <a:endParaRPr lang="ko-KR" altLang="en-US" sz="1600" dirty="0">
+                        <a:latin typeface="HY그래픽M" panose="02030600000101010101" pitchFamily="18" charset="-127"/>
+                        <a:ea typeface="HY그래픽M" panose="02030600000101010101" pitchFamily="18" charset="-127"/>
+                        <a:cs typeface="Calibri Light" panose="020F0302020204030204" pitchFamily="34" charset="0"/>
+                      </a:endParaRPr>
+                    </a:p>
+                  </a:txBody>
+                  <a:tcPr anchor="ctr">
+                    <a:solidFill>
+                      <a:srgbClr val="D7E3FF"/>
+                    </a:solidFill>
+                  </a:tcPr>
+                </a:tc>
+                <a:tc>
+                  <a:txBody>
+                    <a:bodyPr/>
+                    <a:lstStyle/>
+                    <a:p>
+                      <a:pPr>
+                        <a:buNone/>
+                      </a:pPr>
+                      <a:r>
+                        <a:rPr lang="ko-KR" altLang="en-US" sz="1600"/>
+                        <a:t>문제 상황</a:t>
+                      </a:r>
+                      <a:endParaRPr lang="ko-KR" altLang="en-US" sz="1600">
+                        <a:latin typeface="HY그래픽M" panose="02030600000101010101" pitchFamily="18" charset="-127"/>
+                        <a:ea typeface="HY그래픽M" panose="02030600000101010101" pitchFamily="18" charset="-127"/>
+                        <a:cs typeface="Calibri Light" panose="020F0302020204030204" pitchFamily="34" charset="0"/>
+                      </a:endParaRPr>
+                    </a:p>
+                  </a:txBody>
+                  <a:tcPr anchor="ctr">
+                    <a:solidFill>
+                      <a:srgbClr val="D7E3FF"/>
+                    </a:solidFill>
+                  </a:tcPr>
+                </a:tc>
+                <a:tc>
+                  <a:txBody>
+                    <a:bodyPr/>
+                    <a:lstStyle/>
+                    <a:p>
+                      <a:pPr>
+                        <a:buNone/>
+                      </a:pPr>
+                      <a:r>
+                        <a:rPr lang="en-US" sz="1600" dirty="0"/>
+                        <a:t>CLT(</a:t>
+                      </a:r>
+                      <a:r>
+                        <a:rPr lang="ko-KR" altLang="en-US" sz="1600" dirty="0"/>
+                        <a:t>중심극한정리</a:t>
+                      </a:r>
+                      <a:r>
+                        <a:rPr lang="en-US" altLang="ko-KR" sz="1600" dirty="0"/>
+                        <a:t>)</a:t>
+                      </a:r>
+                      <a:r>
+                        <a:rPr lang="en-US" sz="1600" dirty="0"/>
+                        <a:t> </a:t>
+                      </a:r>
+                      <a:r>
+                        <a:rPr lang="ko-KR" altLang="en-US" sz="1600" dirty="0"/>
+                        <a:t>역할</a:t>
+                      </a:r>
+                      <a:endParaRPr lang="ko-KR" altLang="en-US" sz="1600" dirty="0">
+                        <a:latin typeface="HY그래픽M" panose="02030600000101010101" pitchFamily="18" charset="-127"/>
+                        <a:ea typeface="HY그래픽M" panose="02030600000101010101" pitchFamily="18" charset="-127"/>
+                        <a:cs typeface="Calibri Light" panose="020F0302020204030204" pitchFamily="34" charset="0"/>
+                      </a:endParaRPr>
+                    </a:p>
+                  </a:txBody>
+                  <a:tcPr anchor="ctr">
+                    <a:solidFill>
+                      <a:srgbClr val="D7E3FF"/>
+                    </a:solidFill>
+                  </a:tcPr>
+                </a:tc>
+                <a:tc>
+                  <a:txBody>
+                    <a:bodyPr/>
+                    <a:lstStyle/>
+                    <a:p>
+                      <a:pPr>
+                        <a:buNone/>
+                      </a:pPr>
+                      <a:r>
+                        <a:rPr lang="ko-KR" altLang="en-US" sz="1600"/>
+                        <a:t>결과</a:t>
+                      </a:r>
+                      <a:endParaRPr lang="ko-KR" altLang="en-US" sz="1600">
+                        <a:latin typeface="HY그래픽M" panose="02030600000101010101" pitchFamily="18" charset="-127"/>
+                        <a:ea typeface="HY그래픽M" panose="02030600000101010101" pitchFamily="18" charset="-127"/>
+                        <a:cs typeface="Calibri Light" panose="020F0302020204030204" pitchFamily="34" charset="0"/>
+                      </a:endParaRPr>
+                    </a:p>
+                  </a:txBody>
+                  <a:tcPr anchor="ctr">
+                    <a:solidFill>
+                      <a:srgbClr val="D7E3FF"/>
+                    </a:solidFill>
+                  </a:tcPr>
+                </a:tc>
+                <a:extLst>
+                  <a:ext uri="{0D108BD9-81ED-4DB2-BD59-A6C34878D82A}">
+                    <a16:rowId xmlns:a16="http://schemas.microsoft.com/office/drawing/2014/main" val="3969735647"/>
+                  </a:ext>
+                </a:extLst>
+              </a:tr>
+              <a:tr h="767500">
+                <a:tc>
+                  <a:txBody>
+                    <a:bodyPr/>
+                    <a:lstStyle/>
+                    <a:p>
+                      <a:pPr>
+                        <a:buNone/>
+                      </a:pPr>
+                      <a:r>
+                        <a:rPr lang="en-US" altLang="ko-KR" sz="1600" dirty="0"/>
+                        <a:t>1. </a:t>
+                      </a:r>
+                      <a:r>
+                        <a:rPr lang="ko-KR" altLang="en-US" sz="1600" dirty="0"/>
+                        <a:t>데이터 분석 기반</a:t>
+                      </a:r>
+                      <a:endParaRPr lang="ko-KR" altLang="en-US" sz="1600" dirty="0">
+                        <a:latin typeface="HY그래픽M" panose="02030600000101010101" pitchFamily="18" charset="-127"/>
+                        <a:ea typeface="HY그래픽M" panose="02030600000101010101" pitchFamily="18" charset="-127"/>
+                        <a:cs typeface="Calibri Light" panose="020F0302020204030204" pitchFamily="34" charset="0"/>
+                      </a:endParaRPr>
+                    </a:p>
+                  </a:txBody>
+                  <a:tcPr anchor="ctr">
+                    <a:solidFill>
+                      <a:srgbClr val="D7E3FF"/>
+                    </a:solidFill>
+                  </a:tcPr>
+                </a:tc>
+                <a:tc>
+                  <a:txBody>
+                    <a:bodyPr/>
+                    <a:lstStyle/>
+                    <a:p>
+                      <a:pPr>
+                        <a:buNone/>
+                      </a:pPr>
+                      <a:r>
+                        <a:rPr lang="ko-KR" altLang="en-US" sz="1600"/>
+                        <a:t>분포 모름</a:t>
+                      </a:r>
+                      <a:r>
+                        <a:rPr lang="en-US" altLang="ko-KR" sz="1600"/>
+                        <a:t>, </a:t>
+                      </a:r>
+                      <a:r>
+                        <a:rPr lang="ko-KR" altLang="en-US" sz="1600"/>
+                        <a:t>이상치</a:t>
+                      </a:r>
+                      <a:r>
+                        <a:rPr lang="en-US" altLang="ko-KR" sz="1600"/>
+                        <a:t>, </a:t>
+                      </a:r>
+                      <a:r>
+                        <a:rPr lang="ko-KR" altLang="en-US" sz="1600"/>
+                        <a:t>비정규성</a:t>
+                      </a:r>
+                      <a:endParaRPr lang="ko-KR" altLang="en-US" sz="1600">
+                        <a:latin typeface="HY그래픽M" panose="02030600000101010101" pitchFamily="18" charset="-127"/>
+                        <a:ea typeface="HY그래픽M" panose="02030600000101010101" pitchFamily="18" charset="-127"/>
+                        <a:cs typeface="Calibri Light" panose="020F0302020204030204" pitchFamily="34" charset="0"/>
+                      </a:endParaRPr>
+                    </a:p>
+                  </a:txBody>
+                  <a:tcPr anchor="ctr">
+                    <a:solidFill>
+                      <a:srgbClr val="D7E3FF"/>
+                    </a:solidFill>
+                  </a:tcPr>
+                </a:tc>
+                <a:tc>
+                  <a:txBody>
+                    <a:bodyPr/>
+                    <a:lstStyle/>
+                    <a:p>
+                      <a:pPr>
+                        <a:buNone/>
+                      </a:pPr>
+                      <a:r>
+                        <a:rPr lang="ko-KR" altLang="en-US" sz="1600"/>
+                        <a:t>평균 → 정규분포 근사</a:t>
+                      </a:r>
+                      <a:endParaRPr lang="ko-KR" altLang="en-US" sz="1600">
+                        <a:latin typeface="HY그래픽M" panose="02030600000101010101" pitchFamily="18" charset="-127"/>
+                        <a:ea typeface="HY그래픽M" panose="02030600000101010101" pitchFamily="18" charset="-127"/>
+                        <a:cs typeface="Calibri Light" panose="020F0302020204030204" pitchFamily="34" charset="0"/>
+                      </a:endParaRPr>
+                    </a:p>
+                  </a:txBody>
+                  <a:tcPr anchor="ctr">
+                    <a:solidFill>
+                      <a:srgbClr val="D7E3FF"/>
+                    </a:solidFill>
+                  </a:tcPr>
+                </a:tc>
+                <a:tc>
+                  <a:txBody>
+                    <a:bodyPr/>
+                    <a:lstStyle/>
+                    <a:p>
+                      <a:pPr>
+                        <a:buNone/>
+                      </a:pPr>
+                      <a:r>
+                        <a:rPr lang="ko-KR" altLang="en-US" sz="1600" dirty="0"/>
+                        <a:t>통계적 추론 가능 </a:t>
+                      </a:r>
+                      <a:endParaRPr lang="en-US" altLang="ko-KR" sz="1600" dirty="0"/>
+                    </a:p>
+                    <a:p>
+                      <a:pPr>
+                        <a:buNone/>
+                      </a:pPr>
+                      <a:r>
+                        <a:rPr lang="en-US" altLang="ko-KR" sz="1600" dirty="0"/>
+                        <a:t>(</a:t>
+                      </a:r>
+                      <a:r>
+                        <a:rPr lang="ko-KR" altLang="en-US" sz="1600" dirty="0"/>
+                        <a:t>확률</a:t>
+                      </a:r>
+                      <a:r>
+                        <a:rPr lang="en-US" altLang="ko-KR" sz="1600" dirty="0"/>
+                        <a:t>, </a:t>
+                      </a:r>
+                      <a:r>
+                        <a:rPr lang="ko-KR" altLang="en-US" sz="1600" dirty="0"/>
+                        <a:t>신뢰구간</a:t>
+                      </a:r>
+                      <a:r>
+                        <a:rPr lang="en-US" altLang="ko-KR" sz="1600" dirty="0"/>
+                        <a:t>, </a:t>
+                      </a:r>
+                      <a:r>
+                        <a:rPr lang="ko-KR" altLang="en-US" sz="1600" dirty="0"/>
+                        <a:t>검정</a:t>
+                      </a:r>
+                      <a:r>
+                        <a:rPr lang="en-US" altLang="ko-KR" sz="1600" dirty="0"/>
+                        <a:t>)</a:t>
+                      </a:r>
+                      <a:endParaRPr lang="en-US" altLang="ko-KR" sz="1600" dirty="0">
+                        <a:latin typeface="HY그래픽M" panose="02030600000101010101" pitchFamily="18" charset="-127"/>
+                        <a:ea typeface="HY그래픽M" panose="02030600000101010101" pitchFamily="18" charset="-127"/>
+                        <a:cs typeface="Calibri Light" panose="020F0302020204030204" pitchFamily="34" charset="0"/>
+                      </a:endParaRPr>
+                    </a:p>
+                  </a:txBody>
+                  <a:tcPr anchor="ctr">
+                    <a:solidFill>
+                      <a:srgbClr val="D7E3FF"/>
+                    </a:solidFill>
+                  </a:tcPr>
+                </a:tc>
+                <a:extLst>
+                  <a:ext uri="{0D108BD9-81ED-4DB2-BD59-A6C34878D82A}">
+                    <a16:rowId xmlns:a16="http://schemas.microsoft.com/office/drawing/2014/main" val="3022940290"/>
+                  </a:ext>
+                </a:extLst>
+              </a:tr>
+              <a:tr h="767500">
+                <a:tc>
+                  <a:txBody>
+                    <a:bodyPr/>
+                    <a:lstStyle/>
+                    <a:p>
+                      <a:pPr>
+                        <a:buNone/>
+                      </a:pPr>
+                      <a:r>
+                        <a:rPr lang="en-US" altLang="ko-KR" sz="1600"/>
+                        <a:t>2. </a:t>
+                      </a:r>
+                      <a:r>
+                        <a:rPr lang="ko-KR" altLang="en-US" sz="1600"/>
+                        <a:t>모델 학습 안정성</a:t>
+                      </a:r>
+                      <a:endParaRPr lang="ko-KR" altLang="en-US" sz="1600">
+                        <a:latin typeface="HY그래픽M" panose="02030600000101010101" pitchFamily="18" charset="-127"/>
+                        <a:ea typeface="HY그래픽M" panose="02030600000101010101" pitchFamily="18" charset="-127"/>
+                        <a:cs typeface="Calibri Light" panose="020F0302020204030204" pitchFamily="34" charset="0"/>
+                      </a:endParaRPr>
+                    </a:p>
+                  </a:txBody>
+                  <a:tcPr anchor="ctr">
+                    <a:solidFill>
+                      <a:srgbClr val="D7E3FF"/>
+                    </a:solidFill>
+                  </a:tcPr>
+                </a:tc>
+                <a:tc>
+                  <a:txBody>
+                    <a:bodyPr/>
+                    <a:lstStyle/>
+                    <a:p>
+                      <a:pPr>
+                        <a:buNone/>
+                      </a:pPr>
+                      <a:r>
+                        <a:rPr lang="ko-KR" altLang="en-US" sz="1600"/>
+                        <a:t>손실값이 데이터마다 변동</a:t>
+                      </a:r>
+                      <a:endParaRPr lang="ko-KR" altLang="en-US" sz="1600">
+                        <a:latin typeface="HY그래픽M" panose="02030600000101010101" pitchFamily="18" charset="-127"/>
+                        <a:ea typeface="HY그래픽M" panose="02030600000101010101" pitchFamily="18" charset="-127"/>
+                        <a:cs typeface="Calibri Light" panose="020F0302020204030204" pitchFamily="34" charset="0"/>
+                      </a:endParaRPr>
+                    </a:p>
+                  </a:txBody>
+                  <a:tcPr anchor="ctr">
+                    <a:solidFill>
+                      <a:srgbClr val="D7E3FF"/>
+                    </a:solidFill>
+                  </a:tcPr>
+                </a:tc>
+                <a:tc>
+                  <a:txBody>
+                    <a:bodyPr/>
+                    <a:lstStyle/>
+                    <a:p>
+                      <a:pPr>
+                        <a:buNone/>
+                      </a:pPr>
+                      <a:r>
+                        <a:rPr lang="ko-KR" altLang="en-US" sz="1600"/>
+                        <a:t>평균 손실이 안정적으로 수렴</a:t>
+                      </a:r>
+                      <a:endParaRPr lang="ko-KR" altLang="en-US" sz="1600">
+                        <a:latin typeface="HY그래픽M" panose="02030600000101010101" pitchFamily="18" charset="-127"/>
+                        <a:ea typeface="HY그래픽M" panose="02030600000101010101" pitchFamily="18" charset="-127"/>
+                        <a:cs typeface="Calibri Light" panose="020F0302020204030204" pitchFamily="34" charset="0"/>
+                      </a:endParaRPr>
+                    </a:p>
+                  </a:txBody>
+                  <a:tcPr anchor="ctr">
+                    <a:solidFill>
+                      <a:srgbClr val="D7E3FF"/>
+                    </a:solidFill>
+                  </a:tcPr>
+                </a:tc>
+                <a:tc>
+                  <a:txBody>
+                    <a:bodyPr/>
+                    <a:lstStyle/>
+                    <a:p>
+                      <a:pPr>
+                        <a:buNone/>
+                      </a:pPr>
+                      <a:r>
+                        <a:rPr lang="ko-KR" altLang="en-US" sz="1600" dirty="0"/>
+                        <a:t>학습 안정화</a:t>
+                      </a:r>
+                      <a:r>
+                        <a:rPr lang="en-US" altLang="ko-KR" sz="1600" dirty="0"/>
+                        <a:t>, </a:t>
+                      </a:r>
+                    </a:p>
+                    <a:p>
+                      <a:pPr>
+                        <a:buNone/>
+                      </a:pPr>
+                      <a:r>
+                        <a:rPr lang="en-US" sz="1600" dirty="0"/>
+                        <a:t>gradient descent </a:t>
+                      </a:r>
+                      <a:r>
+                        <a:rPr lang="ko-KR" altLang="en-US" sz="1600" dirty="0"/>
+                        <a:t>수렴</a:t>
+                      </a:r>
+                      <a:endParaRPr lang="ko-KR" altLang="en-US" sz="1600" dirty="0">
+                        <a:latin typeface="HY그래픽M" panose="02030600000101010101" pitchFamily="18" charset="-127"/>
+                        <a:ea typeface="HY그래픽M" panose="02030600000101010101" pitchFamily="18" charset="-127"/>
+                        <a:cs typeface="Calibri Light" panose="020F0302020204030204" pitchFamily="34" charset="0"/>
+                      </a:endParaRPr>
+                    </a:p>
+                  </a:txBody>
+                  <a:tcPr anchor="ctr">
+                    <a:solidFill>
+                      <a:srgbClr val="D7E3FF"/>
+                    </a:solidFill>
+                  </a:tcPr>
+                </a:tc>
+                <a:extLst>
+                  <a:ext uri="{0D108BD9-81ED-4DB2-BD59-A6C34878D82A}">
+                    <a16:rowId xmlns:a16="http://schemas.microsoft.com/office/drawing/2014/main" val="836168464"/>
+                  </a:ext>
+                </a:extLst>
+              </a:tr>
+              <a:tr h="444342">
+                <a:tc>
+                  <a:txBody>
+                    <a:bodyPr/>
+                    <a:lstStyle/>
+                    <a:p>
+                      <a:pPr>
+                        <a:buNone/>
+                      </a:pPr>
+                      <a:r>
+                        <a:rPr lang="en-US" sz="1600"/>
+                        <a:t>3. Mini-batch </a:t>
+                      </a:r>
+                      <a:r>
+                        <a:rPr lang="ko-KR" altLang="en-US" sz="1600"/>
+                        <a:t>학습</a:t>
+                      </a:r>
+                      <a:endParaRPr lang="ko-KR" altLang="en-US" sz="1600">
+                        <a:latin typeface="HY그래픽M" panose="02030600000101010101" pitchFamily="18" charset="-127"/>
+                        <a:ea typeface="HY그래픽M" panose="02030600000101010101" pitchFamily="18" charset="-127"/>
+                        <a:cs typeface="Calibri Light" panose="020F0302020204030204" pitchFamily="34" charset="0"/>
+                      </a:endParaRPr>
+                    </a:p>
+                  </a:txBody>
+                  <a:tcPr anchor="ctr">
+                    <a:solidFill>
+                      <a:srgbClr val="D7E3FF"/>
+                    </a:solidFill>
+                  </a:tcPr>
+                </a:tc>
+                <a:tc>
+                  <a:txBody>
+                    <a:bodyPr/>
+                    <a:lstStyle/>
+                    <a:p>
+                      <a:pPr>
+                        <a:buNone/>
+                      </a:pPr>
+                      <a:r>
+                        <a:rPr lang="ko-KR" altLang="en-US" sz="1600"/>
+                        <a:t>전체 데이터 사용 어려움</a:t>
+                      </a:r>
+                      <a:endParaRPr lang="ko-KR" altLang="en-US" sz="1600">
+                        <a:latin typeface="HY그래픽M" panose="02030600000101010101" pitchFamily="18" charset="-127"/>
+                        <a:ea typeface="HY그래픽M" panose="02030600000101010101" pitchFamily="18" charset="-127"/>
+                        <a:cs typeface="Calibri Light" panose="020F0302020204030204" pitchFamily="34" charset="0"/>
+                      </a:endParaRPr>
+                    </a:p>
+                  </a:txBody>
+                  <a:tcPr anchor="ctr">
+                    <a:solidFill>
+                      <a:srgbClr val="D7E3FF"/>
+                    </a:solidFill>
+                  </a:tcPr>
+                </a:tc>
+                <a:tc>
+                  <a:txBody>
+                    <a:bodyPr/>
+                    <a:lstStyle/>
+                    <a:p>
+                      <a:pPr>
+                        <a:buNone/>
+                      </a:pPr>
+                      <a:r>
+                        <a:rPr lang="ko-KR" altLang="en-US" sz="1600"/>
+                        <a:t>작은 샘플 평균이 전체 근사</a:t>
+                      </a:r>
+                      <a:endParaRPr lang="ko-KR" altLang="en-US" sz="1600">
+                        <a:latin typeface="HY그래픽M" panose="02030600000101010101" pitchFamily="18" charset="-127"/>
+                        <a:ea typeface="HY그래픽M" panose="02030600000101010101" pitchFamily="18" charset="-127"/>
+                        <a:cs typeface="Calibri Light" panose="020F0302020204030204" pitchFamily="34" charset="0"/>
+                      </a:endParaRPr>
+                    </a:p>
+                  </a:txBody>
+                  <a:tcPr anchor="ctr">
+                    <a:solidFill>
+                      <a:srgbClr val="D7E3FF"/>
+                    </a:solidFill>
+                  </a:tcPr>
+                </a:tc>
+                <a:tc>
+                  <a:txBody>
+                    <a:bodyPr/>
+                    <a:lstStyle/>
+                    <a:p>
+                      <a:pPr>
+                        <a:buNone/>
+                      </a:pPr>
+                      <a:r>
+                        <a:rPr lang="ko-KR" altLang="en-US" sz="1600" dirty="0"/>
+                        <a:t>계산 효율</a:t>
+                      </a:r>
+                      <a:r>
+                        <a:rPr lang="en-US" altLang="ko-KR" sz="1600" dirty="0"/>
+                        <a:t>, GPU </a:t>
+                      </a:r>
+                      <a:r>
+                        <a:rPr lang="ko-KR" altLang="en-US" sz="1600" dirty="0"/>
+                        <a:t>활용</a:t>
+                      </a:r>
+                      <a:endParaRPr lang="en-US" altLang="ko-KR" sz="1600" dirty="0">
+                        <a:latin typeface="HY그래픽M" panose="02030600000101010101" pitchFamily="18" charset="-127"/>
+                        <a:ea typeface="HY그래픽M" panose="02030600000101010101" pitchFamily="18" charset="-127"/>
+                        <a:cs typeface="Calibri Light" panose="020F0302020204030204" pitchFamily="34" charset="0"/>
+                      </a:endParaRPr>
+                    </a:p>
+                  </a:txBody>
+                  <a:tcPr anchor="ctr">
+                    <a:solidFill>
+                      <a:srgbClr val="D7E3FF"/>
+                    </a:solidFill>
+                  </a:tcPr>
+                </a:tc>
+                <a:extLst>
+                  <a:ext uri="{0D108BD9-81ED-4DB2-BD59-A6C34878D82A}">
+                    <a16:rowId xmlns:a16="http://schemas.microsoft.com/office/drawing/2014/main" val="1758356760"/>
+                  </a:ext>
+                </a:extLst>
+              </a:tr>
+              <a:tr h="444342">
+                <a:tc>
+                  <a:txBody>
+                    <a:bodyPr/>
+                    <a:lstStyle/>
+                    <a:p>
+                      <a:pPr>
+                        <a:buNone/>
+                      </a:pPr>
+                      <a:r>
+                        <a:rPr lang="en-US" altLang="ko-KR" sz="1600"/>
+                        <a:t>4. </a:t>
+                      </a:r>
+                      <a:r>
+                        <a:rPr lang="ko-KR" altLang="en-US" sz="1600"/>
+                        <a:t>모델 평가</a:t>
+                      </a:r>
+                      <a:endParaRPr lang="ko-KR" altLang="en-US" sz="1600">
+                        <a:latin typeface="HY그래픽M" panose="02030600000101010101" pitchFamily="18" charset="-127"/>
+                        <a:ea typeface="HY그래픽M" panose="02030600000101010101" pitchFamily="18" charset="-127"/>
+                        <a:cs typeface="Calibri Light" panose="020F0302020204030204" pitchFamily="34" charset="0"/>
+                      </a:endParaRPr>
+                    </a:p>
+                  </a:txBody>
+                  <a:tcPr anchor="ctr">
+                    <a:solidFill>
+                      <a:srgbClr val="D7E3FF"/>
+                    </a:solidFill>
+                  </a:tcPr>
+                </a:tc>
+                <a:tc>
+                  <a:txBody>
+                    <a:bodyPr/>
+                    <a:lstStyle/>
+                    <a:p>
+                      <a:pPr>
+                        <a:buNone/>
+                      </a:pPr>
+                      <a:r>
+                        <a:rPr lang="ko-KR" altLang="en-US" sz="1600"/>
+                        <a:t>성능 비교 불확실</a:t>
+                      </a:r>
+                      <a:endParaRPr lang="ko-KR" altLang="en-US" sz="1600">
+                        <a:latin typeface="HY그래픽M" panose="02030600000101010101" pitchFamily="18" charset="-127"/>
+                        <a:ea typeface="HY그래픽M" panose="02030600000101010101" pitchFamily="18" charset="-127"/>
+                        <a:cs typeface="Calibri Light" panose="020F0302020204030204" pitchFamily="34" charset="0"/>
+                      </a:endParaRPr>
+                    </a:p>
+                  </a:txBody>
+                  <a:tcPr anchor="ctr">
+                    <a:solidFill>
+                      <a:srgbClr val="D7E3FF"/>
+                    </a:solidFill>
+                  </a:tcPr>
+                </a:tc>
+                <a:tc>
+                  <a:txBody>
+                    <a:bodyPr/>
+                    <a:lstStyle/>
+                    <a:p>
+                      <a:pPr>
+                        <a:buNone/>
+                      </a:pPr>
+                      <a:r>
+                        <a:rPr lang="ko-KR" altLang="en-US" sz="1600"/>
+                        <a:t>평균 성능이 정규분포 따름</a:t>
+                      </a:r>
+                      <a:endParaRPr lang="ko-KR" altLang="en-US" sz="1600">
+                        <a:latin typeface="HY그래픽M" panose="02030600000101010101" pitchFamily="18" charset="-127"/>
+                        <a:ea typeface="HY그래픽M" panose="02030600000101010101" pitchFamily="18" charset="-127"/>
+                        <a:cs typeface="Calibri Light" panose="020F0302020204030204" pitchFamily="34" charset="0"/>
+                      </a:endParaRPr>
+                    </a:p>
+                  </a:txBody>
+                  <a:tcPr anchor="ctr">
+                    <a:solidFill>
+                      <a:srgbClr val="D7E3FF"/>
+                    </a:solidFill>
+                  </a:tcPr>
+                </a:tc>
+                <a:tc>
+                  <a:txBody>
+                    <a:bodyPr/>
+                    <a:lstStyle/>
+                    <a:p>
+                      <a:pPr>
+                        <a:buNone/>
+                      </a:pPr>
+                      <a:r>
+                        <a:rPr lang="ko-KR" altLang="en-US" sz="1600"/>
+                        <a:t>신뢰구간</a:t>
+                      </a:r>
+                      <a:r>
+                        <a:rPr lang="en-US" altLang="ko-KR" sz="1600"/>
+                        <a:t>, </a:t>
+                      </a:r>
+                      <a:r>
+                        <a:rPr lang="ko-KR" altLang="en-US" sz="1600"/>
+                        <a:t>통계적 비교 가능</a:t>
+                      </a:r>
+                      <a:endParaRPr lang="ko-KR" altLang="en-US" sz="1600">
+                        <a:latin typeface="HY그래픽M" panose="02030600000101010101" pitchFamily="18" charset="-127"/>
+                        <a:ea typeface="HY그래픽M" panose="02030600000101010101" pitchFamily="18" charset="-127"/>
+                        <a:cs typeface="Calibri Light" panose="020F0302020204030204" pitchFamily="34" charset="0"/>
+                      </a:endParaRPr>
+                    </a:p>
+                  </a:txBody>
+                  <a:tcPr anchor="ctr">
+                    <a:solidFill>
+                      <a:srgbClr val="D7E3FF"/>
+                    </a:solidFill>
+                  </a:tcPr>
+                </a:tc>
+                <a:extLst>
+                  <a:ext uri="{0D108BD9-81ED-4DB2-BD59-A6C34878D82A}">
+                    <a16:rowId xmlns:a16="http://schemas.microsoft.com/office/drawing/2014/main" val="721531158"/>
+                  </a:ext>
+                </a:extLst>
+              </a:tr>
+              <a:tr h="444342">
+                <a:tc>
+                  <a:txBody>
+                    <a:bodyPr/>
+                    <a:lstStyle/>
+                    <a:p>
+                      <a:pPr>
+                        <a:buNone/>
+                      </a:pPr>
+                      <a:r>
+                        <a:rPr lang="en-US" sz="1600"/>
+                        <a:t>5. A/B </a:t>
+                      </a:r>
+                      <a:r>
+                        <a:rPr lang="ko-KR" altLang="en-US" sz="1600"/>
+                        <a:t>테스트</a:t>
+                      </a:r>
+                      <a:endParaRPr lang="ko-KR" altLang="en-US" sz="1600">
+                        <a:latin typeface="HY그래픽M" panose="02030600000101010101" pitchFamily="18" charset="-127"/>
+                        <a:ea typeface="HY그래픽M" panose="02030600000101010101" pitchFamily="18" charset="-127"/>
+                        <a:cs typeface="Calibri Light" panose="020F0302020204030204" pitchFamily="34" charset="0"/>
+                      </a:endParaRPr>
+                    </a:p>
+                  </a:txBody>
+                  <a:tcPr anchor="ctr">
+                    <a:solidFill>
+                      <a:srgbClr val="D7E3FF"/>
+                    </a:solidFill>
+                  </a:tcPr>
+                </a:tc>
+                <a:tc>
+                  <a:txBody>
+                    <a:bodyPr/>
+                    <a:lstStyle/>
+                    <a:p>
+                      <a:pPr>
+                        <a:buNone/>
+                      </a:pPr>
+                      <a:r>
+                        <a:rPr lang="ko-KR" altLang="en-US" sz="1600" dirty="0"/>
+                        <a:t>효과 차이 판단 필요</a:t>
+                      </a:r>
+                      <a:endParaRPr lang="ko-KR" altLang="en-US" sz="1600" dirty="0">
+                        <a:latin typeface="HY그래픽M" panose="02030600000101010101" pitchFamily="18" charset="-127"/>
+                        <a:ea typeface="HY그래픽M" panose="02030600000101010101" pitchFamily="18" charset="-127"/>
+                        <a:cs typeface="Calibri Light" panose="020F0302020204030204" pitchFamily="34" charset="0"/>
+                      </a:endParaRPr>
+                    </a:p>
+                  </a:txBody>
+                  <a:tcPr anchor="ctr">
+                    <a:solidFill>
+                      <a:srgbClr val="D7E3FF"/>
+                    </a:solidFill>
+                  </a:tcPr>
+                </a:tc>
+                <a:tc>
+                  <a:txBody>
+                    <a:bodyPr/>
+                    <a:lstStyle/>
+                    <a:p>
+                      <a:pPr>
+                        <a:buNone/>
+                      </a:pPr>
+                      <a:r>
+                        <a:rPr lang="ko-KR" altLang="en-US" sz="1600"/>
+                        <a:t>평균 차이 → 정규분포 근사</a:t>
+                      </a:r>
+                      <a:endParaRPr lang="ko-KR" altLang="en-US" sz="1600">
+                        <a:latin typeface="HY그래픽M" panose="02030600000101010101" pitchFamily="18" charset="-127"/>
+                        <a:ea typeface="HY그래픽M" panose="02030600000101010101" pitchFamily="18" charset="-127"/>
+                        <a:cs typeface="Calibri Light" panose="020F0302020204030204" pitchFamily="34" charset="0"/>
+                      </a:endParaRPr>
+                    </a:p>
+                  </a:txBody>
+                  <a:tcPr anchor="ctr">
+                    <a:solidFill>
+                      <a:srgbClr val="D7E3FF"/>
+                    </a:solidFill>
+                  </a:tcPr>
+                </a:tc>
+                <a:tc>
+                  <a:txBody>
+                    <a:bodyPr/>
+                    <a:lstStyle/>
+                    <a:p>
+                      <a:pPr>
+                        <a:buNone/>
+                      </a:pPr>
+                      <a:r>
+                        <a:rPr lang="en-US" altLang="ko-KR" sz="1600" dirty="0"/>
+                        <a:t>p-value </a:t>
+                      </a:r>
+                      <a:r>
+                        <a:rPr lang="ko-KR" altLang="en-US" sz="1600" dirty="0"/>
+                        <a:t>기반 의사결정</a:t>
+                      </a:r>
+                      <a:endParaRPr lang="ko-KR" altLang="en-US" sz="1600" dirty="0">
+                        <a:latin typeface="HY그래픽M" panose="02030600000101010101" pitchFamily="18" charset="-127"/>
+                        <a:ea typeface="HY그래픽M" panose="02030600000101010101" pitchFamily="18" charset="-127"/>
+                        <a:cs typeface="Calibri Light" panose="020F0302020204030204" pitchFamily="34" charset="0"/>
+                      </a:endParaRPr>
+                    </a:p>
+                  </a:txBody>
+                  <a:tcPr anchor="ctr">
+                    <a:solidFill>
+                      <a:srgbClr val="D7E3FF"/>
+                    </a:solidFill>
+                  </a:tcPr>
+                </a:tc>
+                <a:extLst>
+                  <a:ext uri="{0D108BD9-81ED-4DB2-BD59-A6C34878D82A}">
+                    <a16:rowId xmlns:a16="http://schemas.microsoft.com/office/drawing/2014/main" val="1788444641"/>
+                  </a:ext>
+                </a:extLst>
+              </a:tr>
+            </a:tbl>
+          </a:graphicData>
+        </a:graphic>
+      </p:graphicFrame>
+    </p:spTree>
+    <p:extLst>
+      <p:ext uri="{BB962C8B-B14F-4D97-AF65-F5344CB8AC3E}">
+        <p14:creationId xmlns:p14="http://schemas.microsoft.com/office/powerpoint/2010/main" val="817717"/>
       </p:ext>
     </p:extLst>
   </p:cSld>
@@ -7435,6 +9233,26 @@
 </file>
 
 <file path=customXml/item1.xml><?xml version="1.0" encoding="utf-8"?>
+<p:properties xmlns:p="http://schemas.microsoft.com/office/2006/metadata/properties" xmlns:xsi="http://www.w3.org/2001/XMLSchema-instance" xmlns:pc="http://schemas.microsoft.com/office/infopath/2007/PartnerControls">
+  <documentManagement>
+    <VSO_x0020_item_x0020_id xmlns="40262f94-9f35-4ac3-9a90-690165a166b7" xsi:nil="true"/>
+    <Assetid_x0020_ xmlns="40262f94-9f35-4ac3-9a90-690165a166b7" xsi:nil="true"/>
+    <Item_x0020_Details xmlns="40262f94-9f35-4ac3-9a90-690165a166b7" xsi:nil="true"/>
+    <Template_x0020_details xmlns="40262f94-9f35-4ac3-9a90-690165a166b7" xsi:nil="true"/>
+  </documentManagement>
+</p:properties>
+</file>
+
+<file path=customXml/item2.xml><?xml version="1.0" encoding="utf-8"?>
+<?mso-contentType ?>
+<FormTemplates xmlns="http://schemas.microsoft.com/sharepoint/v3/contenttype/forms">
+  <Display>DocumentLibraryForm</Display>
+  <Edit>DocumentLibraryForm</Edit>
+  <New>DocumentLibraryForm</New>
+</FormTemplates>
+</file>
+
+<file path=customXml/item3.xml><?xml version="1.0" encoding="utf-8"?>
 <ct:contentTypeSchema xmlns:ct="http://schemas.microsoft.com/office/2006/metadata/contentType" xmlns:ma="http://schemas.microsoft.com/office/2006/metadata/properties/metaAttributes" ct:_="" ma:_="" ma:contentTypeName="Document" ma:contentTypeID="0x010100AA3F7D94069FF64A86F7DFF56D60E3BE" ma:contentTypeVersion="6" ma:contentTypeDescription="Create a new document." ma:contentTypeScope="" ma:versionID="c32302c77d4085ecf495bdddb7f5e889">
   <xsd:schema xmlns:xsd="http://www.w3.org/2001/XMLSchema" xmlns:xs="http://www.w3.org/2001/XMLSchema" xmlns:p="http://schemas.microsoft.com/office/2006/metadata/properties" xmlns:ns2="a4f35948-e619-41b3-aa29-22878b09cfd2" xmlns:ns3="40262f94-9f35-4ac3-9a90-690165a166b7" targetNamespace="http://schemas.microsoft.com/office/2006/metadata/properties" ma:root="true" ma:fieldsID="4ab5ae46be95f9d0be6107e8200be7a2" ns2:_="" ns3:_="">
     <xsd:import namespace="a4f35948-e619-41b3-aa29-22878b09cfd2"/>
@@ -7615,27 +9433,32 @@
 </ct:contentTypeSchema>
 </file>
 
-<file path=customXml/item2.xml><?xml version="1.0" encoding="utf-8"?>
-<?mso-contentType ?>
-<FormTemplates xmlns="http://schemas.microsoft.com/sharepoint/v3/contenttype/forms">
-  <Display>DocumentLibraryForm</Display>
-  <Edit>DocumentLibraryForm</Edit>
-  <New>DocumentLibraryForm</New>
-</FormTemplates>
+<file path=customXml/itemProps1.xml><?xml version="1.0" encoding="utf-8"?>
+<ds:datastoreItem xmlns:ds="http://schemas.openxmlformats.org/officeDocument/2006/customXml" ds:itemID="{50AACE6D-8EB6-447A-8DFD-C2C0C52916AC}">
+  <ds:schemaRefs>
+    <ds:schemaRef ds:uri="a4f35948-e619-41b3-aa29-22878b09cfd2"/>
+    <ds:schemaRef ds:uri="http://purl.org/dc/elements/1.1/"/>
+    <ds:schemaRef ds:uri="http://schemas.microsoft.com/office/infopath/2007/PartnerControls"/>
+    <ds:schemaRef ds:uri="40262f94-9f35-4ac3-9a90-690165a166b7"/>
+    <ds:schemaRef ds:uri="http://purl.org/dc/dcmitype/"/>
+    <ds:schemaRef ds:uri="http://schemas.microsoft.com/office/2006/documentManagement/types"/>
+    <ds:schemaRef ds:uri="http://schemas.microsoft.com/office/2006/metadata/properties"/>
+    <ds:schemaRef ds:uri="http://schemas.openxmlformats.org/package/2006/metadata/core-properties"/>
+    <ds:schemaRef ds:uri="http://www.w3.org/XML/1998/namespace"/>
+    <ds:schemaRef ds:uri="http://purl.org/dc/terms/"/>
+  </ds:schemaRefs>
+</ds:datastoreItem>
 </file>
 
-<file path=customXml/item3.xml><?xml version="1.0" encoding="utf-8"?>
-<p:properties xmlns:p="http://schemas.microsoft.com/office/2006/metadata/properties" xmlns:xsi="http://www.w3.org/2001/XMLSchema-instance" xmlns:pc="http://schemas.microsoft.com/office/infopath/2007/PartnerControls">
-  <documentManagement>
-    <VSO_x0020_item_x0020_id xmlns="40262f94-9f35-4ac3-9a90-690165a166b7" xsi:nil="true"/>
-    <Assetid_x0020_ xmlns="40262f94-9f35-4ac3-9a90-690165a166b7" xsi:nil="true"/>
-    <Item_x0020_Details xmlns="40262f94-9f35-4ac3-9a90-690165a166b7" xsi:nil="true"/>
-    <Template_x0020_details xmlns="40262f94-9f35-4ac3-9a90-690165a166b7" xsi:nil="true"/>
-  </documentManagement>
-</p:properties>
+<file path=customXml/itemProps2.xml><?xml version="1.0" encoding="utf-8"?>
+<ds:datastoreItem xmlns:ds="http://schemas.openxmlformats.org/officeDocument/2006/customXml" ds:itemID="{7F9B8BCC-BF24-4800-92E1-9F891BBB27E6}">
+  <ds:schemaRefs>
+    <ds:schemaRef ds:uri="http://schemas.microsoft.com/sharepoint/v3/contenttype/forms"/>
+  </ds:schemaRefs>
+</ds:datastoreItem>
 </file>
 
-<file path=customXml/itemProps1.xml><?xml version="1.0" encoding="utf-8"?>
+<file path=customXml/itemProps3.xml><?xml version="1.0" encoding="utf-8"?>
 <ds:datastoreItem xmlns:ds="http://schemas.openxmlformats.org/officeDocument/2006/customXml" ds:itemID="{5CCB2C71-1ED8-4540-B003-293B5E75C71F}">
   <ds:schemaRefs>
     <ds:schemaRef ds:uri="http://schemas.microsoft.com/office/2006/metadata/contentType"/>
@@ -7652,29 +9475,4 @@
     <ds:schemaRef ds:uri="http://schemas.microsoft.com/internal/obd"/>
   </ds:schemaRefs>
 </ds:datastoreItem>
-</file>
-
-<file path=customXml/itemProps2.xml><?xml version="1.0" encoding="utf-8"?>
-<ds:datastoreItem xmlns:ds="http://schemas.openxmlformats.org/officeDocument/2006/customXml" ds:itemID="{7F9B8BCC-BF24-4800-92E1-9F891BBB27E6}">
-  <ds:schemaRefs>
-    <ds:schemaRef ds:uri="http://schemas.microsoft.com/sharepoint/v3/contenttype/forms"/>
-  </ds:schemaRefs>
-</ds:datastoreItem>
-</file>
-
-<file path=customXml/itemProps3.xml><?xml version="1.0" encoding="utf-8"?>
-<ds:datastoreItem xmlns:ds="http://schemas.openxmlformats.org/officeDocument/2006/customXml" ds:itemID="{50AACE6D-8EB6-447A-8DFD-C2C0C52916AC}">
-  <ds:schemaRefs>
-    <ds:schemaRef ds:uri="a4f35948-e619-41b3-aa29-22878b09cfd2"/>
-    <ds:schemaRef ds:uri="http://purl.org/dc/elements/1.1/"/>
-    <ds:schemaRef ds:uri="http://schemas.microsoft.com/office/infopath/2007/PartnerControls"/>
-    <ds:schemaRef ds:uri="40262f94-9f35-4ac3-9a90-690165a166b7"/>
-    <ds:schemaRef ds:uri="http://purl.org/dc/dcmitype/"/>
-    <ds:schemaRef ds:uri="http://schemas.microsoft.com/office/2006/documentManagement/types"/>
-    <ds:schemaRef ds:uri="http://schemas.microsoft.com/office/2006/metadata/properties"/>
-    <ds:schemaRef ds:uri="http://schemas.openxmlformats.org/package/2006/metadata/core-properties"/>
-    <ds:schemaRef ds:uri="http://www.w3.org/XML/1998/namespace"/>
-    <ds:schemaRef ds:uri="http://purl.org/dc/terms/"/>
-  </ds:schemaRefs>
-</ds:datastoreItem>
 </file>
--- a/5_Montecarlo Simulation.pptx
+++ b/5_Montecarlo Simulation.pptx
@@ -5,10 +5,10 @@
     <p:sldMasterId id="2147483648" r:id="rId4"/>
   </p:sldMasterIdLst>
   <p:notesMasterIdLst>
-    <p:notesMasterId r:id="rId14"/>
+    <p:notesMasterId r:id="rId15"/>
   </p:notesMasterIdLst>
   <p:handoutMasterIdLst>
-    <p:handoutMasterId r:id="rId15"/>
+    <p:handoutMasterId r:id="rId16"/>
   </p:handoutMasterIdLst>
   <p:sldIdLst>
     <p:sldId id="256" r:id="rId5"/>
@@ -18,8 +18,9 @@
     <p:sldId id="307" r:id="rId9"/>
     <p:sldId id="306" r:id="rId10"/>
     <p:sldId id="308" r:id="rId11"/>
-    <p:sldId id="309" r:id="rId12"/>
-    <p:sldId id="310" r:id="rId13"/>
+    <p:sldId id="311" r:id="rId12"/>
+    <p:sldId id="309" r:id="rId13"/>
+    <p:sldId id="310" r:id="rId14"/>
   </p:sldIdLst>
   <p:sldSz cx="12188825" cy="6858000"/>
   <p:notesSz cx="6858000" cy="9144000"/>
@@ -789,6 +790,115 @@
 </p:notes>
 </file>
 
+<file path=ppt/notesSlides/notesSlide10.xml><?xml version="1.0" encoding="utf-8"?>
+<p:notes xmlns:a="http://schemas.openxmlformats.org/drawingml/2006/main" xmlns:r="http://schemas.openxmlformats.org/officeDocument/2006/relationships" xmlns:p="http://schemas.openxmlformats.org/presentationml/2006/main">
+  <p:cSld>
+    <p:spTree>
+      <p:nvGrpSpPr>
+        <p:cNvPr id="1" name="">
+          <a:extLst>
+            <a:ext uri="{FF2B5EF4-FFF2-40B4-BE49-F238E27FC236}">
+              <a16:creationId xmlns:a16="http://schemas.microsoft.com/office/drawing/2014/main" id="{3932FD5E-B683-05F5-2A8F-95FE369808B2}"/>
+            </a:ext>
+          </a:extLst>
+        </p:cNvPr>
+        <p:cNvGrpSpPr/>
+        <p:nvPr/>
+      </p:nvGrpSpPr>
+      <p:grpSpPr>
+        <a:xfrm>
+          <a:off x="0" y="0"/>
+          <a:ext cx="0" cy="0"/>
+          <a:chOff x="0" y="0"/>
+          <a:chExt cx="0" cy="0"/>
+        </a:xfrm>
+      </p:grpSpPr>
+      <p:sp>
+        <p:nvSpPr>
+          <p:cNvPr id="2" name="슬라이드 이미지 개체 틀 1">
+            <a:extLst>
+              <a:ext uri="{FF2B5EF4-FFF2-40B4-BE49-F238E27FC236}">
+                <a16:creationId xmlns:a16="http://schemas.microsoft.com/office/drawing/2014/main" id="{1F914573-C36D-346C-F5A7-A95CE5ED020F}"/>
+              </a:ext>
+            </a:extLst>
+          </p:cNvPr>
+          <p:cNvSpPr>
+            <a:spLocks noGrp="1" noRot="1" noChangeAspect="1"/>
+          </p:cNvSpPr>
+          <p:nvPr>
+            <p:ph type="sldImg"/>
+          </p:nvPr>
+        </p:nvSpPr>
+        <p:spPr/>
+      </p:sp>
+      <p:sp>
+        <p:nvSpPr>
+          <p:cNvPr id="3" name="슬라이드 노트 개체 틀 2">
+            <a:extLst>
+              <a:ext uri="{FF2B5EF4-FFF2-40B4-BE49-F238E27FC236}">
+                <a16:creationId xmlns:a16="http://schemas.microsoft.com/office/drawing/2014/main" id="{75B6A3A6-E1B1-4542-BD9E-843AF4A37863}"/>
+              </a:ext>
+            </a:extLst>
+          </p:cNvPr>
+          <p:cNvSpPr>
+            <a:spLocks noGrp="1"/>
+          </p:cNvSpPr>
+          <p:nvPr>
+            <p:ph type="body" idx="1"/>
+          </p:nvPr>
+        </p:nvSpPr>
+        <p:spPr/>
+        <p:txBody>
+          <a:bodyPr/>
+          <a:lstStyle/>
+          <a:p>
+            <a:endParaRPr lang="ko-KR" altLang="en-US" dirty="0"/>
+          </a:p>
+        </p:txBody>
+      </p:sp>
+      <p:sp>
+        <p:nvSpPr>
+          <p:cNvPr id="4" name="슬라이드 번호 개체 틀 3">
+            <a:extLst>
+              <a:ext uri="{FF2B5EF4-FFF2-40B4-BE49-F238E27FC236}">
+                <a16:creationId xmlns:a16="http://schemas.microsoft.com/office/drawing/2014/main" id="{E63E6ECA-8F6F-B8DE-C544-C72743D3729C}"/>
+              </a:ext>
+            </a:extLst>
+          </p:cNvPr>
+          <p:cNvSpPr>
+            <a:spLocks noGrp="1"/>
+          </p:cNvSpPr>
+          <p:nvPr>
+            <p:ph type="sldNum" sz="quarter" idx="10"/>
+          </p:nvPr>
+        </p:nvSpPr>
+        <p:spPr/>
+        <p:txBody>
+          <a:bodyPr/>
+          <a:lstStyle/>
+          <a:p>
+            <a:pPr rtl="0"/>
+            <a:fld id="{5FB91549-43BF-425A-AF25-75262019208C}" type="slidenum">
+              <a:rPr lang="en-US" altLang="ko-KR" smtClean="0"/>
+              <a:t>10</a:t>
+            </a:fld>
+            <a:endParaRPr lang="ko-KR" altLang="en-US" dirty="0"/>
+          </a:p>
+        </p:txBody>
+      </p:sp>
+    </p:spTree>
+    <p:extLst>
+      <p:ext uri="{BB962C8B-B14F-4D97-AF65-F5344CB8AC3E}">
+        <p14:creationId xmlns:p14="http://schemas.microsoft.com/office/powerpoint/2010/main" val="215676295"/>
+      </p:ext>
+    </p:extLst>
+  </p:cSld>
+  <p:clrMapOvr>
+    <a:masterClrMapping/>
+  </p:clrMapOvr>
+</p:notes>
+</file>
+
 <file path=ppt/notesSlides/notesSlide2.xml><?xml version="1.0" encoding="utf-8"?>
 <p:notes xmlns:a="http://schemas.openxmlformats.org/drawingml/2006/main" xmlns:r="http://schemas.openxmlformats.org/officeDocument/2006/relationships" xmlns:p="http://schemas.openxmlformats.org/presentationml/2006/main">
   <p:cSld>
@@ -1427,7 +1537,7 @@
         <p:cNvPr id="1" name="">
           <a:extLst>
             <a:ext uri="{FF2B5EF4-FFF2-40B4-BE49-F238E27FC236}">
-              <a16:creationId xmlns:a16="http://schemas.microsoft.com/office/drawing/2014/main" id="{97800921-2A98-58A1-77F4-D8659C0BA353}"/>
+              <a16:creationId xmlns:a16="http://schemas.microsoft.com/office/drawing/2014/main" id="{98661178-D3A3-BD01-999B-5CD0CBDA675B}"/>
             </a:ext>
           </a:extLst>
         </p:cNvPr>
@@ -1447,7 +1557,7 @@
           <p:cNvPr id="2" name="슬라이드 이미지 개체 틀 1">
             <a:extLst>
               <a:ext uri="{FF2B5EF4-FFF2-40B4-BE49-F238E27FC236}">
-                <a16:creationId xmlns:a16="http://schemas.microsoft.com/office/drawing/2014/main" id="{748269F1-DD08-6BF5-8344-47DF8E22EB29}"/>
+                <a16:creationId xmlns:a16="http://schemas.microsoft.com/office/drawing/2014/main" id="{894B66A9-55C3-DC1E-3535-AD5D96B3015C}"/>
               </a:ext>
             </a:extLst>
           </p:cNvPr>
@@ -1465,7 +1575,7 @@
           <p:cNvPr id="3" name="슬라이드 노트 개체 틀 2">
             <a:extLst>
               <a:ext uri="{FF2B5EF4-FFF2-40B4-BE49-F238E27FC236}">
-                <a16:creationId xmlns:a16="http://schemas.microsoft.com/office/drawing/2014/main" id="{3496A4B6-DC7D-FF48-46FC-7358B9C8159D}"/>
+                <a16:creationId xmlns:a16="http://schemas.microsoft.com/office/drawing/2014/main" id="{497FFF2B-2B71-B514-D49C-EF7B099DE9BF}"/>
               </a:ext>
             </a:extLst>
           </p:cNvPr>
@@ -1490,7 +1600,7 @@
           <p:cNvPr id="4" name="슬라이드 번호 개체 틀 3">
             <a:extLst>
               <a:ext uri="{FF2B5EF4-FFF2-40B4-BE49-F238E27FC236}">
-                <a16:creationId xmlns:a16="http://schemas.microsoft.com/office/drawing/2014/main" id="{8F61E27B-EE8E-0361-5AEB-07842FCFA0C5}"/>
+                <a16:creationId xmlns:a16="http://schemas.microsoft.com/office/drawing/2014/main" id="{108E91CB-DE8C-2792-9462-33EFA4D63E67}"/>
               </a:ext>
             </a:extLst>
           </p:cNvPr>
@@ -1518,7 +1628,7 @@
     </p:spTree>
     <p:extLst>
       <p:ext uri="{BB962C8B-B14F-4D97-AF65-F5344CB8AC3E}">
-        <p14:creationId xmlns:p14="http://schemas.microsoft.com/office/powerpoint/2010/main" val="2303346903"/>
+        <p14:creationId xmlns:p14="http://schemas.microsoft.com/office/powerpoint/2010/main" val="3953977907"/>
       </p:ext>
     </p:extLst>
   </p:cSld>
@@ -1536,7 +1646,7 @@
         <p:cNvPr id="1" name="">
           <a:extLst>
             <a:ext uri="{FF2B5EF4-FFF2-40B4-BE49-F238E27FC236}">
-              <a16:creationId xmlns:a16="http://schemas.microsoft.com/office/drawing/2014/main" id="{3932FD5E-B683-05F5-2A8F-95FE369808B2}"/>
+              <a16:creationId xmlns:a16="http://schemas.microsoft.com/office/drawing/2014/main" id="{97800921-2A98-58A1-77F4-D8659C0BA353}"/>
             </a:ext>
           </a:extLst>
         </p:cNvPr>
@@ -1556,7 +1666,7 @@
           <p:cNvPr id="2" name="슬라이드 이미지 개체 틀 1">
             <a:extLst>
               <a:ext uri="{FF2B5EF4-FFF2-40B4-BE49-F238E27FC236}">
-                <a16:creationId xmlns:a16="http://schemas.microsoft.com/office/drawing/2014/main" id="{1F914573-C36D-346C-F5A7-A95CE5ED020F}"/>
+                <a16:creationId xmlns:a16="http://schemas.microsoft.com/office/drawing/2014/main" id="{748269F1-DD08-6BF5-8344-47DF8E22EB29}"/>
               </a:ext>
             </a:extLst>
           </p:cNvPr>
@@ -1574,7 +1684,7 @@
           <p:cNvPr id="3" name="슬라이드 노트 개체 틀 2">
             <a:extLst>
               <a:ext uri="{FF2B5EF4-FFF2-40B4-BE49-F238E27FC236}">
-                <a16:creationId xmlns:a16="http://schemas.microsoft.com/office/drawing/2014/main" id="{75B6A3A6-E1B1-4542-BD9E-843AF4A37863}"/>
+                <a16:creationId xmlns:a16="http://schemas.microsoft.com/office/drawing/2014/main" id="{3496A4B6-DC7D-FF48-46FC-7358B9C8159D}"/>
               </a:ext>
             </a:extLst>
           </p:cNvPr>
@@ -1599,7 +1709,7 @@
           <p:cNvPr id="4" name="슬라이드 번호 개체 틀 3">
             <a:extLst>
               <a:ext uri="{FF2B5EF4-FFF2-40B4-BE49-F238E27FC236}">
-                <a16:creationId xmlns:a16="http://schemas.microsoft.com/office/drawing/2014/main" id="{E63E6ECA-8F6F-B8DE-C544-C72743D3729C}"/>
+                <a16:creationId xmlns:a16="http://schemas.microsoft.com/office/drawing/2014/main" id="{8F61E27B-EE8E-0361-5AEB-07842FCFA0C5}"/>
               </a:ext>
             </a:extLst>
           </p:cNvPr>
@@ -1627,7 +1737,7 @@
     </p:spTree>
     <p:extLst>
       <p:ext uri="{BB962C8B-B14F-4D97-AF65-F5344CB8AC3E}">
-        <p14:creationId xmlns:p14="http://schemas.microsoft.com/office/powerpoint/2010/main" val="215676295"/>
+        <p14:creationId xmlns:p14="http://schemas.microsoft.com/office/powerpoint/2010/main" val="2303346903"/>
       </p:ext>
     </p:extLst>
   </p:cSld>
@@ -5299,2198 +5409,7 @@
 </p:sld>
 </file>
 
-<file path=ppt/slides/slide2.xml><?xml version="1.0" encoding="utf-8"?>
-<p:sld xmlns:a="http://schemas.openxmlformats.org/drawingml/2006/main" xmlns:r="http://schemas.openxmlformats.org/officeDocument/2006/relationships" xmlns:p="http://schemas.openxmlformats.org/presentationml/2006/main">
-  <p:cSld>
-    <p:spTree>
-      <p:nvGrpSpPr>
-        <p:cNvPr id="1" name=""/>
-        <p:cNvGrpSpPr/>
-        <p:nvPr/>
-      </p:nvGrpSpPr>
-      <p:grpSpPr>
-        <a:xfrm>
-          <a:off x="0" y="0"/>
-          <a:ext cx="0" cy="0"/>
-          <a:chOff x="0" y="0"/>
-          <a:chExt cx="0" cy="0"/>
-        </a:xfrm>
-      </p:grpSpPr>
-      <p:sp>
-        <p:nvSpPr>
-          <p:cNvPr id="8" name="슬라이드 번호 개체 틀 7"/>
-          <p:cNvSpPr>
-            <a:spLocks noGrp="1"/>
-          </p:cNvSpPr>
-          <p:nvPr>
-            <p:ph type="sldNum" sz="quarter" idx="12"/>
-          </p:nvPr>
-        </p:nvSpPr>
-        <p:spPr/>
-        <p:txBody>
-          <a:bodyPr/>
-          <a:lstStyle/>
-          <a:p>
-            <a:pPr rtl="0"/>
-            <a:fld id="{A3F31473-23EB-4724-8B59-FE6D21D89FA4}" type="slidenum">
-              <a:rPr lang="en-US" altLang="ko-KR" noProof="0" smtClean="0"/>
-              <a:t>2</a:t>
-            </a:fld>
-            <a:endParaRPr lang="en-US" altLang="ko-KR" noProof="0" dirty="0"/>
-          </a:p>
-        </p:txBody>
-      </p:sp>
-      <p:sp>
-        <p:nvSpPr>
-          <p:cNvPr id="2" name="직사각형 1"/>
-          <p:cNvSpPr/>
-          <p:nvPr/>
-        </p:nvSpPr>
-        <p:spPr>
-          <a:xfrm>
-            <a:off x="765820" y="764704"/>
-            <a:ext cx="3675622" cy="523220"/>
-          </a:xfrm>
-          <a:prstGeom prst="rect">
-            <a:avLst/>
-          </a:prstGeom>
-        </p:spPr>
-        <p:txBody>
-          <a:bodyPr wrap="none">
-            <a:spAutoFit/>
-          </a:bodyPr>
-          <a:lstStyle/>
-          <a:p>
-            <a:r>
-              <a:rPr lang="en-US" altLang="ko-KR" sz="2800" b="1" dirty="0">
-                <a:solidFill>
-                  <a:srgbClr val="313131"/>
-                </a:solidFill>
-                <a:latin typeface="PT Sans"/>
-              </a:rPr>
-              <a:t>Montecarlo Simulation</a:t>
-            </a:r>
-            <a:endParaRPr lang="ko-KR" altLang="en-US" sz="2800" b="1" dirty="0"/>
-          </a:p>
-        </p:txBody>
-      </p:sp>
-      <p:sp>
-        <p:nvSpPr>
-          <p:cNvPr id="4" name="TextBox 3">
-            <a:extLst>
-              <a:ext uri="{FF2B5EF4-FFF2-40B4-BE49-F238E27FC236}">
-                <a16:creationId xmlns:a16="http://schemas.microsoft.com/office/drawing/2014/main" id="{13810ABA-12DE-BC96-E33E-8F12E2CBC316}"/>
-              </a:ext>
-            </a:extLst>
-          </p:cNvPr>
-          <p:cNvSpPr txBox="1"/>
-          <p:nvPr/>
-        </p:nvSpPr>
-        <p:spPr>
-          <a:xfrm>
-            <a:off x="1125860" y="1484783"/>
-            <a:ext cx="10873208" cy="4664162"/>
-          </a:xfrm>
-          <a:prstGeom prst="rect">
-            <a:avLst/>
-          </a:prstGeom>
-          <a:noFill/>
-        </p:spPr>
-        <p:txBody>
-          <a:bodyPr wrap="square">
-            <a:spAutoFit/>
-          </a:bodyPr>
-          <a:lstStyle/>
-          <a:p>
-            <a:pPr marL="285750" indent="-285750">
-              <a:lnSpc>
-                <a:spcPct val="150000"/>
-              </a:lnSpc>
-              <a:buFont typeface="Wingdings" panose="05000000000000000000" pitchFamily="2" charset="2"/>
-              <a:buChar char="v"/>
-            </a:pPr>
-            <a:r>
-              <a:rPr lang="ko-KR" altLang="en-US" sz="2000" dirty="0">
-                <a:latin typeface="휴먼모음T" panose="02030504000101010101" pitchFamily="18" charset="-127"/>
-                <a:ea typeface="휴먼모음T" panose="02030504000101010101" pitchFamily="18" charset="-127"/>
-              </a:rPr>
-              <a:t>불확실한 결과를 예측하기 위해 반복적인 무작위 추출을 사용하는 통계적 기법</a:t>
-            </a:r>
-            <a:endParaRPr lang="en-US" altLang="ko-KR" sz="2000" dirty="0">
-              <a:latin typeface="휴먼모음T" panose="02030504000101010101" pitchFamily="18" charset="-127"/>
-              <a:ea typeface="휴먼모음T" panose="02030504000101010101" pitchFamily="18" charset="-127"/>
-            </a:endParaRPr>
-          </a:p>
-          <a:p>
-            <a:pPr marL="285750" indent="-285750">
-              <a:lnSpc>
-                <a:spcPct val="150000"/>
-              </a:lnSpc>
-              <a:buFont typeface="Wingdings" panose="05000000000000000000" pitchFamily="2" charset="2"/>
-              <a:buChar char="v"/>
-            </a:pPr>
-            <a:r>
-              <a:rPr lang="ko-KR" altLang="en-US" sz="2000" dirty="0">
-                <a:latin typeface="휴먼모음T" panose="02030504000101010101" pitchFamily="18" charset="-127"/>
-                <a:ea typeface="휴먼모음T" panose="02030504000101010101" pitchFamily="18" charset="-127"/>
-              </a:rPr>
-              <a:t>이름은 도박으로 유명한 모나코의 </a:t>
-            </a:r>
-            <a:r>
-              <a:rPr lang="en-US" altLang="ko-KR" sz="2000" dirty="0">
-                <a:latin typeface="휴먼모음T" panose="02030504000101010101" pitchFamily="18" charset="-127"/>
-                <a:ea typeface="휴먼모음T" panose="02030504000101010101" pitchFamily="18" charset="-127"/>
-              </a:rPr>
-              <a:t>'</a:t>
-            </a:r>
-            <a:r>
-              <a:rPr lang="ko-KR" altLang="en-US" sz="2000" dirty="0">
-                <a:latin typeface="휴먼모음T" panose="02030504000101010101" pitchFamily="18" charset="-127"/>
-                <a:ea typeface="휴먼모음T" panose="02030504000101010101" pitchFamily="18" charset="-127"/>
-              </a:rPr>
-              <a:t>몬테카를로</a:t>
-            </a:r>
-            <a:r>
-              <a:rPr lang="en-US" altLang="ko-KR" sz="2000" dirty="0">
-                <a:latin typeface="휴먼모음T" panose="02030504000101010101" pitchFamily="18" charset="-127"/>
-                <a:ea typeface="휴먼모음T" panose="02030504000101010101" pitchFamily="18" charset="-127"/>
-              </a:rPr>
-              <a:t>' </a:t>
-            </a:r>
-            <a:r>
-              <a:rPr lang="ko-KR" altLang="en-US" sz="2000" dirty="0">
-                <a:latin typeface="휴먼모음T" panose="02030504000101010101" pitchFamily="18" charset="-127"/>
-                <a:ea typeface="휴먼모음T" panose="02030504000101010101" pitchFamily="18" charset="-127"/>
-              </a:rPr>
-              <a:t>카지노에서</a:t>
-            </a:r>
-            <a:r>
-              <a:rPr lang="en-US" altLang="ko-KR" sz="2000" dirty="0">
-                <a:latin typeface="휴먼모음T" panose="02030504000101010101" pitchFamily="18" charset="-127"/>
-                <a:ea typeface="휴먼모음T" panose="02030504000101010101" pitchFamily="18" charset="-127"/>
-              </a:rPr>
-              <a:t>, </a:t>
-            </a:r>
-            <a:r>
-              <a:rPr lang="ko-KR" altLang="en-US" sz="2000" dirty="0">
-                <a:latin typeface="휴먼모음T" panose="02030504000101010101" pitchFamily="18" charset="-127"/>
-                <a:ea typeface="휴먼모음T" panose="02030504000101010101" pitchFamily="18" charset="-127"/>
-              </a:rPr>
-              <a:t>결과가 확률에 의존하는 도박처럼</a:t>
-            </a:r>
-            <a:r>
-              <a:rPr lang="en-US" altLang="ko-KR" sz="2000" dirty="0">
-                <a:latin typeface="휴먼모음T" panose="02030504000101010101" pitchFamily="18" charset="-127"/>
-                <a:ea typeface="휴먼모음T" panose="02030504000101010101" pitchFamily="18" charset="-127"/>
-              </a:rPr>
-              <a:t>, </a:t>
-            </a:r>
-            <a:r>
-              <a:rPr lang="ko-KR" altLang="en-US" sz="2000" dirty="0">
-                <a:latin typeface="휴먼모음T" panose="02030504000101010101" pitchFamily="18" charset="-127"/>
-                <a:ea typeface="휴먼모음T" panose="02030504000101010101" pitchFamily="18" charset="-127"/>
-              </a:rPr>
-              <a:t>수학적으로 계산하기 너무 복잡한 문제들을 수만 번의 가상 실험을 통해 그 근삿값을 찾아내는 방식</a:t>
-            </a:r>
-            <a:endParaRPr lang="en-US" altLang="ko-KR" sz="2000" dirty="0">
-              <a:latin typeface="휴먼모음T" panose="02030504000101010101" pitchFamily="18" charset="-127"/>
-              <a:ea typeface="휴먼모음T" panose="02030504000101010101" pitchFamily="18" charset="-127"/>
-            </a:endParaRPr>
-          </a:p>
-          <a:p>
-            <a:pPr marL="285750" indent="-285750">
-              <a:lnSpc>
-                <a:spcPct val="150000"/>
-              </a:lnSpc>
-              <a:buFont typeface="Wingdings" panose="05000000000000000000" pitchFamily="2" charset="2"/>
-              <a:buChar char="v"/>
-            </a:pPr>
-            <a:endParaRPr lang="en-US" altLang="ko-KR" sz="2000" dirty="0">
-              <a:latin typeface="휴먼모음T" panose="02030504000101010101" pitchFamily="18" charset="-127"/>
-              <a:ea typeface="휴먼모음T" panose="02030504000101010101" pitchFamily="18" charset="-127"/>
-            </a:endParaRPr>
-          </a:p>
-          <a:p>
-            <a:pPr marL="285750" indent="-285750">
-              <a:lnSpc>
-                <a:spcPct val="150000"/>
-              </a:lnSpc>
-              <a:buFont typeface="Wingdings" panose="05000000000000000000" pitchFamily="2" charset="2"/>
-              <a:buChar char="v"/>
-            </a:pPr>
-            <a:r>
-              <a:rPr lang="ko-KR" altLang="en-US" sz="2000" b="1" dirty="0" err="1">
-                <a:latin typeface="휴먼모음T" panose="02030504000101010101" pitchFamily="18" charset="-127"/>
-                <a:ea typeface="휴먼모음T" panose="02030504000101010101" pitchFamily="18" charset="-127"/>
-              </a:rPr>
-              <a:t>몬테카를로의</a:t>
-            </a:r>
-            <a:r>
-              <a:rPr lang="ko-KR" altLang="en-US" sz="2000" b="1" dirty="0">
-                <a:latin typeface="휴먼모음T" panose="02030504000101010101" pitchFamily="18" charset="-127"/>
-                <a:ea typeface="휴먼모음T" panose="02030504000101010101" pitchFamily="18" charset="-127"/>
-              </a:rPr>
-              <a:t> 작동 원리</a:t>
-            </a:r>
-          </a:p>
-          <a:p>
-            <a:pPr marL="742950" lvl="1" indent="-285750">
-              <a:lnSpc>
-                <a:spcPct val="150000"/>
-              </a:lnSpc>
-              <a:buFont typeface="Wingdings" panose="05000000000000000000" pitchFamily="2" charset="2"/>
-              <a:buChar char="v"/>
-            </a:pPr>
-            <a:r>
-              <a:rPr lang="ko-KR" altLang="en-US" sz="2000" b="1" dirty="0">
-                <a:latin typeface="휴먼모음T" panose="02030504000101010101" pitchFamily="18" charset="-127"/>
-                <a:ea typeface="휴먼모음T" panose="02030504000101010101" pitchFamily="18" charset="-127"/>
-              </a:rPr>
-              <a:t>변수 정의</a:t>
-            </a:r>
-            <a:r>
-              <a:rPr lang="en-US" altLang="ko-KR" sz="2000" b="1" dirty="0">
-                <a:latin typeface="휴먼모음T" panose="02030504000101010101" pitchFamily="18" charset="-127"/>
-                <a:ea typeface="휴먼모음T" panose="02030504000101010101" pitchFamily="18" charset="-127"/>
-              </a:rPr>
-              <a:t>:</a:t>
-            </a:r>
-            <a:r>
-              <a:rPr lang="ko-KR" altLang="en-US" sz="2000" dirty="0">
-                <a:latin typeface="휴먼모음T" panose="02030504000101010101" pitchFamily="18" charset="-127"/>
-                <a:ea typeface="휴먼모음T" panose="02030504000101010101" pitchFamily="18" charset="-127"/>
-              </a:rPr>
-              <a:t> 결과에 영향을 주는 불확실한 요소들을 정의</a:t>
-            </a:r>
-            <a:endParaRPr lang="en-US" altLang="ko-KR" sz="2000" dirty="0">
-              <a:latin typeface="휴먼모음T" panose="02030504000101010101" pitchFamily="18" charset="-127"/>
-              <a:ea typeface="휴먼모음T" panose="02030504000101010101" pitchFamily="18" charset="-127"/>
-            </a:endParaRPr>
-          </a:p>
-          <a:p>
-            <a:pPr marL="742950" lvl="1" indent="-285750">
-              <a:lnSpc>
-                <a:spcPct val="150000"/>
-              </a:lnSpc>
-              <a:buFont typeface="Wingdings" panose="05000000000000000000" pitchFamily="2" charset="2"/>
-              <a:buChar char="v"/>
-            </a:pPr>
-            <a:r>
-              <a:rPr lang="ko-KR" altLang="en-US" sz="2000" b="1" dirty="0">
-                <a:latin typeface="휴먼모음T" panose="02030504000101010101" pitchFamily="18" charset="-127"/>
-                <a:ea typeface="휴먼모음T" panose="02030504000101010101" pitchFamily="18" charset="-127"/>
-              </a:rPr>
-              <a:t>확률 분포 할당</a:t>
-            </a:r>
-            <a:r>
-              <a:rPr lang="en-US" altLang="ko-KR" sz="2000" b="1" dirty="0">
-                <a:latin typeface="휴먼모음T" panose="02030504000101010101" pitchFamily="18" charset="-127"/>
-                <a:ea typeface="휴먼모음T" panose="02030504000101010101" pitchFamily="18" charset="-127"/>
-              </a:rPr>
-              <a:t>:</a:t>
-            </a:r>
-            <a:r>
-              <a:rPr lang="ko-KR" altLang="en-US" sz="2000" dirty="0">
-                <a:latin typeface="휴먼모음T" panose="02030504000101010101" pitchFamily="18" charset="-127"/>
-                <a:ea typeface="휴먼모음T" panose="02030504000101010101" pitchFamily="18" charset="-127"/>
-              </a:rPr>
-              <a:t> 각 변수가 가질 수 있는 값의 범위와 확률</a:t>
-            </a:r>
-            <a:r>
-              <a:rPr lang="en-US" altLang="ko-KR" sz="2000" dirty="0">
-                <a:latin typeface="휴먼모음T" panose="02030504000101010101" pitchFamily="18" charset="-127"/>
-                <a:ea typeface="휴먼모음T" panose="02030504000101010101" pitchFamily="18" charset="-127"/>
-              </a:rPr>
-              <a:t>(</a:t>
-            </a:r>
-            <a:r>
-              <a:rPr lang="ko-KR" altLang="en-US" sz="2000" dirty="0">
-                <a:latin typeface="휴먼모음T" panose="02030504000101010101" pitchFamily="18" charset="-127"/>
-                <a:ea typeface="휴먼모음T" panose="02030504000101010101" pitchFamily="18" charset="-127"/>
-              </a:rPr>
-              <a:t>정규분포 등</a:t>
-            </a:r>
-            <a:r>
-              <a:rPr lang="en-US" altLang="ko-KR" sz="2000" dirty="0">
-                <a:latin typeface="휴먼모음T" panose="02030504000101010101" pitchFamily="18" charset="-127"/>
-                <a:ea typeface="휴먼모음T" panose="02030504000101010101" pitchFamily="18" charset="-127"/>
-              </a:rPr>
-              <a:t>)</a:t>
-            </a:r>
-            <a:r>
-              <a:rPr lang="ko-KR" altLang="en-US" sz="2000" dirty="0">
-                <a:latin typeface="휴먼모음T" panose="02030504000101010101" pitchFamily="18" charset="-127"/>
-                <a:ea typeface="휴먼모음T" panose="02030504000101010101" pitchFamily="18" charset="-127"/>
-              </a:rPr>
-              <a:t>을 설정</a:t>
-            </a:r>
-            <a:endParaRPr lang="en-US" altLang="ko-KR" sz="2000" dirty="0">
-              <a:latin typeface="휴먼모음T" panose="02030504000101010101" pitchFamily="18" charset="-127"/>
-              <a:ea typeface="휴먼모음T" panose="02030504000101010101" pitchFamily="18" charset="-127"/>
-            </a:endParaRPr>
-          </a:p>
-          <a:p>
-            <a:pPr marL="742950" lvl="1" indent="-285750">
-              <a:lnSpc>
-                <a:spcPct val="150000"/>
-              </a:lnSpc>
-              <a:buFont typeface="Wingdings" panose="05000000000000000000" pitchFamily="2" charset="2"/>
-              <a:buChar char="v"/>
-            </a:pPr>
-            <a:r>
-              <a:rPr lang="ko-KR" altLang="en-US" sz="2000" b="1" dirty="0">
-                <a:latin typeface="휴먼모음T" panose="02030504000101010101" pitchFamily="18" charset="-127"/>
-                <a:ea typeface="휴먼모음T" panose="02030504000101010101" pitchFamily="18" charset="-127"/>
-              </a:rPr>
-              <a:t>반복 실험</a:t>
-            </a:r>
-            <a:r>
-              <a:rPr lang="en-US" altLang="ko-KR" sz="2000" b="1" dirty="0">
-                <a:latin typeface="휴먼모음T" panose="02030504000101010101" pitchFamily="18" charset="-127"/>
-                <a:ea typeface="휴먼모음T" panose="02030504000101010101" pitchFamily="18" charset="-127"/>
-              </a:rPr>
-              <a:t>:</a:t>
-            </a:r>
-            <a:r>
-              <a:rPr lang="ko-KR" altLang="en-US" sz="2000" dirty="0">
-                <a:latin typeface="휴먼모음T" panose="02030504000101010101" pitchFamily="18" charset="-127"/>
-                <a:ea typeface="휴먼모음T" panose="02030504000101010101" pitchFamily="18" charset="-127"/>
-              </a:rPr>
-              <a:t> 컴퓨터를 이용해 무작위 값을 입력하며 수천</a:t>
-            </a:r>
-            <a:r>
-              <a:rPr lang="en-US" altLang="ko-KR" sz="2000" dirty="0">
-                <a:latin typeface="휴먼모음T" panose="02030504000101010101" pitchFamily="18" charset="-127"/>
-                <a:ea typeface="휴먼모음T" panose="02030504000101010101" pitchFamily="18" charset="-127"/>
-              </a:rPr>
-              <a:t>, </a:t>
-            </a:r>
-            <a:r>
-              <a:rPr lang="ko-KR" altLang="en-US" sz="2000" dirty="0">
-                <a:latin typeface="휴먼모음T" panose="02030504000101010101" pitchFamily="18" charset="-127"/>
-                <a:ea typeface="휴먼모음T" panose="02030504000101010101" pitchFamily="18" charset="-127"/>
-              </a:rPr>
-              <a:t>수만 번의 시뮬레이션을 실행</a:t>
-            </a:r>
-            <a:endParaRPr lang="en-US" altLang="ko-KR" sz="2000" dirty="0">
-              <a:latin typeface="휴먼모음T" panose="02030504000101010101" pitchFamily="18" charset="-127"/>
-              <a:ea typeface="휴먼모음T" panose="02030504000101010101" pitchFamily="18" charset="-127"/>
-            </a:endParaRPr>
-          </a:p>
-          <a:p>
-            <a:pPr marL="742950" lvl="1" indent="-285750">
-              <a:lnSpc>
-                <a:spcPct val="150000"/>
-              </a:lnSpc>
-              <a:buFont typeface="Wingdings" panose="05000000000000000000" pitchFamily="2" charset="2"/>
-              <a:buChar char="v"/>
-            </a:pPr>
-            <a:r>
-              <a:rPr lang="ko-KR" altLang="en-US" sz="2000" b="1" dirty="0">
-                <a:latin typeface="휴먼모음T" panose="02030504000101010101" pitchFamily="18" charset="-127"/>
-                <a:ea typeface="휴먼모음T" panose="02030504000101010101" pitchFamily="18" charset="-127"/>
-              </a:rPr>
-              <a:t>결과 분석</a:t>
-            </a:r>
-            <a:r>
-              <a:rPr lang="en-US" altLang="ko-KR" sz="2000" b="1" dirty="0">
-                <a:latin typeface="휴먼모음T" panose="02030504000101010101" pitchFamily="18" charset="-127"/>
-                <a:ea typeface="휴먼모음T" panose="02030504000101010101" pitchFamily="18" charset="-127"/>
-              </a:rPr>
-              <a:t>:</a:t>
-            </a:r>
-            <a:r>
-              <a:rPr lang="ko-KR" altLang="en-US" sz="2000" dirty="0">
-                <a:latin typeface="휴먼모음T" panose="02030504000101010101" pitchFamily="18" charset="-127"/>
-                <a:ea typeface="휴먼모음T" panose="02030504000101010101" pitchFamily="18" charset="-127"/>
-              </a:rPr>
-              <a:t> 도출된 수많은 결과값의 평균이나 분포를 통해 최종 결과를 예측</a:t>
-            </a:r>
-            <a:endParaRPr lang="en-US" altLang="ko-KR" sz="2000" dirty="0">
-              <a:latin typeface="휴먼모음T" panose="02030504000101010101" pitchFamily="18" charset="-127"/>
-              <a:ea typeface="휴먼모음T" panose="02030504000101010101" pitchFamily="18" charset="-127"/>
-            </a:endParaRPr>
-          </a:p>
-          <a:p>
-            <a:pPr marL="285750" indent="-285750">
-              <a:lnSpc>
-                <a:spcPct val="150000"/>
-              </a:lnSpc>
-              <a:buFont typeface="Wingdings" panose="05000000000000000000" pitchFamily="2" charset="2"/>
-              <a:buChar char="v"/>
-            </a:pPr>
-            <a:endParaRPr lang="ko-KR" altLang="en-US" sz="2000" dirty="0">
-              <a:latin typeface="휴먼모음T" panose="02030504000101010101" pitchFamily="18" charset="-127"/>
-              <a:ea typeface="휴먼모음T" panose="02030504000101010101" pitchFamily="18" charset="-127"/>
-            </a:endParaRPr>
-          </a:p>
-        </p:txBody>
-      </p:sp>
-    </p:spTree>
-    <p:extLst>
-      <p:ext uri="{BB962C8B-B14F-4D97-AF65-F5344CB8AC3E}">
-        <p14:creationId xmlns:p14="http://schemas.microsoft.com/office/powerpoint/2010/main" val="1126723429"/>
-      </p:ext>
-    </p:extLst>
-  </p:cSld>
-  <p:clrMapOvr>
-    <a:masterClrMapping/>
-  </p:clrMapOvr>
-  <mc:AlternateContent xmlns:mc="http://schemas.openxmlformats.org/markup-compatibility/2006" xmlns:p14="http://schemas.microsoft.com/office/powerpoint/2010/main">
-    <mc:Choice Requires="p14">
-      <p:transition spd="med" p14:dur="700">
-        <p:fade/>
-      </p:transition>
-    </mc:Choice>
-    <mc:Fallback xmlns="">
-      <p:transition spd="med">
-        <p:fade/>
-      </p:transition>
-    </mc:Fallback>
-  </mc:AlternateContent>
-</p:sld>
-</file>
-
-<file path=ppt/slides/slide3.xml><?xml version="1.0" encoding="utf-8"?>
-<p:sld xmlns:a="http://schemas.openxmlformats.org/drawingml/2006/main" xmlns:r="http://schemas.openxmlformats.org/officeDocument/2006/relationships" xmlns:p="http://schemas.openxmlformats.org/presentationml/2006/main">
-  <p:cSld>
-    <p:spTree>
-      <p:nvGrpSpPr>
-        <p:cNvPr id="1" name="">
-          <a:extLst>
-            <a:ext uri="{FF2B5EF4-FFF2-40B4-BE49-F238E27FC236}">
-              <a16:creationId xmlns:a16="http://schemas.microsoft.com/office/drawing/2014/main" id="{4F32D5AF-0F51-91DE-64BD-5E17CEF9AA79}"/>
-            </a:ext>
-          </a:extLst>
-        </p:cNvPr>
-        <p:cNvGrpSpPr/>
-        <p:nvPr/>
-      </p:nvGrpSpPr>
-      <p:grpSpPr>
-        <a:xfrm>
-          <a:off x="0" y="0"/>
-          <a:ext cx="0" cy="0"/>
-          <a:chOff x="0" y="0"/>
-          <a:chExt cx="0" cy="0"/>
-        </a:xfrm>
-      </p:grpSpPr>
-      <p:sp>
-        <p:nvSpPr>
-          <p:cNvPr id="2" name="슬라이드 번호 개체 틀 1">
-            <a:extLst>
-              <a:ext uri="{FF2B5EF4-FFF2-40B4-BE49-F238E27FC236}">
-                <a16:creationId xmlns:a16="http://schemas.microsoft.com/office/drawing/2014/main" id="{D1B51CDD-C849-F07D-D7BE-8E0C6C436C59}"/>
-              </a:ext>
-            </a:extLst>
-          </p:cNvPr>
-          <p:cNvSpPr>
-            <a:spLocks noGrp="1"/>
-          </p:cNvSpPr>
-          <p:nvPr>
-            <p:ph type="sldNum" sz="quarter" idx="12"/>
-          </p:nvPr>
-        </p:nvSpPr>
-        <p:spPr/>
-        <p:txBody>
-          <a:bodyPr/>
-          <a:lstStyle/>
-          <a:p>
-            <a:pPr rtl="0"/>
-            <a:fld id="{A3F31473-23EB-4724-8B59-FE6D21D89FA4}" type="slidenum">
-              <a:rPr lang="en-US" altLang="ko-KR" noProof="0" smtClean="0"/>
-              <a:t>3</a:t>
-            </a:fld>
-            <a:endParaRPr lang="en-US" altLang="ko-KR" noProof="0" dirty="0"/>
-          </a:p>
-        </p:txBody>
-      </p:sp>
-      <p:sp>
-        <p:nvSpPr>
-          <p:cNvPr id="4" name="TextBox 3">
-            <a:extLst>
-              <a:ext uri="{FF2B5EF4-FFF2-40B4-BE49-F238E27FC236}">
-                <a16:creationId xmlns:a16="http://schemas.microsoft.com/office/drawing/2014/main" id="{E724D8FB-4BA4-B532-2690-FF91AAEE20BE}"/>
-              </a:ext>
-            </a:extLst>
-          </p:cNvPr>
-          <p:cNvSpPr txBox="1"/>
-          <p:nvPr/>
-        </p:nvSpPr>
-        <p:spPr>
-          <a:xfrm>
-            <a:off x="765820" y="1196752"/>
-            <a:ext cx="11233248" cy="970843"/>
-          </a:xfrm>
-          <a:prstGeom prst="rect">
-            <a:avLst/>
-          </a:prstGeom>
-          <a:solidFill>
-            <a:schemeClr val="tx1">
-              <a:lumMod val="20000"/>
-              <a:lumOff val="80000"/>
-            </a:schemeClr>
-          </a:solidFill>
-        </p:spPr>
-        <p:txBody>
-          <a:bodyPr wrap="square" rtlCol="0">
-            <a:spAutoFit/>
-          </a:bodyPr>
-          <a:lstStyle/>
-          <a:p>
-            <a:pPr marL="285750" indent="-285750">
-              <a:lnSpc>
-                <a:spcPct val="150000"/>
-              </a:lnSpc>
-              <a:buFont typeface="Wingdings" panose="05000000000000000000" pitchFamily="2" charset="2"/>
-              <a:buChar char="v"/>
-            </a:pPr>
-            <a:r>
-              <a:rPr lang="ko-KR" altLang="en-US" sz="2000" dirty="0">
-                <a:latin typeface="휴먼모음T" panose="02030504000101010101" pitchFamily="18" charset="-127"/>
-                <a:ea typeface="휴먼모음T" panose="02030504000101010101" pitchFamily="18" charset="-127"/>
-              </a:rPr>
-              <a:t>원주율 구하기</a:t>
-            </a:r>
-            <a:endParaRPr lang="en-US" altLang="ko-KR" sz="2000" dirty="0">
-              <a:latin typeface="휴먼모음T" panose="02030504000101010101" pitchFamily="18" charset="-127"/>
-              <a:ea typeface="휴먼모음T" panose="02030504000101010101" pitchFamily="18" charset="-127"/>
-            </a:endParaRPr>
-          </a:p>
-          <a:p>
-            <a:pPr marL="285750" indent="-285750">
-              <a:lnSpc>
-                <a:spcPct val="150000"/>
-              </a:lnSpc>
-              <a:buFont typeface="Wingdings" panose="05000000000000000000" pitchFamily="2" charset="2"/>
-              <a:buChar char="v"/>
-            </a:pPr>
-            <a:r>
-              <a:rPr lang="ko-KR" altLang="en-US" sz="2000" dirty="0">
-                <a:latin typeface="휴먼모음T" panose="02030504000101010101" pitchFamily="18" charset="-127"/>
-                <a:ea typeface="휴먼모음T" panose="02030504000101010101" pitchFamily="18" charset="-127"/>
-              </a:rPr>
-              <a:t>원의 면접 구하기</a:t>
-            </a:r>
-            <a:endParaRPr lang="en-US" altLang="ko-KR" sz="2000" dirty="0">
-              <a:latin typeface="휴먼모음T" panose="02030504000101010101" pitchFamily="18" charset="-127"/>
-              <a:ea typeface="휴먼모음T" panose="02030504000101010101" pitchFamily="18" charset="-127"/>
-            </a:endParaRPr>
-          </a:p>
-        </p:txBody>
-      </p:sp>
-      <p:sp>
-        <p:nvSpPr>
-          <p:cNvPr id="9" name="TextBox 8">
-            <a:extLst>
-              <a:ext uri="{FF2B5EF4-FFF2-40B4-BE49-F238E27FC236}">
-                <a16:creationId xmlns:a16="http://schemas.microsoft.com/office/drawing/2014/main" id="{92CE8694-F9D5-0985-6634-DA4CC7CB87C6}"/>
-              </a:ext>
-            </a:extLst>
-          </p:cNvPr>
-          <p:cNvSpPr txBox="1"/>
-          <p:nvPr/>
-        </p:nvSpPr>
-        <p:spPr>
-          <a:xfrm>
-            <a:off x="117748" y="260648"/>
-            <a:ext cx="2592288" cy="584775"/>
-          </a:xfrm>
-          <a:prstGeom prst="rect">
-            <a:avLst/>
-          </a:prstGeom>
-          <a:noFill/>
-        </p:spPr>
-        <p:txBody>
-          <a:bodyPr wrap="square" rtlCol="0">
-            <a:spAutoFit/>
-          </a:bodyPr>
-          <a:lstStyle/>
-          <a:p>
-            <a:r>
-              <a:rPr lang="ko-KR" altLang="en-US" sz="3200" b="1"/>
-              <a:t>문제 풀이</a:t>
-            </a:r>
-          </a:p>
-        </p:txBody>
-      </p:sp>
-    </p:spTree>
-    <p:extLst>
-      <p:ext uri="{BB962C8B-B14F-4D97-AF65-F5344CB8AC3E}">
-        <p14:creationId xmlns:p14="http://schemas.microsoft.com/office/powerpoint/2010/main" val="2336897357"/>
-      </p:ext>
-    </p:extLst>
-  </p:cSld>
-  <p:clrMapOvr>
-    <a:masterClrMapping/>
-  </p:clrMapOvr>
-  <mc:AlternateContent xmlns:mc="http://schemas.openxmlformats.org/markup-compatibility/2006" xmlns:p14="http://schemas.microsoft.com/office/powerpoint/2010/main">
-    <mc:Choice Requires="p14">
-      <p:transition spd="med" p14:dur="700">
-        <p:fade/>
-      </p:transition>
-    </mc:Choice>
-    <mc:Fallback xmlns="">
-      <p:transition spd="med">
-        <p:fade/>
-      </p:transition>
-    </mc:Fallback>
-  </mc:AlternateContent>
-</p:sld>
-</file>
-
-<file path=ppt/slides/slide4.xml><?xml version="1.0" encoding="utf-8"?>
-<p:sld xmlns:a="http://schemas.openxmlformats.org/drawingml/2006/main" xmlns:r="http://schemas.openxmlformats.org/officeDocument/2006/relationships" xmlns:p="http://schemas.openxmlformats.org/presentationml/2006/main">
-  <p:cSld>
-    <p:spTree>
-      <p:nvGrpSpPr>
-        <p:cNvPr id="1" name="">
-          <a:extLst>
-            <a:ext uri="{FF2B5EF4-FFF2-40B4-BE49-F238E27FC236}">
-              <a16:creationId xmlns:a16="http://schemas.microsoft.com/office/drawing/2014/main" id="{9F3A03C4-9F32-8658-57A1-8179E087BD2F}"/>
-            </a:ext>
-          </a:extLst>
-        </p:cNvPr>
-        <p:cNvGrpSpPr/>
-        <p:nvPr/>
-      </p:nvGrpSpPr>
-      <p:grpSpPr>
-        <a:xfrm>
-          <a:off x="0" y="0"/>
-          <a:ext cx="0" cy="0"/>
-          <a:chOff x="0" y="0"/>
-          <a:chExt cx="0" cy="0"/>
-        </a:xfrm>
-      </p:grpSpPr>
-      <p:sp>
-        <p:nvSpPr>
-          <p:cNvPr id="2" name="슬라이드 번호 개체 틀 1">
-            <a:extLst>
-              <a:ext uri="{FF2B5EF4-FFF2-40B4-BE49-F238E27FC236}">
-                <a16:creationId xmlns:a16="http://schemas.microsoft.com/office/drawing/2014/main" id="{CB10A560-CAC8-7DA2-E171-6514006BFA84}"/>
-              </a:ext>
-            </a:extLst>
-          </p:cNvPr>
-          <p:cNvSpPr>
-            <a:spLocks noGrp="1"/>
-          </p:cNvSpPr>
-          <p:nvPr>
-            <p:ph type="sldNum" sz="quarter" idx="12"/>
-          </p:nvPr>
-        </p:nvSpPr>
-        <p:spPr/>
-        <p:txBody>
-          <a:bodyPr/>
-          <a:lstStyle/>
-          <a:p>
-            <a:pPr rtl="0"/>
-            <a:fld id="{A3F31473-23EB-4724-8B59-FE6D21D89FA4}" type="slidenum">
-              <a:rPr lang="en-US" altLang="ko-KR" noProof="0" smtClean="0"/>
-              <a:t>4</a:t>
-            </a:fld>
-            <a:endParaRPr lang="en-US" altLang="ko-KR" noProof="0" dirty="0"/>
-          </a:p>
-        </p:txBody>
-      </p:sp>
-      <p:sp>
-        <p:nvSpPr>
-          <p:cNvPr id="4" name="TextBox 3">
-            <a:extLst>
-              <a:ext uri="{FF2B5EF4-FFF2-40B4-BE49-F238E27FC236}">
-                <a16:creationId xmlns:a16="http://schemas.microsoft.com/office/drawing/2014/main" id="{4C1CC16D-7C9C-2F71-E9C9-02A41D849637}"/>
-              </a:ext>
-            </a:extLst>
-          </p:cNvPr>
-          <p:cNvSpPr txBox="1"/>
-          <p:nvPr/>
-        </p:nvSpPr>
-        <p:spPr>
-          <a:xfrm>
-            <a:off x="765820" y="1196752"/>
-            <a:ext cx="11233248" cy="970843"/>
-          </a:xfrm>
-          <a:prstGeom prst="rect">
-            <a:avLst/>
-          </a:prstGeom>
-          <a:solidFill>
-            <a:schemeClr val="tx1">
-              <a:lumMod val="20000"/>
-              <a:lumOff val="80000"/>
-            </a:schemeClr>
-          </a:solidFill>
-        </p:spPr>
-        <p:txBody>
-          <a:bodyPr wrap="square" rtlCol="0">
-            <a:spAutoFit/>
-          </a:bodyPr>
-          <a:lstStyle/>
-          <a:p>
-            <a:pPr marL="285750" indent="-285750">
-              <a:lnSpc>
-                <a:spcPct val="150000"/>
-              </a:lnSpc>
-              <a:buFont typeface="Wingdings" panose="05000000000000000000" pitchFamily="2" charset="2"/>
-              <a:buChar char="v"/>
-            </a:pPr>
-            <a:r>
-              <a:rPr lang="ko-KR" altLang="en-US" sz="2000" dirty="0">
-                <a:latin typeface="휴먼모음T" panose="02030504000101010101" pitchFamily="18" charset="-127"/>
-                <a:ea typeface="휴먼모음T" panose="02030504000101010101" pitchFamily="18" charset="-127"/>
-              </a:rPr>
-              <a:t>표본 </a:t>
-            </a:r>
-            <a:r>
-              <a:rPr lang="en-US" altLang="ko-KR" sz="2000" dirty="0">
-                <a:latin typeface="휴먼모음T" panose="02030504000101010101" pitchFamily="18" charset="-127"/>
-                <a:ea typeface="휴먼모음T" panose="02030504000101010101" pitchFamily="18" charset="-127"/>
-              </a:rPr>
-              <a:t>1000</a:t>
-            </a:r>
-            <a:r>
-              <a:rPr lang="ko-KR" altLang="en-US" sz="2000" dirty="0">
-                <a:latin typeface="휴먼모음T" panose="02030504000101010101" pitchFamily="18" charset="-127"/>
-                <a:ea typeface="휴먼모음T" panose="02030504000101010101" pitchFamily="18" charset="-127"/>
-              </a:rPr>
-              <a:t>개에서 </a:t>
-            </a:r>
-            <a:r>
-              <a:rPr lang="ko-KR" altLang="en-US" sz="2000" dirty="0" err="1">
-                <a:latin typeface="휴먼모음T" panose="02030504000101010101" pitchFamily="18" charset="-127"/>
-                <a:ea typeface="휴먼모음T" panose="02030504000101010101" pitchFamily="18" charset="-127"/>
-              </a:rPr>
-              <a:t>재표본추출을</a:t>
-            </a:r>
-            <a:r>
-              <a:rPr lang="ko-KR" altLang="en-US" sz="2000" dirty="0">
-                <a:latin typeface="휴먼모음T" panose="02030504000101010101" pitchFamily="18" charset="-127"/>
-                <a:ea typeface="휴먼모음T" panose="02030504000101010101" pitchFamily="18" charset="-127"/>
-              </a:rPr>
-              <a:t> 복원추출</a:t>
-            </a:r>
-            <a:r>
-              <a:rPr lang="en-US" altLang="ko-KR" sz="2000" dirty="0">
-                <a:latin typeface="휴먼모음T" panose="02030504000101010101" pitchFamily="18" charset="-127"/>
-                <a:ea typeface="휴먼모음T" panose="02030504000101010101" pitchFamily="18" charset="-127"/>
-              </a:rPr>
-              <a:t>(replace=True)</a:t>
-            </a:r>
-            <a:r>
-              <a:rPr lang="ko-KR" altLang="en-US" sz="2000" dirty="0">
-                <a:latin typeface="휴먼모음T" panose="02030504000101010101" pitchFamily="18" charset="-127"/>
-                <a:ea typeface="휴먼모음T" panose="02030504000101010101" pitchFamily="18" charset="-127"/>
-              </a:rPr>
-              <a:t>방식으로</a:t>
-            </a:r>
-            <a:r>
-              <a:rPr lang="en-US" altLang="ko-KR" sz="2000" dirty="0">
-                <a:latin typeface="휴먼모음T" panose="02030504000101010101" pitchFamily="18" charset="-127"/>
-                <a:ea typeface="휴먼모음T" panose="02030504000101010101" pitchFamily="18" charset="-127"/>
-              </a:rPr>
-              <a:t> 100</a:t>
-            </a:r>
-            <a:r>
-              <a:rPr lang="ko-KR" altLang="en-US" sz="2000" dirty="0">
-                <a:latin typeface="휴먼모음T" panose="02030504000101010101" pitchFamily="18" charset="-127"/>
-                <a:ea typeface="휴먼모음T" panose="02030504000101010101" pitchFamily="18" charset="-127"/>
-              </a:rPr>
-              <a:t>개를 무한히 </a:t>
-            </a:r>
-            <a:r>
-              <a:rPr lang="ko-KR" altLang="en-US" sz="2000" dirty="0" err="1">
-                <a:latin typeface="휴먼모음T" panose="02030504000101010101" pitchFamily="18" charset="-127"/>
-                <a:ea typeface="휴먼모음T" panose="02030504000101010101" pitchFamily="18" charset="-127"/>
-              </a:rPr>
-              <a:t>재표본</a:t>
-            </a:r>
-            <a:r>
-              <a:rPr lang="ko-KR" altLang="en-US" sz="2000" dirty="0">
-                <a:latin typeface="휴먼모음T" panose="02030504000101010101" pitchFamily="18" charset="-127"/>
-                <a:ea typeface="휴먼모음T" panose="02030504000101010101" pitchFamily="18" charset="-127"/>
-              </a:rPr>
-              <a:t> 추출하여 평균과 분산에 대해 토론하라 </a:t>
-            </a:r>
-            <a:endParaRPr lang="en-US" altLang="ko-KR" sz="2000" dirty="0">
-              <a:latin typeface="휴먼모음T" panose="02030504000101010101" pitchFamily="18" charset="-127"/>
-              <a:ea typeface="휴먼모음T" panose="02030504000101010101" pitchFamily="18" charset="-127"/>
-            </a:endParaRPr>
-          </a:p>
-        </p:txBody>
-      </p:sp>
-      <p:sp>
-        <p:nvSpPr>
-          <p:cNvPr id="9" name="TextBox 8">
-            <a:extLst>
-              <a:ext uri="{FF2B5EF4-FFF2-40B4-BE49-F238E27FC236}">
-                <a16:creationId xmlns:a16="http://schemas.microsoft.com/office/drawing/2014/main" id="{5419691D-5BF7-99F5-D054-700096553189}"/>
-              </a:ext>
-            </a:extLst>
-          </p:cNvPr>
-          <p:cNvSpPr txBox="1"/>
-          <p:nvPr/>
-        </p:nvSpPr>
-        <p:spPr>
-          <a:xfrm>
-            <a:off x="117748" y="260648"/>
-            <a:ext cx="2592288" cy="584775"/>
-          </a:xfrm>
-          <a:prstGeom prst="rect">
-            <a:avLst/>
-          </a:prstGeom>
-          <a:noFill/>
-        </p:spPr>
-        <p:txBody>
-          <a:bodyPr wrap="square" rtlCol="0">
-            <a:spAutoFit/>
-          </a:bodyPr>
-          <a:lstStyle/>
-          <a:p>
-            <a:r>
-              <a:rPr lang="ko-KR" altLang="en-US" sz="3200" b="1"/>
-              <a:t>문제 풀이</a:t>
-            </a:r>
-          </a:p>
-        </p:txBody>
-      </p:sp>
-      <p:pic>
-        <p:nvPicPr>
-          <p:cNvPr id="5" name="그림 4">
-            <a:extLst>
-              <a:ext uri="{FF2B5EF4-FFF2-40B4-BE49-F238E27FC236}">
-                <a16:creationId xmlns:a16="http://schemas.microsoft.com/office/drawing/2014/main" id="{153D10DE-54F1-5E83-B617-EB567D2F7BCF}"/>
-              </a:ext>
-            </a:extLst>
-          </p:cNvPr>
-          <p:cNvPicPr>
-            <a:picLocks noChangeAspect="1"/>
-          </p:cNvPicPr>
-          <p:nvPr/>
-        </p:nvPicPr>
-        <p:blipFill>
-          <a:blip r:embed="rId3"/>
-          <a:stretch>
-            <a:fillRect/>
-          </a:stretch>
-        </p:blipFill>
-        <p:spPr>
-          <a:xfrm>
-            <a:off x="2133972" y="2533040"/>
-            <a:ext cx="8566741" cy="4074601"/>
-          </a:xfrm>
-          <a:prstGeom prst="rect">
-            <a:avLst/>
-          </a:prstGeom>
-        </p:spPr>
-      </p:pic>
-    </p:spTree>
-    <p:extLst>
-      <p:ext uri="{BB962C8B-B14F-4D97-AF65-F5344CB8AC3E}">
-        <p14:creationId xmlns:p14="http://schemas.microsoft.com/office/powerpoint/2010/main" val="3184162328"/>
-      </p:ext>
-    </p:extLst>
-  </p:cSld>
-  <p:clrMapOvr>
-    <a:masterClrMapping/>
-  </p:clrMapOvr>
-  <mc:AlternateContent xmlns:mc="http://schemas.openxmlformats.org/markup-compatibility/2006" xmlns:p14="http://schemas.microsoft.com/office/powerpoint/2010/main">
-    <mc:Choice Requires="p14">
-      <p:transition spd="med" p14:dur="700">
-        <p:fade/>
-      </p:transition>
-    </mc:Choice>
-    <mc:Fallback xmlns="">
-      <p:transition spd="med">
-        <p:fade/>
-      </p:transition>
-    </mc:Fallback>
-  </mc:AlternateContent>
-</p:sld>
-</file>
-
-<file path=ppt/slides/slide5.xml><?xml version="1.0" encoding="utf-8"?>
-<p:sld xmlns:a="http://schemas.openxmlformats.org/drawingml/2006/main" xmlns:r="http://schemas.openxmlformats.org/officeDocument/2006/relationships" xmlns:p="http://schemas.openxmlformats.org/presentationml/2006/main">
-  <p:cSld>
-    <p:spTree>
-      <p:nvGrpSpPr>
-        <p:cNvPr id="1" name="">
-          <a:extLst>
-            <a:ext uri="{FF2B5EF4-FFF2-40B4-BE49-F238E27FC236}">
-              <a16:creationId xmlns:a16="http://schemas.microsoft.com/office/drawing/2014/main" id="{E57C9014-F20D-7B7E-82F4-291B35DDF201}"/>
-            </a:ext>
-          </a:extLst>
-        </p:cNvPr>
-        <p:cNvGrpSpPr/>
-        <p:nvPr/>
-      </p:nvGrpSpPr>
-      <p:grpSpPr>
-        <a:xfrm>
-          <a:off x="0" y="0"/>
-          <a:ext cx="0" cy="0"/>
-          <a:chOff x="0" y="0"/>
-          <a:chExt cx="0" cy="0"/>
-        </a:xfrm>
-      </p:grpSpPr>
-      <p:sp>
-        <p:nvSpPr>
-          <p:cNvPr id="2" name="슬라이드 번호 개체 틀 1">
-            <a:extLst>
-              <a:ext uri="{FF2B5EF4-FFF2-40B4-BE49-F238E27FC236}">
-                <a16:creationId xmlns:a16="http://schemas.microsoft.com/office/drawing/2014/main" id="{7CDD9F21-3F8F-61DF-D1E4-E7AEA20F5D5C}"/>
-              </a:ext>
-            </a:extLst>
-          </p:cNvPr>
-          <p:cNvSpPr>
-            <a:spLocks noGrp="1"/>
-          </p:cNvSpPr>
-          <p:nvPr>
-            <p:ph type="sldNum" sz="quarter" idx="12"/>
-          </p:nvPr>
-        </p:nvSpPr>
-        <p:spPr/>
-        <p:txBody>
-          <a:bodyPr/>
-          <a:lstStyle/>
-          <a:p>
-            <a:pPr rtl="0"/>
-            <a:fld id="{A3F31473-23EB-4724-8B59-FE6D21D89FA4}" type="slidenum">
-              <a:rPr lang="en-US" altLang="ko-KR" noProof="0" smtClean="0"/>
-              <a:t>5</a:t>
-            </a:fld>
-            <a:endParaRPr lang="en-US" altLang="ko-KR" noProof="0" dirty="0"/>
-          </a:p>
-        </p:txBody>
-      </p:sp>
-      <p:sp>
-        <p:nvSpPr>
-          <p:cNvPr id="4" name="TextBox 3">
-            <a:extLst>
-              <a:ext uri="{FF2B5EF4-FFF2-40B4-BE49-F238E27FC236}">
-                <a16:creationId xmlns:a16="http://schemas.microsoft.com/office/drawing/2014/main" id="{A35A16EB-E2DE-F31D-3EA0-A223294CA89B}"/>
-              </a:ext>
-            </a:extLst>
-          </p:cNvPr>
-          <p:cNvSpPr txBox="1"/>
-          <p:nvPr/>
-        </p:nvSpPr>
-        <p:spPr>
-          <a:xfrm>
-            <a:off x="765820" y="1196752"/>
-            <a:ext cx="11233248" cy="509178"/>
-          </a:xfrm>
-          <a:prstGeom prst="rect">
-            <a:avLst/>
-          </a:prstGeom>
-          <a:solidFill>
-            <a:schemeClr val="tx1">
-              <a:lumMod val="20000"/>
-              <a:lumOff val="80000"/>
-            </a:schemeClr>
-          </a:solidFill>
-        </p:spPr>
-        <p:txBody>
-          <a:bodyPr wrap="square" rtlCol="0">
-            <a:spAutoFit/>
-          </a:bodyPr>
-          <a:lstStyle/>
-          <a:p>
-            <a:pPr marL="285750" indent="-285750">
-              <a:lnSpc>
-                <a:spcPct val="150000"/>
-              </a:lnSpc>
-              <a:buFont typeface="Wingdings" panose="05000000000000000000" pitchFamily="2" charset="2"/>
-              <a:buChar char="v"/>
-            </a:pPr>
-            <a:r>
-              <a:rPr lang="ko-KR" altLang="en-US" sz="2000" dirty="0">
-                <a:latin typeface="휴먼모음T" panose="02030504000101010101" pitchFamily="18" charset="-127"/>
-                <a:ea typeface="휴먼모음T" panose="02030504000101010101" pitchFamily="18" charset="-127"/>
-              </a:rPr>
-              <a:t>시간</a:t>
-            </a:r>
-            <a:r>
-              <a:rPr lang="en-US" altLang="ko-KR" sz="2000" dirty="0">
-                <a:latin typeface="휴먼모음T" panose="02030504000101010101" pitchFamily="18" charset="-127"/>
-                <a:ea typeface="휴먼모음T" panose="02030504000101010101" pitchFamily="18" charset="-127"/>
-              </a:rPr>
-              <a:t>, </a:t>
-            </a:r>
-            <a:r>
-              <a:rPr lang="ko-KR" altLang="en-US" sz="2000" dirty="0">
-                <a:latin typeface="휴먼모음T" panose="02030504000101010101" pitchFamily="18" charset="-127"/>
-                <a:ea typeface="휴먼모음T" panose="02030504000101010101" pitchFamily="18" charset="-127"/>
-              </a:rPr>
-              <a:t>거리</a:t>
-            </a:r>
-            <a:r>
-              <a:rPr lang="en-US" altLang="ko-KR" sz="2000" dirty="0">
-                <a:latin typeface="휴먼모음T" panose="02030504000101010101" pitchFamily="18" charset="-127"/>
-                <a:ea typeface="휴먼모음T" panose="02030504000101010101" pitchFamily="18" charset="-127"/>
-              </a:rPr>
-              <a:t>, </a:t>
-            </a:r>
-            <a:r>
-              <a:rPr lang="ko-KR" altLang="en-US" sz="2000" dirty="0">
-                <a:latin typeface="휴먼모음T" panose="02030504000101010101" pitchFamily="18" charset="-127"/>
-                <a:ea typeface="휴먼모음T" panose="02030504000101010101" pitchFamily="18" charset="-127"/>
-              </a:rPr>
-              <a:t>속도</a:t>
-            </a:r>
-            <a:r>
-              <a:rPr lang="en-US" altLang="ko-KR" sz="2000" dirty="0">
-                <a:latin typeface="휴먼모음T" panose="02030504000101010101" pitchFamily="18" charset="-127"/>
-                <a:ea typeface="휴먼모음T" panose="02030504000101010101" pitchFamily="18" charset="-127"/>
-              </a:rPr>
-              <a:t>, </a:t>
-            </a:r>
-            <a:r>
-              <a:rPr lang="ko-KR" altLang="en-US" sz="2000" dirty="0">
-                <a:latin typeface="휴먼모음T" panose="02030504000101010101" pitchFamily="18" charset="-127"/>
-                <a:ea typeface="휴먼모음T" panose="02030504000101010101" pitchFamily="18" charset="-127"/>
-              </a:rPr>
-              <a:t>가속도에 대한 시뮬레이션</a:t>
-            </a:r>
-            <a:r>
-              <a:rPr lang="en-US" altLang="ko-KR" sz="2000" dirty="0">
-                <a:latin typeface="휴먼모음T" panose="02030504000101010101" pitchFamily="18" charset="-127"/>
-                <a:ea typeface="휴먼모음T" panose="02030504000101010101" pitchFamily="18" charset="-127"/>
-              </a:rPr>
-              <a:t>(</a:t>
-            </a:r>
-            <a:r>
-              <a:rPr lang="ko-KR" altLang="en-US" sz="2000" dirty="0">
-                <a:latin typeface="휴먼모음T" panose="02030504000101010101" pitchFamily="18" charset="-127"/>
-                <a:ea typeface="휴먼모음T" panose="02030504000101010101" pitchFamily="18" charset="-127"/>
-              </a:rPr>
-              <a:t>미적분</a:t>
-            </a:r>
-            <a:r>
-              <a:rPr lang="en-US" altLang="ko-KR" sz="2000">
-                <a:latin typeface="휴먼모음T" panose="02030504000101010101" pitchFamily="18" charset="-127"/>
-                <a:ea typeface="휴먼모음T" panose="02030504000101010101" pitchFamily="18" charset="-127"/>
-              </a:rPr>
-              <a:t>)</a:t>
-            </a:r>
-            <a:endParaRPr lang="en-US" altLang="ko-KR" sz="2000" dirty="0">
-              <a:latin typeface="휴먼모음T" panose="02030504000101010101" pitchFamily="18" charset="-127"/>
-              <a:ea typeface="휴먼모음T" panose="02030504000101010101" pitchFamily="18" charset="-127"/>
-            </a:endParaRPr>
-          </a:p>
-        </p:txBody>
-      </p:sp>
-      <p:sp>
-        <p:nvSpPr>
-          <p:cNvPr id="9" name="TextBox 8">
-            <a:extLst>
-              <a:ext uri="{FF2B5EF4-FFF2-40B4-BE49-F238E27FC236}">
-                <a16:creationId xmlns:a16="http://schemas.microsoft.com/office/drawing/2014/main" id="{5AD34784-A486-0A01-E7A2-FD0B1406CD2E}"/>
-              </a:ext>
-            </a:extLst>
-          </p:cNvPr>
-          <p:cNvSpPr txBox="1"/>
-          <p:nvPr/>
-        </p:nvSpPr>
-        <p:spPr>
-          <a:xfrm>
-            <a:off x="117748" y="260648"/>
-            <a:ext cx="2592288" cy="584775"/>
-          </a:xfrm>
-          <a:prstGeom prst="rect">
-            <a:avLst/>
-          </a:prstGeom>
-          <a:noFill/>
-        </p:spPr>
-        <p:txBody>
-          <a:bodyPr wrap="square" rtlCol="0">
-            <a:spAutoFit/>
-          </a:bodyPr>
-          <a:lstStyle/>
-          <a:p>
-            <a:r>
-              <a:rPr lang="ko-KR" altLang="en-US" sz="3200" b="1"/>
-              <a:t>문제 풀이</a:t>
-            </a:r>
-          </a:p>
-        </p:txBody>
-      </p:sp>
-    </p:spTree>
-    <p:extLst>
-      <p:ext uri="{BB962C8B-B14F-4D97-AF65-F5344CB8AC3E}">
-        <p14:creationId xmlns:p14="http://schemas.microsoft.com/office/powerpoint/2010/main" val="1990975147"/>
-      </p:ext>
-    </p:extLst>
-  </p:cSld>
-  <p:clrMapOvr>
-    <a:masterClrMapping/>
-  </p:clrMapOvr>
-  <mc:AlternateContent xmlns:mc="http://schemas.openxmlformats.org/markup-compatibility/2006" xmlns:p14="http://schemas.microsoft.com/office/powerpoint/2010/main">
-    <mc:Choice Requires="p14">
-      <p:transition spd="med" p14:dur="700">
-        <p:fade/>
-      </p:transition>
-    </mc:Choice>
-    <mc:Fallback xmlns="">
-      <p:transition spd="med">
-        <p:fade/>
-      </p:transition>
-    </mc:Fallback>
-  </mc:AlternateContent>
-</p:sld>
-</file>
-
-<file path=ppt/slides/slide6.xml><?xml version="1.0" encoding="utf-8"?>
-<p:sld xmlns:a="http://schemas.openxmlformats.org/drawingml/2006/main" xmlns:r="http://schemas.openxmlformats.org/officeDocument/2006/relationships" xmlns:p="http://schemas.openxmlformats.org/presentationml/2006/main">
-  <p:cSld>
-    <p:spTree>
-      <p:nvGrpSpPr>
-        <p:cNvPr id="1" name="">
-          <a:extLst>
-            <a:ext uri="{FF2B5EF4-FFF2-40B4-BE49-F238E27FC236}">
-              <a16:creationId xmlns:a16="http://schemas.microsoft.com/office/drawing/2014/main" id="{4F32D5AF-0F51-91DE-64BD-5E17CEF9AA79}"/>
-            </a:ext>
-          </a:extLst>
-        </p:cNvPr>
-        <p:cNvGrpSpPr/>
-        <p:nvPr/>
-      </p:nvGrpSpPr>
-      <p:grpSpPr>
-        <a:xfrm>
-          <a:off x="0" y="0"/>
-          <a:ext cx="0" cy="0"/>
-          <a:chOff x="0" y="0"/>
-          <a:chExt cx="0" cy="0"/>
-        </a:xfrm>
-      </p:grpSpPr>
-      <p:sp>
-        <p:nvSpPr>
-          <p:cNvPr id="2" name="슬라이드 번호 개체 틀 1">
-            <a:extLst>
-              <a:ext uri="{FF2B5EF4-FFF2-40B4-BE49-F238E27FC236}">
-                <a16:creationId xmlns:a16="http://schemas.microsoft.com/office/drawing/2014/main" id="{D1B51CDD-C849-F07D-D7BE-8E0C6C436C59}"/>
-              </a:ext>
-            </a:extLst>
-          </p:cNvPr>
-          <p:cNvSpPr>
-            <a:spLocks noGrp="1"/>
-          </p:cNvSpPr>
-          <p:nvPr>
-            <p:ph type="sldNum" sz="quarter" idx="12"/>
-          </p:nvPr>
-        </p:nvSpPr>
-        <p:spPr/>
-        <p:txBody>
-          <a:bodyPr/>
-          <a:lstStyle/>
-          <a:p>
-            <a:pPr rtl="0"/>
-            <a:fld id="{A3F31473-23EB-4724-8B59-FE6D21D89FA4}" type="slidenum">
-              <a:rPr lang="en-US" altLang="ko-KR" noProof="0" smtClean="0"/>
-              <a:t>6</a:t>
-            </a:fld>
-            <a:endParaRPr lang="en-US" altLang="ko-KR" noProof="0" dirty="0"/>
-          </a:p>
-        </p:txBody>
-      </p:sp>
-      <p:sp>
-        <p:nvSpPr>
-          <p:cNvPr id="4" name="TextBox 3">
-            <a:extLst>
-              <a:ext uri="{FF2B5EF4-FFF2-40B4-BE49-F238E27FC236}">
-                <a16:creationId xmlns:a16="http://schemas.microsoft.com/office/drawing/2014/main" id="{E724D8FB-4BA4-B532-2690-FF91AAEE20BE}"/>
-              </a:ext>
-            </a:extLst>
-          </p:cNvPr>
-          <p:cNvSpPr txBox="1"/>
-          <p:nvPr/>
-        </p:nvSpPr>
-        <p:spPr>
-          <a:xfrm>
-            <a:off x="765820" y="1196752"/>
-            <a:ext cx="11233248" cy="509178"/>
-          </a:xfrm>
-          <a:prstGeom prst="rect">
-            <a:avLst/>
-          </a:prstGeom>
-          <a:solidFill>
-            <a:schemeClr val="tx1">
-              <a:lumMod val="20000"/>
-              <a:lumOff val="80000"/>
-            </a:schemeClr>
-          </a:solidFill>
-        </p:spPr>
-        <p:txBody>
-          <a:bodyPr wrap="square" rtlCol="0">
-            <a:spAutoFit/>
-          </a:bodyPr>
-          <a:lstStyle/>
-          <a:p>
-            <a:pPr marL="285750" indent="-285750">
-              <a:lnSpc>
-                <a:spcPct val="150000"/>
-              </a:lnSpc>
-              <a:buFont typeface="Wingdings" panose="05000000000000000000" pitchFamily="2" charset="2"/>
-              <a:buChar char="v"/>
-            </a:pPr>
-            <a:r>
-              <a:rPr lang="en-US" altLang="ko-KR" sz="2000" dirty="0">
-                <a:latin typeface="휴먼모음T" panose="02030504000101010101" pitchFamily="18" charset="-127"/>
-                <a:ea typeface="휴먼모음T" panose="02030504000101010101" pitchFamily="18" charset="-127"/>
-                <a:hlinkClick r:id="rId3">
-                  <a:extLst>
-                    <a:ext uri="{A12FA001-AC4F-418D-AE19-62706E023703}">
-                      <ahyp:hlinkClr xmlns:ahyp="http://schemas.microsoft.com/office/drawing/2018/hyperlinkcolor" val="tx"/>
-                    </a:ext>
-                  </a:extLst>
-                </a:hlinkClick>
-              </a:rPr>
-              <a:t>Monty Hall Problem</a:t>
-            </a:r>
-            <a:endParaRPr lang="en-US" altLang="ko-KR" sz="2000" dirty="0">
-              <a:latin typeface="휴먼모음T" panose="02030504000101010101" pitchFamily="18" charset="-127"/>
-              <a:ea typeface="휴먼모음T" panose="02030504000101010101" pitchFamily="18" charset="-127"/>
-            </a:endParaRPr>
-          </a:p>
-        </p:txBody>
-      </p:sp>
-      <p:sp>
-        <p:nvSpPr>
-          <p:cNvPr id="9" name="TextBox 8">
-            <a:extLst>
-              <a:ext uri="{FF2B5EF4-FFF2-40B4-BE49-F238E27FC236}">
-                <a16:creationId xmlns:a16="http://schemas.microsoft.com/office/drawing/2014/main" id="{92CE8694-F9D5-0985-6634-DA4CC7CB87C6}"/>
-              </a:ext>
-            </a:extLst>
-          </p:cNvPr>
-          <p:cNvSpPr txBox="1"/>
-          <p:nvPr/>
-        </p:nvSpPr>
-        <p:spPr>
-          <a:xfrm>
-            <a:off x="117748" y="260648"/>
-            <a:ext cx="2592288" cy="584775"/>
-          </a:xfrm>
-          <a:prstGeom prst="rect">
-            <a:avLst/>
-          </a:prstGeom>
-          <a:noFill/>
-        </p:spPr>
-        <p:txBody>
-          <a:bodyPr wrap="square" rtlCol="0">
-            <a:spAutoFit/>
-          </a:bodyPr>
-          <a:lstStyle/>
-          <a:p>
-            <a:r>
-              <a:rPr lang="ko-KR" altLang="en-US" sz="3200" b="1"/>
-              <a:t>문제 풀이</a:t>
-            </a:r>
-          </a:p>
-        </p:txBody>
-      </p:sp>
-      <p:pic>
-        <p:nvPicPr>
-          <p:cNvPr id="2050" name="Picture 2">
-            <a:extLst>
-              <a:ext uri="{FF2B5EF4-FFF2-40B4-BE49-F238E27FC236}">
-                <a16:creationId xmlns:a16="http://schemas.microsoft.com/office/drawing/2014/main" id="{3AFCC670-9D52-97E0-301E-31793E380890}"/>
-              </a:ext>
-            </a:extLst>
-          </p:cNvPr>
-          <p:cNvPicPr>
-            <a:picLocks noChangeAspect="1" noChangeArrowheads="1"/>
-          </p:cNvPicPr>
-          <p:nvPr/>
-        </p:nvPicPr>
-        <p:blipFill>
-          <a:blip r:embed="rId4">
-            <a:extLst>
-              <a:ext uri="{28A0092B-C50C-407E-A947-70E740481C1C}">
-                <a14:useLocalDpi xmlns:a14="http://schemas.microsoft.com/office/drawing/2010/main" val="0"/>
-              </a:ext>
-            </a:extLst>
-          </a:blip>
-          <a:srcRect/>
-          <a:stretch>
-            <a:fillRect/>
-          </a:stretch>
-        </p:blipFill>
-        <p:spPr bwMode="auto">
-          <a:xfrm>
-            <a:off x="3142084" y="2492896"/>
-            <a:ext cx="5334969" cy="2966243"/>
-          </a:xfrm>
-          <a:prstGeom prst="rect">
-            <a:avLst/>
-          </a:prstGeom>
-          <a:noFill/>
-          <a:extLst>
-            <a:ext uri="{909E8E84-426E-40DD-AFC4-6F175D3DCCD1}">
-              <a14:hiddenFill xmlns:a14="http://schemas.microsoft.com/office/drawing/2010/main">
-                <a:solidFill>
-                  <a:srgbClr val="FFFFFF"/>
-                </a:solidFill>
-              </a14:hiddenFill>
-            </a:ext>
-          </a:extLst>
-        </p:spPr>
-      </p:pic>
-    </p:spTree>
-    <p:extLst>
-      <p:ext uri="{BB962C8B-B14F-4D97-AF65-F5344CB8AC3E}">
-        <p14:creationId xmlns:p14="http://schemas.microsoft.com/office/powerpoint/2010/main" val="1646032272"/>
-      </p:ext>
-    </p:extLst>
-  </p:cSld>
-  <p:clrMapOvr>
-    <a:masterClrMapping/>
-  </p:clrMapOvr>
-  <mc:AlternateContent xmlns:mc="http://schemas.openxmlformats.org/markup-compatibility/2006" xmlns:p14="http://schemas.microsoft.com/office/powerpoint/2010/main">
-    <mc:Choice Requires="p14">
-      <p:transition spd="med" p14:dur="700">
-        <p:fade/>
-      </p:transition>
-    </mc:Choice>
-    <mc:Fallback xmlns="">
-      <p:transition spd="med">
-        <p:fade/>
-      </p:transition>
-    </mc:Fallback>
-  </mc:AlternateContent>
-</p:sld>
-</file>
-
-<file path=ppt/slides/slide7.xml><?xml version="1.0" encoding="utf-8"?>
-<p:sld xmlns:a="http://schemas.openxmlformats.org/drawingml/2006/main" xmlns:r="http://schemas.openxmlformats.org/officeDocument/2006/relationships" xmlns:p="http://schemas.openxmlformats.org/presentationml/2006/main">
-  <p:cSld>
-    <p:spTree>
-      <p:nvGrpSpPr>
-        <p:cNvPr id="1" name="">
-          <a:extLst>
-            <a:ext uri="{FF2B5EF4-FFF2-40B4-BE49-F238E27FC236}">
-              <a16:creationId xmlns:a16="http://schemas.microsoft.com/office/drawing/2014/main" id="{DA1C777C-D922-8895-688C-C5D8CB36E7A9}"/>
-            </a:ext>
-          </a:extLst>
-        </p:cNvPr>
-        <p:cNvGrpSpPr/>
-        <p:nvPr/>
-      </p:nvGrpSpPr>
-      <p:grpSpPr>
-        <a:xfrm>
-          <a:off x="0" y="0"/>
-          <a:ext cx="0" cy="0"/>
-          <a:chOff x="0" y="0"/>
-          <a:chExt cx="0" cy="0"/>
-        </a:xfrm>
-      </p:grpSpPr>
-      <p:sp>
-        <p:nvSpPr>
-          <p:cNvPr id="2" name="슬라이드 번호 개체 틀 1">
-            <a:extLst>
-              <a:ext uri="{FF2B5EF4-FFF2-40B4-BE49-F238E27FC236}">
-                <a16:creationId xmlns:a16="http://schemas.microsoft.com/office/drawing/2014/main" id="{AEB2C61B-EEC0-7491-DD5B-4008A55D9FCA}"/>
-              </a:ext>
-            </a:extLst>
-          </p:cNvPr>
-          <p:cNvSpPr>
-            <a:spLocks noGrp="1"/>
-          </p:cNvSpPr>
-          <p:nvPr>
-            <p:ph type="sldNum" sz="quarter" idx="12"/>
-          </p:nvPr>
-        </p:nvSpPr>
-        <p:spPr/>
-        <p:txBody>
-          <a:bodyPr/>
-          <a:lstStyle/>
-          <a:p>
-            <a:pPr rtl="0"/>
-            <a:fld id="{A3F31473-23EB-4724-8B59-FE6D21D89FA4}" type="slidenum">
-              <a:rPr lang="en-US" altLang="ko-KR" noProof="0" smtClean="0"/>
-              <a:t>7</a:t>
-            </a:fld>
-            <a:endParaRPr lang="en-US" altLang="ko-KR" noProof="0" dirty="0"/>
-          </a:p>
-        </p:txBody>
-      </p:sp>
-      <p:sp>
-        <p:nvSpPr>
-          <p:cNvPr id="4" name="TextBox 3">
-            <a:extLst>
-              <a:ext uri="{FF2B5EF4-FFF2-40B4-BE49-F238E27FC236}">
-                <a16:creationId xmlns:a16="http://schemas.microsoft.com/office/drawing/2014/main" id="{B46F664B-D509-3189-2815-157CC6374EF1}"/>
-              </a:ext>
-            </a:extLst>
-          </p:cNvPr>
-          <p:cNvSpPr txBox="1"/>
-          <p:nvPr/>
-        </p:nvSpPr>
-        <p:spPr>
-          <a:xfrm>
-            <a:off x="765820" y="1196752"/>
-            <a:ext cx="11233248" cy="509178"/>
-          </a:xfrm>
-          <a:prstGeom prst="rect">
-            <a:avLst/>
-          </a:prstGeom>
-          <a:solidFill>
-            <a:schemeClr val="tx1">
-              <a:lumMod val="20000"/>
-              <a:lumOff val="80000"/>
-            </a:schemeClr>
-          </a:solidFill>
-        </p:spPr>
-        <p:txBody>
-          <a:bodyPr wrap="square" rtlCol="0">
-            <a:spAutoFit/>
-          </a:bodyPr>
-          <a:lstStyle/>
-          <a:p>
-            <a:pPr marL="285750" indent="-285750">
-              <a:lnSpc>
-                <a:spcPct val="150000"/>
-              </a:lnSpc>
-              <a:buFont typeface="Wingdings" panose="05000000000000000000" pitchFamily="2" charset="2"/>
-              <a:buChar char="v"/>
-            </a:pPr>
-            <a:r>
-              <a:rPr lang="ko-KR" altLang="en-US" sz="2000" dirty="0">
-                <a:latin typeface="휴먼모음T" panose="02030504000101010101" pitchFamily="18" charset="-127"/>
-                <a:ea typeface="휴먼모음T" panose="02030504000101010101" pitchFamily="18" charset="-127"/>
-              </a:rPr>
-              <a:t>평생 미팅하는 상대방이 </a:t>
-            </a:r>
-            <a:r>
-              <a:rPr lang="en-US" altLang="ko-KR" sz="2000" dirty="0">
-                <a:latin typeface="휴먼모음T" panose="02030504000101010101" pitchFamily="18" charset="-127"/>
-                <a:ea typeface="휴먼모음T" panose="02030504000101010101" pitchFamily="18" charset="-127"/>
-              </a:rPr>
-              <a:t>N</a:t>
-            </a:r>
-            <a:r>
-              <a:rPr lang="ko-KR" altLang="en-US" sz="2000" dirty="0">
-                <a:latin typeface="휴먼모음T" panose="02030504000101010101" pitchFamily="18" charset="-127"/>
-                <a:ea typeface="휴먼모음T" panose="02030504000101010101" pitchFamily="18" charset="-127"/>
-              </a:rPr>
-              <a:t>명이라면 몇 번째 만난 사람과 </a:t>
-            </a:r>
-            <a:r>
-              <a:rPr lang="ko-KR" altLang="en-US" sz="2000" dirty="0" err="1">
-                <a:latin typeface="휴먼모음T" panose="02030504000101010101" pitchFamily="18" charset="-127"/>
-                <a:ea typeface="휴먼모음T" panose="02030504000101010101" pitchFamily="18" charset="-127"/>
-              </a:rPr>
-              <a:t>결혼을해야</a:t>
-            </a:r>
-            <a:r>
-              <a:rPr lang="ko-KR" altLang="en-US" sz="2000" dirty="0">
-                <a:latin typeface="휴먼모음T" panose="02030504000101010101" pitchFamily="18" charset="-127"/>
-                <a:ea typeface="휴먼모음T" panose="02030504000101010101" pitchFamily="18" charset="-127"/>
-              </a:rPr>
-              <a:t> 최적의 선택인가</a:t>
-            </a:r>
-            <a:r>
-              <a:rPr lang="en-US" altLang="ko-KR" sz="2000" dirty="0">
-                <a:latin typeface="휴먼모음T" panose="02030504000101010101" pitchFamily="18" charset="-127"/>
-                <a:ea typeface="휴먼모음T" panose="02030504000101010101" pitchFamily="18" charset="-127"/>
-              </a:rPr>
-              <a:t>?</a:t>
-            </a:r>
-          </a:p>
-        </p:txBody>
-      </p:sp>
-      <p:sp>
-        <p:nvSpPr>
-          <p:cNvPr id="9" name="TextBox 8">
-            <a:extLst>
-              <a:ext uri="{FF2B5EF4-FFF2-40B4-BE49-F238E27FC236}">
-                <a16:creationId xmlns:a16="http://schemas.microsoft.com/office/drawing/2014/main" id="{1A89527C-5F15-5354-51AE-303E2EF56CBE}"/>
-              </a:ext>
-            </a:extLst>
-          </p:cNvPr>
-          <p:cNvSpPr txBox="1"/>
-          <p:nvPr/>
-        </p:nvSpPr>
-        <p:spPr>
-          <a:xfrm>
-            <a:off x="117748" y="260648"/>
-            <a:ext cx="2592288" cy="584775"/>
-          </a:xfrm>
-          <a:prstGeom prst="rect">
-            <a:avLst/>
-          </a:prstGeom>
-          <a:noFill/>
-        </p:spPr>
-        <p:txBody>
-          <a:bodyPr wrap="square" rtlCol="0">
-            <a:spAutoFit/>
-          </a:bodyPr>
-          <a:lstStyle/>
-          <a:p>
-            <a:r>
-              <a:rPr lang="ko-KR" altLang="en-US" sz="3200" b="1"/>
-              <a:t>문제 풀이</a:t>
-            </a:r>
-          </a:p>
-        </p:txBody>
-      </p:sp>
-    </p:spTree>
-    <p:extLst>
-      <p:ext uri="{BB962C8B-B14F-4D97-AF65-F5344CB8AC3E}">
-        <p14:creationId xmlns:p14="http://schemas.microsoft.com/office/powerpoint/2010/main" val="1127705894"/>
-      </p:ext>
-    </p:extLst>
-  </p:cSld>
-  <p:clrMapOvr>
-    <a:masterClrMapping/>
-  </p:clrMapOvr>
-  <mc:AlternateContent xmlns:mc="http://schemas.openxmlformats.org/markup-compatibility/2006" xmlns:p14="http://schemas.microsoft.com/office/powerpoint/2010/main">
-    <mc:Choice Requires="p14">
-      <p:transition spd="med" p14:dur="700">
-        <p:fade/>
-      </p:transition>
-    </mc:Choice>
-    <mc:Fallback xmlns="">
-      <p:transition spd="med">
-        <p:fade/>
-      </p:transition>
-    </mc:Fallback>
-  </mc:AlternateContent>
-</p:sld>
-</file>
-
-<file path=ppt/slides/slide8.xml><?xml version="1.0" encoding="utf-8"?>
-<p:sld xmlns:a="http://schemas.openxmlformats.org/drawingml/2006/main" xmlns:r="http://schemas.openxmlformats.org/officeDocument/2006/relationships" xmlns:p="http://schemas.openxmlformats.org/presentationml/2006/main">
-  <p:cSld>
-    <p:spTree>
-      <p:nvGrpSpPr>
-        <p:cNvPr id="1" name="">
-          <a:extLst>
-            <a:ext uri="{FF2B5EF4-FFF2-40B4-BE49-F238E27FC236}">
-              <a16:creationId xmlns:a16="http://schemas.microsoft.com/office/drawing/2014/main" id="{014016E6-4DF5-97F6-9486-23E46F5C4A36}"/>
-            </a:ext>
-          </a:extLst>
-        </p:cNvPr>
-        <p:cNvGrpSpPr/>
-        <p:nvPr/>
-      </p:nvGrpSpPr>
-      <p:grpSpPr>
-        <a:xfrm>
-          <a:off x="0" y="0"/>
-          <a:ext cx="0" cy="0"/>
-          <a:chOff x="0" y="0"/>
-          <a:chExt cx="0" cy="0"/>
-        </a:xfrm>
-      </p:grpSpPr>
-      <p:sp>
-        <p:nvSpPr>
-          <p:cNvPr id="2" name="슬라이드 번호 개체 틀 1">
-            <a:extLst>
-              <a:ext uri="{FF2B5EF4-FFF2-40B4-BE49-F238E27FC236}">
-                <a16:creationId xmlns:a16="http://schemas.microsoft.com/office/drawing/2014/main" id="{A39D4B50-D754-79A0-CD51-823002DF348F}"/>
-              </a:ext>
-            </a:extLst>
-          </p:cNvPr>
-          <p:cNvSpPr>
-            <a:spLocks noGrp="1"/>
-          </p:cNvSpPr>
-          <p:nvPr>
-            <p:ph type="sldNum" sz="quarter" idx="12"/>
-          </p:nvPr>
-        </p:nvSpPr>
-        <p:spPr/>
-        <p:txBody>
-          <a:bodyPr/>
-          <a:lstStyle/>
-          <a:p>
-            <a:pPr rtl="0"/>
-            <a:fld id="{A3F31473-23EB-4724-8B59-FE6D21D89FA4}" type="slidenum">
-              <a:rPr lang="en-US" altLang="ko-KR" noProof="0" smtClean="0"/>
-              <a:t>8</a:t>
-            </a:fld>
-            <a:endParaRPr lang="en-US" altLang="ko-KR" noProof="0" dirty="0"/>
-          </a:p>
-        </p:txBody>
-      </p:sp>
-      <p:sp>
-        <p:nvSpPr>
-          <p:cNvPr id="4" name="TextBox 3">
-            <a:extLst>
-              <a:ext uri="{FF2B5EF4-FFF2-40B4-BE49-F238E27FC236}">
-                <a16:creationId xmlns:a16="http://schemas.microsoft.com/office/drawing/2014/main" id="{6843735A-526C-E0D0-66F8-62A3BD4EC82F}"/>
-              </a:ext>
-            </a:extLst>
-          </p:cNvPr>
-          <p:cNvSpPr txBox="1"/>
-          <p:nvPr/>
-        </p:nvSpPr>
-        <p:spPr>
-          <a:xfrm>
-            <a:off x="693812" y="2276872"/>
-            <a:ext cx="11233248" cy="3976153"/>
-          </a:xfrm>
-          <a:prstGeom prst="rect">
-            <a:avLst/>
-          </a:prstGeom>
-          <a:solidFill>
-            <a:schemeClr val="tx1">
-              <a:lumMod val="20000"/>
-              <a:lumOff val="80000"/>
-            </a:schemeClr>
-          </a:solidFill>
-        </p:spPr>
-        <p:txBody>
-          <a:bodyPr wrap="square" rtlCol="0">
-            <a:spAutoFit/>
-          </a:bodyPr>
-          <a:lstStyle/>
-          <a:p>
-            <a:pPr marL="285750" indent="-285750">
-              <a:lnSpc>
-                <a:spcPct val="150000"/>
-              </a:lnSpc>
-              <a:buFont typeface="Wingdings" panose="05000000000000000000" pitchFamily="2" charset="2"/>
-              <a:buChar char="v"/>
-            </a:pPr>
-            <a:r>
-              <a:rPr lang="ko-KR" altLang="en-US" dirty="0">
-                <a:latin typeface="휴먼모음T" panose="02030504000101010101" pitchFamily="18" charset="-127"/>
-                <a:ea typeface="휴먼모음T" panose="02030504000101010101" pitchFamily="18" charset="-127"/>
-              </a:rPr>
-              <a:t>모델 학습의 안정성 확보”</a:t>
-            </a:r>
-            <a:endParaRPr lang="en-US" altLang="ko-KR" dirty="0">
-              <a:latin typeface="휴먼모음T" panose="02030504000101010101" pitchFamily="18" charset="-127"/>
-              <a:ea typeface="휴먼모음T" panose="02030504000101010101" pitchFamily="18" charset="-127"/>
-            </a:endParaRPr>
-          </a:p>
-          <a:p>
-            <a:pPr marL="742950" lvl="1" indent="-285750">
-              <a:lnSpc>
-                <a:spcPct val="150000"/>
-              </a:lnSpc>
-              <a:buFont typeface="Wingdings" panose="05000000000000000000" pitchFamily="2" charset="2"/>
-              <a:buChar char="v"/>
-            </a:pPr>
-            <a:r>
-              <a:rPr lang="en-US" altLang="ko-KR" sz="1600" dirty="0">
-                <a:latin typeface="휴먼모음T" panose="02030504000101010101" pitchFamily="18" charset="-127"/>
-                <a:ea typeface="휴먼모음T" panose="02030504000101010101" pitchFamily="18" charset="-127"/>
-              </a:rPr>
-              <a:t>MSE , Cross-Entropy, Log-loss </a:t>
-            </a:r>
-            <a:endParaRPr lang="en-US" altLang="ko-KR" dirty="0">
-              <a:latin typeface="휴먼모음T" panose="02030504000101010101" pitchFamily="18" charset="-127"/>
-              <a:ea typeface="휴먼모음T" panose="02030504000101010101" pitchFamily="18" charset="-127"/>
-            </a:endParaRPr>
-          </a:p>
-          <a:p>
-            <a:pPr marL="285750" indent="-285750">
-              <a:lnSpc>
-                <a:spcPct val="150000"/>
-              </a:lnSpc>
-              <a:buFont typeface="Wingdings" panose="05000000000000000000" pitchFamily="2" charset="2"/>
-              <a:buChar char="v"/>
-            </a:pPr>
-            <a:r>
-              <a:rPr lang="en-US" altLang="ko-KR" dirty="0">
-                <a:latin typeface="휴먼모음T" panose="02030504000101010101" pitchFamily="18" charset="-127"/>
-                <a:ea typeface="휴먼모음T" panose="02030504000101010101" pitchFamily="18" charset="-127"/>
-              </a:rPr>
-              <a:t>Mini-batch </a:t>
-            </a:r>
-            <a:r>
-              <a:rPr lang="ko-KR" altLang="en-US" dirty="0">
-                <a:latin typeface="휴먼모음T" panose="02030504000101010101" pitchFamily="18" charset="-127"/>
-                <a:ea typeface="휴먼모음T" panose="02030504000101010101" pitchFamily="18" charset="-127"/>
-              </a:rPr>
-              <a:t>학습이 가능한 이유”</a:t>
-            </a:r>
-            <a:endParaRPr lang="en-US" altLang="ko-KR" dirty="0">
-              <a:latin typeface="휴먼모음T" panose="02030504000101010101" pitchFamily="18" charset="-127"/>
-              <a:ea typeface="휴먼모음T" panose="02030504000101010101" pitchFamily="18" charset="-127"/>
-            </a:endParaRPr>
-          </a:p>
-          <a:p>
-            <a:pPr marL="742950" lvl="1" indent="-285750">
-              <a:lnSpc>
-                <a:spcPct val="150000"/>
-              </a:lnSpc>
-              <a:buFont typeface="Wingdings" panose="05000000000000000000" pitchFamily="2" charset="2"/>
-              <a:buChar char="v"/>
-            </a:pPr>
-            <a:r>
-              <a:rPr lang="en-US" altLang="ko-KR" sz="1600" dirty="0">
-                <a:latin typeface="휴먼모음T" panose="02030504000101010101" pitchFamily="18" charset="-127"/>
-                <a:ea typeface="휴먼모음T" panose="02030504000101010101" pitchFamily="18" charset="-127"/>
-              </a:rPr>
-              <a:t>Mini-batch = </a:t>
-            </a:r>
-            <a:r>
-              <a:rPr lang="ko-KR" altLang="en-US" sz="1600" dirty="0">
-                <a:latin typeface="휴먼모음T" panose="02030504000101010101" pitchFamily="18" charset="-127"/>
-                <a:ea typeface="휴먼모음T" panose="02030504000101010101" pitchFamily="18" charset="-127"/>
-              </a:rPr>
-              <a:t>작은 샘플 평균</a:t>
-            </a:r>
-            <a:r>
-              <a:rPr lang="en-US" altLang="ko-KR" sz="1600" dirty="0">
-                <a:latin typeface="휴먼모음T" panose="02030504000101010101" pitchFamily="18" charset="-127"/>
-                <a:ea typeface="휴먼모음T" panose="02030504000101010101" pitchFamily="18" charset="-127"/>
-              </a:rPr>
-              <a:t>, CLT</a:t>
-            </a:r>
-            <a:r>
-              <a:rPr lang="ko-KR" altLang="en-US" sz="1600" dirty="0">
-                <a:latin typeface="휴먼모음T" panose="02030504000101010101" pitchFamily="18" charset="-127"/>
-                <a:ea typeface="휴먼모음T" panose="02030504000101010101" pitchFamily="18" charset="-127"/>
-              </a:rPr>
-              <a:t>없이는 </a:t>
-            </a:r>
-            <a:r>
-              <a:rPr lang="en-US" altLang="ko-KR" sz="1600" dirty="0">
-                <a:latin typeface="휴먼모음T" panose="02030504000101010101" pitchFamily="18" charset="-127"/>
-                <a:ea typeface="휴먼모음T" panose="02030504000101010101" pitchFamily="18" charset="-127"/>
-              </a:rPr>
-              <a:t>mini</a:t>
-            </a:r>
-            <a:r>
-              <a:rPr lang="ko-KR" altLang="en-US" sz="1600" dirty="0">
-                <a:latin typeface="휴먼모음T" panose="02030504000101010101" pitchFamily="18" charset="-127"/>
-                <a:ea typeface="휴먼모음T" panose="02030504000101010101" pitchFamily="18" charset="-127"/>
-              </a:rPr>
-              <a:t> </a:t>
-            </a:r>
-            <a:r>
-              <a:rPr lang="en-US" altLang="ko-KR" sz="1600" dirty="0">
-                <a:latin typeface="휴먼모음T" panose="02030504000101010101" pitchFamily="18" charset="-127"/>
-                <a:ea typeface="휴먼모음T" panose="02030504000101010101" pitchFamily="18" charset="-127"/>
-              </a:rPr>
-              <a:t>batch </a:t>
-            </a:r>
-            <a:r>
-              <a:rPr lang="ko-KR" altLang="en-US" sz="1600" dirty="0">
-                <a:latin typeface="휴먼모음T" panose="02030504000101010101" pitchFamily="18" charset="-127"/>
-                <a:ea typeface="휴먼모음T" panose="02030504000101010101" pitchFamily="18" charset="-127"/>
-              </a:rPr>
-              <a:t>도 없음</a:t>
-            </a:r>
-            <a:endParaRPr lang="en-US" altLang="ko-KR" dirty="0">
-              <a:latin typeface="휴먼모음T" panose="02030504000101010101" pitchFamily="18" charset="-127"/>
-              <a:ea typeface="휴먼모음T" panose="02030504000101010101" pitchFamily="18" charset="-127"/>
-            </a:endParaRPr>
-          </a:p>
-          <a:p>
-            <a:pPr marL="285750" indent="-285750">
-              <a:lnSpc>
-                <a:spcPct val="150000"/>
-              </a:lnSpc>
-              <a:buFont typeface="Wingdings" panose="05000000000000000000" pitchFamily="2" charset="2"/>
-              <a:buChar char="v"/>
-            </a:pPr>
-            <a:r>
-              <a:rPr lang="ko-KR" altLang="en-US" dirty="0">
-                <a:latin typeface="휴먼모음T" panose="02030504000101010101" pitchFamily="18" charset="-127"/>
-                <a:ea typeface="휴먼모음T" panose="02030504000101010101" pitchFamily="18" charset="-127"/>
-              </a:rPr>
-              <a:t>교차검증을 통한 모델의 평가</a:t>
-            </a:r>
-            <a:endParaRPr lang="en-US" altLang="ko-KR" dirty="0">
-              <a:latin typeface="휴먼모음T" panose="02030504000101010101" pitchFamily="18" charset="-127"/>
-              <a:ea typeface="휴먼모음T" panose="02030504000101010101" pitchFamily="18" charset="-127"/>
-            </a:endParaRPr>
-          </a:p>
-          <a:p>
-            <a:pPr marL="742950" lvl="1" indent="-285750">
-              <a:lnSpc>
-                <a:spcPct val="150000"/>
-              </a:lnSpc>
-              <a:buFont typeface="Wingdings" panose="05000000000000000000" pitchFamily="2" charset="2"/>
-              <a:buChar char="v"/>
-            </a:pPr>
-            <a:r>
-              <a:rPr lang="ko-KR" altLang="en-US" sz="1600" dirty="0">
-                <a:latin typeface="휴먼모음T" panose="02030504000101010101" pitchFamily="18" charset="-127"/>
-                <a:ea typeface="휴먼모음T" panose="02030504000101010101" pitchFamily="18" charset="-127"/>
-              </a:rPr>
-              <a:t>평균 </a:t>
-            </a:r>
-            <a:r>
-              <a:rPr lang="en-US" altLang="ko-KR" sz="1600" dirty="0">
-                <a:latin typeface="휴먼모음T" panose="02030504000101010101" pitchFamily="18" charset="-127"/>
-                <a:ea typeface="휴먼모음T" panose="02030504000101010101" pitchFamily="18" charset="-127"/>
-              </a:rPr>
-              <a:t>accuracy, </a:t>
-            </a:r>
-            <a:r>
-              <a:rPr lang="ko-KR" altLang="en-US" sz="1600" dirty="0">
-                <a:latin typeface="휴먼모음T" panose="02030504000101010101" pitchFamily="18" charset="-127"/>
-                <a:ea typeface="휴먼모음T" panose="02030504000101010101" pitchFamily="18" charset="-127"/>
-              </a:rPr>
-              <a:t>평균 </a:t>
-            </a:r>
-            <a:r>
-              <a:rPr lang="en-US" altLang="ko-KR" sz="1600" dirty="0">
-                <a:latin typeface="휴먼모음T" panose="02030504000101010101" pitchFamily="18" charset="-127"/>
-                <a:ea typeface="휴먼모음T" panose="02030504000101010101" pitchFamily="18" charset="-127"/>
-              </a:rPr>
-              <a:t>loss, </a:t>
-            </a:r>
-            <a:r>
-              <a:rPr lang="ko-KR" altLang="en-US" sz="1600" dirty="0">
-                <a:latin typeface="휴먼모음T" panose="02030504000101010101" pitchFamily="18" charset="-127"/>
-                <a:ea typeface="휴먼모음T" panose="02030504000101010101" pitchFamily="18" charset="-127"/>
-              </a:rPr>
-              <a:t>교차검증 평균 등 </a:t>
-            </a:r>
-            <a:r>
-              <a:rPr lang="en-US" altLang="ko-KR" sz="1600" dirty="0">
-                <a:latin typeface="휴먼모음T" panose="02030504000101010101" pitchFamily="18" charset="-127"/>
-                <a:ea typeface="휴먼모음T" panose="02030504000101010101" pitchFamily="18" charset="-127"/>
-              </a:rPr>
-              <a:t>CLT </a:t>
-            </a:r>
-            <a:r>
-              <a:rPr lang="ko-KR" altLang="en-US" sz="1600" dirty="0">
-                <a:latin typeface="휴먼모음T" panose="02030504000101010101" pitchFamily="18" charset="-127"/>
-                <a:ea typeface="휴먼모음T" panose="02030504000101010101" pitchFamily="18" charset="-127"/>
-              </a:rPr>
-              <a:t>적용으로 이  평균들은 → 정규분포 근사</a:t>
-            </a:r>
-            <a:r>
-              <a:rPr lang="en-US" altLang="ko-KR" sz="1600" dirty="0">
-                <a:latin typeface="휴먼모음T" panose="02030504000101010101" pitchFamily="18" charset="-127"/>
-                <a:ea typeface="휴먼모음T" panose="02030504000101010101" pitchFamily="18" charset="-127"/>
-              </a:rPr>
-              <a:t> </a:t>
-            </a:r>
-            <a:r>
-              <a:rPr lang="ko-KR" altLang="en-US" sz="1600" dirty="0">
-                <a:latin typeface="휴먼모음T" panose="02030504000101010101" pitchFamily="18" charset="-127"/>
-                <a:ea typeface="휴먼모음T" panose="02030504000101010101" pitchFamily="18" charset="-127"/>
-              </a:rPr>
-              <a:t>→ 신뢰구간</a:t>
-            </a:r>
-            <a:r>
-              <a:rPr lang="en-US" altLang="ko-KR" sz="1600" dirty="0">
-                <a:latin typeface="휴먼모음T" panose="02030504000101010101" pitchFamily="18" charset="-127"/>
-                <a:ea typeface="휴먼모음T" panose="02030504000101010101" pitchFamily="18" charset="-127"/>
-              </a:rPr>
-              <a:t> </a:t>
-            </a:r>
-            <a:r>
-              <a:rPr lang="ko-KR" altLang="en-US" sz="1600" dirty="0">
-                <a:latin typeface="휴먼모음T" panose="02030504000101010101" pitchFamily="18" charset="-127"/>
-                <a:ea typeface="휴먼모음T" panose="02030504000101010101" pitchFamily="18" charset="-127"/>
-              </a:rPr>
-              <a:t>→</a:t>
-            </a:r>
-            <a:r>
-              <a:rPr lang="en-US" altLang="ko-KR" sz="1600" dirty="0">
-                <a:latin typeface="휴먼모음T" panose="02030504000101010101" pitchFamily="18" charset="-127"/>
-                <a:ea typeface="휴먼모음T" panose="02030504000101010101" pitchFamily="18" charset="-127"/>
-              </a:rPr>
-              <a:t> </a:t>
-            </a:r>
-            <a:r>
-              <a:rPr lang="ko-KR" altLang="en-US" sz="1600" dirty="0">
-                <a:latin typeface="휴먼모음T" panose="02030504000101010101" pitchFamily="18" charset="-127"/>
-                <a:ea typeface="휴먼모음T" panose="02030504000101010101" pitchFamily="18" charset="-127"/>
-              </a:rPr>
-              <a:t>통계적 비교 가능</a:t>
-            </a:r>
-            <a:endParaRPr lang="en-US" altLang="ko-KR" dirty="0">
-              <a:latin typeface="휴먼모음T" panose="02030504000101010101" pitchFamily="18" charset="-127"/>
-              <a:ea typeface="휴먼모음T" panose="02030504000101010101" pitchFamily="18" charset="-127"/>
-            </a:endParaRPr>
-          </a:p>
-          <a:p>
-            <a:pPr marL="285750" indent="-285750">
-              <a:lnSpc>
-                <a:spcPct val="150000"/>
-              </a:lnSpc>
-              <a:buFont typeface="Wingdings" panose="05000000000000000000" pitchFamily="2" charset="2"/>
-              <a:buChar char="v"/>
-            </a:pPr>
-            <a:r>
-              <a:rPr lang="en-US" altLang="ko-KR" dirty="0">
-                <a:latin typeface="휴먼모음T" panose="02030504000101010101" pitchFamily="18" charset="-127"/>
-                <a:ea typeface="휴먼모음T" panose="02030504000101010101" pitchFamily="18" charset="-127"/>
-              </a:rPr>
-              <a:t>A/B </a:t>
-            </a:r>
-            <a:r>
-              <a:rPr lang="ko-KR" altLang="en-US" dirty="0">
-                <a:latin typeface="휴먼모음T" panose="02030504000101010101" pitchFamily="18" charset="-127"/>
-                <a:ea typeface="휴먼모음T" panose="02030504000101010101" pitchFamily="18" charset="-127"/>
-              </a:rPr>
-              <a:t>테스트와 실험 설계의 핵심</a:t>
-            </a:r>
-            <a:endParaRPr lang="en-US" altLang="ko-KR" dirty="0">
-              <a:latin typeface="휴먼모음T" panose="02030504000101010101" pitchFamily="18" charset="-127"/>
-              <a:ea typeface="휴먼모음T" panose="02030504000101010101" pitchFamily="18" charset="-127"/>
-            </a:endParaRPr>
-          </a:p>
-          <a:p>
-            <a:pPr marL="742950" lvl="1" indent="-285750">
-              <a:lnSpc>
-                <a:spcPct val="150000"/>
-              </a:lnSpc>
-              <a:buFont typeface="Wingdings" panose="05000000000000000000" pitchFamily="2" charset="2"/>
-              <a:buChar char="v"/>
-            </a:pPr>
-            <a:r>
-              <a:rPr lang="ko-KR" altLang="en-US" sz="1600" dirty="0">
-                <a:latin typeface="휴먼모음T" panose="02030504000101010101" pitchFamily="18" charset="-127"/>
-                <a:ea typeface="휴먼모음T" panose="02030504000101010101" pitchFamily="18" charset="-127"/>
-              </a:rPr>
-              <a:t>광고 효과 비교</a:t>
-            </a:r>
-            <a:r>
-              <a:rPr lang="en-US" altLang="ko-KR" sz="1600" dirty="0">
-                <a:latin typeface="휴먼모음T" panose="02030504000101010101" pitchFamily="18" charset="-127"/>
-                <a:ea typeface="휴먼모음T" panose="02030504000101010101" pitchFamily="18" charset="-127"/>
-              </a:rPr>
-              <a:t>, </a:t>
-            </a:r>
-            <a:r>
-              <a:rPr lang="ko-KR" altLang="en-US" sz="1600" dirty="0">
-                <a:latin typeface="휴먼모음T" panose="02030504000101010101" pitchFamily="18" charset="-127"/>
-                <a:ea typeface="휴먼모음T" panose="02030504000101010101" pitchFamily="18" charset="-127"/>
-              </a:rPr>
-              <a:t>추천 알고리즘 비교</a:t>
-            </a:r>
-            <a:r>
-              <a:rPr lang="en-US" altLang="ko-KR" sz="1600" dirty="0">
-                <a:latin typeface="휴먼모음T" panose="02030504000101010101" pitchFamily="18" charset="-127"/>
-                <a:ea typeface="휴먼모음T" panose="02030504000101010101" pitchFamily="18" charset="-127"/>
-              </a:rPr>
-              <a:t>, UI </a:t>
-            </a:r>
-            <a:r>
-              <a:rPr lang="ko-KR" altLang="en-US" sz="1600" dirty="0">
-                <a:latin typeface="휴먼모음T" panose="02030504000101010101" pitchFamily="18" charset="-127"/>
-                <a:ea typeface="휴먼모음T" panose="02030504000101010101" pitchFamily="18" charset="-127"/>
-              </a:rPr>
-              <a:t>개선 효과 측정  등 전부 평균 비교 문제로 </a:t>
-            </a:r>
-            <a:r>
-              <a:rPr lang="en-US" altLang="ko-KR" sz="1600" dirty="0">
-                <a:latin typeface="휴먼모음T" panose="02030504000101010101" pitchFamily="18" charset="-127"/>
-                <a:ea typeface="휴먼모음T" panose="02030504000101010101" pitchFamily="18" charset="-127"/>
-              </a:rPr>
-              <a:t>CLT </a:t>
-            </a:r>
-            <a:r>
-              <a:rPr lang="ko-KR" altLang="en-US" sz="1600" dirty="0">
-                <a:latin typeface="휴먼모음T" panose="02030504000101010101" pitchFamily="18" charset="-127"/>
-                <a:ea typeface="휴먼모음T" panose="02030504000101010101" pitchFamily="18" charset="-127"/>
-              </a:rPr>
-              <a:t>덕분에</a:t>
-            </a:r>
-            <a:r>
-              <a:rPr lang="en-US" altLang="ko-KR" sz="1600" dirty="0">
-                <a:latin typeface="휴먼모음T" panose="02030504000101010101" pitchFamily="18" charset="-127"/>
-                <a:ea typeface="휴먼모음T" panose="02030504000101010101" pitchFamily="18" charset="-127"/>
-              </a:rPr>
-              <a:t> </a:t>
-            </a:r>
-            <a:r>
-              <a:rPr lang="ko-KR" altLang="en-US" sz="1600" dirty="0">
-                <a:latin typeface="휴먼모음T" panose="02030504000101010101" pitchFamily="18" charset="-127"/>
-                <a:ea typeface="휴먼모음T" panose="02030504000101010101" pitchFamily="18" charset="-127"/>
-              </a:rPr>
-              <a:t>두 평균 차이 → 정규분포 근사 → </a:t>
-            </a:r>
-            <a:r>
-              <a:rPr lang="en-US" altLang="ko-KR" sz="1600" dirty="0">
-                <a:latin typeface="휴먼모음T" panose="02030504000101010101" pitchFamily="18" charset="-127"/>
-                <a:ea typeface="휴먼모음T" panose="02030504000101010101" pitchFamily="18" charset="-127"/>
-              </a:rPr>
-              <a:t>p-value </a:t>
-            </a:r>
-            <a:r>
-              <a:rPr lang="ko-KR" altLang="en-US" sz="1600" dirty="0">
-                <a:latin typeface="휴먼모음T" panose="02030504000101010101" pitchFamily="18" charset="-127"/>
-                <a:ea typeface="휴먼모음T" panose="02030504000101010101" pitchFamily="18" charset="-127"/>
-              </a:rPr>
-              <a:t>계산 가능</a:t>
-            </a:r>
-            <a:r>
-              <a:rPr lang="ko-KR" altLang="en-US" dirty="0">
-                <a:latin typeface="휴먼모음T" panose="02030504000101010101" pitchFamily="18" charset="-127"/>
-                <a:ea typeface="휴먼모음T" panose="02030504000101010101" pitchFamily="18" charset="-127"/>
-              </a:rPr>
-              <a:t> </a:t>
-            </a:r>
-            <a:endParaRPr lang="en-US" altLang="ko-KR" sz="2000" dirty="0">
-              <a:latin typeface="휴먼모음T" panose="02030504000101010101" pitchFamily="18" charset="-127"/>
-              <a:ea typeface="휴먼모음T" panose="02030504000101010101" pitchFamily="18" charset="-127"/>
-            </a:endParaRPr>
-          </a:p>
-        </p:txBody>
-      </p:sp>
-      <p:sp>
-        <p:nvSpPr>
-          <p:cNvPr id="9" name="TextBox 8">
-            <a:extLst>
-              <a:ext uri="{FF2B5EF4-FFF2-40B4-BE49-F238E27FC236}">
-                <a16:creationId xmlns:a16="http://schemas.microsoft.com/office/drawing/2014/main" id="{185A9784-515E-A3E4-8F67-F24BA80B28DC}"/>
-              </a:ext>
-            </a:extLst>
-          </p:cNvPr>
-          <p:cNvSpPr txBox="1"/>
-          <p:nvPr/>
-        </p:nvSpPr>
-        <p:spPr>
-          <a:xfrm>
-            <a:off x="117748" y="260648"/>
-            <a:ext cx="2592288" cy="584775"/>
-          </a:xfrm>
-          <a:prstGeom prst="rect">
-            <a:avLst/>
-          </a:prstGeom>
-          <a:noFill/>
-        </p:spPr>
-        <p:txBody>
-          <a:bodyPr wrap="square" rtlCol="0">
-            <a:spAutoFit/>
-          </a:bodyPr>
-          <a:lstStyle/>
-          <a:p>
-            <a:r>
-              <a:rPr lang="ko-KR" altLang="en-US" sz="3200" b="1"/>
-              <a:t>문제 풀이</a:t>
-            </a:r>
-          </a:p>
-        </p:txBody>
-      </p:sp>
-      <p:sp>
-        <p:nvSpPr>
-          <p:cNvPr id="5" name="TextBox 4">
-            <a:extLst>
-              <a:ext uri="{FF2B5EF4-FFF2-40B4-BE49-F238E27FC236}">
-                <a16:creationId xmlns:a16="http://schemas.microsoft.com/office/drawing/2014/main" id="{52039815-B66C-C01C-F725-1707E5711FCB}"/>
-              </a:ext>
-            </a:extLst>
-          </p:cNvPr>
-          <p:cNvSpPr txBox="1"/>
-          <p:nvPr/>
-        </p:nvSpPr>
-        <p:spPr>
-          <a:xfrm>
-            <a:off x="549796" y="858989"/>
-            <a:ext cx="11377264" cy="970843"/>
-          </a:xfrm>
-          <a:prstGeom prst="rect">
-            <a:avLst/>
-          </a:prstGeom>
-          <a:noFill/>
-        </p:spPr>
-        <p:txBody>
-          <a:bodyPr wrap="square">
-            <a:spAutoFit/>
-          </a:bodyPr>
-          <a:lstStyle/>
-          <a:p>
-            <a:pPr marL="285750" indent="-285750">
-              <a:lnSpc>
-                <a:spcPct val="150000"/>
-              </a:lnSpc>
-              <a:buFont typeface="Wingdings" panose="05000000000000000000" pitchFamily="2" charset="2"/>
-              <a:buChar char="v"/>
-            </a:pPr>
-            <a:r>
-              <a:rPr lang="ko-KR" altLang="en-US" sz="2000" dirty="0">
-                <a:latin typeface="휴먼모음T" panose="02030504000101010101" pitchFamily="18" charset="-127"/>
-                <a:ea typeface="휴먼모음T" panose="02030504000101010101" pitchFamily="18" charset="-127"/>
-              </a:rPr>
-              <a:t>중심극한정리</a:t>
-            </a:r>
-            <a:r>
-              <a:rPr lang="en-US" altLang="ko-KR" sz="2000" dirty="0">
-                <a:latin typeface="휴먼모음T" panose="02030504000101010101" pitchFamily="18" charset="-127"/>
-                <a:ea typeface="휴먼모음T" panose="02030504000101010101" pitchFamily="18" charset="-127"/>
-              </a:rPr>
-              <a:t>(</a:t>
-            </a:r>
-            <a:r>
-              <a:rPr lang="ko-KR" altLang="en-US" sz="2000" dirty="0">
-                <a:latin typeface="휴먼모음T" panose="02030504000101010101" pitchFamily="18" charset="-127"/>
-                <a:ea typeface="휴먼모음T" panose="02030504000101010101" pitchFamily="18" charset="-127"/>
-              </a:rPr>
-              <a:t>데이터는 불규칙하지만</a:t>
-            </a:r>
-            <a:r>
-              <a:rPr lang="en-US" altLang="ko-KR" sz="2000" dirty="0">
-                <a:latin typeface="휴먼모음T" panose="02030504000101010101" pitchFamily="18" charset="-127"/>
-                <a:ea typeface="휴먼모음T" panose="02030504000101010101" pitchFamily="18" charset="-127"/>
-              </a:rPr>
-              <a:t>, </a:t>
-            </a:r>
-            <a:r>
-              <a:rPr lang="ko-KR" altLang="en-US" sz="2000" dirty="0">
-                <a:latin typeface="휴먼모음T" panose="02030504000101010101" pitchFamily="18" charset="-127"/>
-                <a:ea typeface="휴먼모음T" panose="02030504000101010101" pitchFamily="18" charset="-127"/>
-              </a:rPr>
-              <a:t>평균은 예측 가능하다 → 그래서 학습이 가능하다</a:t>
-            </a:r>
-            <a:r>
-              <a:rPr lang="en-US" altLang="ko-KR" sz="2000" dirty="0">
-                <a:latin typeface="휴먼모음T" panose="02030504000101010101" pitchFamily="18" charset="-127"/>
-                <a:ea typeface="휴먼모음T" panose="02030504000101010101" pitchFamily="18" charset="-127"/>
-              </a:rPr>
-              <a:t>)</a:t>
-            </a:r>
-            <a:r>
-              <a:rPr lang="ko-KR" altLang="en-US" sz="2000" dirty="0">
-                <a:latin typeface="휴먼모음T" panose="02030504000101010101" pitchFamily="18" charset="-127"/>
-                <a:ea typeface="휴먼모음T" panose="02030504000101010101" pitchFamily="18" charset="-127"/>
-              </a:rPr>
-              <a:t>가 </a:t>
-            </a:r>
-            <a:r>
-              <a:rPr lang="ko-KR" altLang="en-US" sz="2000" dirty="0" err="1">
-                <a:latin typeface="휴먼모음T" panose="02030504000101010101" pitchFamily="18" charset="-127"/>
-                <a:ea typeface="휴먼모음T" panose="02030504000101010101" pitchFamily="18" charset="-127"/>
-              </a:rPr>
-              <a:t>머신러닝에</a:t>
-            </a:r>
-            <a:r>
-              <a:rPr lang="ko-KR" altLang="en-US" sz="2000" dirty="0">
-                <a:latin typeface="휴먼모음T" panose="02030504000101010101" pitchFamily="18" charset="-127"/>
-                <a:ea typeface="휴먼모음T" panose="02030504000101010101" pitchFamily="18" charset="-127"/>
-              </a:rPr>
-              <a:t> 접목하는 내용을 모의실험으로 파이썬 코드로 제시하라</a:t>
-            </a:r>
-            <a:endParaRPr lang="en-US" altLang="ko-KR" sz="2000" dirty="0">
-              <a:latin typeface="휴먼모음T" panose="02030504000101010101" pitchFamily="18" charset="-127"/>
-              <a:ea typeface="휴먼모음T" panose="02030504000101010101" pitchFamily="18" charset="-127"/>
-            </a:endParaRPr>
-          </a:p>
-        </p:txBody>
-      </p:sp>
-    </p:spTree>
-    <p:extLst>
-      <p:ext uri="{BB962C8B-B14F-4D97-AF65-F5344CB8AC3E}">
-        <p14:creationId xmlns:p14="http://schemas.microsoft.com/office/powerpoint/2010/main" val="2559646205"/>
-      </p:ext>
-    </p:extLst>
-  </p:cSld>
-  <p:clrMapOvr>
-    <a:masterClrMapping/>
-  </p:clrMapOvr>
-  <mc:AlternateContent xmlns:mc="http://schemas.openxmlformats.org/markup-compatibility/2006" xmlns:p14="http://schemas.microsoft.com/office/powerpoint/2010/main">
-    <mc:Choice Requires="p14">
-      <p:transition spd="med" p14:dur="700">
-        <p:fade/>
-      </p:transition>
-    </mc:Choice>
-    <mc:Fallback xmlns="">
-      <p:transition spd="med">
-        <p:fade/>
-      </p:transition>
-    </mc:Fallback>
-  </mc:AlternateContent>
-</p:sld>
-</file>
-
-<file path=ppt/slides/slide9.xml><?xml version="1.0" encoding="utf-8"?>
+<file path=ppt/slides/slide10.xml><?xml version="1.0" encoding="utf-8"?>
 <p:sld xmlns:a="http://schemas.openxmlformats.org/drawingml/2006/main" xmlns:r="http://schemas.openxmlformats.org/officeDocument/2006/relationships" xmlns:p="http://schemas.openxmlformats.org/presentationml/2006/main">
   <p:cSld>
     <p:spTree>
@@ -7537,7 +5456,7 @@
             <a:pPr rtl="0"/>
             <a:fld id="{A3F31473-23EB-4724-8B59-FE6D21D89FA4}" type="slidenum">
               <a:rPr lang="en-US" altLang="ko-KR" noProof="0" smtClean="0"/>
-              <a:t>9</a:t>
+              <a:t>10</a:t>
             </a:fld>
             <a:endParaRPr lang="en-US" altLang="ko-KR" noProof="0" dirty="0"/>
           </a:p>
@@ -8432,6 +6351,2761 @@
 </p:sld>
 </file>
 
+<file path=ppt/slides/slide2.xml><?xml version="1.0" encoding="utf-8"?>
+<p:sld xmlns:a="http://schemas.openxmlformats.org/drawingml/2006/main" xmlns:r="http://schemas.openxmlformats.org/officeDocument/2006/relationships" xmlns:p="http://schemas.openxmlformats.org/presentationml/2006/main">
+  <p:cSld>
+    <p:spTree>
+      <p:nvGrpSpPr>
+        <p:cNvPr id="1" name=""/>
+        <p:cNvGrpSpPr/>
+        <p:nvPr/>
+      </p:nvGrpSpPr>
+      <p:grpSpPr>
+        <a:xfrm>
+          <a:off x="0" y="0"/>
+          <a:ext cx="0" cy="0"/>
+          <a:chOff x="0" y="0"/>
+          <a:chExt cx="0" cy="0"/>
+        </a:xfrm>
+      </p:grpSpPr>
+      <p:sp>
+        <p:nvSpPr>
+          <p:cNvPr id="8" name="슬라이드 번호 개체 틀 7"/>
+          <p:cNvSpPr>
+            <a:spLocks noGrp="1"/>
+          </p:cNvSpPr>
+          <p:nvPr>
+            <p:ph type="sldNum" sz="quarter" idx="12"/>
+          </p:nvPr>
+        </p:nvSpPr>
+        <p:spPr/>
+        <p:txBody>
+          <a:bodyPr/>
+          <a:lstStyle/>
+          <a:p>
+            <a:pPr rtl="0"/>
+            <a:fld id="{A3F31473-23EB-4724-8B59-FE6D21D89FA4}" type="slidenum">
+              <a:rPr lang="en-US" altLang="ko-KR" noProof="0" smtClean="0"/>
+              <a:t>2</a:t>
+            </a:fld>
+            <a:endParaRPr lang="en-US" altLang="ko-KR" noProof="0" dirty="0"/>
+          </a:p>
+        </p:txBody>
+      </p:sp>
+      <p:sp>
+        <p:nvSpPr>
+          <p:cNvPr id="2" name="직사각형 1"/>
+          <p:cNvSpPr/>
+          <p:nvPr/>
+        </p:nvSpPr>
+        <p:spPr>
+          <a:xfrm>
+            <a:off x="765820" y="764704"/>
+            <a:ext cx="3675622" cy="523220"/>
+          </a:xfrm>
+          <a:prstGeom prst="rect">
+            <a:avLst/>
+          </a:prstGeom>
+        </p:spPr>
+        <p:txBody>
+          <a:bodyPr wrap="none">
+            <a:spAutoFit/>
+          </a:bodyPr>
+          <a:lstStyle/>
+          <a:p>
+            <a:r>
+              <a:rPr lang="en-US" altLang="ko-KR" sz="2800" b="1" dirty="0">
+                <a:solidFill>
+                  <a:srgbClr val="313131"/>
+                </a:solidFill>
+                <a:latin typeface="PT Sans"/>
+              </a:rPr>
+              <a:t>Montecarlo Simulation</a:t>
+            </a:r>
+            <a:endParaRPr lang="ko-KR" altLang="en-US" sz="2800" b="1" dirty="0"/>
+          </a:p>
+        </p:txBody>
+      </p:sp>
+      <p:sp>
+        <p:nvSpPr>
+          <p:cNvPr id="4" name="TextBox 3">
+            <a:extLst>
+              <a:ext uri="{FF2B5EF4-FFF2-40B4-BE49-F238E27FC236}">
+                <a16:creationId xmlns:a16="http://schemas.microsoft.com/office/drawing/2014/main" id="{13810ABA-12DE-BC96-E33E-8F12E2CBC316}"/>
+              </a:ext>
+            </a:extLst>
+          </p:cNvPr>
+          <p:cNvSpPr txBox="1"/>
+          <p:nvPr/>
+        </p:nvSpPr>
+        <p:spPr>
+          <a:xfrm>
+            <a:off x="1125860" y="1484783"/>
+            <a:ext cx="10873208" cy="4664162"/>
+          </a:xfrm>
+          <a:prstGeom prst="rect">
+            <a:avLst/>
+          </a:prstGeom>
+          <a:noFill/>
+        </p:spPr>
+        <p:txBody>
+          <a:bodyPr wrap="square">
+            <a:spAutoFit/>
+          </a:bodyPr>
+          <a:lstStyle/>
+          <a:p>
+            <a:pPr marL="285750" indent="-285750">
+              <a:lnSpc>
+                <a:spcPct val="150000"/>
+              </a:lnSpc>
+              <a:buFont typeface="Wingdings" panose="05000000000000000000" pitchFamily="2" charset="2"/>
+              <a:buChar char="v"/>
+            </a:pPr>
+            <a:r>
+              <a:rPr lang="ko-KR" altLang="en-US" sz="2000" dirty="0">
+                <a:latin typeface="휴먼모음T" panose="02030504000101010101" pitchFamily="18" charset="-127"/>
+                <a:ea typeface="휴먼모음T" panose="02030504000101010101" pitchFamily="18" charset="-127"/>
+              </a:rPr>
+              <a:t>불확실한 결과를 예측하기 위해 반복적인 무작위 추출을 사용하는 통계적 기법</a:t>
+            </a:r>
+            <a:endParaRPr lang="en-US" altLang="ko-KR" sz="2000" dirty="0">
+              <a:latin typeface="휴먼모음T" panose="02030504000101010101" pitchFamily="18" charset="-127"/>
+              <a:ea typeface="휴먼모음T" panose="02030504000101010101" pitchFamily="18" charset="-127"/>
+            </a:endParaRPr>
+          </a:p>
+          <a:p>
+            <a:pPr marL="285750" indent="-285750">
+              <a:lnSpc>
+                <a:spcPct val="150000"/>
+              </a:lnSpc>
+              <a:buFont typeface="Wingdings" panose="05000000000000000000" pitchFamily="2" charset="2"/>
+              <a:buChar char="v"/>
+            </a:pPr>
+            <a:r>
+              <a:rPr lang="ko-KR" altLang="en-US" sz="2000" dirty="0">
+                <a:latin typeface="휴먼모음T" panose="02030504000101010101" pitchFamily="18" charset="-127"/>
+                <a:ea typeface="휴먼모음T" panose="02030504000101010101" pitchFamily="18" charset="-127"/>
+              </a:rPr>
+              <a:t>이름은 도박으로 유명한 모나코의 </a:t>
+            </a:r>
+            <a:r>
+              <a:rPr lang="en-US" altLang="ko-KR" sz="2000" dirty="0">
+                <a:latin typeface="휴먼모음T" panose="02030504000101010101" pitchFamily="18" charset="-127"/>
+                <a:ea typeface="휴먼모음T" panose="02030504000101010101" pitchFamily="18" charset="-127"/>
+              </a:rPr>
+              <a:t>'</a:t>
+            </a:r>
+            <a:r>
+              <a:rPr lang="ko-KR" altLang="en-US" sz="2000" dirty="0">
+                <a:latin typeface="휴먼모음T" panose="02030504000101010101" pitchFamily="18" charset="-127"/>
+                <a:ea typeface="휴먼모음T" panose="02030504000101010101" pitchFamily="18" charset="-127"/>
+              </a:rPr>
+              <a:t>몬테카를로</a:t>
+            </a:r>
+            <a:r>
+              <a:rPr lang="en-US" altLang="ko-KR" sz="2000" dirty="0">
+                <a:latin typeface="휴먼모음T" panose="02030504000101010101" pitchFamily="18" charset="-127"/>
+                <a:ea typeface="휴먼모음T" panose="02030504000101010101" pitchFamily="18" charset="-127"/>
+              </a:rPr>
+              <a:t>' </a:t>
+            </a:r>
+            <a:r>
+              <a:rPr lang="ko-KR" altLang="en-US" sz="2000" dirty="0">
+                <a:latin typeface="휴먼모음T" panose="02030504000101010101" pitchFamily="18" charset="-127"/>
+                <a:ea typeface="휴먼모음T" panose="02030504000101010101" pitchFamily="18" charset="-127"/>
+              </a:rPr>
+              <a:t>카지노에서</a:t>
+            </a:r>
+            <a:r>
+              <a:rPr lang="en-US" altLang="ko-KR" sz="2000" dirty="0">
+                <a:latin typeface="휴먼모음T" panose="02030504000101010101" pitchFamily="18" charset="-127"/>
+                <a:ea typeface="휴먼모음T" panose="02030504000101010101" pitchFamily="18" charset="-127"/>
+              </a:rPr>
+              <a:t>, </a:t>
+            </a:r>
+            <a:r>
+              <a:rPr lang="ko-KR" altLang="en-US" sz="2000" dirty="0">
+                <a:latin typeface="휴먼모음T" panose="02030504000101010101" pitchFamily="18" charset="-127"/>
+                <a:ea typeface="휴먼모음T" panose="02030504000101010101" pitchFamily="18" charset="-127"/>
+              </a:rPr>
+              <a:t>결과가 확률에 의존하는 도박처럼</a:t>
+            </a:r>
+            <a:r>
+              <a:rPr lang="en-US" altLang="ko-KR" sz="2000" dirty="0">
+                <a:latin typeface="휴먼모음T" panose="02030504000101010101" pitchFamily="18" charset="-127"/>
+                <a:ea typeface="휴먼모음T" panose="02030504000101010101" pitchFamily="18" charset="-127"/>
+              </a:rPr>
+              <a:t>, </a:t>
+            </a:r>
+            <a:r>
+              <a:rPr lang="ko-KR" altLang="en-US" sz="2000" dirty="0">
+                <a:latin typeface="휴먼모음T" panose="02030504000101010101" pitchFamily="18" charset="-127"/>
+                <a:ea typeface="휴먼모음T" panose="02030504000101010101" pitchFamily="18" charset="-127"/>
+              </a:rPr>
+              <a:t>수학적으로 계산하기 너무 복잡한 문제들을 수만 번의 가상 실험을 통해 그 근삿값을 찾아내는 방식</a:t>
+            </a:r>
+            <a:endParaRPr lang="en-US" altLang="ko-KR" sz="2000" dirty="0">
+              <a:latin typeface="휴먼모음T" panose="02030504000101010101" pitchFamily="18" charset="-127"/>
+              <a:ea typeface="휴먼모음T" panose="02030504000101010101" pitchFamily="18" charset="-127"/>
+            </a:endParaRPr>
+          </a:p>
+          <a:p>
+            <a:pPr marL="285750" indent="-285750">
+              <a:lnSpc>
+                <a:spcPct val="150000"/>
+              </a:lnSpc>
+              <a:buFont typeface="Wingdings" panose="05000000000000000000" pitchFamily="2" charset="2"/>
+              <a:buChar char="v"/>
+            </a:pPr>
+            <a:endParaRPr lang="en-US" altLang="ko-KR" sz="2000" dirty="0">
+              <a:latin typeface="휴먼모음T" panose="02030504000101010101" pitchFamily="18" charset="-127"/>
+              <a:ea typeface="휴먼모음T" panose="02030504000101010101" pitchFamily="18" charset="-127"/>
+            </a:endParaRPr>
+          </a:p>
+          <a:p>
+            <a:pPr marL="285750" indent="-285750">
+              <a:lnSpc>
+                <a:spcPct val="150000"/>
+              </a:lnSpc>
+              <a:buFont typeface="Wingdings" panose="05000000000000000000" pitchFamily="2" charset="2"/>
+              <a:buChar char="v"/>
+            </a:pPr>
+            <a:r>
+              <a:rPr lang="ko-KR" altLang="en-US" sz="2000" b="1" dirty="0" err="1">
+                <a:latin typeface="휴먼모음T" panose="02030504000101010101" pitchFamily="18" charset="-127"/>
+                <a:ea typeface="휴먼모음T" panose="02030504000101010101" pitchFamily="18" charset="-127"/>
+              </a:rPr>
+              <a:t>몬테카를로의</a:t>
+            </a:r>
+            <a:r>
+              <a:rPr lang="ko-KR" altLang="en-US" sz="2000" b="1" dirty="0">
+                <a:latin typeface="휴먼모음T" panose="02030504000101010101" pitchFamily="18" charset="-127"/>
+                <a:ea typeface="휴먼모음T" panose="02030504000101010101" pitchFamily="18" charset="-127"/>
+              </a:rPr>
+              <a:t> 작동 원리</a:t>
+            </a:r>
+          </a:p>
+          <a:p>
+            <a:pPr marL="742950" lvl="1" indent="-285750">
+              <a:lnSpc>
+                <a:spcPct val="150000"/>
+              </a:lnSpc>
+              <a:buFont typeface="Wingdings" panose="05000000000000000000" pitchFamily="2" charset="2"/>
+              <a:buChar char="v"/>
+            </a:pPr>
+            <a:r>
+              <a:rPr lang="ko-KR" altLang="en-US" sz="2000" b="1" dirty="0">
+                <a:latin typeface="휴먼모음T" panose="02030504000101010101" pitchFamily="18" charset="-127"/>
+                <a:ea typeface="휴먼모음T" panose="02030504000101010101" pitchFamily="18" charset="-127"/>
+              </a:rPr>
+              <a:t>변수 정의</a:t>
+            </a:r>
+            <a:r>
+              <a:rPr lang="en-US" altLang="ko-KR" sz="2000" b="1" dirty="0">
+                <a:latin typeface="휴먼모음T" panose="02030504000101010101" pitchFamily="18" charset="-127"/>
+                <a:ea typeface="휴먼모음T" panose="02030504000101010101" pitchFamily="18" charset="-127"/>
+              </a:rPr>
+              <a:t>:</a:t>
+            </a:r>
+            <a:r>
+              <a:rPr lang="ko-KR" altLang="en-US" sz="2000" dirty="0">
+                <a:latin typeface="휴먼모음T" panose="02030504000101010101" pitchFamily="18" charset="-127"/>
+                <a:ea typeface="휴먼모음T" panose="02030504000101010101" pitchFamily="18" charset="-127"/>
+              </a:rPr>
+              <a:t> 결과에 영향을 주는 불확실한 요소들을 정의</a:t>
+            </a:r>
+            <a:endParaRPr lang="en-US" altLang="ko-KR" sz="2000" dirty="0">
+              <a:latin typeface="휴먼모음T" panose="02030504000101010101" pitchFamily="18" charset="-127"/>
+              <a:ea typeface="휴먼모음T" panose="02030504000101010101" pitchFamily="18" charset="-127"/>
+            </a:endParaRPr>
+          </a:p>
+          <a:p>
+            <a:pPr marL="742950" lvl="1" indent="-285750">
+              <a:lnSpc>
+                <a:spcPct val="150000"/>
+              </a:lnSpc>
+              <a:buFont typeface="Wingdings" panose="05000000000000000000" pitchFamily="2" charset="2"/>
+              <a:buChar char="v"/>
+            </a:pPr>
+            <a:r>
+              <a:rPr lang="ko-KR" altLang="en-US" sz="2000" b="1" dirty="0">
+                <a:latin typeface="휴먼모음T" panose="02030504000101010101" pitchFamily="18" charset="-127"/>
+                <a:ea typeface="휴먼모음T" panose="02030504000101010101" pitchFamily="18" charset="-127"/>
+              </a:rPr>
+              <a:t>확률 분포 할당</a:t>
+            </a:r>
+            <a:r>
+              <a:rPr lang="en-US" altLang="ko-KR" sz="2000" b="1" dirty="0">
+                <a:latin typeface="휴먼모음T" panose="02030504000101010101" pitchFamily="18" charset="-127"/>
+                <a:ea typeface="휴먼모음T" panose="02030504000101010101" pitchFamily="18" charset="-127"/>
+              </a:rPr>
+              <a:t>:</a:t>
+            </a:r>
+            <a:r>
+              <a:rPr lang="ko-KR" altLang="en-US" sz="2000" dirty="0">
+                <a:latin typeface="휴먼모음T" panose="02030504000101010101" pitchFamily="18" charset="-127"/>
+                <a:ea typeface="휴먼모음T" panose="02030504000101010101" pitchFamily="18" charset="-127"/>
+              </a:rPr>
+              <a:t> 각 변수가 가질 수 있는 값의 범위와 확률</a:t>
+            </a:r>
+            <a:r>
+              <a:rPr lang="en-US" altLang="ko-KR" sz="2000" dirty="0">
+                <a:latin typeface="휴먼모음T" panose="02030504000101010101" pitchFamily="18" charset="-127"/>
+                <a:ea typeface="휴먼모음T" panose="02030504000101010101" pitchFamily="18" charset="-127"/>
+              </a:rPr>
+              <a:t>(</a:t>
+            </a:r>
+            <a:r>
+              <a:rPr lang="ko-KR" altLang="en-US" sz="2000" dirty="0">
+                <a:latin typeface="휴먼모음T" panose="02030504000101010101" pitchFamily="18" charset="-127"/>
+                <a:ea typeface="휴먼모음T" panose="02030504000101010101" pitchFamily="18" charset="-127"/>
+              </a:rPr>
+              <a:t>정규분포 등</a:t>
+            </a:r>
+            <a:r>
+              <a:rPr lang="en-US" altLang="ko-KR" sz="2000" dirty="0">
+                <a:latin typeface="휴먼모음T" panose="02030504000101010101" pitchFamily="18" charset="-127"/>
+                <a:ea typeface="휴먼모음T" panose="02030504000101010101" pitchFamily="18" charset="-127"/>
+              </a:rPr>
+              <a:t>)</a:t>
+            </a:r>
+            <a:r>
+              <a:rPr lang="ko-KR" altLang="en-US" sz="2000" dirty="0">
+                <a:latin typeface="휴먼모음T" panose="02030504000101010101" pitchFamily="18" charset="-127"/>
+                <a:ea typeface="휴먼모음T" panose="02030504000101010101" pitchFamily="18" charset="-127"/>
+              </a:rPr>
+              <a:t>을 설정</a:t>
+            </a:r>
+            <a:endParaRPr lang="en-US" altLang="ko-KR" sz="2000" dirty="0">
+              <a:latin typeface="휴먼모음T" panose="02030504000101010101" pitchFamily="18" charset="-127"/>
+              <a:ea typeface="휴먼모음T" panose="02030504000101010101" pitchFamily="18" charset="-127"/>
+            </a:endParaRPr>
+          </a:p>
+          <a:p>
+            <a:pPr marL="742950" lvl="1" indent="-285750">
+              <a:lnSpc>
+                <a:spcPct val="150000"/>
+              </a:lnSpc>
+              <a:buFont typeface="Wingdings" panose="05000000000000000000" pitchFamily="2" charset="2"/>
+              <a:buChar char="v"/>
+            </a:pPr>
+            <a:r>
+              <a:rPr lang="ko-KR" altLang="en-US" sz="2000" b="1" dirty="0">
+                <a:latin typeface="휴먼모음T" panose="02030504000101010101" pitchFamily="18" charset="-127"/>
+                <a:ea typeface="휴먼모음T" panose="02030504000101010101" pitchFamily="18" charset="-127"/>
+              </a:rPr>
+              <a:t>반복 실험</a:t>
+            </a:r>
+            <a:r>
+              <a:rPr lang="en-US" altLang="ko-KR" sz="2000" b="1" dirty="0">
+                <a:latin typeface="휴먼모음T" panose="02030504000101010101" pitchFamily="18" charset="-127"/>
+                <a:ea typeface="휴먼모음T" panose="02030504000101010101" pitchFamily="18" charset="-127"/>
+              </a:rPr>
+              <a:t>:</a:t>
+            </a:r>
+            <a:r>
+              <a:rPr lang="ko-KR" altLang="en-US" sz="2000" dirty="0">
+                <a:latin typeface="휴먼모음T" panose="02030504000101010101" pitchFamily="18" charset="-127"/>
+                <a:ea typeface="휴먼모음T" panose="02030504000101010101" pitchFamily="18" charset="-127"/>
+              </a:rPr>
+              <a:t> 컴퓨터를 이용해 무작위 값을 입력하며 수천</a:t>
+            </a:r>
+            <a:r>
+              <a:rPr lang="en-US" altLang="ko-KR" sz="2000" dirty="0">
+                <a:latin typeface="휴먼모음T" panose="02030504000101010101" pitchFamily="18" charset="-127"/>
+                <a:ea typeface="휴먼모음T" panose="02030504000101010101" pitchFamily="18" charset="-127"/>
+              </a:rPr>
+              <a:t>, </a:t>
+            </a:r>
+            <a:r>
+              <a:rPr lang="ko-KR" altLang="en-US" sz="2000" dirty="0">
+                <a:latin typeface="휴먼모음T" panose="02030504000101010101" pitchFamily="18" charset="-127"/>
+                <a:ea typeface="휴먼모음T" panose="02030504000101010101" pitchFamily="18" charset="-127"/>
+              </a:rPr>
+              <a:t>수만 번의 시뮬레이션을 실행</a:t>
+            </a:r>
+            <a:endParaRPr lang="en-US" altLang="ko-KR" sz="2000" dirty="0">
+              <a:latin typeface="휴먼모음T" panose="02030504000101010101" pitchFamily="18" charset="-127"/>
+              <a:ea typeface="휴먼모음T" panose="02030504000101010101" pitchFamily="18" charset="-127"/>
+            </a:endParaRPr>
+          </a:p>
+          <a:p>
+            <a:pPr marL="742950" lvl="1" indent="-285750">
+              <a:lnSpc>
+                <a:spcPct val="150000"/>
+              </a:lnSpc>
+              <a:buFont typeface="Wingdings" panose="05000000000000000000" pitchFamily="2" charset="2"/>
+              <a:buChar char="v"/>
+            </a:pPr>
+            <a:r>
+              <a:rPr lang="ko-KR" altLang="en-US" sz="2000" b="1" dirty="0">
+                <a:latin typeface="휴먼모음T" panose="02030504000101010101" pitchFamily="18" charset="-127"/>
+                <a:ea typeface="휴먼모음T" panose="02030504000101010101" pitchFamily="18" charset="-127"/>
+              </a:rPr>
+              <a:t>결과 분석</a:t>
+            </a:r>
+            <a:r>
+              <a:rPr lang="en-US" altLang="ko-KR" sz="2000" b="1" dirty="0">
+                <a:latin typeface="휴먼모음T" panose="02030504000101010101" pitchFamily="18" charset="-127"/>
+                <a:ea typeface="휴먼모음T" panose="02030504000101010101" pitchFamily="18" charset="-127"/>
+              </a:rPr>
+              <a:t>:</a:t>
+            </a:r>
+            <a:r>
+              <a:rPr lang="ko-KR" altLang="en-US" sz="2000" dirty="0">
+                <a:latin typeface="휴먼모음T" panose="02030504000101010101" pitchFamily="18" charset="-127"/>
+                <a:ea typeface="휴먼모음T" panose="02030504000101010101" pitchFamily="18" charset="-127"/>
+              </a:rPr>
+              <a:t> 도출된 수많은 결과값의 평균이나 분포를 통해 최종 결과를 예측</a:t>
+            </a:r>
+            <a:endParaRPr lang="en-US" altLang="ko-KR" sz="2000" dirty="0">
+              <a:latin typeface="휴먼모음T" panose="02030504000101010101" pitchFamily="18" charset="-127"/>
+              <a:ea typeface="휴먼모음T" panose="02030504000101010101" pitchFamily="18" charset="-127"/>
+            </a:endParaRPr>
+          </a:p>
+          <a:p>
+            <a:pPr marL="285750" indent="-285750">
+              <a:lnSpc>
+                <a:spcPct val="150000"/>
+              </a:lnSpc>
+              <a:buFont typeface="Wingdings" panose="05000000000000000000" pitchFamily="2" charset="2"/>
+              <a:buChar char="v"/>
+            </a:pPr>
+            <a:endParaRPr lang="ko-KR" altLang="en-US" sz="2000" dirty="0">
+              <a:latin typeface="휴먼모음T" panose="02030504000101010101" pitchFamily="18" charset="-127"/>
+              <a:ea typeface="휴먼모음T" panose="02030504000101010101" pitchFamily="18" charset="-127"/>
+            </a:endParaRPr>
+          </a:p>
+        </p:txBody>
+      </p:sp>
+    </p:spTree>
+    <p:extLst>
+      <p:ext uri="{BB962C8B-B14F-4D97-AF65-F5344CB8AC3E}">
+        <p14:creationId xmlns:p14="http://schemas.microsoft.com/office/powerpoint/2010/main" val="1126723429"/>
+      </p:ext>
+    </p:extLst>
+  </p:cSld>
+  <p:clrMapOvr>
+    <a:masterClrMapping/>
+  </p:clrMapOvr>
+  <mc:AlternateContent xmlns:mc="http://schemas.openxmlformats.org/markup-compatibility/2006" xmlns:p14="http://schemas.microsoft.com/office/powerpoint/2010/main">
+    <mc:Choice Requires="p14">
+      <p:transition spd="med" p14:dur="700">
+        <p:fade/>
+      </p:transition>
+    </mc:Choice>
+    <mc:Fallback xmlns="">
+      <p:transition spd="med">
+        <p:fade/>
+      </p:transition>
+    </mc:Fallback>
+  </mc:AlternateContent>
+</p:sld>
+</file>
+
+<file path=ppt/slides/slide3.xml><?xml version="1.0" encoding="utf-8"?>
+<p:sld xmlns:a="http://schemas.openxmlformats.org/drawingml/2006/main" xmlns:r="http://schemas.openxmlformats.org/officeDocument/2006/relationships" xmlns:p="http://schemas.openxmlformats.org/presentationml/2006/main">
+  <p:cSld>
+    <p:spTree>
+      <p:nvGrpSpPr>
+        <p:cNvPr id="1" name="">
+          <a:extLst>
+            <a:ext uri="{FF2B5EF4-FFF2-40B4-BE49-F238E27FC236}">
+              <a16:creationId xmlns:a16="http://schemas.microsoft.com/office/drawing/2014/main" id="{4F32D5AF-0F51-91DE-64BD-5E17CEF9AA79}"/>
+            </a:ext>
+          </a:extLst>
+        </p:cNvPr>
+        <p:cNvGrpSpPr/>
+        <p:nvPr/>
+      </p:nvGrpSpPr>
+      <p:grpSpPr>
+        <a:xfrm>
+          <a:off x="0" y="0"/>
+          <a:ext cx="0" cy="0"/>
+          <a:chOff x="0" y="0"/>
+          <a:chExt cx="0" cy="0"/>
+        </a:xfrm>
+      </p:grpSpPr>
+      <p:sp>
+        <p:nvSpPr>
+          <p:cNvPr id="2" name="슬라이드 번호 개체 틀 1">
+            <a:extLst>
+              <a:ext uri="{FF2B5EF4-FFF2-40B4-BE49-F238E27FC236}">
+                <a16:creationId xmlns:a16="http://schemas.microsoft.com/office/drawing/2014/main" id="{D1B51CDD-C849-F07D-D7BE-8E0C6C436C59}"/>
+              </a:ext>
+            </a:extLst>
+          </p:cNvPr>
+          <p:cNvSpPr>
+            <a:spLocks noGrp="1"/>
+          </p:cNvSpPr>
+          <p:nvPr>
+            <p:ph type="sldNum" sz="quarter" idx="12"/>
+          </p:nvPr>
+        </p:nvSpPr>
+        <p:spPr/>
+        <p:txBody>
+          <a:bodyPr/>
+          <a:lstStyle/>
+          <a:p>
+            <a:pPr rtl="0"/>
+            <a:fld id="{A3F31473-23EB-4724-8B59-FE6D21D89FA4}" type="slidenum">
+              <a:rPr lang="en-US" altLang="ko-KR" noProof="0" smtClean="0"/>
+              <a:t>3</a:t>
+            </a:fld>
+            <a:endParaRPr lang="en-US" altLang="ko-KR" noProof="0" dirty="0"/>
+          </a:p>
+        </p:txBody>
+      </p:sp>
+      <p:sp>
+        <p:nvSpPr>
+          <p:cNvPr id="4" name="TextBox 3">
+            <a:extLst>
+              <a:ext uri="{FF2B5EF4-FFF2-40B4-BE49-F238E27FC236}">
+                <a16:creationId xmlns:a16="http://schemas.microsoft.com/office/drawing/2014/main" id="{E724D8FB-4BA4-B532-2690-FF91AAEE20BE}"/>
+              </a:ext>
+            </a:extLst>
+          </p:cNvPr>
+          <p:cNvSpPr txBox="1"/>
+          <p:nvPr/>
+        </p:nvSpPr>
+        <p:spPr>
+          <a:xfrm>
+            <a:off x="765820" y="1196752"/>
+            <a:ext cx="11233248" cy="970843"/>
+          </a:xfrm>
+          <a:prstGeom prst="rect">
+            <a:avLst/>
+          </a:prstGeom>
+          <a:solidFill>
+            <a:schemeClr val="tx1">
+              <a:lumMod val="20000"/>
+              <a:lumOff val="80000"/>
+            </a:schemeClr>
+          </a:solidFill>
+        </p:spPr>
+        <p:txBody>
+          <a:bodyPr wrap="square" rtlCol="0">
+            <a:spAutoFit/>
+          </a:bodyPr>
+          <a:lstStyle/>
+          <a:p>
+            <a:pPr marL="285750" indent="-285750">
+              <a:lnSpc>
+                <a:spcPct val="150000"/>
+              </a:lnSpc>
+              <a:buFont typeface="Wingdings" panose="05000000000000000000" pitchFamily="2" charset="2"/>
+              <a:buChar char="v"/>
+            </a:pPr>
+            <a:r>
+              <a:rPr lang="ko-KR" altLang="en-US" sz="2000" dirty="0">
+                <a:latin typeface="휴먼모음T" panose="02030504000101010101" pitchFamily="18" charset="-127"/>
+                <a:ea typeface="휴먼모음T" panose="02030504000101010101" pitchFamily="18" charset="-127"/>
+              </a:rPr>
+              <a:t>원주율 구하기</a:t>
+            </a:r>
+            <a:endParaRPr lang="en-US" altLang="ko-KR" sz="2000" dirty="0">
+              <a:latin typeface="휴먼모음T" panose="02030504000101010101" pitchFamily="18" charset="-127"/>
+              <a:ea typeface="휴먼모음T" panose="02030504000101010101" pitchFamily="18" charset="-127"/>
+            </a:endParaRPr>
+          </a:p>
+          <a:p>
+            <a:pPr marL="285750" indent="-285750">
+              <a:lnSpc>
+                <a:spcPct val="150000"/>
+              </a:lnSpc>
+              <a:buFont typeface="Wingdings" panose="05000000000000000000" pitchFamily="2" charset="2"/>
+              <a:buChar char="v"/>
+            </a:pPr>
+            <a:r>
+              <a:rPr lang="ko-KR" altLang="en-US" sz="2000" dirty="0">
+                <a:latin typeface="휴먼모음T" panose="02030504000101010101" pitchFamily="18" charset="-127"/>
+                <a:ea typeface="휴먼모음T" panose="02030504000101010101" pitchFamily="18" charset="-127"/>
+              </a:rPr>
+              <a:t>원의 면접 구하기</a:t>
+            </a:r>
+            <a:endParaRPr lang="en-US" altLang="ko-KR" sz="2000" dirty="0">
+              <a:latin typeface="휴먼모음T" panose="02030504000101010101" pitchFamily="18" charset="-127"/>
+              <a:ea typeface="휴먼모음T" panose="02030504000101010101" pitchFamily="18" charset="-127"/>
+            </a:endParaRPr>
+          </a:p>
+        </p:txBody>
+      </p:sp>
+      <p:sp>
+        <p:nvSpPr>
+          <p:cNvPr id="9" name="TextBox 8">
+            <a:extLst>
+              <a:ext uri="{FF2B5EF4-FFF2-40B4-BE49-F238E27FC236}">
+                <a16:creationId xmlns:a16="http://schemas.microsoft.com/office/drawing/2014/main" id="{92CE8694-F9D5-0985-6634-DA4CC7CB87C6}"/>
+              </a:ext>
+            </a:extLst>
+          </p:cNvPr>
+          <p:cNvSpPr txBox="1"/>
+          <p:nvPr/>
+        </p:nvSpPr>
+        <p:spPr>
+          <a:xfrm>
+            <a:off x="117748" y="260648"/>
+            <a:ext cx="2592288" cy="584775"/>
+          </a:xfrm>
+          <a:prstGeom prst="rect">
+            <a:avLst/>
+          </a:prstGeom>
+          <a:noFill/>
+        </p:spPr>
+        <p:txBody>
+          <a:bodyPr wrap="square" rtlCol="0">
+            <a:spAutoFit/>
+          </a:bodyPr>
+          <a:lstStyle/>
+          <a:p>
+            <a:r>
+              <a:rPr lang="ko-KR" altLang="en-US" sz="3200" b="1"/>
+              <a:t>문제 풀이</a:t>
+            </a:r>
+          </a:p>
+        </p:txBody>
+      </p:sp>
+    </p:spTree>
+    <p:extLst>
+      <p:ext uri="{BB962C8B-B14F-4D97-AF65-F5344CB8AC3E}">
+        <p14:creationId xmlns:p14="http://schemas.microsoft.com/office/powerpoint/2010/main" val="2336897357"/>
+      </p:ext>
+    </p:extLst>
+  </p:cSld>
+  <p:clrMapOvr>
+    <a:masterClrMapping/>
+  </p:clrMapOvr>
+  <mc:AlternateContent xmlns:mc="http://schemas.openxmlformats.org/markup-compatibility/2006" xmlns:p14="http://schemas.microsoft.com/office/powerpoint/2010/main">
+    <mc:Choice Requires="p14">
+      <p:transition spd="med" p14:dur="700">
+        <p:fade/>
+      </p:transition>
+    </mc:Choice>
+    <mc:Fallback xmlns="">
+      <p:transition spd="med">
+        <p:fade/>
+      </p:transition>
+    </mc:Fallback>
+  </mc:AlternateContent>
+</p:sld>
+</file>
+
+<file path=ppt/slides/slide4.xml><?xml version="1.0" encoding="utf-8"?>
+<p:sld xmlns:a="http://schemas.openxmlformats.org/drawingml/2006/main" xmlns:r="http://schemas.openxmlformats.org/officeDocument/2006/relationships" xmlns:p="http://schemas.openxmlformats.org/presentationml/2006/main">
+  <p:cSld>
+    <p:spTree>
+      <p:nvGrpSpPr>
+        <p:cNvPr id="1" name="">
+          <a:extLst>
+            <a:ext uri="{FF2B5EF4-FFF2-40B4-BE49-F238E27FC236}">
+              <a16:creationId xmlns:a16="http://schemas.microsoft.com/office/drawing/2014/main" id="{9F3A03C4-9F32-8658-57A1-8179E087BD2F}"/>
+            </a:ext>
+          </a:extLst>
+        </p:cNvPr>
+        <p:cNvGrpSpPr/>
+        <p:nvPr/>
+      </p:nvGrpSpPr>
+      <p:grpSpPr>
+        <a:xfrm>
+          <a:off x="0" y="0"/>
+          <a:ext cx="0" cy="0"/>
+          <a:chOff x="0" y="0"/>
+          <a:chExt cx="0" cy="0"/>
+        </a:xfrm>
+      </p:grpSpPr>
+      <p:sp>
+        <p:nvSpPr>
+          <p:cNvPr id="2" name="슬라이드 번호 개체 틀 1">
+            <a:extLst>
+              <a:ext uri="{FF2B5EF4-FFF2-40B4-BE49-F238E27FC236}">
+                <a16:creationId xmlns:a16="http://schemas.microsoft.com/office/drawing/2014/main" id="{CB10A560-CAC8-7DA2-E171-6514006BFA84}"/>
+              </a:ext>
+            </a:extLst>
+          </p:cNvPr>
+          <p:cNvSpPr>
+            <a:spLocks noGrp="1"/>
+          </p:cNvSpPr>
+          <p:nvPr>
+            <p:ph type="sldNum" sz="quarter" idx="12"/>
+          </p:nvPr>
+        </p:nvSpPr>
+        <p:spPr/>
+        <p:txBody>
+          <a:bodyPr/>
+          <a:lstStyle/>
+          <a:p>
+            <a:pPr rtl="0"/>
+            <a:fld id="{A3F31473-23EB-4724-8B59-FE6D21D89FA4}" type="slidenum">
+              <a:rPr lang="en-US" altLang="ko-KR" noProof="0" smtClean="0"/>
+              <a:t>4</a:t>
+            </a:fld>
+            <a:endParaRPr lang="en-US" altLang="ko-KR" noProof="0" dirty="0"/>
+          </a:p>
+        </p:txBody>
+      </p:sp>
+      <p:sp>
+        <p:nvSpPr>
+          <p:cNvPr id="4" name="TextBox 3">
+            <a:extLst>
+              <a:ext uri="{FF2B5EF4-FFF2-40B4-BE49-F238E27FC236}">
+                <a16:creationId xmlns:a16="http://schemas.microsoft.com/office/drawing/2014/main" id="{4C1CC16D-7C9C-2F71-E9C9-02A41D849637}"/>
+              </a:ext>
+            </a:extLst>
+          </p:cNvPr>
+          <p:cNvSpPr txBox="1"/>
+          <p:nvPr/>
+        </p:nvSpPr>
+        <p:spPr>
+          <a:xfrm>
+            <a:off x="765820" y="1196752"/>
+            <a:ext cx="11233248" cy="970843"/>
+          </a:xfrm>
+          <a:prstGeom prst="rect">
+            <a:avLst/>
+          </a:prstGeom>
+          <a:solidFill>
+            <a:schemeClr val="tx1">
+              <a:lumMod val="20000"/>
+              <a:lumOff val="80000"/>
+            </a:schemeClr>
+          </a:solidFill>
+        </p:spPr>
+        <p:txBody>
+          <a:bodyPr wrap="square" rtlCol="0">
+            <a:spAutoFit/>
+          </a:bodyPr>
+          <a:lstStyle/>
+          <a:p>
+            <a:pPr marL="285750" indent="-285750">
+              <a:lnSpc>
+                <a:spcPct val="150000"/>
+              </a:lnSpc>
+              <a:buFont typeface="Wingdings" panose="05000000000000000000" pitchFamily="2" charset="2"/>
+              <a:buChar char="v"/>
+            </a:pPr>
+            <a:r>
+              <a:rPr lang="ko-KR" altLang="en-US" sz="2000" dirty="0">
+                <a:latin typeface="휴먼모음T" panose="02030504000101010101" pitchFamily="18" charset="-127"/>
+                <a:ea typeface="휴먼모음T" panose="02030504000101010101" pitchFamily="18" charset="-127"/>
+              </a:rPr>
+              <a:t>표본 </a:t>
+            </a:r>
+            <a:r>
+              <a:rPr lang="en-US" altLang="ko-KR" sz="2000" dirty="0">
+                <a:latin typeface="휴먼모음T" panose="02030504000101010101" pitchFamily="18" charset="-127"/>
+                <a:ea typeface="휴먼모음T" panose="02030504000101010101" pitchFamily="18" charset="-127"/>
+              </a:rPr>
+              <a:t>1000</a:t>
+            </a:r>
+            <a:r>
+              <a:rPr lang="ko-KR" altLang="en-US" sz="2000" dirty="0">
+                <a:latin typeface="휴먼모음T" panose="02030504000101010101" pitchFamily="18" charset="-127"/>
+                <a:ea typeface="휴먼모음T" panose="02030504000101010101" pitchFamily="18" charset="-127"/>
+              </a:rPr>
+              <a:t>개에서 </a:t>
+            </a:r>
+            <a:r>
+              <a:rPr lang="ko-KR" altLang="en-US" sz="2000" dirty="0" err="1">
+                <a:latin typeface="휴먼모음T" panose="02030504000101010101" pitchFamily="18" charset="-127"/>
+                <a:ea typeface="휴먼모음T" panose="02030504000101010101" pitchFamily="18" charset="-127"/>
+              </a:rPr>
+              <a:t>재표본추출을</a:t>
+            </a:r>
+            <a:r>
+              <a:rPr lang="ko-KR" altLang="en-US" sz="2000" dirty="0">
+                <a:latin typeface="휴먼모음T" panose="02030504000101010101" pitchFamily="18" charset="-127"/>
+                <a:ea typeface="휴먼모음T" panose="02030504000101010101" pitchFamily="18" charset="-127"/>
+              </a:rPr>
+              <a:t> 복원추출</a:t>
+            </a:r>
+            <a:r>
+              <a:rPr lang="en-US" altLang="ko-KR" sz="2000" dirty="0">
+                <a:latin typeface="휴먼모음T" panose="02030504000101010101" pitchFamily="18" charset="-127"/>
+                <a:ea typeface="휴먼모음T" panose="02030504000101010101" pitchFamily="18" charset="-127"/>
+              </a:rPr>
+              <a:t>(replace=True)</a:t>
+            </a:r>
+            <a:r>
+              <a:rPr lang="ko-KR" altLang="en-US" sz="2000" dirty="0">
+                <a:latin typeface="휴먼모음T" panose="02030504000101010101" pitchFamily="18" charset="-127"/>
+                <a:ea typeface="휴먼모음T" panose="02030504000101010101" pitchFamily="18" charset="-127"/>
+              </a:rPr>
+              <a:t>방식으로</a:t>
+            </a:r>
+            <a:r>
+              <a:rPr lang="en-US" altLang="ko-KR" sz="2000" dirty="0">
+                <a:latin typeface="휴먼모음T" panose="02030504000101010101" pitchFamily="18" charset="-127"/>
+                <a:ea typeface="휴먼모음T" panose="02030504000101010101" pitchFamily="18" charset="-127"/>
+              </a:rPr>
+              <a:t> 100</a:t>
+            </a:r>
+            <a:r>
+              <a:rPr lang="ko-KR" altLang="en-US" sz="2000" dirty="0">
+                <a:latin typeface="휴먼모음T" panose="02030504000101010101" pitchFamily="18" charset="-127"/>
+                <a:ea typeface="휴먼모음T" panose="02030504000101010101" pitchFamily="18" charset="-127"/>
+              </a:rPr>
+              <a:t>개를 무한히 </a:t>
+            </a:r>
+            <a:r>
+              <a:rPr lang="ko-KR" altLang="en-US" sz="2000" dirty="0" err="1">
+                <a:latin typeface="휴먼모음T" panose="02030504000101010101" pitchFamily="18" charset="-127"/>
+                <a:ea typeface="휴먼모음T" panose="02030504000101010101" pitchFamily="18" charset="-127"/>
+              </a:rPr>
+              <a:t>재표본</a:t>
+            </a:r>
+            <a:r>
+              <a:rPr lang="ko-KR" altLang="en-US" sz="2000" dirty="0">
+                <a:latin typeface="휴먼모음T" panose="02030504000101010101" pitchFamily="18" charset="-127"/>
+                <a:ea typeface="휴먼모음T" panose="02030504000101010101" pitchFamily="18" charset="-127"/>
+              </a:rPr>
+              <a:t> 추출하여 평균과 분산에 대해 토론하라 </a:t>
+            </a:r>
+            <a:endParaRPr lang="en-US" altLang="ko-KR" sz="2000" dirty="0">
+              <a:latin typeface="휴먼모음T" panose="02030504000101010101" pitchFamily="18" charset="-127"/>
+              <a:ea typeface="휴먼모음T" panose="02030504000101010101" pitchFamily="18" charset="-127"/>
+            </a:endParaRPr>
+          </a:p>
+        </p:txBody>
+      </p:sp>
+      <p:sp>
+        <p:nvSpPr>
+          <p:cNvPr id="9" name="TextBox 8">
+            <a:extLst>
+              <a:ext uri="{FF2B5EF4-FFF2-40B4-BE49-F238E27FC236}">
+                <a16:creationId xmlns:a16="http://schemas.microsoft.com/office/drawing/2014/main" id="{5419691D-5BF7-99F5-D054-700096553189}"/>
+              </a:ext>
+            </a:extLst>
+          </p:cNvPr>
+          <p:cNvSpPr txBox="1"/>
+          <p:nvPr/>
+        </p:nvSpPr>
+        <p:spPr>
+          <a:xfrm>
+            <a:off x="117748" y="260648"/>
+            <a:ext cx="2592288" cy="584775"/>
+          </a:xfrm>
+          <a:prstGeom prst="rect">
+            <a:avLst/>
+          </a:prstGeom>
+          <a:noFill/>
+        </p:spPr>
+        <p:txBody>
+          <a:bodyPr wrap="square" rtlCol="0">
+            <a:spAutoFit/>
+          </a:bodyPr>
+          <a:lstStyle/>
+          <a:p>
+            <a:r>
+              <a:rPr lang="ko-KR" altLang="en-US" sz="3200" b="1"/>
+              <a:t>문제 풀이</a:t>
+            </a:r>
+          </a:p>
+        </p:txBody>
+      </p:sp>
+      <p:pic>
+        <p:nvPicPr>
+          <p:cNvPr id="5" name="그림 4">
+            <a:extLst>
+              <a:ext uri="{FF2B5EF4-FFF2-40B4-BE49-F238E27FC236}">
+                <a16:creationId xmlns:a16="http://schemas.microsoft.com/office/drawing/2014/main" id="{153D10DE-54F1-5E83-B617-EB567D2F7BCF}"/>
+              </a:ext>
+            </a:extLst>
+          </p:cNvPr>
+          <p:cNvPicPr>
+            <a:picLocks noChangeAspect="1"/>
+          </p:cNvPicPr>
+          <p:nvPr/>
+        </p:nvPicPr>
+        <p:blipFill>
+          <a:blip r:embed="rId3"/>
+          <a:stretch>
+            <a:fillRect/>
+          </a:stretch>
+        </p:blipFill>
+        <p:spPr>
+          <a:xfrm>
+            <a:off x="2133972" y="2533040"/>
+            <a:ext cx="8566741" cy="4074601"/>
+          </a:xfrm>
+          <a:prstGeom prst="rect">
+            <a:avLst/>
+          </a:prstGeom>
+        </p:spPr>
+      </p:pic>
+    </p:spTree>
+    <p:extLst>
+      <p:ext uri="{BB962C8B-B14F-4D97-AF65-F5344CB8AC3E}">
+        <p14:creationId xmlns:p14="http://schemas.microsoft.com/office/powerpoint/2010/main" val="3184162328"/>
+      </p:ext>
+    </p:extLst>
+  </p:cSld>
+  <p:clrMapOvr>
+    <a:masterClrMapping/>
+  </p:clrMapOvr>
+  <mc:AlternateContent xmlns:mc="http://schemas.openxmlformats.org/markup-compatibility/2006" xmlns:p14="http://schemas.microsoft.com/office/powerpoint/2010/main">
+    <mc:Choice Requires="p14">
+      <p:transition spd="med" p14:dur="700">
+        <p:fade/>
+      </p:transition>
+    </mc:Choice>
+    <mc:Fallback xmlns="">
+      <p:transition spd="med">
+        <p:fade/>
+      </p:transition>
+    </mc:Fallback>
+  </mc:AlternateContent>
+</p:sld>
+</file>
+
+<file path=ppt/slides/slide5.xml><?xml version="1.0" encoding="utf-8"?>
+<p:sld xmlns:a="http://schemas.openxmlformats.org/drawingml/2006/main" xmlns:r="http://schemas.openxmlformats.org/officeDocument/2006/relationships" xmlns:p="http://schemas.openxmlformats.org/presentationml/2006/main">
+  <p:cSld>
+    <p:spTree>
+      <p:nvGrpSpPr>
+        <p:cNvPr id="1" name="">
+          <a:extLst>
+            <a:ext uri="{FF2B5EF4-FFF2-40B4-BE49-F238E27FC236}">
+              <a16:creationId xmlns:a16="http://schemas.microsoft.com/office/drawing/2014/main" id="{E57C9014-F20D-7B7E-82F4-291B35DDF201}"/>
+            </a:ext>
+          </a:extLst>
+        </p:cNvPr>
+        <p:cNvGrpSpPr/>
+        <p:nvPr/>
+      </p:nvGrpSpPr>
+      <p:grpSpPr>
+        <a:xfrm>
+          <a:off x="0" y="0"/>
+          <a:ext cx="0" cy="0"/>
+          <a:chOff x="0" y="0"/>
+          <a:chExt cx="0" cy="0"/>
+        </a:xfrm>
+      </p:grpSpPr>
+      <p:sp>
+        <p:nvSpPr>
+          <p:cNvPr id="2" name="슬라이드 번호 개체 틀 1">
+            <a:extLst>
+              <a:ext uri="{FF2B5EF4-FFF2-40B4-BE49-F238E27FC236}">
+                <a16:creationId xmlns:a16="http://schemas.microsoft.com/office/drawing/2014/main" id="{7CDD9F21-3F8F-61DF-D1E4-E7AEA20F5D5C}"/>
+              </a:ext>
+            </a:extLst>
+          </p:cNvPr>
+          <p:cNvSpPr>
+            <a:spLocks noGrp="1"/>
+          </p:cNvSpPr>
+          <p:nvPr>
+            <p:ph type="sldNum" sz="quarter" idx="12"/>
+          </p:nvPr>
+        </p:nvSpPr>
+        <p:spPr/>
+        <p:txBody>
+          <a:bodyPr/>
+          <a:lstStyle/>
+          <a:p>
+            <a:pPr rtl="0"/>
+            <a:fld id="{A3F31473-23EB-4724-8B59-FE6D21D89FA4}" type="slidenum">
+              <a:rPr lang="en-US" altLang="ko-KR" noProof="0" smtClean="0"/>
+              <a:t>5</a:t>
+            </a:fld>
+            <a:endParaRPr lang="en-US" altLang="ko-KR" noProof="0" dirty="0"/>
+          </a:p>
+        </p:txBody>
+      </p:sp>
+      <p:sp>
+        <p:nvSpPr>
+          <p:cNvPr id="4" name="TextBox 3">
+            <a:extLst>
+              <a:ext uri="{FF2B5EF4-FFF2-40B4-BE49-F238E27FC236}">
+                <a16:creationId xmlns:a16="http://schemas.microsoft.com/office/drawing/2014/main" id="{A35A16EB-E2DE-F31D-3EA0-A223294CA89B}"/>
+              </a:ext>
+            </a:extLst>
+          </p:cNvPr>
+          <p:cNvSpPr txBox="1"/>
+          <p:nvPr/>
+        </p:nvSpPr>
+        <p:spPr>
+          <a:xfrm>
+            <a:off x="765820" y="1196752"/>
+            <a:ext cx="11233248" cy="509178"/>
+          </a:xfrm>
+          <a:prstGeom prst="rect">
+            <a:avLst/>
+          </a:prstGeom>
+          <a:solidFill>
+            <a:schemeClr val="tx1">
+              <a:lumMod val="20000"/>
+              <a:lumOff val="80000"/>
+            </a:schemeClr>
+          </a:solidFill>
+        </p:spPr>
+        <p:txBody>
+          <a:bodyPr wrap="square" rtlCol="0">
+            <a:spAutoFit/>
+          </a:bodyPr>
+          <a:lstStyle/>
+          <a:p>
+            <a:pPr marL="285750" indent="-285750">
+              <a:lnSpc>
+                <a:spcPct val="150000"/>
+              </a:lnSpc>
+              <a:buFont typeface="Wingdings" panose="05000000000000000000" pitchFamily="2" charset="2"/>
+              <a:buChar char="v"/>
+            </a:pPr>
+            <a:r>
+              <a:rPr lang="ko-KR" altLang="en-US" sz="2000" dirty="0">
+                <a:latin typeface="휴먼모음T" panose="02030504000101010101" pitchFamily="18" charset="-127"/>
+                <a:ea typeface="휴먼모음T" panose="02030504000101010101" pitchFamily="18" charset="-127"/>
+              </a:rPr>
+              <a:t>시간</a:t>
+            </a:r>
+            <a:r>
+              <a:rPr lang="en-US" altLang="ko-KR" sz="2000" dirty="0">
+                <a:latin typeface="휴먼모음T" panose="02030504000101010101" pitchFamily="18" charset="-127"/>
+                <a:ea typeface="휴먼모음T" panose="02030504000101010101" pitchFamily="18" charset="-127"/>
+              </a:rPr>
+              <a:t>, </a:t>
+            </a:r>
+            <a:r>
+              <a:rPr lang="ko-KR" altLang="en-US" sz="2000" dirty="0">
+                <a:latin typeface="휴먼모음T" panose="02030504000101010101" pitchFamily="18" charset="-127"/>
+                <a:ea typeface="휴먼모음T" panose="02030504000101010101" pitchFamily="18" charset="-127"/>
+              </a:rPr>
+              <a:t>거리</a:t>
+            </a:r>
+            <a:r>
+              <a:rPr lang="en-US" altLang="ko-KR" sz="2000" dirty="0">
+                <a:latin typeface="휴먼모음T" panose="02030504000101010101" pitchFamily="18" charset="-127"/>
+                <a:ea typeface="휴먼모음T" panose="02030504000101010101" pitchFamily="18" charset="-127"/>
+              </a:rPr>
+              <a:t>, </a:t>
+            </a:r>
+            <a:r>
+              <a:rPr lang="ko-KR" altLang="en-US" sz="2000" dirty="0">
+                <a:latin typeface="휴먼모음T" panose="02030504000101010101" pitchFamily="18" charset="-127"/>
+                <a:ea typeface="휴먼모음T" panose="02030504000101010101" pitchFamily="18" charset="-127"/>
+              </a:rPr>
+              <a:t>속도</a:t>
+            </a:r>
+            <a:r>
+              <a:rPr lang="en-US" altLang="ko-KR" sz="2000" dirty="0">
+                <a:latin typeface="휴먼모음T" panose="02030504000101010101" pitchFamily="18" charset="-127"/>
+                <a:ea typeface="휴먼모음T" panose="02030504000101010101" pitchFamily="18" charset="-127"/>
+              </a:rPr>
+              <a:t>, </a:t>
+            </a:r>
+            <a:r>
+              <a:rPr lang="ko-KR" altLang="en-US" sz="2000" dirty="0">
+                <a:latin typeface="휴먼모음T" panose="02030504000101010101" pitchFamily="18" charset="-127"/>
+                <a:ea typeface="휴먼모음T" panose="02030504000101010101" pitchFamily="18" charset="-127"/>
+              </a:rPr>
+              <a:t>가속도에 대한 시뮬레이션</a:t>
+            </a:r>
+            <a:r>
+              <a:rPr lang="en-US" altLang="ko-KR" sz="2000" dirty="0">
+                <a:latin typeface="휴먼모음T" panose="02030504000101010101" pitchFamily="18" charset="-127"/>
+                <a:ea typeface="휴먼모음T" panose="02030504000101010101" pitchFamily="18" charset="-127"/>
+              </a:rPr>
+              <a:t>(</a:t>
+            </a:r>
+            <a:r>
+              <a:rPr lang="ko-KR" altLang="en-US" sz="2000" dirty="0">
+                <a:latin typeface="휴먼모음T" panose="02030504000101010101" pitchFamily="18" charset="-127"/>
+                <a:ea typeface="휴먼모음T" panose="02030504000101010101" pitchFamily="18" charset="-127"/>
+              </a:rPr>
+              <a:t>미적분</a:t>
+            </a:r>
+            <a:r>
+              <a:rPr lang="en-US" altLang="ko-KR" sz="2000">
+                <a:latin typeface="휴먼모음T" panose="02030504000101010101" pitchFamily="18" charset="-127"/>
+                <a:ea typeface="휴먼모음T" panose="02030504000101010101" pitchFamily="18" charset="-127"/>
+              </a:rPr>
+              <a:t>)</a:t>
+            </a:r>
+            <a:endParaRPr lang="en-US" altLang="ko-KR" sz="2000" dirty="0">
+              <a:latin typeface="휴먼모음T" panose="02030504000101010101" pitchFamily="18" charset="-127"/>
+              <a:ea typeface="휴먼모음T" panose="02030504000101010101" pitchFamily="18" charset="-127"/>
+            </a:endParaRPr>
+          </a:p>
+        </p:txBody>
+      </p:sp>
+      <p:sp>
+        <p:nvSpPr>
+          <p:cNvPr id="9" name="TextBox 8">
+            <a:extLst>
+              <a:ext uri="{FF2B5EF4-FFF2-40B4-BE49-F238E27FC236}">
+                <a16:creationId xmlns:a16="http://schemas.microsoft.com/office/drawing/2014/main" id="{5AD34784-A486-0A01-E7A2-FD0B1406CD2E}"/>
+              </a:ext>
+            </a:extLst>
+          </p:cNvPr>
+          <p:cNvSpPr txBox="1"/>
+          <p:nvPr/>
+        </p:nvSpPr>
+        <p:spPr>
+          <a:xfrm>
+            <a:off x="117748" y="260648"/>
+            <a:ext cx="2592288" cy="584775"/>
+          </a:xfrm>
+          <a:prstGeom prst="rect">
+            <a:avLst/>
+          </a:prstGeom>
+          <a:noFill/>
+        </p:spPr>
+        <p:txBody>
+          <a:bodyPr wrap="square" rtlCol="0">
+            <a:spAutoFit/>
+          </a:bodyPr>
+          <a:lstStyle/>
+          <a:p>
+            <a:r>
+              <a:rPr lang="ko-KR" altLang="en-US" sz="3200" b="1"/>
+              <a:t>문제 풀이</a:t>
+            </a:r>
+          </a:p>
+        </p:txBody>
+      </p:sp>
+    </p:spTree>
+    <p:extLst>
+      <p:ext uri="{BB962C8B-B14F-4D97-AF65-F5344CB8AC3E}">
+        <p14:creationId xmlns:p14="http://schemas.microsoft.com/office/powerpoint/2010/main" val="1990975147"/>
+      </p:ext>
+    </p:extLst>
+  </p:cSld>
+  <p:clrMapOvr>
+    <a:masterClrMapping/>
+  </p:clrMapOvr>
+  <mc:AlternateContent xmlns:mc="http://schemas.openxmlformats.org/markup-compatibility/2006" xmlns:p14="http://schemas.microsoft.com/office/powerpoint/2010/main">
+    <mc:Choice Requires="p14">
+      <p:transition spd="med" p14:dur="700">
+        <p:fade/>
+      </p:transition>
+    </mc:Choice>
+    <mc:Fallback xmlns="">
+      <p:transition spd="med">
+        <p:fade/>
+      </p:transition>
+    </mc:Fallback>
+  </mc:AlternateContent>
+</p:sld>
+</file>
+
+<file path=ppt/slides/slide6.xml><?xml version="1.0" encoding="utf-8"?>
+<p:sld xmlns:a="http://schemas.openxmlformats.org/drawingml/2006/main" xmlns:r="http://schemas.openxmlformats.org/officeDocument/2006/relationships" xmlns:p="http://schemas.openxmlformats.org/presentationml/2006/main">
+  <p:cSld>
+    <p:spTree>
+      <p:nvGrpSpPr>
+        <p:cNvPr id="1" name="">
+          <a:extLst>
+            <a:ext uri="{FF2B5EF4-FFF2-40B4-BE49-F238E27FC236}">
+              <a16:creationId xmlns:a16="http://schemas.microsoft.com/office/drawing/2014/main" id="{4F32D5AF-0F51-91DE-64BD-5E17CEF9AA79}"/>
+            </a:ext>
+          </a:extLst>
+        </p:cNvPr>
+        <p:cNvGrpSpPr/>
+        <p:nvPr/>
+      </p:nvGrpSpPr>
+      <p:grpSpPr>
+        <a:xfrm>
+          <a:off x="0" y="0"/>
+          <a:ext cx="0" cy="0"/>
+          <a:chOff x="0" y="0"/>
+          <a:chExt cx="0" cy="0"/>
+        </a:xfrm>
+      </p:grpSpPr>
+      <p:sp>
+        <p:nvSpPr>
+          <p:cNvPr id="2" name="슬라이드 번호 개체 틀 1">
+            <a:extLst>
+              <a:ext uri="{FF2B5EF4-FFF2-40B4-BE49-F238E27FC236}">
+                <a16:creationId xmlns:a16="http://schemas.microsoft.com/office/drawing/2014/main" id="{D1B51CDD-C849-F07D-D7BE-8E0C6C436C59}"/>
+              </a:ext>
+            </a:extLst>
+          </p:cNvPr>
+          <p:cNvSpPr>
+            <a:spLocks noGrp="1"/>
+          </p:cNvSpPr>
+          <p:nvPr>
+            <p:ph type="sldNum" sz="quarter" idx="12"/>
+          </p:nvPr>
+        </p:nvSpPr>
+        <p:spPr/>
+        <p:txBody>
+          <a:bodyPr/>
+          <a:lstStyle/>
+          <a:p>
+            <a:pPr rtl="0"/>
+            <a:fld id="{A3F31473-23EB-4724-8B59-FE6D21D89FA4}" type="slidenum">
+              <a:rPr lang="en-US" altLang="ko-KR" noProof="0" smtClean="0"/>
+              <a:t>6</a:t>
+            </a:fld>
+            <a:endParaRPr lang="en-US" altLang="ko-KR" noProof="0" dirty="0"/>
+          </a:p>
+        </p:txBody>
+      </p:sp>
+      <p:sp>
+        <p:nvSpPr>
+          <p:cNvPr id="4" name="TextBox 3">
+            <a:extLst>
+              <a:ext uri="{FF2B5EF4-FFF2-40B4-BE49-F238E27FC236}">
+                <a16:creationId xmlns:a16="http://schemas.microsoft.com/office/drawing/2014/main" id="{E724D8FB-4BA4-B532-2690-FF91AAEE20BE}"/>
+              </a:ext>
+            </a:extLst>
+          </p:cNvPr>
+          <p:cNvSpPr txBox="1"/>
+          <p:nvPr/>
+        </p:nvSpPr>
+        <p:spPr>
+          <a:xfrm>
+            <a:off x="765820" y="1196752"/>
+            <a:ext cx="11233248" cy="509178"/>
+          </a:xfrm>
+          <a:prstGeom prst="rect">
+            <a:avLst/>
+          </a:prstGeom>
+          <a:solidFill>
+            <a:schemeClr val="tx1">
+              <a:lumMod val="20000"/>
+              <a:lumOff val="80000"/>
+            </a:schemeClr>
+          </a:solidFill>
+        </p:spPr>
+        <p:txBody>
+          <a:bodyPr wrap="square" rtlCol="0">
+            <a:spAutoFit/>
+          </a:bodyPr>
+          <a:lstStyle/>
+          <a:p>
+            <a:pPr marL="285750" indent="-285750">
+              <a:lnSpc>
+                <a:spcPct val="150000"/>
+              </a:lnSpc>
+              <a:buFont typeface="Wingdings" panose="05000000000000000000" pitchFamily="2" charset="2"/>
+              <a:buChar char="v"/>
+            </a:pPr>
+            <a:r>
+              <a:rPr lang="en-US" altLang="ko-KR" sz="2000" dirty="0">
+                <a:latin typeface="휴먼모음T" panose="02030504000101010101" pitchFamily="18" charset="-127"/>
+                <a:ea typeface="휴먼모음T" panose="02030504000101010101" pitchFamily="18" charset="-127"/>
+                <a:hlinkClick r:id="rId3">
+                  <a:extLst>
+                    <a:ext uri="{A12FA001-AC4F-418D-AE19-62706E023703}">
+                      <ahyp:hlinkClr xmlns:ahyp="http://schemas.microsoft.com/office/drawing/2018/hyperlinkcolor" val="tx"/>
+                    </a:ext>
+                  </a:extLst>
+                </a:hlinkClick>
+              </a:rPr>
+              <a:t>Monty Hall Problem</a:t>
+            </a:r>
+            <a:r>
+              <a:rPr lang="en-US" altLang="ko-KR" sz="2000" dirty="0">
+                <a:latin typeface="휴먼모음T" panose="02030504000101010101" pitchFamily="18" charset="-127"/>
+                <a:ea typeface="휴먼모음T" panose="02030504000101010101" pitchFamily="18" charset="-127"/>
+              </a:rPr>
+              <a:t>, </a:t>
+            </a:r>
+            <a:r>
+              <a:rPr lang="ko-KR" altLang="en-US" sz="2000" dirty="0">
+                <a:latin typeface="휴먼모음T" panose="02030504000101010101" pitchFamily="18" charset="-127"/>
+                <a:ea typeface="휴먼모음T" panose="02030504000101010101" pitchFamily="18" charset="-127"/>
+              </a:rPr>
+              <a:t>문이 </a:t>
+            </a:r>
+            <a:r>
+              <a:rPr lang="en-US" altLang="ko-KR" sz="2000" dirty="0">
+                <a:latin typeface="휴먼모음T" panose="02030504000101010101" pitchFamily="18" charset="-127"/>
+                <a:ea typeface="휴먼모음T" panose="02030504000101010101" pitchFamily="18" charset="-127"/>
+              </a:rPr>
+              <a:t>10,000</a:t>
+            </a:r>
+            <a:r>
+              <a:rPr lang="ko-KR" altLang="en-US" sz="2000" dirty="0">
+                <a:latin typeface="휴먼모음T" panose="02030504000101010101" pitchFamily="18" charset="-127"/>
+                <a:ea typeface="휴먼모음T" panose="02030504000101010101" pitchFamily="18" charset="-127"/>
+              </a:rPr>
+              <a:t>개 라면</a:t>
+            </a:r>
+            <a:r>
+              <a:rPr lang="en-US" altLang="ko-KR" sz="2000">
+                <a:latin typeface="휴먼모음T" panose="02030504000101010101" pitchFamily="18" charset="-127"/>
+                <a:ea typeface="휴먼모음T" panose="02030504000101010101" pitchFamily="18" charset="-127"/>
+              </a:rPr>
+              <a:t>?</a:t>
+            </a:r>
+            <a:endParaRPr lang="en-US" altLang="ko-KR" sz="2000" dirty="0">
+              <a:latin typeface="휴먼모음T" panose="02030504000101010101" pitchFamily="18" charset="-127"/>
+              <a:ea typeface="휴먼모음T" panose="02030504000101010101" pitchFamily="18" charset="-127"/>
+            </a:endParaRPr>
+          </a:p>
+        </p:txBody>
+      </p:sp>
+      <p:sp>
+        <p:nvSpPr>
+          <p:cNvPr id="9" name="TextBox 8">
+            <a:extLst>
+              <a:ext uri="{FF2B5EF4-FFF2-40B4-BE49-F238E27FC236}">
+                <a16:creationId xmlns:a16="http://schemas.microsoft.com/office/drawing/2014/main" id="{92CE8694-F9D5-0985-6634-DA4CC7CB87C6}"/>
+              </a:ext>
+            </a:extLst>
+          </p:cNvPr>
+          <p:cNvSpPr txBox="1"/>
+          <p:nvPr/>
+        </p:nvSpPr>
+        <p:spPr>
+          <a:xfrm>
+            <a:off x="117748" y="260648"/>
+            <a:ext cx="2592288" cy="584775"/>
+          </a:xfrm>
+          <a:prstGeom prst="rect">
+            <a:avLst/>
+          </a:prstGeom>
+          <a:noFill/>
+        </p:spPr>
+        <p:txBody>
+          <a:bodyPr wrap="square" rtlCol="0">
+            <a:spAutoFit/>
+          </a:bodyPr>
+          <a:lstStyle/>
+          <a:p>
+            <a:r>
+              <a:rPr lang="ko-KR" altLang="en-US" sz="3200" b="1"/>
+              <a:t>문제 풀이</a:t>
+            </a:r>
+          </a:p>
+        </p:txBody>
+      </p:sp>
+      <p:pic>
+        <p:nvPicPr>
+          <p:cNvPr id="2050" name="Picture 2">
+            <a:extLst>
+              <a:ext uri="{FF2B5EF4-FFF2-40B4-BE49-F238E27FC236}">
+                <a16:creationId xmlns:a16="http://schemas.microsoft.com/office/drawing/2014/main" id="{3AFCC670-9D52-97E0-301E-31793E380890}"/>
+              </a:ext>
+            </a:extLst>
+          </p:cNvPr>
+          <p:cNvPicPr>
+            <a:picLocks noChangeAspect="1" noChangeArrowheads="1"/>
+          </p:cNvPicPr>
+          <p:nvPr/>
+        </p:nvPicPr>
+        <p:blipFill>
+          <a:blip r:embed="rId4">
+            <a:extLst>
+              <a:ext uri="{28A0092B-C50C-407E-A947-70E740481C1C}">
+                <a14:useLocalDpi xmlns:a14="http://schemas.microsoft.com/office/drawing/2010/main" val="0"/>
+              </a:ext>
+            </a:extLst>
+          </a:blip>
+          <a:srcRect/>
+          <a:stretch>
+            <a:fillRect/>
+          </a:stretch>
+        </p:blipFill>
+        <p:spPr bwMode="auto">
+          <a:xfrm>
+            <a:off x="3142084" y="2492896"/>
+            <a:ext cx="5334969" cy="2966243"/>
+          </a:xfrm>
+          <a:prstGeom prst="rect">
+            <a:avLst/>
+          </a:prstGeom>
+          <a:noFill/>
+          <a:extLst>
+            <a:ext uri="{909E8E84-426E-40DD-AFC4-6F175D3DCCD1}">
+              <a14:hiddenFill xmlns:a14="http://schemas.microsoft.com/office/drawing/2010/main">
+                <a:solidFill>
+                  <a:srgbClr val="FFFFFF"/>
+                </a:solidFill>
+              </a14:hiddenFill>
+            </a:ext>
+          </a:extLst>
+        </p:spPr>
+      </p:pic>
+    </p:spTree>
+    <p:extLst>
+      <p:ext uri="{BB962C8B-B14F-4D97-AF65-F5344CB8AC3E}">
+        <p14:creationId xmlns:p14="http://schemas.microsoft.com/office/powerpoint/2010/main" val="1646032272"/>
+      </p:ext>
+    </p:extLst>
+  </p:cSld>
+  <p:clrMapOvr>
+    <a:masterClrMapping/>
+  </p:clrMapOvr>
+  <mc:AlternateContent xmlns:mc="http://schemas.openxmlformats.org/markup-compatibility/2006" xmlns:p14="http://schemas.microsoft.com/office/powerpoint/2010/main">
+    <mc:Choice Requires="p14">
+      <p:transition spd="med" p14:dur="700">
+        <p:fade/>
+      </p:transition>
+    </mc:Choice>
+    <mc:Fallback xmlns="">
+      <p:transition spd="med">
+        <p:fade/>
+      </p:transition>
+    </mc:Fallback>
+  </mc:AlternateContent>
+</p:sld>
+</file>
+
+<file path=ppt/slides/slide7.xml><?xml version="1.0" encoding="utf-8"?>
+<p:sld xmlns:a="http://schemas.openxmlformats.org/drawingml/2006/main" xmlns:r="http://schemas.openxmlformats.org/officeDocument/2006/relationships" xmlns:p="http://schemas.openxmlformats.org/presentationml/2006/main">
+  <p:cSld>
+    <p:spTree>
+      <p:nvGrpSpPr>
+        <p:cNvPr id="1" name="">
+          <a:extLst>
+            <a:ext uri="{FF2B5EF4-FFF2-40B4-BE49-F238E27FC236}">
+              <a16:creationId xmlns:a16="http://schemas.microsoft.com/office/drawing/2014/main" id="{DA1C777C-D922-8895-688C-C5D8CB36E7A9}"/>
+            </a:ext>
+          </a:extLst>
+        </p:cNvPr>
+        <p:cNvGrpSpPr/>
+        <p:nvPr/>
+      </p:nvGrpSpPr>
+      <p:grpSpPr>
+        <a:xfrm>
+          <a:off x="0" y="0"/>
+          <a:ext cx="0" cy="0"/>
+          <a:chOff x="0" y="0"/>
+          <a:chExt cx="0" cy="0"/>
+        </a:xfrm>
+      </p:grpSpPr>
+      <p:sp>
+        <p:nvSpPr>
+          <p:cNvPr id="2" name="슬라이드 번호 개체 틀 1">
+            <a:extLst>
+              <a:ext uri="{FF2B5EF4-FFF2-40B4-BE49-F238E27FC236}">
+                <a16:creationId xmlns:a16="http://schemas.microsoft.com/office/drawing/2014/main" id="{AEB2C61B-EEC0-7491-DD5B-4008A55D9FCA}"/>
+              </a:ext>
+            </a:extLst>
+          </p:cNvPr>
+          <p:cNvSpPr>
+            <a:spLocks noGrp="1"/>
+          </p:cNvSpPr>
+          <p:nvPr>
+            <p:ph type="sldNum" sz="quarter" idx="12"/>
+          </p:nvPr>
+        </p:nvSpPr>
+        <p:spPr/>
+        <p:txBody>
+          <a:bodyPr/>
+          <a:lstStyle/>
+          <a:p>
+            <a:pPr rtl="0"/>
+            <a:fld id="{A3F31473-23EB-4724-8B59-FE6D21D89FA4}" type="slidenum">
+              <a:rPr lang="en-US" altLang="ko-KR" noProof="0" smtClean="0"/>
+              <a:t>7</a:t>
+            </a:fld>
+            <a:endParaRPr lang="en-US" altLang="ko-KR" noProof="0" dirty="0"/>
+          </a:p>
+        </p:txBody>
+      </p:sp>
+      <p:sp>
+        <p:nvSpPr>
+          <p:cNvPr id="4" name="TextBox 3">
+            <a:extLst>
+              <a:ext uri="{FF2B5EF4-FFF2-40B4-BE49-F238E27FC236}">
+                <a16:creationId xmlns:a16="http://schemas.microsoft.com/office/drawing/2014/main" id="{B46F664B-D509-3189-2815-157CC6374EF1}"/>
+              </a:ext>
+            </a:extLst>
+          </p:cNvPr>
+          <p:cNvSpPr txBox="1"/>
+          <p:nvPr/>
+        </p:nvSpPr>
+        <p:spPr>
+          <a:xfrm>
+            <a:off x="765820" y="1196752"/>
+            <a:ext cx="11233248" cy="509178"/>
+          </a:xfrm>
+          <a:prstGeom prst="rect">
+            <a:avLst/>
+          </a:prstGeom>
+          <a:solidFill>
+            <a:schemeClr val="tx1">
+              <a:lumMod val="20000"/>
+              <a:lumOff val="80000"/>
+            </a:schemeClr>
+          </a:solidFill>
+        </p:spPr>
+        <p:txBody>
+          <a:bodyPr wrap="square" rtlCol="0">
+            <a:spAutoFit/>
+          </a:bodyPr>
+          <a:lstStyle/>
+          <a:p>
+            <a:pPr marL="285750" indent="-285750">
+              <a:lnSpc>
+                <a:spcPct val="150000"/>
+              </a:lnSpc>
+              <a:buFont typeface="Wingdings" panose="05000000000000000000" pitchFamily="2" charset="2"/>
+              <a:buChar char="v"/>
+            </a:pPr>
+            <a:r>
+              <a:rPr lang="ko-KR" altLang="en-US" sz="2000" dirty="0">
+                <a:latin typeface="휴먼모음T" panose="02030504000101010101" pitchFamily="18" charset="-127"/>
+                <a:ea typeface="휴먼모음T" panose="02030504000101010101" pitchFamily="18" charset="-127"/>
+              </a:rPr>
+              <a:t>평생 미팅하는 상대방이 </a:t>
+            </a:r>
+            <a:r>
+              <a:rPr lang="en-US" altLang="ko-KR" sz="2000" dirty="0">
+                <a:latin typeface="휴먼모음T" panose="02030504000101010101" pitchFamily="18" charset="-127"/>
+                <a:ea typeface="휴먼모음T" panose="02030504000101010101" pitchFamily="18" charset="-127"/>
+              </a:rPr>
+              <a:t>N</a:t>
+            </a:r>
+            <a:r>
+              <a:rPr lang="ko-KR" altLang="en-US" sz="2000" dirty="0">
+                <a:latin typeface="휴먼모음T" panose="02030504000101010101" pitchFamily="18" charset="-127"/>
+                <a:ea typeface="휴먼모음T" panose="02030504000101010101" pitchFamily="18" charset="-127"/>
+              </a:rPr>
+              <a:t>명이라면 몇 번째 만난 사람과 결혼을 해야 최적의 선택인가</a:t>
+            </a:r>
+            <a:r>
+              <a:rPr lang="en-US" altLang="ko-KR" sz="2000" dirty="0">
+                <a:latin typeface="휴먼모음T" panose="02030504000101010101" pitchFamily="18" charset="-127"/>
+                <a:ea typeface="휴먼모음T" panose="02030504000101010101" pitchFamily="18" charset="-127"/>
+              </a:rPr>
+              <a:t>?</a:t>
+            </a:r>
+          </a:p>
+        </p:txBody>
+      </p:sp>
+      <p:sp>
+        <p:nvSpPr>
+          <p:cNvPr id="9" name="TextBox 8">
+            <a:extLst>
+              <a:ext uri="{FF2B5EF4-FFF2-40B4-BE49-F238E27FC236}">
+                <a16:creationId xmlns:a16="http://schemas.microsoft.com/office/drawing/2014/main" id="{1A89527C-5F15-5354-51AE-303E2EF56CBE}"/>
+              </a:ext>
+            </a:extLst>
+          </p:cNvPr>
+          <p:cNvSpPr txBox="1"/>
+          <p:nvPr/>
+        </p:nvSpPr>
+        <p:spPr>
+          <a:xfrm>
+            <a:off x="117748" y="260648"/>
+            <a:ext cx="2592288" cy="584775"/>
+          </a:xfrm>
+          <a:prstGeom prst="rect">
+            <a:avLst/>
+          </a:prstGeom>
+          <a:noFill/>
+        </p:spPr>
+        <p:txBody>
+          <a:bodyPr wrap="square" rtlCol="0">
+            <a:spAutoFit/>
+          </a:bodyPr>
+          <a:lstStyle/>
+          <a:p>
+            <a:r>
+              <a:rPr lang="ko-KR" altLang="en-US" sz="3200" b="1"/>
+              <a:t>문제 풀이</a:t>
+            </a:r>
+          </a:p>
+        </p:txBody>
+      </p:sp>
+    </p:spTree>
+    <p:extLst>
+      <p:ext uri="{BB962C8B-B14F-4D97-AF65-F5344CB8AC3E}">
+        <p14:creationId xmlns:p14="http://schemas.microsoft.com/office/powerpoint/2010/main" val="1127705894"/>
+      </p:ext>
+    </p:extLst>
+  </p:cSld>
+  <p:clrMapOvr>
+    <a:masterClrMapping/>
+  </p:clrMapOvr>
+  <mc:AlternateContent xmlns:mc="http://schemas.openxmlformats.org/markup-compatibility/2006" xmlns:p14="http://schemas.microsoft.com/office/powerpoint/2010/main">
+    <mc:Choice Requires="p14">
+      <p:transition spd="med" p14:dur="700">
+        <p:fade/>
+      </p:transition>
+    </mc:Choice>
+    <mc:Fallback xmlns="">
+      <p:transition spd="med">
+        <p:fade/>
+      </p:transition>
+    </mc:Fallback>
+  </mc:AlternateContent>
+</p:sld>
+</file>
+
+<file path=ppt/slides/slide8.xml><?xml version="1.0" encoding="utf-8"?>
+<p:sld xmlns:a="http://schemas.openxmlformats.org/drawingml/2006/main" xmlns:r="http://schemas.openxmlformats.org/officeDocument/2006/relationships" xmlns:p="http://schemas.openxmlformats.org/presentationml/2006/main">
+  <p:cSld>
+    <p:spTree>
+      <p:nvGrpSpPr>
+        <p:cNvPr id="1" name="">
+          <a:extLst>
+            <a:ext uri="{FF2B5EF4-FFF2-40B4-BE49-F238E27FC236}">
+              <a16:creationId xmlns:a16="http://schemas.microsoft.com/office/drawing/2014/main" id="{D82F35E0-A8BA-9E25-DCE5-002AF8EF7215}"/>
+            </a:ext>
+          </a:extLst>
+        </p:cNvPr>
+        <p:cNvGrpSpPr/>
+        <p:nvPr/>
+      </p:nvGrpSpPr>
+      <p:grpSpPr>
+        <a:xfrm>
+          <a:off x="0" y="0"/>
+          <a:ext cx="0" cy="0"/>
+          <a:chOff x="0" y="0"/>
+          <a:chExt cx="0" cy="0"/>
+        </a:xfrm>
+      </p:grpSpPr>
+      <p:sp>
+        <p:nvSpPr>
+          <p:cNvPr id="2" name="슬라이드 번호 개체 틀 1">
+            <a:extLst>
+              <a:ext uri="{FF2B5EF4-FFF2-40B4-BE49-F238E27FC236}">
+                <a16:creationId xmlns:a16="http://schemas.microsoft.com/office/drawing/2014/main" id="{CA6F4F7E-6F61-4FB4-D872-D19D234DDFD9}"/>
+              </a:ext>
+            </a:extLst>
+          </p:cNvPr>
+          <p:cNvSpPr>
+            <a:spLocks noGrp="1"/>
+          </p:cNvSpPr>
+          <p:nvPr>
+            <p:ph type="sldNum" sz="quarter" idx="12"/>
+          </p:nvPr>
+        </p:nvSpPr>
+        <p:spPr/>
+        <p:txBody>
+          <a:bodyPr/>
+          <a:lstStyle/>
+          <a:p>
+            <a:pPr rtl="0"/>
+            <a:fld id="{A3F31473-23EB-4724-8B59-FE6D21D89FA4}" type="slidenum">
+              <a:rPr lang="en-US" altLang="ko-KR" noProof="0" smtClean="0"/>
+              <a:t>8</a:t>
+            </a:fld>
+            <a:endParaRPr lang="en-US" altLang="ko-KR" noProof="0" dirty="0"/>
+          </a:p>
+        </p:txBody>
+      </p:sp>
+      <p:sp>
+        <p:nvSpPr>
+          <p:cNvPr id="4" name="TextBox 3">
+            <a:extLst>
+              <a:ext uri="{FF2B5EF4-FFF2-40B4-BE49-F238E27FC236}">
+                <a16:creationId xmlns:a16="http://schemas.microsoft.com/office/drawing/2014/main" id="{0FFED543-95FD-70FD-6206-68419637947A}"/>
+              </a:ext>
+            </a:extLst>
+          </p:cNvPr>
+          <p:cNvSpPr txBox="1"/>
+          <p:nvPr/>
+        </p:nvSpPr>
+        <p:spPr>
+          <a:xfrm>
+            <a:off x="765820" y="1196752"/>
+            <a:ext cx="11233248" cy="882999"/>
+          </a:xfrm>
+          <a:prstGeom prst="rect">
+            <a:avLst/>
+          </a:prstGeom>
+          <a:solidFill>
+            <a:schemeClr val="tx1">
+              <a:lumMod val="20000"/>
+              <a:lumOff val="80000"/>
+            </a:schemeClr>
+          </a:solidFill>
+        </p:spPr>
+        <p:txBody>
+          <a:bodyPr wrap="square" rtlCol="0">
+            <a:spAutoFit/>
+          </a:bodyPr>
+          <a:lstStyle/>
+          <a:p>
+            <a:pPr marL="285750" indent="-285750">
+              <a:lnSpc>
+                <a:spcPct val="150000"/>
+              </a:lnSpc>
+              <a:buFont typeface="Wingdings" panose="05000000000000000000" pitchFamily="2" charset="2"/>
+              <a:buChar char="v"/>
+            </a:pPr>
+            <a:r>
+              <a:rPr lang="ko-KR" altLang="en-US" dirty="0">
+                <a:latin typeface="휴먼모음T" panose="02030504000101010101" pitchFamily="18" charset="-127"/>
+                <a:ea typeface="휴먼모음T" panose="02030504000101010101" pitchFamily="18" charset="-127"/>
+              </a:rPr>
+              <a:t>모집단의 회귀식의 </a:t>
+            </a:r>
+            <a:r>
+              <a:rPr lang="en-US" altLang="ko-KR" dirty="0">
+                <a:latin typeface="휴먼모음T" panose="02030504000101010101" pitchFamily="18" charset="-127"/>
+                <a:ea typeface="휴먼모음T" panose="02030504000101010101" pitchFamily="18" charset="-127"/>
+              </a:rPr>
+              <a:t>gradient(</a:t>
+            </a:r>
+            <a:r>
+              <a:rPr lang="ko-KR" altLang="en-US" dirty="0">
+                <a:latin typeface="휴먼모음T" panose="02030504000101010101" pitchFamily="18" charset="-127"/>
+                <a:ea typeface="휴먼모음T" panose="02030504000101010101" pitchFamily="18" charset="-127"/>
+              </a:rPr>
+              <a:t>기울기</a:t>
+            </a:r>
+            <a:r>
+              <a:rPr lang="en-US" altLang="ko-KR" dirty="0">
+                <a:latin typeface="휴먼모음T" panose="02030504000101010101" pitchFamily="18" charset="-127"/>
+                <a:ea typeface="휴먼모음T" panose="02030504000101010101" pitchFamily="18" charset="-127"/>
+              </a:rPr>
+              <a:t>)</a:t>
+            </a:r>
+            <a:r>
+              <a:rPr lang="ko-KR" altLang="en-US" dirty="0">
+                <a:latin typeface="휴먼모음T" panose="02030504000101010101" pitchFamily="18" charset="-127"/>
+                <a:ea typeface="휴먼모음T" panose="02030504000101010101" pitchFamily="18" charset="-127"/>
+              </a:rPr>
+              <a:t> </a:t>
+            </a:r>
+            <a:r>
+              <a:rPr lang="en-US" altLang="ko-KR" dirty="0">
+                <a:latin typeface="휴먼모음T" panose="02030504000101010101" pitchFamily="18" charset="-127"/>
+                <a:ea typeface="휴먼모음T" panose="02030504000101010101" pitchFamily="18" charset="-127"/>
+              </a:rPr>
+              <a:t>2</a:t>
+            </a:r>
+            <a:r>
+              <a:rPr lang="ko-KR" altLang="en-US" dirty="0">
+                <a:latin typeface="휴먼모음T" panose="02030504000101010101" pitchFamily="18" charset="-127"/>
+                <a:ea typeface="휴먼모음T" panose="02030504000101010101" pitchFamily="18" charset="-127"/>
+              </a:rPr>
+              <a:t>인 데이터를 생성하고 표본크기를 </a:t>
+            </a:r>
+            <a:r>
+              <a:rPr lang="en-US" altLang="ko-KR" dirty="0">
+                <a:latin typeface="휴먼모음T" panose="02030504000101010101" pitchFamily="18" charset="-127"/>
+                <a:ea typeface="휴먼모음T" panose="02030504000101010101" pitchFamily="18" charset="-127"/>
+              </a:rPr>
+              <a:t>5, 30, 100 </a:t>
+            </a:r>
+            <a:r>
+              <a:rPr lang="ko-KR" altLang="en-US" dirty="0">
+                <a:latin typeface="휴먼모음T" panose="02030504000101010101" pitchFamily="18" charset="-127"/>
+                <a:ea typeface="휴먼모음T" panose="02030504000101010101" pitchFamily="18" charset="-127"/>
+              </a:rPr>
+              <a:t>으로 각각 </a:t>
+            </a:r>
+            <a:r>
+              <a:rPr lang="en-US" altLang="ko-KR" dirty="0">
+                <a:latin typeface="휴먼모음T" panose="02030504000101010101" pitchFamily="18" charset="-127"/>
+                <a:ea typeface="휴먼모음T" panose="02030504000101010101" pitchFamily="18" charset="-127"/>
+              </a:rPr>
+              <a:t>1000</a:t>
+            </a:r>
+            <a:r>
+              <a:rPr lang="ko-KR" altLang="en-US" dirty="0">
+                <a:latin typeface="휴먼모음T" panose="02030504000101010101" pitchFamily="18" charset="-127"/>
+                <a:ea typeface="휴먼모음T" panose="02030504000101010101" pitchFamily="18" charset="-127"/>
+              </a:rPr>
+              <a:t>개 표본의 기울기와 </a:t>
+            </a:r>
+            <a:r>
+              <a:rPr lang="en-US" altLang="ko-KR" dirty="0">
+                <a:latin typeface="휴먼모음T" panose="02030504000101010101" pitchFamily="18" charset="-127"/>
+                <a:ea typeface="휴먼모음T" panose="02030504000101010101" pitchFamily="18" charset="-127"/>
+              </a:rPr>
+              <a:t>MSE(Mean</a:t>
+            </a:r>
+            <a:r>
+              <a:rPr lang="ko-KR" altLang="en-US" dirty="0">
+                <a:latin typeface="휴먼모음T" panose="02030504000101010101" pitchFamily="18" charset="-127"/>
+                <a:ea typeface="휴먼모음T" panose="02030504000101010101" pitchFamily="18" charset="-127"/>
+              </a:rPr>
+              <a:t> </a:t>
+            </a:r>
+            <a:r>
+              <a:rPr lang="en-US" altLang="ko-KR" dirty="0">
+                <a:latin typeface="휴먼모음T" panose="02030504000101010101" pitchFamily="18" charset="-127"/>
+                <a:ea typeface="휴먼모음T" panose="02030504000101010101" pitchFamily="18" charset="-127"/>
+              </a:rPr>
+              <a:t>Squared</a:t>
+            </a:r>
+            <a:r>
+              <a:rPr lang="ko-KR" altLang="en-US" dirty="0">
+                <a:latin typeface="휴먼모음T" panose="02030504000101010101" pitchFamily="18" charset="-127"/>
+                <a:ea typeface="휴먼모음T" panose="02030504000101010101" pitchFamily="18" charset="-127"/>
+              </a:rPr>
+              <a:t> </a:t>
+            </a:r>
+            <a:r>
+              <a:rPr lang="en-US" altLang="ko-KR" dirty="0">
+                <a:latin typeface="휴먼모음T" panose="02030504000101010101" pitchFamily="18" charset="-127"/>
+                <a:ea typeface="휴먼모음T" panose="02030504000101010101" pitchFamily="18" charset="-127"/>
+              </a:rPr>
+              <a:t>Error)</a:t>
+            </a:r>
+            <a:r>
+              <a:rPr lang="ko-KR" altLang="en-US" dirty="0">
+                <a:latin typeface="휴먼모음T" panose="02030504000101010101" pitchFamily="18" charset="-127"/>
+                <a:ea typeface="휴먼모음T" panose="02030504000101010101" pitchFamily="18" charset="-127"/>
+              </a:rPr>
+              <a:t>의 평균과 분산을 </a:t>
+            </a:r>
+            <a:r>
+              <a:rPr lang="ko-KR" altLang="en-US" dirty="0" err="1">
+                <a:latin typeface="휴먼모음T" panose="02030504000101010101" pitchFamily="18" charset="-127"/>
+                <a:ea typeface="휴먼모음T" panose="02030504000101010101" pitchFamily="18" charset="-127"/>
+              </a:rPr>
+              <a:t>시각화하라</a:t>
+            </a:r>
+            <a:r>
+              <a:rPr lang="ko-KR" altLang="en-US" dirty="0">
+                <a:latin typeface="휴먼모음T" panose="02030504000101010101" pitchFamily="18" charset="-127"/>
+                <a:ea typeface="휴먼모음T" panose="02030504000101010101" pitchFamily="18" charset="-127"/>
+              </a:rPr>
+              <a:t>  </a:t>
+            </a:r>
+            <a:endParaRPr lang="en-US" altLang="ko-KR" dirty="0">
+              <a:latin typeface="휴먼모음T" panose="02030504000101010101" pitchFamily="18" charset="-127"/>
+              <a:ea typeface="휴먼모음T" panose="02030504000101010101" pitchFamily="18" charset="-127"/>
+            </a:endParaRPr>
+          </a:p>
+        </p:txBody>
+      </p:sp>
+      <p:sp>
+        <p:nvSpPr>
+          <p:cNvPr id="9" name="TextBox 8">
+            <a:extLst>
+              <a:ext uri="{FF2B5EF4-FFF2-40B4-BE49-F238E27FC236}">
+                <a16:creationId xmlns:a16="http://schemas.microsoft.com/office/drawing/2014/main" id="{F30D0FE0-2695-7F37-8905-B8DE24E7A394}"/>
+              </a:ext>
+            </a:extLst>
+          </p:cNvPr>
+          <p:cNvSpPr txBox="1"/>
+          <p:nvPr/>
+        </p:nvSpPr>
+        <p:spPr>
+          <a:xfrm>
+            <a:off x="117748" y="260648"/>
+            <a:ext cx="2592288" cy="584775"/>
+          </a:xfrm>
+          <a:prstGeom prst="rect">
+            <a:avLst/>
+          </a:prstGeom>
+          <a:noFill/>
+        </p:spPr>
+        <p:txBody>
+          <a:bodyPr wrap="square" rtlCol="0">
+            <a:spAutoFit/>
+          </a:bodyPr>
+          <a:lstStyle/>
+          <a:p>
+            <a:r>
+              <a:rPr lang="ko-KR" altLang="en-US" sz="3200" b="1"/>
+              <a:t>문제 풀이</a:t>
+            </a:r>
+          </a:p>
+        </p:txBody>
+      </p:sp>
+      <p:pic>
+        <p:nvPicPr>
+          <p:cNvPr id="1026" name="Picture 2">
+            <a:extLst>
+              <a:ext uri="{FF2B5EF4-FFF2-40B4-BE49-F238E27FC236}">
+                <a16:creationId xmlns:a16="http://schemas.microsoft.com/office/drawing/2014/main" id="{66A96551-6CD7-9DE7-087B-11A115B1C22B}"/>
+              </a:ext>
+            </a:extLst>
+          </p:cNvPr>
+          <p:cNvPicPr>
+            <a:picLocks noChangeAspect="1" noChangeArrowheads="1"/>
+          </p:cNvPicPr>
+          <p:nvPr/>
+        </p:nvPicPr>
+        <p:blipFill>
+          <a:blip r:embed="rId3">
+            <a:extLst>
+              <a:ext uri="{28A0092B-C50C-407E-A947-70E740481C1C}">
+                <a14:useLocalDpi xmlns:a14="http://schemas.microsoft.com/office/drawing/2010/main" val="0"/>
+              </a:ext>
+            </a:extLst>
+          </a:blip>
+          <a:srcRect/>
+          <a:stretch>
+            <a:fillRect/>
+          </a:stretch>
+        </p:blipFill>
+        <p:spPr bwMode="auto">
+          <a:xfrm>
+            <a:off x="333772" y="3162993"/>
+            <a:ext cx="3721378" cy="2899706"/>
+          </a:xfrm>
+          <a:prstGeom prst="rect">
+            <a:avLst/>
+          </a:prstGeom>
+          <a:noFill/>
+          <a:extLst>
+            <a:ext uri="{909E8E84-426E-40DD-AFC4-6F175D3DCCD1}">
+              <a14:hiddenFill xmlns:a14="http://schemas.microsoft.com/office/drawing/2010/main">
+                <a:solidFill>
+                  <a:srgbClr val="FFFFFF"/>
+                </a:solidFill>
+              </a14:hiddenFill>
+            </a:ext>
+          </a:extLst>
+        </p:spPr>
+      </p:pic>
+      <p:sp>
+        <p:nvSpPr>
+          <p:cNvPr id="5" name="TextBox 4">
+            <a:extLst>
+              <a:ext uri="{FF2B5EF4-FFF2-40B4-BE49-F238E27FC236}">
+                <a16:creationId xmlns:a16="http://schemas.microsoft.com/office/drawing/2014/main" id="{92D6731E-3482-342B-4CF9-362C40D676CA}"/>
+              </a:ext>
+            </a:extLst>
+          </p:cNvPr>
+          <p:cNvSpPr txBox="1"/>
+          <p:nvPr/>
+        </p:nvSpPr>
+        <p:spPr>
+          <a:xfrm>
+            <a:off x="261764" y="2422823"/>
+            <a:ext cx="3721378" cy="718145"/>
+          </a:xfrm>
+          <a:prstGeom prst="rect">
+            <a:avLst/>
+          </a:prstGeom>
+          <a:noFill/>
+        </p:spPr>
+        <p:txBody>
+          <a:bodyPr wrap="square">
+            <a:spAutoFit/>
+          </a:bodyPr>
+          <a:lstStyle/>
+          <a:p>
+            <a:pPr>
+              <a:lnSpc>
+                <a:spcPts val="1575"/>
+              </a:lnSpc>
+              <a:buNone/>
+            </a:pPr>
+            <a:r>
+              <a:rPr lang="en-US" altLang="ko-KR" sz="1400" b="0" dirty="0">
+                <a:effectLst/>
+                <a:latin typeface="Arial Narrow" panose="020B0606020202030204" pitchFamily="34" charset="0"/>
+              </a:rPr>
+              <a:t>X = </a:t>
+            </a:r>
+            <a:r>
+              <a:rPr lang="en-US" altLang="ko-KR" sz="1400" b="0" dirty="0" err="1">
+                <a:effectLst/>
+                <a:latin typeface="Arial Narrow" panose="020B0606020202030204" pitchFamily="34" charset="0"/>
+              </a:rPr>
+              <a:t>np.random.randn</a:t>
+            </a:r>
+            <a:r>
+              <a:rPr lang="en-US" altLang="ko-KR" sz="1400" b="0" dirty="0">
+                <a:effectLst/>
+                <a:latin typeface="Arial Narrow" panose="020B0606020202030204" pitchFamily="34" charset="0"/>
+              </a:rPr>
+              <a:t>(10000, 1)</a:t>
+            </a:r>
+          </a:p>
+          <a:p>
+            <a:pPr>
+              <a:lnSpc>
+                <a:spcPts val="1575"/>
+              </a:lnSpc>
+              <a:buNone/>
+            </a:pPr>
+            <a:r>
+              <a:rPr lang="en-US" altLang="ko-KR" sz="1400" b="0" dirty="0" err="1">
+                <a:effectLst/>
+                <a:latin typeface="Arial Narrow" panose="020B0606020202030204" pitchFamily="34" charset="0"/>
+              </a:rPr>
+              <a:t>true_w</a:t>
+            </a:r>
+            <a:r>
+              <a:rPr lang="en-US" altLang="ko-KR" sz="1400" b="0" dirty="0">
+                <a:effectLst/>
+                <a:latin typeface="Arial Narrow" panose="020B0606020202030204" pitchFamily="34" charset="0"/>
+              </a:rPr>
+              <a:t> = 2.0</a:t>
+            </a:r>
+          </a:p>
+          <a:p>
+            <a:pPr>
+              <a:lnSpc>
+                <a:spcPts val="1575"/>
+              </a:lnSpc>
+              <a:buNone/>
+            </a:pPr>
+            <a:r>
+              <a:rPr lang="en-US" altLang="ko-KR" sz="1400" b="0" dirty="0">
+                <a:effectLst/>
+                <a:latin typeface="Arial Narrow" panose="020B0606020202030204" pitchFamily="34" charset="0"/>
+              </a:rPr>
+              <a:t>y = </a:t>
+            </a:r>
+            <a:r>
+              <a:rPr lang="en-US" altLang="ko-KR" sz="1400" b="0" dirty="0" err="1">
+                <a:effectLst/>
+                <a:latin typeface="Arial Narrow" panose="020B0606020202030204" pitchFamily="34" charset="0"/>
+              </a:rPr>
+              <a:t>true_w</a:t>
+            </a:r>
+            <a:r>
+              <a:rPr lang="en-US" altLang="ko-KR" sz="1400" b="0" dirty="0">
+                <a:effectLst/>
+                <a:latin typeface="Arial Narrow" panose="020B0606020202030204" pitchFamily="34" charset="0"/>
+              </a:rPr>
+              <a:t> * X + </a:t>
+            </a:r>
+            <a:r>
+              <a:rPr lang="en-US" altLang="ko-KR" sz="1400" b="0" dirty="0" err="1">
+                <a:effectLst/>
+                <a:latin typeface="Arial Narrow" panose="020B0606020202030204" pitchFamily="34" charset="0"/>
+              </a:rPr>
+              <a:t>np.random.randn</a:t>
+            </a:r>
+            <a:r>
+              <a:rPr lang="en-US" altLang="ko-KR" sz="1400" b="0" dirty="0">
+                <a:effectLst/>
+                <a:latin typeface="Arial Narrow" panose="020B0606020202030204" pitchFamily="34" charset="0"/>
+              </a:rPr>
+              <a:t>(10000, 1) * 0.5</a:t>
+            </a:r>
+          </a:p>
+        </p:txBody>
+      </p:sp>
+      <p:pic>
+        <p:nvPicPr>
+          <p:cNvPr id="1030" name="Picture 6">
+            <a:extLst>
+              <a:ext uri="{FF2B5EF4-FFF2-40B4-BE49-F238E27FC236}">
+                <a16:creationId xmlns:a16="http://schemas.microsoft.com/office/drawing/2014/main" id="{604A6947-78A3-C7CA-2B50-5D00DD4F3DDD}"/>
+              </a:ext>
+            </a:extLst>
+          </p:cNvPr>
+          <p:cNvPicPr>
+            <a:picLocks noChangeAspect="1" noChangeArrowheads="1"/>
+          </p:cNvPicPr>
+          <p:nvPr/>
+        </p:nvPicPr>
+        <p:blipFill>
+          <a:blip r:embed="rId4" cstate="print">
+            <a:extLst>
+              <a:ext uri="{28A0092B-C50C-407E-A947-70E740481C1C}">
+                <a14:useLocalDpi xmlns:a14="http://schemas.microsoft.com/office/drawing/2010/main" val="0"/>
+              </a:ext>
+            </a:extLst>
+          </a:blip>
+          <a:srcRect/>
+          <a:stretch>
+            <a:fillRect/>
+          </a:stretch>
+        </p:blipFill>
+        <p:spPr bwMode="auto">
+          <a:xfrm>
+            <a:off x="5307995" y="2469173"/>
+            <a:ext cx="5832647" cy="1919654"/>
+          </a:xfrm>
+          <a:prstGeom prst="rect">
+            <a:avLst/>
+          </a:prstGeom>
+          <a:noFill/>
+          <a:extLst>
+            <a:ext uri="{909E8E84-426E-40DD-AFC4-6F175D3DCCD1}">
+              <a14:hiddenFill xmlns:a14="http://schemas.microsoft.com/office/drawing/2010/main">
+                <a:solidFill>
+                  <a:srgbClr val="FFFFFF"/>
+                </a:solidFill>
+              </a14:hiddenFill>
+            </a:ext>
+          </a:extLst>
+        </p:spPr>
+      </p:pic>
+      <p:pic>
+        <p:nvPicPr>
+          <p:cNvPr id="1032" name="Picture 8">
+            <a:extLst>
+              <a:ext uri="{FF2B5EF4-FFF2-40B4-BE49-F238E27FC236}">
+                <a16:creationId xmlns:a16="http://schemas.microsoft.com/office/drawing/2014/main" id="{0AC33CC4-6C35-C6FD-C03A-DFEEFB9013D3}"/>
+              </a:ext>
+            </a:extLst>
+          </p:cNvPr>
+          <p:cNvPicPr>
+            <a:picLocks noChangeAspect="1" noChangeArrowheads="1"/>
+          </p:cNvPicPr>
+          <p:nvPr/>
+        </p:nvPicPr>
+        <p:blipFill>
+          <a:blip r:embed="rId5" cstate="print">
+            <a:extLst>
+              <a:ext uri="{28A0092B-C50C-407E-A947-70E740481C1C}">
+                <a14:useLocalDpi xmlns:a14="http://schemas.microsoft.com/office/drawing/2010/main" val="0"/>
+              </a:ext>
+            </a:extLst>
+          </a:blip>
+          <a:srcRect/>
+          <a:stretch>
+            <a:fillRect/>
+          </a:stretch>
+        </p:blipFill>
+        <p:spPr bwMode="auto">
+          <a:xfrm>
+            <a:off x="5302324" y="4701421"/>
+            <a:ext cx="5832647" cy="1919653"/>
+          </a:xfrm>
+          <a:prstGeom prst="rect">
+            <a:avLst/>
+          </a:prstGeom>
+          <a:noFill/>
+          <a:extLst>
+            <a:ext uri="{909E8E84-426E-40DD-AFC4-6F175D3DCCD1}">
+              <a14:hiddenFill xmlns:a14="http://schemas.microsoft.com/office/drawing/2010/main">
+                <a:solidFill>
+                  <a:srgbClr val="FFFFFF"/>
+                </a:solidFill>
+              </a14:hiddenFill>
+            </a:ext>
+          </a:extLst>
+        </p:spPr>
+      </p:pic>
+    </p:spTree>
+    <p:extLst>
+      <p:ext uri="{BB962C8B-B14F-4D97-AF65-F5344CB8AC3E}">
+        <p14:creationId xmlns:p14="http://schemas.microsoft.com/office/powerpoint/2010/main" val="2060882861"/>
+      </p:ext>
+    </p:extLst>
+  </p:cSld>
+  <p:clrMapOvr>
+    <a:masterClrMapping/>
+  </p:clrMapOvr>
+  <mc:AlternateContent xmlns:mc="http://schemas.openxmlformats.org/markup-compatibility/2006" xmlns:p14="http://schemas.microsoft.com/office/powerpoint/2010/main">
+    <mc:Choice Requires="p14">
+      <p:transition spd="med" p14:dur="700">
+        <p:fade/>
+      </p:transition>
+    </mc:Choice>
+    <mc:Fallback xmlns="">
+      <p:transition spd="med">
+        <p:fade/>
+      </p:transition>
+    </mc:Fallback>
+  </mc:AlternateContent>
+</p:sld>
+</file>
+
+<file path=ppt/slides/slide9.xml><?xml version="1.0" encoding="utf-8"?>
+<p:sld xmlns:a="http://schemas.openxmlformats.org/drawingml/2006/main" xmlns:r="http://schemas.openxmlformats.org/officeDocument/2006/relationships" xmlns:p="http://schemas.openxmlformats.org/presentationml/2006/main">
+  <p:cSld>
+    <p:spTree>
+      <p:nvGrpSpPr>
+        <p:cNvPr id="1" name="">
+          <a:extLst>
+            <a:ext uri="{FF2B5EF4-FFF2-40B4-BE49-F238E27FC236}">
+              <a16:creationId xmlns:a16="http://schemas.microsoft.com/office/drawing/2014/main" id="{014016E6-4DF5-97F6-9486-23E46F5C4A36}"/>
+            </a:ext>
+          </a:extLst>
+        </p:cNvPr>
+        <p:cNvGrpSpPr/>
+        <p:nvPr/>
+      </p:nvGrpSpPr>
+      <p:grpSpPr>
+        <a:xfrm>
+          <a:off x="0" y="0"/>
+          <a:ext cx="0" cy="0"/>
+          <a:chOff x="0" y="0"/>
+          <a:chExt cx="0" cy="0"/>
+        </a:xfrm>
+      </p:grpSpPr>
+      <p:sp>
+        <p:nvSpPr>
+          <p:cNvPr id="2" name="슬라이드 번호 개체 틀 1">
+            <a:extLst>
+              <a:ext uri="{FF2B5EF4-FFF2-40B4-BE49-F238E27FC236}">
+                <a16:creationId xmlns:a16="http://schemas.microsoft.com/office/drawing/2014/main" id="{A39D4B50-D754-79A0-CD51-823002DF348F}"/>
+              </a:ext>
+            </a:extLst>
+          </p:cNvPr>
+          <p:cNvSpPr>
+            <a:spLocks noGrp="1"/>
+          </p:cNvSpPr>
+          <p:nvPr>
+            <p:ph type="sldNum" sz="quarter" idx="12"/>
+          </p:nvPr>
+        </p:nvSpPr>
+        <p:spPr/>
+        <p:txBody>
+          <a:bodyPr/>
+          <a:lstStyle/>
+          <a:p>
+            <a:pPr rtl="0"/>
+            <a:fld id="{A3F31473-23EB-4724-8B59-FE6D21D89FA4}" type="slidenum">
+              <a:rPr lang="en-US" altLang="ko-KR" noProof="0" smtClean="0"/>
+              <a:t>9</a:t>
+            </a:fld>
+            <a:endParaRPr lang="en-US" altLang="ko-KR" noProof="0" dirty="0"/>
+          </a:p>
+        </p:txBody>
+      </p:sp>
+      <p:sp>
+        <p:nvSpPr>
+          <p:cNvPr id="4" name="TextBox 3">
+            <a:extLst>
+              <a:ext uri="{FF2B5EF4-FFF2-40B4-BE49-F238E27FC236}">
+                <a16:creationId xmlns:a16="http://schemas.microsoft.com/office/drawing/2014/main" id="{6843735A-526C-E0D0-66F8-62A3BD4EC82F}"/>
+              </a:ext>
+            </a:extLst>
+          </p:cNvPr>
+          <p:cNvSpPr txBox="1"/>
+          <p:nvPr/>
+        </p:nvSpPr>
+        <p:spPr>
+          <a:xfrm>
+            <a:off x="693812" y="2276872"/>
+            <a:ext cx="11233248" cy="3606821"/>
+          </a:xfrm>
+          <a:prstGeom prst="rect">
+            <a:avLst/>
+          </a:prstGeom>
+          <a:solidFill>
+            <a:schemeClr val="tx1">
+              <a:lumMod val="20000"/>
+              <a:lumOff val="80000"/>
+            </a:schemeClr>
+          </a:solidFill>
+        </p:spPr>
+        <p:txBody>
+          <a:bodyPr wrap="square" rtlCol="0">
+            <a:spAutoFit/>
+          </a:bodyPr>
+          <a:lstStyle/>
+          <a:p>
+            <a:pPr marL="285750" indent="-285750">
+              <a:lnSpc>
+                <a:spcPct val="150000"/>
+              </a:lnSpc>
+              <a:buFont typeface="Wingdings" panose="05000000000000000000" pitchFamily="2" charset="2"/>
+              <a:buChar char="v"/>
+            </a:pPr>
+            <a:r>
+              <a:rPr lang="ko-KR" altLang="en-US" dirty="0">
+                <a:latin typeface="휴먼모음T" panose="02030504000101010101" pitchFamily="18" charset="-127"/>
+                <a:ea typeface="휴먼모음T" panose="02030504000101010101" pitchFamily="18" charset="-127"/>
+              </a:rPr>
+              <a:t>모델 학습의 안정성 확보”</a:t>
+            </a:r>
+            <a:endParaRPr lang="en-US" altLang="ko-KR" dirty="0">
+              <a:latin typeface="휴먼모음T" panose="02030504000101010101" pitchFamily="18" charset="-127"/>
+              <a:ea typeface="휴먼모음T" panose="02030504000101010101" pitchFamily="18" charset="-127"/>
+            </a:endParaRPr>
+          </a:p>
+          <a:p>
+            <a:pPr marL="742950" lvl="1" indent="-285750">
+              <a:lnSpc>
+                <a:spcPct val="150000"/>
+              </a:lnSpc>
+              <a:buFont typeface="Wingdings" panose="05000000000000000000" pitchFamily="2" charset="2"/>
+              <a:buChar char="v"/>
+            </a:pPr>
+            <a:r>
+              <a:rPr lang="en-US" altLang="ko-KR" sz="1600" dirty="0">
+                <a:latin typeface="휴먼모음T" panose="02030504000101010101" pitchFamily="18" charset="-127"/>
+                <a:ea typeface="휴먼모음T" panose="02030504000101010101" pitchFamily="18" charset="-127"/>
+              </a:rPr>
+              <a:t>MSE , Cross-Entropy, Log-loss </a:t>
+            </a:r>
+            <a:endParaRPr lang="en-US" altLang="ko-KR" dirty="0">
+              <a:latin typeface="휴먼모음T" panose="02030504000101010101" pitchFamily="18" charset="-127"/>
+              <a:ea typeface="휴먼모음T" panose="02030504000101010101" pitchFamily="18" charset="-127"/>
+            </a:endParaRPr>
+          </a:p>
+          <a:p>
+            <a:pPr marL="285750" indent="-285750">
+              <a:lnSpc>
+                <a:spcPct val="150000"/>
+              </a:lnSpc>
+              <a:buFont typeface="Wingdings" panose="05000000000000000000" pitchFamily="2" charset="2"/>
+              <a:buChar char="v"/>
+            </a:pPr>
+            <a:r>
+              <a:rPr lang="en-US" altLang="ko-KR" dirty="0">
+                <a:latin typeface="휴먼모음T" panose="02030504000101010101" pitchFamily="18" charset="-127"/>
+                <a:ea typeface="휴먼모음T" panose="02030504000101010101" pitchFamily="18" charset="-127"/>
+              </a:rPr>
+              <a:t>Mini-batch </a:t>
+            </a:r>
+            <a:r>
+              <a:rPr lang="ko-KR" altLang="en-US" dirty="0">
+                <a:latin typeface="휴먼모음T" panose="02030504000101010101" pitchFamily="18" charset="-127"/>
+                <a:ea typeface="휴먼모음T" panose="02030504000101010101" pitchFamily="18" charset="-127"/>
+              </a:rPr>
+              <a:t>학습이 가능한 이유”</a:t>
+            </a:r>
+            <a:endParaRPr lang="en-US" altLang="ko-KR" dirty="0">
+              <a:latin typeface="휴먼모음T" panose="02030504000101010101" pitchFamily="18" charset="-127"/>
+              <a:ea typeface="휴먼모음T" panose="02030504000101010101" pitchFamily="18" charset="-127"/>
+            </a:endParaRPr>
+          </a:p>
+          <a:p>
+            <a:pPr marL="742950" lvl="1" indent="-285750">
+              <a:lnSpc>
+                <a:spcPct val="150000"/>
+              </a:lnSpc>
+              <a:buFont typeface="Wingdings" panose="05000000000000000000" pitchFamily="2" charset="2"/>
+              <a:buChar char="v"/>
+            </a:pPr>
+            <a:r>
+              <a:rPr lang="en-US" altLang="ko-KR" sz="1600" dirty="0">
+                <a:latin typeface="휴먼모음T" panose="02030504000101010101" pitchFamily="18" charset="-127"/>
+                <a:ea typeface="휴먼모음T" panose="02030504000101010101" pitchFamily="18" charset="-127"/>
+              </a:rPr>
+              <a:t>Mini-batch = </a:t>
+            </a:r>
+            <a:r>
+              <a:rPr lang="ko-KR" altLang="en-US" sz="1600" dirty="0">
+                <a:latin typeface="휴먼모음T" panose="02030504000101010101" pitchFamily="18" charset="-127"/>
+                <a:ea typeface="휴먼모음T" panose="02030504000101010101" pitchFamily="18" charset="-127"/>
+              </a:rPr>
+              <a:t>작은 샘플 평균</a:t>
+            </a:r>
+            <a:r>
+              <a:rPr lang="en-US" altLang="ko-KR" sz="1600" dirty="0">
+                <a:latin typeface="휴먼모음T" panose="02030504000101010101" pitchFamily="18" charset="-127"/>
+                <a:ea typeface="휴먼모음T" panose="02030504000101010101" pitchFamily="18" charset="-127"/>
+              </a:rPr>
+              <a:t>, CLT</a:t>
+            </a:r>
+            <a:r>
+              <a:rPr lang="ko-KR" altLang="en-US" sz="1600" dirty="0">
+                <a:latin typeface="휴먼모음T" panose="02030504000101010101" pitchFamily="18" charset="-127"/>
+                <a:ea typeface="휴먼모음T" panose="02030504000101010101" pitchFamily="18" charset="-127"/>
+              </a:rPr>
+              <a:t>없이는 </a:t>
+            </a:r>
+            <a:r>
+              <a:rPr lang="en-US" altLang="ko-KR" sz="1600" dirty="0">
+                <a:latin typeface="휴먼모음T" panose="02030504000101010101" pitchFamily="18" charset="-127"/>
+                <a:ea typeface="휴먼모음T" panose="02030504000101010101" pitchFamily="18" charset="-127"/>
+              </a:rPr>
+              <a:t>mini</a:t>
+            </a:r>
+            <a:r>
+              <a:rPr lang="ko-KR" altLang="en-US" sz="1600" dirty="0">
+                <a:latin typeface="휴먼모음T" panose="02030504000101010101" pitchFamily="18" charset="-127"/>
+                <a:ea typeface="휴먼모음T" panose="02030504000101010101" pitchFamily="18" charset="-127"/>
+              </a:rPr>
+              <a:t> </a:t>
+            </a:r>
+            <a:r>
+              <a:rPr lang="en-US" altLang="ko-KR" sz="1600" dirty="0">
+                <a:latin typeface="휴먼모음T" panose="02030504000101010101" pitchFamily="18" charset="-127"/>
+                <a:ea typeface="휴먼모음T" panose="02030504000101010101" pitchFamily="18" charset="-127"/>
+              </a:rPr>
+              <a:t>batch </a:t>
+            </a:r>
+            <a:r>
+              <a:rPr lang="ko-KR" altLang="en-US" sz="1600" dirty="0">
+                <a:latin typeface="휴먼모음T" panose="02030504000101010101" pitchFamily="18" charset="-127"/>
+                <a:ea typeface="휴먼모음T" panose="02030504000101010101" pitchFamily="18" charset="-127"/>
+              </a:rPr>
+              <a:t>도 없음</a:t>
+            </a:r>
+            <a:endParaRPr lang="en-US" altLang="ko-KR" dirty="0">
+              <a:latin typeface="휴먼모음T" panose="02030504000101010101" pitchFamily="18" charset="-127"/>
+              <a:ea typeface="휴먼모음T" panose="02030504000101010101" pitchFamily="18" charset="-127"/>
+            </a:endParaRPr>
+          </a:p>
+          <a:p>
+            <a:pPr marL="285750" indent="-285750">
+              <a:lnSpc>
+                <a:spcPct val="150000"/>
+              </a:lnSpc>
+              <a:buFont typeface="Wingdings" panose="05000000000000000000" pitchFamily="2" charset="2"/>
+              <a:buChar char="v"/>
+            </a:pPr>
+            <a:r>
+              <a:rPr lang="ko-KR" altLang="en-US" dirty="0">
+                <a:latin typeface="휴먼모음T" panose="02030504000101010101" pitchFamily="18" charset="-127"/>
+                <a:ea typeface="휴먼모음T" panose="02030504000101010101" pitchFamily="18" charset="-127"/>
+              </a:rPr>
+              <a:t>교차검증을 통한 모델의 평가</a:t>
+            </a:r>
+            <a:endParaRPr lang="en-US" altLang="ko-KR" dirty="0">
+              <a:latin typeface="휴먼모음T" panose="02030504000101010101" pitchFamily="18" charset="-127"/>
+              <a:ea typeface="휴먼모음T" panose="02030504000101010101" pitchFamily="18" charset="-127"/>
+            </a:endParaRPr>
+          </a:p>
+          <a:p>
+            <a:pPr marL="742950" lvl="1" indent="-285750">
+              <a:lnSpc>
+                <a:spcPct val="150000"/>
+              </a:lnSpc>
+              <a:buFont typeface="Wingdings" panose="05000000000000000000" pitchFamily="2" charset="2"/>
+              <a:buChar char="v"/>
+            </a:pPr>
+            <a:r>
+              <a:rPr lang="ko-KR" altLang="en-US" sz="1600" dirty="0">
+                <a:latin typeface="휴먼모음T" panose="02030504000101010101" pitchFamily="18" charset="-127"/>
+                <a:ea typeface="휴먼모음T" panose="02030504000101010101" pitchFamily="18" charset="-127"/>
+              </a:rPr>
+              <a:t>평균 </a:t>
+            </a:r>
+            <a:r>
+              <a:rPr lang="en-US" altLang="ko-KR" sz="1600" dirty="0">
+                <a:latin typeface="휴먼모음T" panose="02030504000101010101" pitchFamily="18" charset="-127"/>
+                <a:ea typeface="휴먼모음T" panose="02030504000101010101" pitchFamily="18" charset="-127"/>
+              </a:rPr>
+              <a:t>accuracy/loss, </a:t>
+            </a:r>
+            <a:r>
+              <a:rPr lang="ko-KR" altLang="en-US" sz="1600" dirty="0">
+                <a:latin typeface="휴먼모음T" panose="02030504000101010101" pitchFamily="18" charset="-127"/>
+                <a:ea typeface="휴먼모음T" panose="02030504000101010101" pitchFamily="18" charset="-127"/>
+              </a:rPr>
+              <a:t>교차검증 평균 등 </a:t>
+            </a:r>
+            <a:r>
+              <a:rPr lang="en-US" altLang="ko-KR" sz="1600" dirty="0">
+                <a:latin typeface="휴먼모음T" panose="02030504000101010101" pitchFamily="18" charset="-127"/>
+                <a:ea typeface="휴먼모음T" panose="02030504000101010101" pitchFamily="18" charset="-127"/>
+              </a:rPr>
+              <a:t>CLT </a:t>
+            </a:r>
+            <a:r>
+              <a:rPr lang="ko-KR" altLang="en-US" sz="1600" dirty="0">
+                <a:latin typeface="휴먼모음T" panose="02030504000101010101" pitchFamily="18" charset="-127"/>
+                <a:ea typeface="휴먼모음T" panose="02030504000101010101" pitchFamily="18" charset="-127"/>
+              </a:rPr>
+              <a:t>적용으로 이  평균들은 → 정규분포 근사</a:t>
+            </a:r>
+            <a:r>
+              <a:rPr lang="en-US" altLang="ko-KR" sz="1600" dirty="0">
+                <a:latin typeface="휴먼모음T" panose="02030504000101010101" pitchFamily="18" charset="-127"/>
+                <a:ea typeface="휴먼모음T" panose="02030504000101010101" pitchFamily="18" charset="-127"/>
+              </a:rPr>
+              <a:t> </a:t>
+            </a:r>
+            <a:r>
+              <a:rPr lang="ko-KR" altLang="en-US" sz="1600" dirty="0">
+                <a:latin typeface="휴먼모음T" panose="02030504000101010101" pitchFamily="18" charset="-127"/>
+                <a:ea typeface="휴먼모음T" panose="02030504000101010101" pitchFamily="18" charset="-127"/>
+              </a:rPr>
+              <a:t>→ 신뢰구간</a:t>
+            </a:r>
+            <a:r>
+              <a:rPr lang="en-US" altLang="ko-KR" sz="1600" dirty="0">
+                <a:latin typeface="휴먼모음T" panose="02030504000101010101" pitchFamily="18" charset="-127"/>
+                <a:ea typeface="휴먼모음T" panose="02030504000101010101" pitchFamily="18" charset="-127"/>
+              </a:rPr>
+              <a:t> </a:t>
+            </a:r>
+            <a:r>
+              <a:rPr lang="ko-KR" altLang="en-US" sz="1600" dirty="0">
+                <a:latin typeface="휴먼모음T" panose="02030504000101010101" pitchFamily="18" charset="-127"/>
+                <a:ea typeface="휴먼모음T" panose="02030504000101010101" pitchFamily="18" charset="-127"/>
+              </a:rPr>
+              <a:t>→</a:t>
+            </a:r>
+            <a:r>
+              <a:rPr lang="en-US" altLang="ko-KR" sz="1600" dirty="0">
+                <a:latin typeface="휴먼모음T" panose="02030504000101010101" pitchFamily="18" charset="-127"/>
+                <a:ea typeface="휴먼모음T" panose="02030504000101010101" pitchFamily="18" charset="-127"/>
+              </a:rPr>
+              <a:t> </a:t>
+            </a:r>
+            <a:r>
+              <a:rPr lang="ko-KR" altLang="en-US" sz="1600" dirty="0">
+                <a:latin typeface="휴먼모음T" panose="02030504000101010101" pitchFamily="18" charset="-127"/>
+                <a:ea typeface="휴먼모음T" panose="02030504000101010101" pitchFamily="18" charset="-127"/>
+              </a:rPr>
+              <a:t>통계적 비교 가능</a:t>
+            </a:r>
+            <a:endParaRPr lang="en-US" altLang="ko-KR" dirty="0">
+              <a:latin typeface="휴먼모음T" panose="02030504000101010101" pitchFamily="18" charset="-127"/>
+              <a:ea typeface="휴먼모음T" panose="02030504000101010101" pitchFamily="18" charset="-127"/>
+            </a:endParaRPr>
+          </a:p>
+          <a:p>
+            <a:pPr marL="285750" indent="-285750">
+              <a:lnSpc>
+                <a:spcPct val="150000"/>
+              </a:lnSpc>
+              <a:buFont typeface="Wingdings" panose="05000000000000000000" pitchFamily="2" charset="2"/>
+              <a:buChar char="v"/>
+            </a:pPr>
+            <a:r>
+              <a:rPr lang="en-US" altLang="ko-KR" dirty="0">
+                <a:latin typeface="휴먼모음T" panose="02030504000101010101" pitchFamily="18" charset="-127"/>
+                <a:ea typeface="휴먼모음T" panose="02030504000101010101" pitchFamily="18" charset="-127"/>
+              </a:rPr>
+              <a:t>A/B </a:t>
+            </a:r>
+            <a:r>
+              <a:rPr lang="ko-KR" altLang="en-US" dirty="0">
+                <a:latin typeface="휴먼모음T" panose="02030504000101010101" pitchFamily="18" charset="-127"/>
+                <a:ea typeface="휴먼모음T" panose="02030504000101010101" pitchFamily="18" charset="-127"/>
+              </a:rPr>
+              <a:t>테스트와 실험 설계의 핵심</a:t>
+            </a:r>
+            <a:endParaRPr lang="en-US" altLang="ko-KR" dirty="0">
+              <a:latin typeface="휴먼모음T" panose="02030504000101010101" pitchFamily="18" charset="-127"/>
+              <a:ea typeface="휴먼모음T" panose="02030504000101010101" pitchFamily="18" charset="-127"/>
+            </a:endParaRPr>
+          </a:p>
+          <a:p>
+            <a:pPr marL="742950" lvl="1" indent="-285750">
+              <a:lnSpc>
+                <a:spcPct val="150000"/>
+              </a:lnSpc>
+              <a:buFont typeface="Wingdings" panose="05000000000000000000" pitchFamily="2" charset="2"/>
+              <a:buChar char="v"/>
+            </a:pPr>
+            <a:r>
+              <a:rPr lang="ko-KR" altLang="en-US" sz="1600" dirty="0">
+                <a:latin typeface="휴먼모음T" panose="02030504000101010101" pitchFamily="18" charset="-127"/>
+                <a:ea typeface="휴먼모음T" panose="02030504000101010101" pitchFamily="18" charset="-127"/>
+              </a:rPr>
+              <a:t>광고 효과 비교</a:t>
+            </a:r>
+            <a:r>
+              <a:rPr lang="en-US" altLang="ko-KR" sz="1600" dirty="0">
+                <a:latin typeface="휴먼모음T" panose="02030504000101010101" pitchFamily="18" charset="-127"/>
+                <a:ea typeface="휴먼모음T" panose="02030504000101010101" pitchFamily="18" charset="-127"/>
+              </a:rPr>
+              <a:t>, </a:t>
+            </a:r>
+            <a:r>
+              <a:rPr lang="ko-KR" altLang="en-US" sz="1600" dirty="0">
+                <a:latin typeface="휴먼모음T" panose="02030504000101010101" pitchFamily="18" charset="-127"/>
+                <a:ea typeface="휴먼모음T" panose="02030504000101010101" pitchFamily="18" charset="-127"/>
+              </a:rPr>
+              <a:t>추천 알고리즘 비교</a:t>
+            </a:r>
+            <a:r>
+              <a:rPr lang="en-US" altLang="ko-KR" sz="1600" dirty="0">
+                <a:latin typeface="휴먼모음T" panose="02030504000101010101" pitchFamily="18" charset="-127"/>
+                <a:ea typeface="휴먼모음T" panose="02030504000101010101" pitchFamily="18" charset="-127"/>
+              </a:rPr>
+              <a:t>, UI </a:t>
+            </a:r>
+            <a:r>
+              <a:rPr lang="ko-KR" altLang="en-US" sz="1600" dirty="0">
+                <a:latin typeface="휴먼모음T" panose="02030504000101010101" pitchFamily="18" charset="-127"/>
+                <a:ea typeface="휴먼모음T" panose="02030504000101010101" pitchFamily="18" charset="-127"/>
+              </a:rPr>
+              <a:t>개선 효과 측정  등 전부 평균 비교 문제로 </a:t>
+            </a:r>
+            <a:r>
+              <a:rPr lang="en-US" altLang="ko-KR" sz="1600" dirty="0">
+                <a:latin typeface="휴먼모음T" panose="02030504000101010101" pitchFamily="18" charset="-127"/>
+                <a:ea typeface="휴먼모음T" panose="02030504000101010101" pitchFamily="18" charset="-127"/>
+              </a:rPr>
+              <a:t>CLT </a:t>
+            </a:r>
+            <a:r>
+              <a:rPr lang="ko-KR" altLang="en-US" sz="1600" dirty="0">
+                <a:latin typeface="휴먼모음T" panose="02030504000101010101" pitchFamily="18" charset="-127"/>
+                <a:ea typeface="휴먼모음T" panose="02030504000101010101" pitchFamily="18" charset="-127"/>
+              </a:rPr>
+              <a:t>덕분에</a:t>
+            </a:r>
+            <a:r>
+              <a:rPr lang="en-US" altLang="ko-KR" sz="1600" dirty="0">
+                <a:latin typeface="휴먼모음T" panose="02030504000101010101" pitchFamily="18" charset="-127"/>
+                <a:ea typeface="휴먼모음T" panose="02030504000101010101" pitchFamily="18" charset="-127"/>
+              </a:rPr>
+              <a:t> </a:t>
+            </a:r>
+            <a:r>
+              <a:rPr lang="ko-KR" altLang="en-US" sz="1600" dirty="0">
+                <a:latin typeface="휴먼모음T" panose="02030504000101010101" pitchFamily="18" charset="-127"/>
+                <a:ea typeface="휴먼모음T" panose="02030504000101010101" pitchFamily="18" charset="-127"/>
+              </a:rPr>
+              <a:t>두 평균 차이 → 정규분포 근사 → </a:t>
+            </a:r>
+            <a:r>
+              <a:rPr lang="en-US" altLang="ko-KR" sz="1600" dirty="0">
+                <a:latin typeface="휴먼모음T" panose="02030504000101010101" pitchFamily="18" charset="-127"/>
+                <a:ea typeface="휴먼모음T" panose="02030504000101010101" pitchFamily="18" charset="-127"/>
+              </a:rPr>
+              <a:t>p-value </a:t>
+            </a:r>
+            <a:r>
+              <a:rPr lang="ko-KR" altLang="en-US" sz="1600" dirty="0">
+                <a:latin typeface="휴먼모음T" panose="02030504000101010101" pitchFamily="18" charset="-127"/>
+                <a:ea typeface="휴먼모음T" panose="02030504000101010101" pitchFamily="18" charset="-127"/>
+              </a:rPr>
+              <a:t>계산 가능</a:t>
+            </a:r>
+            <a:r>
+              <a:rPr lang="ko-KR" altLang="en-US" dirty="0">
+                <a:latin typeface="휴먼모음T" panose="02030504000101010101" pitchFamily="18" charset="-127"/>
+                <a:ea typeface="휴먼모음T" panose="02030504000101010101" pitchFamily="18" charset="-127"/>
+              </a:rPr>
+              <a:t> </a:t>
+            </a:r>
+            <a:endParaRPr lang="en-US" altLang="ko-KR" sz="2000" dirty="0">
+              <a:latin typeface="휴먼모음T" panose="02030504000101010101" pitchFamily="18" charset="-127"/>
+              <a:ea typeface="휴먼모음T" panose="02030504000101010101" pitchFamily="18" charset="-127"/>
+            </a:endParaRPr>
+          </a:p>
+        </p:txBody>
+      </p:sp>
+      <p:sp>
+        <p:nvSpPr>
+          <p:cNvPr id="9" name="TextBox 8">
+            <a:extLst>
+              <a:ext uri="{FF2B5EF4-FFF2-40B4-BE49-F238E27FC236}">
+                <a16:creationId xmlns:a16="http://schemas.microsoft.com/office/drawing/2014/main" id="{185A9784-515E-A3E4-8F67-F24BA80B28DC}"/>
+              </a:ext>
+            </a:extLst>
+          </p:cNvPr>
+          <p:cNvSpPr txBox="1"/>
+          <p:nvPr/>
+        </p:nvSpPr>
+        <p:spPr>
+          <a:xfrm>
+            <a:off x="117748" y="260648"/>
+            <a:ext cx="2592288" cy="584775"/>
+          </a:xfrm>
+          <a:prstGeom prst="rect">
+            <a:avLst/>
+          </a:prstGeom>
+          <a:noFill/>
+        </p:spPr>
+        <p:txBody>
+          <a:bodyPr wrap="square" rtlCol="0">
+            <a:spAutoFit/>
+          </a:bodyPr>
+          <a:lstStyle/>
+          <a:p>
+            <a:r>
+              <a:rPr lang="ko-KR" altLang="en-US" sz="3200" b="1"/>
+              <a:t>문제 풀이</a:t>
+            </a:r>
+          </a:p>
+        </p:txBody>
+      </p:sp>
+      <p:sp>
+        <p:nvSpPr>
+          <p:cNvPr id="5" name="TextBox 4">
+            <a:extLst>
+              <a:ext uri="{FF2B5EF4-FFF2-40B4-BE49-F238E27FC236}">
+                <a16:creationId xmlns:a16="http://schemas.microsoft.com/office/drawing/2014/main" id="{52039815-B66C-C01C-F725-1707E5711FCB}"/>
+              </a:ext>
+            </a:extLst>
+          </p:cNvPr>
+          <p:cNvSpPr txBox="1"/>
+          <p:nvPr/>
+        </p:nvSpPr>
+        <p:spPr>
+          <a:xfrm>
+            <a:off x="549796" y="858989"/>
+            <a:ext cx="11377264" cy="970843"/>
+          </a:xfrm>
+          <a:prstGeom prst="rect">
+            <a:avLst/>
+          </a:prstGeom>
+          <a:noFill/>
+        </p:spPr>
+        <p:txBody>
+          <a:bodyPr wrap="square">
+            <a:spAutoFit/>
+          </a:bodyPr>
+          <a:lstStyle/>
+          <a:p>
+            <a:pPr marL="285750" indent="-285750">
+              <a:lnSpc>
+                <a:spcPct val="150000"/>
+              </a:lnSpc>
+              <a:buFont typeface="Wingdings" panose="05000000000000000000" pitchFamily="2" charset="2"/>
+              <a:buChar char="v"/>
+            </a:pPr>
+            <a:r>
+              <a:rPr lang="ko-KR" altLang="en-US" sz="2000" dirty="0">
+                <a:latin typeface="휴먼모음T" panose="02030504000101010101" pitchFamily="18" charset="-127"/>
+                <a:ea typeface="휴먼모음T" panose="02030504000101010101" pitchFamily="18" charset="-127"/>
+              </a:rPr>
+              <a:t>중심극한정리</a:t>
+            </a:r>
+            <a:r>
+              <a:rPr lang="en-US" altLang="ko-KR" sz="2000" dirty="0">
+                <a:latin typeface="휴먼모음T" panose="02030504000101010101" pitchFamily="18" charset="-127"/>
+                <a:ea typeface="휴먼모음T" panose="02030504000101010101" pitchFamily="18" charset="-127"/>
+              </a:rPr>
+              <a:t>(</a:t>
+            </a:r>
+            <a:r>
+              <a:rPr lang="ko-KR" altLang="en-US" sz="2000" dirty="0">
+                <a:latin typeface="휴먼모음T" panose="02030504000101010101" pitchFamily="18" charset="-127"/>
+                <a:ea typeface="휴먼모음T" panose="02030504000101010101" pitchFamily="18" charset="-127"/>
+              </a:rPr>
+              <a:t>데이터는 불규칙하지만</a:t>
+            </a:r>
+            <a:r>
+              <a:rPr lang="en-US" altLang="ko-KR" sz="2000" dirty="0">
+                <a:latin typeface="휴먼모음T" panose="02030504000101010101" pitchFamily="18" charset="-127"/>
+                <a:ea typeface="휴먼모음T" panose="02030504000101010101" pitchFamily="18" charset="-127"/>
+              </a:rPr>
+              <a:t>, </a:t>
+            </a:r>
+            <a:r>
+              <a:rPr lang="ko-KR" altLang="en-US" sz="2000" dirty="0">
+                <a:latin typeface="휴먼모음T" panose="02030504000101010101" pitchFamily="18" charset="-127"/>
+                <a:ea typeface="휴먼모음T" panose="02030504000101010101" pitchFamily="18" charset="-127"/>
+              </a:rPr>
+              <a:t>평균은 예측 가능하다 → 그래서 학습이 가능하다</a:t>
+            </a:r>
+            <a:r>
+              <a:rPr lang="en-US" altLang="ko-KR" sz="2000" dirty="0">
+                <a:latin typeface="휴먼모음T" panose="02030504000101010101" pitchFamily="18" charset="-127"/>
+                <a:ea typeface="휴먼모음T" panose="02030504000101010101" pitchFamily="18" charset="-127"/>
+              </a:rPr>
+              <a:t>)</a:t>
+            </a:r>
+            <a:r>
+              <a:rPr lang="ko-KR" altLang="en-US" sz="2000" dirty="0">
+                <a:latin typeface="휴먼모음T" panose="02030504000101010101" pitchFamily="18" charset="-127"/>
+                <a:ea typeface="휴먼모음T" panose="02030504000101010101" pitchFamily="18" charset="-127"/>
+              </a:rPr>
+              <a:t>가 </a:t>
+            </a:r>
+            <a:r>
+              <a:rPr lang="ko-KR" altLang="en-US" sz="2000" dirty="0" err="1">
+                <a:latin typeface="휴먼모음T" panose="02030504000101010101" pitchFamily="18" charset="-127"/>
+                <a:ea typeface="휴먼모음T" panose="02030504000101010101" pitchFamily="18" charset="-127"/>
+              </a:rPr>
+              <a:t>머신러닝에</a:t>
+            </a:r>
+            <a:r>
+              <a:rPr lang="ko-KR" altLang="en-US" sz="2000" dirty="0">
+                <a:latin typeface="휴먼모음T" panose="02030504000101010101" pitchFamily="18" charset="-127"/>
+                <a:ea typeface="휴먼모음T" panose="02030504000101010101" pitchFamily="18" charset="-127"/>
+              </a:rPr>
+              <a:t> 접목하는 내용을 모의실험으로 파이썬 코드로 제시하라</a:t>
+            </a:r>
+            <a:endParaRPr lang="en-US" altLang="ko-KR" sz="2000" dirty="0">
+              <a:latin typeface="휴먼모음T" panose="02030504000101010101" pitchFamily="18" charset="-127"/>
+              <a:ea typeface="휴먼모음T" panose="02030504000101010101" pitchFamily="18" charset="-127"/>
+            </a:endParaRPr>
+          </a:p>
+        </p:txBody>
+      </p:sp>
+    </p:spTree>
+    <p:extLst>
+      <p:ext uri="{BB962C8B-B14F-4D97-AF65-F5344CB8AC3E}">
+        <p14:creationId xmlns:p14="http://schemas.microsoft.com/office/powerpoint/2010/main" val="2559646205"/>
+      </p:ext>
+    </p:extLst>
+  </p:cSld>
+  <p:clrMapOvr>
+    <a:masterClrMapping/>
+  </p:clrMapOvr>
+  <mc:AlternateContent xmlns:mc="http://schemas.openxmlformats.org/markup-compatibility/2006" xmlns:p14="http://schemas.microsoft.com/office/powerpoint/2010/main">
+    <mc:Choice Requires="p14">
+      <p:transition spd="med" p14:dur="700">
+        <p:fade/>
+      </p:transition>
+    </mc:Choice>
+    <mc:Fallback xmlns="">
+      <p:transition spd="med">
+        <p:fade/>
+      </p:transition>
+    </mc:Fallback>
+  </mc:AlternateContent>
+</p:sld>
+</file>
+
 <file path=ppt/theme/theme1.xml><?xml version="1.0" encoding="utf-8"?>
 <a:theme xmlns:a="http://schemas.openxmlformats.org/drawingml/2006/main" name="마케팅 16x9">
   <a:themeElements>
@@ -9233,26 +9907,6 @@
 </file>
 
 <file path=customXml/item1.xml><?xml version="1.0" encoding="utf-8"?>
-<p:properties xmlns:p="http://schemas.microsoft.com/office/2006/metadata/properties" xmlns:xsi="http://www.w3.org/2001/XMLSchema-instance" xmlns:pc="http://schemas.microsoft.com/office/infopath/2007/PartnerControls">
-  <documentManagement>
-    <VSO_x0020_item_x0020_id xmlns="40262f94-9f35-4ac3-9a90-690165a166b7" xsi:nil="true"/>
-    <Assetid_x0020_ xmlns="40262f94-9f35-4ac3-9a90-690165a166b7" xsi:nil="true"/>
-    <Item_x0020_Details xmlns="40262f94-9f35-4ac3-9a90-690165a166b7" xsi:nil="true"/>
-    <Template_x0020_details xmlns="40262f94-9f35-4ac3-9a90-690165a166b7" xsi:nil="true"/>
-  </documentManagement>
-</p:properties>
-</file>
-
-<file path=customXml/item2.xml><?xml version="1.0" encoding="utf-8"?>
-<?mso-contentType ?>
-<FormTemplates xmlns="http://schemas.microsoft.com/sharepoint/v3/contenttype/forms">
-  <Display>DocumentLibraryForm</Display>
-  <Edit>DocumentLibraryForm</Edit>
-  <New>DocumentLibraryForm</New>
-</FormTemplates>
-</file>
-
-<file path=customXml/item3.xml><?xml version="1.0" encoding="utf-8"?>
 <ct:contentTypeSchema xmlns:ct="http://schemas.microsoft.com/office/2006/metadata/contentType" xmlns:ma="http://schemas.microsoft.com/office/2006/metadata/properties/metaAttributes" ct:_="" ma:_="" ma:contentTypeName="Document" ma:contentTypeID="0x010100AA3F7D94069FF64A86F7DFF56D60E3BE" ma:contentTypeVersion="6" ma:contentTypeDescription="Create a new document." ma:contentTypeScope="" ma:versionID="c32302c77d4085ecf495bdddb7f5e889">
   <xsd:schema xmlns:xsd="http://www.w3.org/2001/XMLSchema" xmlns:xs="http://www.w3.org/2001/XMLSchema" xmlns:p="http://schemas.microsoft.com/office/2006/metadata/properties" xmlns:ns2="a4f35948-e619-41b3-aa29-22878b09cfd2" xmlns:ns3="40262f94-9f35-4ac3-9a90-690165a166b7" targetNamespace="http://schemas.microsoft.com/office/2006/metadata/properties" ma:root="true" ma:fieldsID="4ab5ae46be95f9d0be6107e8200be7a2" ns2:_="" ns3:_="">
     <xsd:import namespace="a4f35948-e619-41b3-aa29-22878b09cfd2"/>
@@ -9433,32 +10087,27 @@
 </ct:contentTypeSchema>
 </file>
 
-<file path=customXml/itemProps1.xml><?xml version="1.0" encoding="utf-8"?>
-<ds:datastoreItem xmlns:ds="http://schemas.openxmlformats.org/officeDocument/2006/customXml" ds:itemID="{50AACE6D-8EB6-447A-8DFD-C2C0C52916AC}">
-  <ds:schemaRefs>
-    <ds:schemaRef ds:uri="a4f35948-e619-41b3-aa29-22878b09cfd2"/>
-    <ds:schemaRef ds:uri="http://purl.org/dc/elements/1.1/"/>
-    <ds:schemaRef ds:uri="http://schemas.microsoft.com/office/infopath/2007/PartnerControls"/>
-    <ds:schemaRef ds:uri="40262f94-9f35-4ac3-9a90-690165a166b7"/>
-    <ds:schemaRef ds:uri="http://purl.org/dc/dcmitype/"/>
-    <ds:schemaRef ds:uri="http://schemas.microsoft.com/office/2006/documentManagement/types"/>
-    <ds:schemaRef ds:uri="http://schemas.microsoft.com/office/2006/metadata/properties"/>
-    <ds:schemaRef ds:uri="http://schemas.openxmlformats.org/package/2006/metadata/core-properties"/>
-    <ds:schemaRef ds:uri="http://www.w3.org/XML/1998/namespace"/>
-    <ds:schemaRef ds:uri="http://purl.org/dc/terms/"/>
-  </ds:schemaRefs>
-</ds:datastoreItem>
+<file path=customXml/item2.xml><?xml version="1.0" encoding="utf-8"?>
+<?mso-contentType ?>
+<FormTemplates xmlns="http://schemas.microsoft.com/sharepoint/v3/contenttype/forms">
+  <Display>DocumentLibraryForm</Display>
+  <Edit>DocumentLibraryForm</Edit>
+  <New>DocumentLibraryForm</New>
+</FormTemplates>
 </file>
 
-<file path=customXml/itemProps2.xml><?xml version="1.0" encoding="utf-8"?>
-<ds:datastoreItem xmlns:ds="http://schemas.openxmlformats.org/officeDocument/2006/customXml" ds:itemID="{7F9B8BCC-BF24-4800-92E1-9F891BBB27E6}">
-  <ds:schemaRefs>
-    <ds:schemaRef ds:uri="http://schemas.microsoft.com/sharepoint/v3/contenttype/forms"/>
-  </ds:schemaRefs>
-</ds:datastoreItem>
+<file path=customXml/item3.xml><?xml version="1.0" encoding="utf-8"?>
+<p:properties xmlns:p="http://schemas.microsoft.com/office/2006/metadata/properties" xmlns:xsi="http://www.w3.org/2001/XMLSchema-instance" xmlns:pc="http://schemas.microsoft.com/office/infopath/2007/PartnerControls">
+  <documentManagement>
+    <VSO_x0020_item_x0020_id xmlns="40262f94-9f35-4ac3-9a90-690165a166b7" xsi:nil="true"/>
+    <Assetid_x0020_ xmlns="40262f94-9f35-4ac3-9a90-690165a166b7" xsi:nil="true"/>
+    <Item_x0020_Details xmlns="40262f94-9f35-4ac3-9a90-690165a166b7" xsi:nil="true"/>
+    <Template_x0020_details xmlns="40262f94-9f35-4ac3-9a90-690165a166b7" xsi:nil="true"/>
+  </documentManagement>
+</p:properties>
 </file>
 
-<file path=customXml/itemProps3.xml><?xml version="1.0" encoding="utf-8"?>
+<file path=customXml/itemProps1.xml><?xml version="1.0" encoding="utf-8"?>
 <ds:datastoreItem xmlns:ds="http://schemas.openxmlformats.org/officeDocument/2006/customXml" ds:itemID="{5CCB2C71-1ED8-4540-B003-293B5E75C71F}">
   <ds:schemaRefs>
     <ds:schemaRef ds:uri="http://schemas.microsoft.com/office/2006/metadata/contentType"/>
@@ -9475,4 +10124,29 @@
     <ds:schemaRef ds:uri="http://schemas.microsoft.com/internal/obd"/>
   </ds:schemaRefs>
 </ds:datastoreItem>
+</file>
+
+<file path=customXml/itemProps2.xml><?xml version="1.0" encoding="utf-8"?>
+<ds:datastoreItem xmlns:ds="http://schemas.openxmlformats.org/officeDocument/2006/customXml" ds:itemID="{7F9B8BCC-BF24-4800-92E1-9F891BBB27E6}">
+  <ds:schemaRefs>
+    <ds:schemaRef ds:uri="http://schemas.microsoft.com/sharepoint/v3/contenttype/forms"/>
+  </ds:schemaRefs>
+</ds:datastoreItem>
+</file>
+
+<file path=customXml/itemProps3.xml><?xml version="1.0" encoding="utf-8"?>
+<ds:datastoreItem xmlns:ds="http://schemas.openxmlformats.org/officeDocument/2006/customXml" ds:itemID="{50AACE6D-8EB6-447A-8DFD-C2C0C52916AC}">
+  <ds:schemaRefs>
+    <ds:schemaRef ds:uri="a4f35948-e619-41b3-aa29-22878b09cfd2"/>
+    <ds:schemaRef ds:uri="http://purl.org/dc/elements/1.1/"/>
+    <ds:schemaRef ds:uri="http://schemas.microsoft.com/office/infopath/2007/PartnerControls"/>
+    <ds:schemaRef ds:uri="40262f94-9f35-4ac3-9a90-690165a166b7"/>
+    <ds:schemaRef ds:uri="http://purl.org/dc/dcmitype/"/>
+    <ds:schemaRef ds:uri="http://schemas.microsoft.com/office/2006/documentManagement/types"/>
+    <ds:schemaRef ds:uri="http://schemas.microsoft.com/office/2006/metadata/properties"/>
+    <ds:schemaRef ds:uri="http://schemas.openxmlformats.org/package/2006/metadata/core-properties"/>
+    <ds:schemaRef ds:uri="http://www.w3.org/XML/1998/namespace"/>
+    <ds:schemaRef ds:uri="http://purl.org/dc/terms/"/>
+  </ds:schemaRefs>
+</ds:datastoreItem>
 </file>
--- a/5_Montecarlo Simulation.pptx
+++ b/5_Montecarlo Simulation.pptx
@@ -5,10 +5,10 @@
     <p:sldMasterId id="2147483648" r:id="rId4"/>
   </p:sldMasterIdLst>
   <p:notesMasterIdLst>
-    <p:notesMasterId r:id="rId15"/>
+    <p:notesMasterId r:id="rId16"/>
   </p:notesMasterIdLst>
   <p:handoutMasterIdLst>
-    <p:handoutMasterId r:id="rId16"/>
+    <p:handoutMasterId r:id="rId17"/>
   </p:handoutMasterIdLst>
   <p:sldIdLst>
     <p:sldId id="256" r:id="rId5"/>
@@ -18,9 +18,10 @@
     <p:sldId id="307" r:id="rId9"/>
     <p:sldId id="306" r:id="rId10"/>
     <p:sldId id="308" r:id="rId11"/>
-    <p:sldId id="311" r:id="rId12"/>
-    <p:sldId id="309" r:id="rId13"/>
-    <p:sldId id="310" r:id="rId14"/>
+    <p:sldId id="312" r:id="rId12"/>
+    <p:sldId id="311" r:id="rId13"/>
+    <p:sldId id="309" r:id="rId14"/>
+    <p:sldId id="310" r:id="rId15"/>
   </p:sldIdLst>
   <p:sldSz cx="12188825" cy="6858000"/>
   <p:notesSz cx="6858000" cy="9144000"/>
@@ -242,7 +243,7 @@
                 <a:latin typeface="맑은 고딕" panose="020B0503020000020004" pitchFamily="50" charset="-127"/>
                 <a:ea typeface="맑은 고딕" panose="020B0503020000020004" pitchFamily="50" charset="-127"/>
               </a:rPr>
-              <a:t>2026-03-24</a:t>
+              <a:t>2026-03-25</a:t>
             </a:fld>
             <a:endParaRPr lang="ko-KR" altLang="en-US" dirty="0">
               <a:latin typeface="맑은 고딕" panose="020B0503020000020004" pitchFamily="50" charset="-127"/>
@@ -429,7 +430,7 @@
             <a:fld id="{39DBE7D5-AA2D-4B26-8C69-8B60D39FD5EE}" type="datetime1">
               <a:rPr lang="ko-KR" altLang="en-US" smtClean="0"/>
               <a:pPr/>
-              <a:t>2026-03-24</a:t>
+              <a:t>2026-03-25</a:t>
             </a:fld>
             <a:endParaRPr lang="ko-KR" altLang="en-US" dirty="0"/>
           </a:p>
@@ -798,6 +799,115 @@
         <p:cNvPr id="1" name="">
           <a:extLst>
             <a:ext uri="{FF2B5EF4-FFF2-40B4-BE49-F238E27FC236}">
+              <a16:creationId xmlns:a16="http://schemas.microsoft.com/office/drawing/2014/main" id="{97800921-2A98-58A1-77F4-D8659C0BA353}"/>
+            </a:ext>
+          </a:extLst>
+        </p:cNvPr>
+        <p:cNvGrpSpPr/>
+        <p:nvPr/>
+      </p:nvGrpSpPr>
+      <p:grpSpPr>
+        <a:xfrm>
+          <a:off x="0" y="0"/>
+          <a:ext cx="0" cy="0"/>
+          <a:chOff x="0" y="0"/>
+          <a:chExt cx="0" cy="0"/>
+        </a:xfrm>
+      </p:grpSpPr>
+      <p:sp>
+        <p:nvSpPr>
+          <p:cNvPr id="2" name="슬라이드 이미지 개체 틀 1">
+            <a:extLst>
+              <a:ext uri="{FF2B5EF4-FFF2-40B4-BE49-F238E27FC236}">
+                <a16:creationId xmlns:a16="http://schemas.microsoft.com/office/drawing/2014/main" id="{748269F1-DD08-6BF5-8344-47DF8E22EB29}"/>
+              </a:ext>
+            </a:extLst>
+          </p:cNvPr>
+          <p:cNvSpPr>
+            <a:spLocks noGrp="1" noRot="1" noChangeAspect="1"/>
+          </p:cNvSpPr>
+          <p:nvPr>
+            <p:ph type="sldImg"/>
+          </p:nvPr>
+        </p:nvSpPr>
+        <p:spPr/>
+      </p:sp>
+      <p:sp>
+        <p:nvSpPr>
+          <p:cNvPr id="3" name="슬라이드 노트 개체 틀 2">
+            <a:extLst>
+              <a:ext uri="{FF2B5EF4-FFF2-40B4-BE49-F238E27FC236}">
+                <a16:creationId xmlns:a16="http://schemas.microsoft.com/office/drawing/2014/main" id="{3496A4B6-DC7D-FF48-46FC-7358B9C8159D}"/>
+              </a:ext>
+            </a:extLst>
+          </p:cNvPr>
+          <p:cNvSpPr>
+            <a:spLocks noGrp="1"/>
+          </p:cNvSpPr>
+          <p:nvPr>
+            <p:ph type="body" idx="1"/>
+          </p:nvPr>
+        </p:nvSpPr>
+        <p:spPr/>
+        <p:txBody>
+          <a:bodyPr/>
+          <a:lstStyle/>
+          <a:p>
+            <a:endParaRPr lang="ko-KR" altLang="en-US" dirty="0"/>
+          </a:p>
+        </p:txBody>
+      </p:sp>
+      <p:sp>
+        <p:nvSpPr>
+          <p:cNvPr id="4" name="슬라이드 번호 개체 틀 3">
+            <a:extLst>
+              <a:ext uri="{FF2B5EF4-FFF2-40B4-BE49-F238E27FC236}">
+                <a16:creationId xmlns:a16="http://schemas.microsoft.com/office/drawing/2014/main" id="{8F61E27B-EE8E-0361-5AEB-07842FCFA0C5}"/>
+              </a:ext>
+            </a:extLst>
+          </p:cNvPr>
+          <p:cNvSpPr>
+            <a:spLocks noGrp="1"/>
+          </p:cNvSpPr>
+          <p:nvPr>
+            <p:ph type="sldNum" sz="quarter" idx="10"/>
+          </p:nvPr>
+        </p:nvSpPr>
+        <p:spPr/>
+        <p:txBody>
+          <a:bodyPr/>
+          <a:lstStyle/>
+          <a:p>
+            <a:pPr rtl="0"/>
+            <a:fld id="{5FB91549-43BF-425A-AF25-75262019208C}" type="slidenum">
+              <a:rPr lang="en-US" altLang="ko-KR" smtClean="0"/>
+              <a:t>10</a:t>
+            </a:fld>
+            <a:endParaRPr lang="ko-KR" altLang="en-US" dirty="0"/>
+          </a:p>
+        </p:txBody>
+      </p:sp>
+    </p:spTree>
+    <p:extLst>
+      <p:ext uri="{BB962C8B-B14F-4D97-AF65-F5344CB8AC3E}">
+        <p14:creationId xmlns:p14="http://schemas.microsoft.com/office/powerpoint/2010/main" val="2303346903"/>
+      </p:ext>
+    </p:extLst>
+  </p:cSld>
+  <p:clrMapOvr>
+    <a:masterClrMapping/>
+  </p:clrMapOvr>
+</p:notes>
+</file>
+
+<file path=ppt/notesSlides/notesSlide11.xml><?xml version="1.0" encoding="utf-8"?>
+<p:notes xmlns:a="http://schemas.openxmlformats.org/drawingml/2006/main" xmlns:r="http://schemas.openxmlformats.org/officeDocument/2006/relationships" xmlns:p="http://schemas.openxmlformats.org/presentationml/2006/main">
+  <p:cSld>
+    <p:spTree>
+      <p:nvGrpSpPr>
+        <p:cNvPr id="1" name="">
+          <a:extLst>
+            <a:ext uri="{FF2B5EF4-FFF2-40B4-BE49-F238E27FC236}">
               <a16:creationId xmlns:a16="http://schemas.microsoft.com/office/drawing/2014/main" id="{3932FD5E-B683-05F5-2A8F-95FE369808B2}"/>
             </a:ext>
           </a:extLst>
@@ -880,7 +990,7 @@
             <a:pPr rtl="0"/>
             <a:fld id="{5FB91549-43BF-425A-AF25-75262019208C}" type="slidenum">
               <a:rPr lang="en-US" altLang="ko-KR" smtClean="0"/>
-              <a:t>10</a:t>
+              <a:t>11</a:t>
             </a:fld>
             <a:endParaRPr lang="ko-KR" altLang="en-US" dirty="0"/>
           </a:p>
@@ -1537,7 +1647,7 @@
         <p:cNvPr id="1" name="">
           <a:extLst>
             <a:ext uri="{FF2B5EF4-FFF2-40B4-BE49-F238E27FC236}">
-              <a16:creationId xmlns:a16="http://schemas.microsoft.com/office/drawing/2014/main" id="{98661178-D3A3-BD01-999B-5CD0CBDA675B}"/>
+              <a16:creationId xmlns:a16="http://schemas.microsoft.com/office/drawing/2014/main" id="{90545C30-FC2E-5949-B48E-275DB0B4BAAF}"/>
             </a:ext>
           </a:extLst>
         </p:cNvPr>
@@ -1557,7 +1667,7 @@
           <p:cNvPr id="2" name="슬라이드 이미지 개체 틀 1">
             <a:extLst>
               <a:ext uri="{FF2B5EF4-FFF2-40B4-BE49-F238E27FC236}">
-                <a16:creationId xmlns:a16="http://schemas.microsoft.com/office/drawing/2014/main" id="{894B66A9-55C3-DC1E-3535-AD5D96B3015C}"/>
+                <a16:creationId xmlns:a16="http://schemas.microsoft.com/office/drawing/2014/main" id="{83D7EBCA-E8FA-9264-0E05-68DB33B45417}"/>
               </a:ext>
             </a:extLst>
           </p:cNvPr>
@@ -1575,7 +1685,7 @@
           <p:cNvPr id="3" name="슬라이드 노트 개체 틀 2">
             <a:extLst>
               <a:ext uri="{FF2B5EF4-FFF2-40B4-BE49-F238E27FC236}">
-                <a16:creationId xmlns:a16="http://schemas.microsoft.com/office/drawing/2014/main" id="{497FFF2B-2B71-B514-D49C-EF7B099DE9BF}"/>
+                <a16:creationId xmlns:a16="http://schemas.microsoft.com/office/drawing/2014/main" id="{2A35FA87-88FD-E3E4-A0AB-F6BEFB491842}"/>
               </a:ext>
             </a:extLst>
           </p:cNvPr>
@@ -1600,7 +1710,7 @@
           <p:cNvPr id="4" name="슬라이드 번호 개체 틀 3">
             <a:extLst>
               <a:ext uri="{FF2B5EF4-FFF2-40B4-BE49-F238E27FC236}">
-                <a16:creationId xmlns:a16="http://schemas.microsoft.com/office/drawing/2014/main" id="{108E91CB-DE8C-2792-9462-33EFA4D63E67}"/>
+                <a16:creationId xmlns:a16="http://schemas.microsoft.com/office/drawing/2014/main" id="{E124905E-17BC-CEEB-6F2D-8A5C7B332128}"/>
               </a:ext>
             </a:extLst>
           </p:cNvPr>
@@ -1628,7 +1738,7 @@
     </p:spTree>
     <p:extLst>
       <p:ext uri="{BB962C8B-B14F-4D97-AF65-F5344CB8AC3E}">
-        <p14:creationId xmlns:p14="http://schemas.microsoft.com/office/powerpoint/2010/main" val="3953977907"/>
+        <p14:creationId xmlns:p14="http://schemas.microsoft.com/office/powerpoint/2010/main" val="363948702"/>
       </p:ext>
     </p:extLst>
   </p:cSld>
@@ -1646,7 +1756,7 @@
         <p:cNvPr id="1" name="">
           <a:extLst>
             <a:ext uri="{FF2B5EF4-FFF2-40B4-BE49-F238E27FC236}">
-              <a16:creationId xmlns:a16="http://schemas.microsoft.com/office/drawing/2014/main" id="{97800921-2A98-58A1-77F4-D8659C0BA353}"/>
+              <a16:creationId xmlns:a16="http://schemas.microsoft.com/office/drawing/2014/main" id="{98661178-D3A3-BD01-999B-5CD0CBDA675B}"/>
             </a:ext>
           </a:extLst>
         </p:cNvPr>
@@ -1666,7 +1776,7 @@
           <p:cNvPr id="2" name="슬라이드 이미지 개체 틀 1">
             <a:extLst>
               <a:ext uri="{FF2B5EF4-FFF2-40B4-BE49-F238E27FC236}">
-                <a16:creationId xmlns:a16="http://schemas.microsoft.com/office/drawing/2014/main" id="{748269F1-DD08-6BF5-8344-47DF8E22EB29}"/>
+                <a16:creationId xmlns:a16="http://schemas.microsoft.com/office/drawing/2014/main" id="{894B66A9-55C3-DC1E-3535-AD5D96B3015C}"/>
               </a:ext>
             </a:extLst>
           </p:cNvPr>
@@ -1684,7 +1794,7 @@
           <p:cNvPr id="3" name="슬라이드 노트 개체 틀 2">
             <a:extLst>
               <a:ext uri="{FF2B5EF4-FFF2-40B4-BE49-F238E27FC236}">
-                <a16:creationId xmlns:a16="http://schemas.microsoft.com/office/drawing/2014/main" id="{3496A4B6-DC7D-FF48-46FC-7358B9C8159D}"/>
+                <a16:creationId xmlns:a16="http://schemas.microsoft.com/office/drawing/2014/main" id="{497FFF2B-2B71-B514-D49C-EF7B099DE9BF}"/>
               </a:ext>
             </a:extLst>
           </p:cNvPr>
@@ -1709,7 +1819,7 @@
           <p:cNvPr id="4" name="슬라이드 번호 개체 틀 3">
             <a:extLst>
               <a:ext uri="{FF2B5EF4-FFF2-40B4-BE49-F238E27FC236}">
-                <a16:creationId xmlns:a16="http://schemas.microsoft.com/office/drawing/2014/main" id="{8F61E27B-EE8E-0361-5AEB-07842FCFA0C5}"/>
+                <a16:creationId xmlns:a16="http://schemas.microsoft.com/office/drawing/2014/main" id="{108E91CB-DE8C-2792-9462-33EFA4D63E67}"/>
               </a:ext>
             </a:extLst>
           </p:cNvPr>
@@ -1737,7 +1847,7 @@
     </p:spTree>
     <p:extLst>
       <p:ext uri="{BB962C8B-B14F-4D97-AF65-F5344CB8AC3E}">
-        <p14:creationId xmlns:p14="http://schemas.microsoft.com/office/powerpoint/2010/main" val="2303346903"/>
+        <p14:creationId xmlns:p14="http://schemas.microsoft.com/office/powerpoint/2010/main" val="3953977907"/>
       </p:ext>
     </p:extLst>
   </p:cSld>
@@ -1985,7 +2095,7 @@
           <a:p>
             <a:fld id="{4B229CEB-779D-4AB3-81CB-8FCEEAE03F61}" type="datetime1">
               <a:rPr lang="ko-KR" altLang="en-US" smtClean="0"/>
-              <a:t>2026-03-24</a:t>
+              <a:t>2026-03-25</a:t>
             </a:fld>
             <a:endParaRPr lang="ko-KR" altLang="en-US" dirty="0"/>
           </a:p>
@@ -2223,7 +2333,7 @@
             <a:pPr rtl="0"/>
             <a:fld id="{C3B7A883-0BF0-4B4B-84D5-D747A0111A56}" type="datetime1">
               <a:rPr lang="ko-KR" altLang="en-US" noProof="0" smtClean="0"/>
-              <a:t>2026-03-24</a:t>
+              <a:t>2026-03-25</a:t>
             </a:fld>
             <a:endParaRPr lang="ko-KR" altLang="en-US" noProof="0" dirty="0"/>
           </a:p>
@@ -2441,7 +2551,7 @@
             <a:pPr rtl="0"/>
             <a:fld id="{3DA7EA29-F2BB-4FB1-BB4B-C55A7FA3FC5C}" type="datetime1">
               <a:rPr lang="ko-KR" altLang="en-US" noProof="0" smtClean="0"/>
-              <a:t>2026-03-24</a:t>
+              <a:t>2026-03-25</a:t>
             </a:fld>
             <a:endParaRPr lang="ko-KR" altLang="en-US" noProof="0" dirty="0"/>
           </a:p>
@@ -2650,7 +2760,7 @@
             <a:pPr rtl="0"/>
             <a:fld id="{D76306AB-75A0-421C-B431-0E4E30A5C28E}" type="datetime1">
               <a:rPr lang="ko-KR" altLang="en-US" noProof="0" smtClean="0"/>
-              <a:t>2026-03-24</a:t>
+              <a:t>2026-03-25</a:t>
             </a:fld>
             <a:endParaRPr lang="ko-KR" altLang="en-US" noProof="0" dirty="0"/>
           </a:p>
@@ -2920,7 +3030,7 @@
             <a:pPr rtl="0"/>
             <a:fld id="{E1D969EE-F1EB-462E-B70D-5B36B3806A4E}" type="datetime1">
               <a:rPr lang="ko-KR" altLang="en-US" noProof="0" smtClean="0"/>
-              <a:t>2026-03-24</a:t>
+              <a:t>2026-03-25</a:t>
             </a:fld>
             <a:endParaRPr lang="ko-KR" altLang="en-US" noProof="0" dirty="0"/>
           </a:p>
@@ -3228,7 +3338,7 @@
             <a:pPr rtl="0"/>
             <a:fld id="{E8CBB1B7-E0A1-46A3-B5B5-C69931095FF6}" type="datetime1">
               <a:rPr lang="ko-KR" altLang="en-US" noProof="0" smtClean="0"/>
-              <a:t>2026-03-24</a:t>
+              <a:t>2026-03-25</a:t>
             </a:fld>
             <a:endParaRPr lang="ko-KR" altLang="en-US" noProof="0" dirty="0"/>
           </a:p>
@@ -3679,7 +3789,7 @@
             <a:pPr rtl="0"/>
             <a:fld id="{DAFC0E65-06AB-44D7-AAEE-8F4C7ED84A0C}" type="datetime1">
               <a:rPr lang="ko-KR" altLang="en-US" noProof="0" smtClean="0"/>
-              <a:t>2026-03-24</a:t>
+              <a:t>2026-03-25</a:t>
             </a:fld>
             <a:endParaRPr lang="ko-KR" altLang="en-US" noProof="0" dirty="0"/>
           </a:p>
@@ -3816,7 +3926,7 @@
             <a:pPr rtl="0"/>
             <a:fld id="{30189E66-D439-4767-B911-EB49CB20E313}" type="datetime1">
               <a:rPr lang="ko-KR" altLang="en-US" noProof="0" smtClean="0"/>
-              <a:t>2026-03-24</a:t>
+              <a:t>2026-03-25</a:t>
             </a:fld>
             <a:endParaRPr lang="ko-KR" altLang="en-US" noProof="0" dirty="0"/>
           </a:p>
@@ -3929,7 +4039,7 @@
             <a:pPr rtl="0"/>
             <a:fld id="{D4E4FFC0-DB28-4291-80A0-63DBF8428320}" type="datetime1">
               <a:rPr lang="ko-KR" altLang="en-US" noProof="0" smtClean="0"/>
-              <a:t>2026-03-24</a:t>
+              <a:t>2026-03-25</a:t>
             </a:fld>
             <a:endParaRPr lang="ko-KR" altLang="en-US" noProof="0" dirty="0"/>
           </a:p>
@@ -4234,7 +4344,7 @@
             <a:pPr rtl="0"/>
             <a:fld id="{3AB5804B-C38E-4214-93DF-3E6DA00134E8}" type="datetime1">
               <a:rPr lang="ko-KR" altLang="en-US" noProof="0" smtClean="0"/>
-              <a:t>2026-03-24</a:t>
+              <a:t>2026-03-25</a:t>
             </a:fld>
             <a:endParaRPr lang="ko-KR" altLang="en-US" noProof="0" dirty="0"/>
           </a:p>
@@ -4528,7 +4638,7 @@
             <a:pPr rtl="0"/>
             <a:fld id="{CABEE384-F18F-4153-AC21-608599869F84}" type="datetime1">
               <a:rPr lang="ko-KR" altLang="en-US" noProof="0" smtClean="0"/>
-              <a:t>2026-03-24</a:t>
+              <a:t>2026-03-25</a:t>
             </a:fld>
             <a:endParaRPr lang="ko-KR" altLang="en-US" noProof="0" dirty="0"/>
           </a:p>
@@ -4760,7 +4870,7 @@
           <a:p>
             <a:fld id="{667A4C69-65FB-481C-AC2A-84D254D33675}" type="datetime1">
               <a:rPr lang="ko-KR" altLang="en-US" smtClean="0"/>
-              <a:t>2026-03-24</a:t>
+              <a:t>2026-03-25</a:t>
             </a:fld>
             <a:endParaRPr lang="ko-KR" altLang="en-US" dirty="0"/>
           </a:p>
@@ -5417,6 +5527,628 @@
         <p:cNvPr id="1" name="">
           <a:extLst>
             <a:ext uri="{FF2B5EF4-FFF2-40B4-BE49-F238E27FC236}">
+              <a16:creationId xmlns:a16="http://schemas.microsoft.com/office/drawing/2014/main" id="{014016E6-4DF5-97F6-9486-23E46F5C4A36}"/>
+            </a:ext>
+          </a:extLst>
+        </p:cNvPr>
+        <p:cNvGrpSpPr/>
+        <p:nvPr/>
+      </p:nvGrpSpPr>
+      <p:grpSpPr>
+        <a:xfrm>
+          <a:off x="0" y="0"/>
+          <a:ext cx="0" cy="0"/>
+          <a:chOff x="0" y="0"/>
+          <a:chExt cx="0" cy="0"/>
+        </a:xfrm>
+      </p:grpSpPr>
+      <p:sp>
+        <p:nvSpPr>
+          <p:cNvPr id="2" name="슬라이드 번호 개체 틀 1">
+            <a:extLst>
+              <a:ext uri="{FF2B5EF4-FFF2-40B4-BE49-F238E27FC236}">
+                <a16:creationId xmlns:a16="http://schemas.microsoft.com/office/drawing/2014/main" id="{A39D4B50-D754-79A0-CD51-823002DF348F}"/>
+              </a:ext>
+            </a:extLst>
+          </p:cNvPr>
+          <p:cNvSpPr>
+            <a:spLocks noGrp="1"/>
+          </p:cNvSpPr>
+          <p:nvPr>
+            <p:ph type="sldNum" sz="quarter" idx="12"/>
+          </p:nvPr>
+        </p:nvSpPr>
+        <p:spPr/>
+        <p:txBody>
+          <a:bodyPr/>
+          <a:lstStyle/>
+          <a:p>
+            <a:pPr rtl="0"/>
+            <a:fld id="{A3F31473-23EB-4724-8B59-FE6D21D89FA4}" type="slidenum">
+              <a:rPr lang="en-US" altLang="ko-KR" noProof="0" smtClean="0"/>
+              <a:t>10</a:t>
+            </a:fld>
+            <a:endParaRPr lang="en-US" altLang="ko-KR" noProof="0" dirty="0"/>
+          </a:p>
+        </p:txBody>
+      </p:sp>
+      <p:sp>
+        <p:nvSpPr>
+          <p:cNvPr id="4" name="TextBox 3">
+            <a:extLst>
+              <a:ext uri="{FF2B5EF4-FFF2-40B4-BE49-F238E27FC236}">
+                <a16:creationId xmlns:a16="http://schemas.microsoft.com/office/drawing/2014/main" id="{6843735A-526C-E0D0-66F8-62A3BD4EC82F}"/>
+              </a:ext>
+            </a:extLst>
+          </p:cNvPr>
+          <p:cNvSpPr txBox="1"/>
+          <p:nvPr/>
+        </p:nvSpPr>
+        <p:spPr>
+          <a:xfrm>
+            <a:off x="693812" y="2276872"/>
+            <a:ext cx="11233248" cy="3606821"/>
+          </a:xfrm>
+          <a:prstGeom prst="rect">
+            <a:avLst/>
+          </a:prstGeom>
+          <a:solidFill>
+            <a:schemeClr val="tx1">
+              <a:lumMod val="20000"/>
+              <a:lumOff val="80000"/>
+            </a:schemeClr>
+          </a:solidFill>
+        </p:spPr>
+        <p:txBody>
+          <a:bodyPr wrap="square" rtlCol="0">
+            <a:spAutoFit/>
+          </a:bodyPr>
+          <a:lstStyle/>
+          <a:p>
+            <a:pPr marL="285750" indent="-285750">
+              <a:lnSpc>
+                <a:spcPct val="150000"/>
+              </a:lnSpc>
+              <a:buFont typeface="Wingdings" panose="05000000000000000000" pitchFamily="2" charset="2"/>
+              <a:buChar char="v"/>
+            </a:pPr>
+            <a:r>
+              <a:rPr lang="ko-KR" altLang="en-US" dirty="0">
+                <a:latin typeface="휴먼모음T" panose="02030504000101010101" pitchFamily="18" charset="-127"/>
+                <a:ea typeface="휴먼모음T" panose="02030504000101010101" pitchFamily="18" charset="-127"/>
+              </a:rPr>
+              <a:t>모델 학습의 안정성 확보”</a:t>
+            </a:r>
+            <a:endParaRPr lang="en-US" altLang="ko-KR" dirty="0">
+              <a:latin typeface="휴먼모음T" panose="02030504000101010101" pitchFamily="18" charset="-127"/>
+              <a:ea typeface="휴먼모음T" panose="02030504000101010101" pitchFamily="18" charset="-127"/>
+            </a:endParaRPr>
+          </a:p>
+          <a:p>
+            <a:pPr marL="742950" lvl="1" indent="-285750">
+              <a:lnSpc>
+                <a:spcPct val="150000"/>
+              </a:lnSpc>
+              <a:buFont typeface="Wingdings" panose="05000000000000000000" pitchFamily="2" charset="2"/>
+              <a:buChar char="v"/>
+            </a:pPr>
+            <a:r>
+              <a:rPr lang="en-US" altLang="ko-KR" sz="1600" dirty="0">
+                <a:latin typeface="휴먼모음T" panose="02030504000101010101" pitchFamily="18" charset="-127"/>
+                <a:ea typeface="휴먼모음T" panose="02030504000101010101" pitchFamily="18" charset="-127"/>
+              </a:rPr>
+              <a:t>MSE , Cross-Entropy, Log-loss </a:t>
+            </a:r>
+            <a:endParaRPr lang="en-US" altLang="ko-KR" dirty="0">
+              <a:latin typeface="휴먼모음T" panose="02030504000101010101" pitchFamily="18" charset="-127"/>
+              <a:ea typeface="휴먼모음T" panose="02030504000101010101" pitchFamily="18" charset="-127"/>
+            </a:endParaRPr>
+          </a:p>
+          <a:p>
+            <a:pPr marL="285750" indent="-285750">
+              <a:lnSpc>
+                <a:spcPct val="150000"/>
+              </a:lnSpc>
+              <a:buFont typeface="Wingdings" panose="05000000000000000000" pitchFamily="2" charset="2"/>
+              <a:buChar char="v"/>
+            </a:pPr>
+            <a:r>
+              <a:rPr lang="en-US" altLang="ko-KR" dirty="0">
+                <a:latin typeface="휴먼모음T" panose="02030504000101010101" pitchFamily="18" charset="-127"/>
+                <a:ea typeface="휴먼모음T" panose="02030504000101010101" pitchFamily="18" charset="-127"/>
+              </a:rPr>
+              <a:t>Mini-batch </a:t>
+            </a:r>
+            <a:r>
+              <a:rPr lang="ko-KR" altLang="en-US" dirty="0">
+                <a:latin typeface="휴먼모음T" panose="02030504000101010101" pitchFamily="18" charset="-127"/>
+                <a:ea typeface="휴먼모음T" panose="02030504000101010101" pitchFamily="18" charset="-127"/>
+              </a:rPr>
+              <a:t>학습이 가능한 이유”</a:t>
+            </a:r>
+            <a:endParaRPr lang="en-US" altLang="ko-KR" dirty="0">
+              <a:latin typeface="휴먼모음T" panose="02030504000101010101" pitchFamily="18" charset="-127"/>
+              <a:ea typeface="휴먼모음T" panose="02030504000101010101" pitchFamily="18" charset="-127"/>
+            </a:endParaRPr>
+          </a:p>
+          <a:p>
+            <a:pPr marL="742950" lvl="1" indent="-285750">
+              <a:lnSpc>
+                <a:spcPct val="150000"/>
+              </a:lnSpc>
+              <a:buFont typeface="Wingdings" panose="05000000000000000000" pitchFamily="2" charset="2"/>
+              <a:buChar char="v"/>
+            </a:pPr>
+            <a:r>
+              <a:rPr lang="en-US" altLang="ko-KR" sz="1600" dirty="0">
+                <a:latin typeface="휴먼모음T" panose="02030504000101010101" pitchFamily="18" charset="-127"/>
+                <a:ea typeface="휴먼모음T" panose="02030504000101010101" pitchFamily="18" charset="-127"/>
+              </a:rPr>
+              <a:t>Mini-batch = </a:t>
+            </a:r>
+            <a:r>
+              <a:rPr lang="ko-KR" altLang="en-US" sz="1600" dirty="0">
+                <a:latin typeface="휴먼모음T" panose="02030504000101010101" pitchFamily="18" charset="-127"/>
+                <a:ea typeface="휴먼모음T" panose="02030504000101010101" pitchFamily="18" charset="-127"/>
+              </a:rPr>
+              <a:t>작은 샘플 평균</a:t>
+            </a:r>
+            <a:r>
+              <a:rPr lang="en-US" altLang="ko-KR" sz="1600" dirty="0">
+                <a:latin typeface="휴먼모음T" panose="02030504000101010101" pitchFamily="18" charset="-127"/>
+                <a:ea typeface="휴먼모음T" panose="02030504000101010101" pitchFamily="18" charset="-127"/>
+              </a:rPr>
+              <a:t>, CLT</a:t>
+            </a:r>
+            <a:r>
+              <a:rPr lang="ko-KR" altLang="en-US" sz="1600" dirty="0">
+                <a:latin typeface="휴먼모음T" panose="02030504000101010101" pitchFamily="18" charset="-127"/>
+                <a:ea typeface="휴먼모음T" panose="02030504000101010101" pitchFamily="18" charset="-127"/>
+              </a:rPr>
+              <a:t>없이는 </a:t>
+            </a:r>
+            <a:r>
+              <a:rPr lang="en-US" altLang="ko-KR" sz="1600" dirty="0">
+                <a:latin typeface="휴먼모음T" panose="02030504000101010101" pitchFamily="18" charset="-127"/>
+                <a:ea typeface="휴먼모음T" panose="02030504000101010101" pitchFamily="18" charset="-127"/>
+              </a:rPr>
+              <a:t>mini</a:t>
+            </a:r>
+            <a:r>
+              <a:rPr lang="ko-KR" altLang="en-US" sz="1600" dirty="0">
+                <a:latin typeface="휴먼모음T" panose="02030504000101010101" pitchFamily="18" charset="-127"/>
+                <a:ea typeface="휴먼모음T" panose="02030504000101010101" pitchFamily="18" charset="-127"/>
+              </a:rPr>
+              <a:t> </a:t>
+            </a:r>
+            <a:r>
+              <a:rPr lang="en-US" altLang="ko-KR" sz="1600" dirty="0">
+                <a:latin typeface="휴먼모음T" panose="02030504000101010101" pitchFamily="18" charset="-127"/>
+                <a:ea typeface="휴먼모음T" panose="02030504000101010101" pitchFamily="18" charset="-127"/>
+              </a:rPr>
+              <a:t>batch </a:t>
+            </a:r>
+            <a:r>
+              <a:rPr lang="ko-KR" altLang="en-US" sz="1600" dirty="0">
+                <a:latin typeface="휴먼모음T" panose="02030504000101010101" pitchFamily="18" charset="-127"/>
+                <a:ea typeface="휴먼모음T" panose="02030504000101010101" pitchFamily="18" charset="-127"/>
+              </a:rPr>
+              <a:t>도 없음</a:t>
+            </a:r>
+            <a:endParaRPr lang="en-US" altLang="ko-KR" dirty="0">
+              <a:latin typeface="휴먼모음T" panose="02030504000101010101" pitchFamily="18" charset="-127"/>
+              <a:ea typeface="휴먼모음T" panose="02030504000101010101" pitchFamily="18" charset="-127"/>
+            </a:endParaRPr>
+          </a:p>
+          <a:p>
+            <a:pPr marL="285750" indent="-285750">
+              <a:lnSpc>
+                <a:spcPct val="150000"/>
+              </a:lnSpc>
+              <a:buFont typeface="Wingdings" panose="05000000000000000000" pitchFamily="2" charset="2"/>
+              <a:buChar char="v"/>
+            </a:pPr>
+            <a:r>
+              <a:rPr lang="ko-KR" altLang="en-US" dirty="0">
+                <a:latin typeface="휴먼모음T" panose="02030504000101010101" pitchFamily="18" charset="-127"/>
+                <a:ea typeface="휴먼모음T" panose="02030504000101010101" pitchFamily="18" charset="-127"/>
+              </a:rPr>
+              <a:t>교차검증을 통한 모델의 평가</a:t>
+            </a:r>
+            <a:endParaRPr lang="en-US" altLang="ko-KR" dirty="0">
+              <a:latin typeface="휴먼모음T" panose="02030504000101010101" pitchFamily="18" charset="-127"/>
+              <a:ea typeface="휴먼모음T" panose="02030504000101010101" pitchFamily="18" charset="-127"/>
+            </a:endParaRPr>
+          </a:p>
+          <a:p>
+            <a:pPr marL="742950" lvl="1" indent="-285750">
+              <a:lnSpc>
+                <a:spcPct val="150000"/>
+              </a:lnSpc>
+              <a:buFont typeface="Wingdings" panose="05000000000000000000" pitchFamily="2" charset="2"/>
+              <a:buChar char="v"/>
+            </a:pPr>
+            <a:r>
+              <a:rPr lang="ko-KR" altLang="en-US" sz="1600" dirty="0">
+                <a:latin typeface="휴먼모음T" panose="02030504000101010101" pitchFamily="18" charset="-127"/>
+                <a:ea typeface="휴먼모음T" panose="02030504000101010101" pitchFamily="18" charset="-127"/>
+              </a:rPr>
+              <a:t>평균 </a:t>
+            </a:r>
+            <a:r>
+              <a:rPr lang="en-US" altLang="ko-KR" sz="1600" dirty="0">
+                <a:latin typeface="휴먼모음T" panose="02030504000101010101" pitchFamily="18" charset="-127"/>
+                <a:ea typeface="휴먼모음T" panose="02030504000101010101" pitchFamily="18" charset="-127"/>
+              </a:rPr>
+              <a:t>accuracy/loss, </a:t>
+            </a:r>
+            <a:r>
+              <a:rPr lang="ko-KR" altLang="en-US" sz="1600" dirty="0">
+                <a:latin typeface="휴먼모음T" panose="02030504000101010101" pitchFamily="18" charset="-127"/>
+                <a:ea typeface="휴먼모음T" panose="02030504000101010101" pitchFamily="18" charset="-127"/>
+              </a:rPr>
+              <a:t>교차검증 평균 등 </a:t>
+            </a:r>
+            <a:r>
+              <a:rPr lang="en-US" altLang="ko-KR" sz="1600" dirty="0">
+                <a:latin typeface="휴먼모음T" panose="02030504000101010101" pitchFamily="18" charset="-127"/>
+                <a:ea typeface="휴먼모음T" panose="02030504000101010101" pitchFamily="18" charset="-127"/>
+              </a:rPr>
+              <a:t>CLT </a:t>
+            </a:r>
+            <a:r>
+              <a:rPr lang="ko-KR" altLang="en-US" sz="1600" dirty="0">
+                <a:latin typeface="휴먼모음T" panose="02030504000101010101" pitchFamily="18" charset="-127"/>
+                <a:ea typeface="휴먼모음T" panose="02030504000101010101" pitchFamily="18" charset="-127"/>
+              </a:rPr>
+              <a:t>적용으로 이  평균들은 → 정규분포 근사</a:t>
+            </a:r>
+            <a:r>
+              <a:rPr lang="en-US" altLang="ko-KR" sz="1600" dirty="0">
+                <a:latin typeface="휴먼모음T" panose="02030504000101010101" pitchFamily="18" charset="-127"/>
+                <a:ea typeface="휴먼모음T" panose="02030504000101010101" pitchFamily="18" charset="-127"/>
+              </a:rPr>
+              <a:t> </a:t>
+            </a:r>
+            <a:r>
+              <a:rPr lang="ko-KR" altLang="en-US" sz="1600" dirty="0">
+                <a:latin typeface="휴먼모음T" panose="02030504000101010101" pitchFamily="18" charset="-127"/>
+                <a:ea typeface="휴먼모음T" panose="02030504000101010101" pitchFamily="18" charset="-127"/>
+              </a:rPr>
+              <a:t>→ 신뢰구간</a:t>
+            </a:r>
+            <a:r>
+              <a:rPr lang="en-US" altLang="ko-KR" sz="1600" dirty="0">
+                <a:latin typeface="휴먼모음T" panose="02030504000101010101" pitchFamily="18" charset="-127"/>
+                <a:ea typeface="휴먼모음T" panose="02030504000101010101" pitchFamily="18" charset="-127"/>
+              </a:rPr>
+              <a:t> </a:t>
+            </a:r>
+            <a:r>
+              <a:rPr lang="ko-KR" altLang="en-US" sz="1600" dirty="0">
+                <a:latin typeface="휴먼모음T" panose="02030504000101010101" pitchFamily="18" charset="-127"/>
+                <a:ea typeface="휴먼모음T" panose="02030504000101010101" pitchFamily="18" charset="-127"/>
+              </a:rPr>
+              <a:t>→</a:t>
+            </a:r>
+            <a:r>
+              <a:rPr lang="en-US" altLang="ko-KR" sz="1600" dirty="0">
+                <a:latin typeface="휴먼모음T" panose="02030504000101010101" pitchFamily="18" charset="-127"/>
+                <a:ea typeface="휴먼모음T" panose="02030504000101010101" pitchFamily="18" charset="-127"/>
+              </a:rPr>
+              <a:t> </a:t>
+            </a:r>
+            <a:r>
+              <a:rPr lang="ko-KR" altLang="en-US" sz="1600" dirty="0">
+                <a:latin typeface="휴먼모음T" panose="02030504000101010101" pitchFamily="18" charset="-127"/>
+                <a:ea typeface="휴먼모음T" panose="02030504000101010101" pitchFamily="18" charset="-127"/>
+              </a:rPr>
+              <a:t>통계적 비교 가능</a:t>
+            </a:r>
+            <a:endParaRPr lang="en-US" altLang="ko-KR" dirty="0">
+              <a:latin typeface="휴먼모음T" panose="02030504000101010101" pitchFamily="18" charset="-127"/>
+              <a:ea typeface="휴먼모음T" panose="02030504000101010101" pitchFamily="18" charset="-127"/>
+            </a:endParaRPr>
+          </a:p>
+          <a:p>
+            <a:pPr marL="285750" indent="-285750">
+              <a:lnSpc>
+                <a:spcPct val="150000"/>
+              </a:lnSpc>
+              <a:buFont typeface="Wingdings" panose="05000000000000000000" pitchFamily="2" charset="2"/>
+              <a:buChar char="v"/>
+            </a:pPr>
+            <a:r>
+              <a:rPr lang="en-US" altLang="ko-KR" dirty="0">
+                <a:latin typeface="휴먼모음T" panose="02030504000101010101" pitchFamily="18" charset="-127"/>
+                <a:ea typeface="휴먼모음T" panose="02030504000101010101" pitchFamily="18" charset="-127"/>
+              </a:rPr>
+              <a:t>A/B </a:t>
+            </a:r>
+            <a:r>
+              <a:rPr lang="ko-KR" altLang="en-US" dirty="0">
+                <a:latin typeface="휴먼모음T" panose="02030504000101010101" pitchFamily="18" charset="-127"/>
+                <a:ea typeface="휴먼모음T" panose="02030504000101010101" pitchFamily="18" charset="-127"/>
+              </a:rPr>
+              <a:t>테스트와 실험 설계의 핵심</a:t>
+            </a:r>
+            <a:endParaRPr lang="en-US" altLang="ko-KR" dirty="0">
+              <a:latin typeface="휴먼모음T" panose="02030504000101010101" pitchFamily="18" charset="-127"/>
+              <a:ea typeface="휴먼모음T" panose="02030504000101010101" pitchFamily="18" charset="-127"/>
+            </a:endParaRPr>
+          </a:p>
+          <a:p>
+            <a:pPr marL="742950" lvl="1" indent="-285750">
+              <a:lnSpc>
+                <a:spcPct val="150000"/>
+              </a:lnSpc>
+              <a:buFont typeface="Wingdings" panose="05000000000000000000" pitchFamily="2" charset="2"/>
+              <a:buChar char="v"/>
+            </a:pPr>
+            <a:r>
+              <a:rPr lang="ko-KR" altLang="en-US" sz="1600" dirty="0">
+                <a:latin typeface="휴먼모음T" panose="02030504000101010101" pitchFamily="18" charset="-127"/>
+                <a:ea typeface="휴먼모음T" panose="02030504000101010101" pitchFamily="18" charset="-127"/>
+              </a:rPr>
+              <a:t>광고 효과 비교</a:t>
+            </a:r>
+            <a:r>
+              <a:rPr lang="en-US" altLang="ko-KR" sz="1600" dirty="0">
+                <a:latin typeface="휴먼모음T" panose="02030504000101010101" pitchFamily="18" charset="-127"/>
+                <a:ea typeface="휴먼모음T" panose="02030504000101010101" pitchFamily="18" charset="-127"/>
+              </a:rPr>
+              <a:t>, </a:t>
+            </a:r>
+            <a:r>
+              <a:rPr lang="ko-KR" altLang="en-US" sz="1600" dirty="0">
+                <a:latin typeface="휴먼모음T" panose="02030504000101010101" pitchFamily="18" charset="-127"/>
+                <a:ea typeface="휴먼모음T" panose="02030504000101010101" pitchFamily="18" charset="-127"/>
+              </a:rPr>
+              <a:t>추천 알고리즘 비교</a:t>
+            </a:r>
+            <a:r>
+              <a:rPr lang="en-US" altLang="ko-KR" sz="1600" dirty="0">
+                <a:latin typeface="휴먼모음T" panose="02030504000101010101" pitchFamily="18" charset="-127"/>
+                <a:ea typeface="휴먼모음T" panose="02030504000101010101" pitchFamily="18" charset="-127"/>
+              </a:rPr>
+              <a:t>, UI </a:t>
+            </a:r>
+            <a:r>
+              <a:rPr lang="ko-KR" altLang="en-US" sz="1600" dirty="0">
+                <a:latin typeface="휴먼모음T" panose="02030504000101010101" pitchFamily="18" charset="-127"/>
+                <a:ea typeface="휴먼모음T" panose="02030504000101010101" pitchFamily="18" charset="-127"/>
+              </a:rPr>
+              <a:t>개선 효과 측정  등 전부 평균 비교 문제로 </a:t>
+            </a:r>
+            <a:r>
+              <a:rPr lang="en-US" altLang="ko-KR" sz="1600" dirty="0">
+                <a:latin typeface="휴먼모음T" panose="02030504000101010101" pitchFamily="18" charset="-127"/>
+                <a:ea typeface="휴먼모음T" panose="02030504000101010101" pitchFamily="18" charset="-127"/>
+              </a:rPr>
+              <a:t>CLT </a:t>
+            </a:r>
+            <a:r>
+              <a:rPr lang="ko-KR" altLang="en-US" sz="1600" dirty="0">
+                <a:latin typeface="휴먼모음T" panose="02030504000101010101" pitchFamily="18" charset="-127"/>
+                <a:ea typeface="휴먼모음T" panose="02030504000101010101" pitchFamily="18" charset="-127"/>
+              </a:rPr>
+              <a:t>덕분에</a:t>
+            </a:r>
+            <a:r>
+              <a:rPr lang="en-US" altLang="ko-KR" sz="1600" dirty="0">
+                <a:latin typeface="휴먼모음T" panose="02030504000101010101" pitchFamily="18" charset="-127"/>
+                <a:ea typeface="휴먼모음T" panose="02030504000101010101" pitchFamily="18" charset="-127"/>
+              </a:rPr>
+              <a:t> </a:t>
+            </a:r>
+            <a:r>
+              <a:rPr lang="ko-KR" altLang="en-US" sz="1600" dirty="0">
+                <a:latin typeface="휴먼모음T" panose="02030504000101010101" pitchFamily="18" charset="-127"/>
+                <a:ea typeface="휴먼모음T" panose="02030504000101010101" pitchFamily="18" charset="-127"/>
+              </a:rPr>
+              <a:t>두 평균 차이 → 정규분포 근사 → </a:t>
+            </a:r>
+            <a:r>
+              <a:rPr lang="en-US" altLang="ko-KR" sz="1600" dirty="0">
+                <a:latin typeface="휴먼모음T" panose="02030504000101010101" pitchFamily="18" charset="-127"/>
+                <a:ea typeface="휴먼모음T" panose="02030504000101010101" pitchFamily="18" charset="-127"/>
+              </a:rPr>
+              <a:t>p-value </a:t>
+            </a:r>
+            <a:r>
+              <a:rPr lang="ko-KR" altLang="en-US" sz="1600" dirty="0">
+                <a:latin typeface="휴먼모음T" panose="02030504000101010101" pitchFamily="18" charset="-127"/>
+                <a:ea typeface="휴먼모음T" panose="02030504000101010101" pitchFamily="18" charset="-127"/>
+              </a:rPr>
+              <a:t>계산 가능</a:t>
+            </a:r>
+            <a:r>
+              <a:rPr lang="ko-KR" altLang="en-US" dirty="0">
+                <a:latin typeface="휴먼모음T" panose="02030504000101010101" pitchFamily="18" charset="-127"/>
+                <a:ea typeface="휴먼모음T" panose="02030504000101010101" pitchFamily="18" charset="-127"/>
+              </a:rPr>
+              <a:t> </a:t>
+            </a:r>
+            <a:endParaRPr lang="en-US" altLang="ko-KR" sz="2000" dirty="0">
+              <a:latin typeface="휴먼모음T" panose="02030504000101010101" pitchFamily="18" charset="-127"/>
+              <a:ea typeface="휴먼모음T" panose="02030504000101010101" pitchFamily="18" charset="-127"/>
+            </a:endParaRPr>
+          </a:p>
+        </p:txBody>
+      </p:sp>
+      <p:sp>
+        <p:nvSpPr>
+          <p:cNvPr id="9" name="TextBox 8">
+            <a:extLst>
+              <a:ext uri="{FF2B5EF4-FFF2-40B4-BE49-F238E27FC236}">
+                <a16:creationId xmlns:a16="http://schemas.microsoft.com/office/drawing/2014/main" id="{185A9784-515E-A3E4-8F67-F24BA80B28DC}"/>
+              </a:ext>
+            </a:extLst>
+          </p:cNvPr>
+          <p:cNvSpPr txBox="1"/>
+          <p:nvPr/>
+        </p:nvSpPr>
+        <p:spPr>
+          <a:xfrm>
+            <a:off x="117748" y="260648"/>
+            <a:ext cx="2592288" cy="584775"/>
+          </a:xfrm>
+          <a:prstGeom prst="rect">
+            <a:avLst/>
+          </a:prstGeom>
+          <a:noFill/>
+        </p:spPr>
+        <p:txBody>
+          <a:bodyPr wrap="square" rtlCol="0">
+            <a:spAutoFit/>
+          </a:bodyPr>
+          <a:lstStyle/>
+          <a:p>
+            <a:r>
+              <a:rPr lang="ko-KR" altLang="en-US" sz="3200" b="1"/>
+              <a:t>문제 풀이</a:t>
+            </a:r>
+          </a:p>
+        </p:txBody>
+      </p:sp>
+      <p:sp>
+        <p:nvSpPr>
+          <p:cNvPr id="5" name="TextBox 4">
+            <a:extLst>
+              <a:ext uri="{FF2B5EF4-FFF2-40B4-BE49-F238E27FC236}">
+                <a16:creationId xmlns:a16="http://schemas.microsoft.com/office/drawing/2014/main" id="{52039815-B66C-C01C-F725-1707E5711FCB}"/>
+              </a:ext>
+            </a:extLst>
+          </p:cNvPr>
+          <p:cNvSpPr txBox="1"/>
+          <p:nvPr/>
+        </p:nvSpPr>
+        <p:spPr>
+          <a:xfrm>
+            <a:off x="549796" y="858989"/>
+            <a:ext cx="11377264" cy="970843"/>
+          </a:xfrm>
+          <a:prstGeom prst="rect">
+            <a:avLst/>
+          </a:prstGeom>
+          <a:noFill/>
+        </p:spPr>
+        <p:txBody>
+          <a:bodyPr wrap="square">
+            <a:spAutoFit/>
+          </a:bodyPr>
+          <a:lstStyle/>
+          <a:p>
+            <a:pPr marL="285750" indent="-285750">
+              <a:lnSpc>
+                <a:spcPct val="150000"/>
+              </a:lnSpc>
+              <a:buFont typeface="Wingdings" panose="05000000000000000000" pitchFamily="2" charset="2"/>
+              <a:buChar char="v"/>
+            </a:pPr>
+            <a:r>
+              <a:rPr lang="ko-KR" altLang="en-US" sz="2000" dirty="0">
+                <a:latin typeface="휴먼모음T" panose="02030504000101010101" pitchFamily="18" charset="-127"/>
+                <a:ea typeface="휴먼모음T" panose="02030504000101010101" pitchFamily="18" charset="-127"/>
+              </a:rPr>
+              <a:t>중심극한정리</a:t>
+            </a:r>
+            <a:r>
+              <a:rPr lang="en-US" altLang="ko-KR" sz="2000" dirty="0">
+                <a:latin typeface="휴먼모음T" panose="02030504000101010101" pitchFamily="18" charset="-127"/>
+                <a:ea typeface="휴먼모음T" panose="02030504000101010101" pitchFamily="18" charset="-127"/>
+              </a:rPr>
+              <a:t>(</a:t>
+            </a:r>
+            <a:r>
+              <a:rPr lang="ko-KR" altLang="en-US" sz="2000" dirty="0">
+                <a:latin typeface="휴먼모음T" panose="02030504000101010101" pitchFamily="18" charset="-127"/>
+                <a:ea typeface="휴먼모음T" panose="02030504000101010101" pitchFamily="18" charset="-127"/>
+              </a:rPr>
+              <a:t>데이터는 불규칙하지만</a:t>
+            </a:r>
+            <a:r>
+              <a:rPr lang="en-US" altLang="ko-KR" sz="2000" dirty="0">
+                <a:latin typeface="휴먼모음T" panose="02030504000101010101" pitchFamily="18" charset="-127"/>
+                <a:ea typeface="휴먼모음T" panose="02030504000101010101" pitchFamily="18" charset="-127"/>
+              </a:rPr>
+              <a:t>, </a:t>
+            </a:r>
+            <a:r>
+              <a:rPr lang="ko-KR" altLang="en-US" sz="2000" dirty="0">
+                <a:latin typeface="휴먼모음T" panose="02030504000101010101" pitchFamily="18" charset="-127"/>
+                <a:ea typeface="휴먼모음T" panose="02030504000101010101" pitchFamily="18" charset="-127"/>
+              </a:rPr>
+              <a:t>평균은 예측 가능하다 → 그래서 학습이 가능하다</a:t>
+            </a:r>
+            <a:r>
+              <a:rPr lang="en-US" altLang="ko-KR" sz="2000" dirty="0">
+                <a:latin typeface="휴먼모음T" panose="02030504000101010101" pitchFamily="18" charset="-127"/>
+                <a:ea typeface="휴먼모음T" panose="02030504000101010101" pitchFamily="18" charset="-127"/>
+              </a:rPr>
+              <a:t>)</a:t>
+            </a:r>
+            <a:r>
+              <a:rPr lang="ko-KR" altLang="en-US" sz="2000" dirty="0">
+                <a:latin typeface="휴먼모음T" panose="02030504000101010101" pitchFamily="18" charset="-127"/>
+                <a:ea typeface="휴먼모음T" panose="02030504000101010101" pitchFamily="18" charset="-127"/>
+              </a:rPr>
+              <a:t>가 </a:t>
+            </a:r>
+            <a:r>
+              <a:rPr lang="ko-KR" altLang="en-US" sz="2000" dirty="0" err="1">
+                <a:latin typeface="휴먼모음T" panose="02030504000101010101" pitchFamily="18" charset="-127"/>
+                <a:ea typeface="휴먼모음T" panose="02030504000101010101" pitchFamily="18" charset="-127"/>
+              </a:rPr>
+              <a:t>머신러닝에</a:t>
+            </a:r>
+            <a:r>
+              <a:rPr lang="ko-KR" altLang="en-US" sz="2000" dirty="0">
+                <a:latin typeface="휴먼모음T" panose="02030504000101010101" pitchFamily="18" charset="-127"/>
+                <a:ea typeface="휴먼모음T" panose="02030504000101010101" pitchFamily="18" charset="-127"/>
+              </a:rPr>
+              <a:t> 접목하는 내용을 모의실험으로 파이썬 코드로 제시하라</a:t>
+            </a:r>
+            <a:endParaRPr lang="en-US" altLang="ko-KR" sz="2000" dirty="0">
+              <a:latin typeface="휴먼모음T" panose="02030504000101010101" pitchFamily="18" charset="-127"/>
+              <a:ea typeface="휴먼모음T" panose="02030504000101010101" pitchFamily="18" charset="-127"/>
+            </a:endParaRPr>
+          </a:p>
+        </p:txBody>
+      </p:sp>
+    </p:spTree>
+    <p:extLst>
+      <p:ext uri="{BB962C8B-B14F-4D97-AF65-F5344CB8AC3E}">
+        <p14:creationId xmlns:p14="http://schemas.microsoft.com/office/powerpoint/2010/main" val="2559646205"/>
+      </p:ext>
+    </p:extLst>
+  </p:cSld>
+  <p:clrMapOvr>
+    <a:masterClrMapping/>
+  </p:clrMapOvr>
+  <mc:AlternateContent xmlns:mc="http://schemas.openxmlformats.org/markup-compatibility/2006" xmlns:p14="http://schemas.microsoft.com/office/powerpoint/2010/main">
+    <mc:Choice Requires="p14">
+      <p:transition spd="med" p14:dur="700">
+        <p:fade/>
+      </p:transition>
+    </mc:Choice>
+    <mc:Fallback xmlns="">
+      <p:transition spd="med">
+        <p:fade/>
+      </p:transition>
+    </mc:Fallback>
+  </mc:AlternateContent>
+</p:sld>
+</file>
+
+<file path=ppt/slides/slide11.xml><?xml version="1.0" encoding="utf-8"?>
+<p:sld xmlns:a="http://schemas.openxmlformats.org/drawingml/2006/main" xmlns:r="http://schemas.openxmlformats.org/officeDocument/2006/relationships" xmlns:p="http://schemas.openxmlformats.org/presentationml/2006/main">
+  <p:cSld>
+    <p:spTree>
+      <p:nvGrpSpPr>
+        <p:cNvPr id="1" name="">
+          <a:extLst>
+            <a:ext uri="{FF2B5EF4-FFF2-40B4-BE49-F238E27FC236}">
               <a16:creationId xmlns:a16="http://schemas.microsoft.com/office/drawing/2014/main" id="{9BBFE75F-6515-E02E-0A0F-4F2429757FE5}"/>
             </a:ext>
           </a:extLst>
@@ -5456,7 +6188,7 @@
             <a:pPr rtl="0"/>
             <a:fld id="{A3F31473-23EB-4724-8B59-FE6D21D89FA4}" type="slidenum">
               <a:rPr lang="en-US" altLang="ko-KR" noProof="0" smtClean="0"/>
-              <a:t>10</a:t>
+              <a:t>11</a:t>
             </a:fld>
             <a:endParaRPr lang="en-US" altLang="ko-KR" noProof="0" dirty="0"/>
           </a:p>
@@ -7811,7 +8543,7 @@
         <p:spPr>
           <a:xfrm>
             <a:off x="765820" y="1196752"/>
-            <a:ext cx="11233248" cy="509178"/>
+            <a:ext cx="11233248" cy="2355838"/>
           </a:xfrm>
           <a:prstGeom prst="rect">
             <a:avLst/>
@@ -7841,21 +8573,221 @@
                 <a:latin typeface="휴먼모음T" panose="02030504000101010101" pitchFamily="18" charset="-127"/>
                 <a:ea typeface="휴먼모음T" panose="02030504000101010101" pitchFamily="18" charset="-127"/>
               </a:rPr>
-              <a:t>평생 미팅하는 상대방이 </a:t>
+              <a:t>한 학급에 </a:t>
+            </a:r>
+            <a:r>
+              <a:rPr lang="ko-KR" altLang="ko-KR" sz="2000" dirty="0">
+                <a:latin typeface="휴먼모음T" panose="02030504000101010101" pitchFamily="18" charset="-127"/>
+                <a:ea typeface="휴먼모음T" panose="02030504000101010101" pitchFamily="18" charset="-127"/>
+              </a:rPr>
+              <a:t>100</a:t>
+            </a:r>
+            <a:r>
+              <a:rPr lang="ko-KR" altLang="en-US" sz="2000" dirty="0">
+                <a:latin typeface="휴먼모음T" panose="02030504000101010101" pitchFamily="18" charset="-127"/>
+                <a:ea typeface="휴먼모음T" panose="02030504000101010101" pitchFamily="18" charset="-127"/>
+              </a:rPr>
+              <a:t>명</a:t>
+            </a:r>
+            <a:r>
+              <a:rPr lang="ko-KR" altLang="ko-KR" sz="2000" dirty="0">
+                <a:latin typeface="휴먼모음T" panose="02030504000101010101" pitchFamily="18" charset="-127"/>
+                <a:ea typeface="휴먼모음T" panose="02030504000101010101" pitchFamily="18" charset="-127"/>
+              </a:rPr>
+              <a:t>(</a:t>
+            </a:r>
+            <a:r>
+              <a:rPr lang="ko-KR" altLang="ko-KR" sz="2000" dirty="0" err="1">
+                <a:latin typeface="휴먼모음T" panose="02030504000101010101" pitchFamily="18" charset="-127"/>
+                <a:ea typeface="휴먼모음T" panose="02030504000101010101" pitchFamily="18" charset="-127"/>
+              </a:rPr>
+              <a:t>N</a:t>
+            </a:r>
+            <a:r>
+              <a:rPr lang="ko-KR" altLang="ko-KR" sz="2000" dirty="0">
+                <a:latin typeface="휴먼모음T" panose="02030504000101010101" pitchFamily="18" charset="-127"/>
+                <a:ea typeface="휴먼모음T" panose="02030504000101010101" pitchFamily="18" charset="-127"/>
+              </a:rPr>
+              <a:t>=100)</a:t>
+            </a:r>
+            <a:r>
+              <a:rPr lang="ko-KR" altLang="en-US" sz="2000" dirty="0">
+                <a:latin typeface="휴먼모음T" panose="02030504000101010101" pitchFamily="18" charset="-127"/>
+                <a:ea typeface="휴먼모음T" panose="02030504000101010101" pitchFamily="18" charset="-127"/>
+              </a:rPr>
+              <a:t>이 있는 반을 </a:t>
+            </a:r>
+            <a:r>
+              <a:rPr lang="ko-KR" altLang="ko-KR" sz="2000" dirty="0">
+                <a:latin typeface="휴먼모음T" panose="02030504000101010101" pitchFamily="18" charset="-127"/>
+                <a:ea typeface="휴먼모음T" panose="02030504000101010101" pitchFamily="18" charset="-127"/>
+              </a:rPr>
+              <a:t>상상해 보세요. </a:t>
+            </a:r>
+            <a:r>
+              <a:rPr lang="ko-KR" altLang="en-US" sz="2000" dirty="0">
+                <a:latin typeface="휴먼모음T" panose="02030504000101010101" pitchFamily="18" charset="-127"/>
+                <a:ea typeface="휴먼모음T" panose="02030504000101010101" pitchFamily="18" charset="-127"/>
+              </a:rPr>
+              <a:t>선생님이 무작위로 </a:t>
             </a:r>
             <a:r>
               <a:rPr lang="en-US" altLang="ko-KR" sz="2000" dirty="0">
                 <a:latin typeface="휴먼모음T" panose="02030504000101010101" pitchFamily="18" charset="-127"/>
                 <a:ea typeface="휴먼모음T" panose="02030504000101010101" pitchFamily="18" charset="-127"/>
               </a:rPr>
-              <a:t>N</a:t>
+              <a:t>1 </a:t>
             </a:r>
             <a:r>
               <a:rPr lang="ko-KR" altLang="en-US" sz="2000" dirty="0">
                 <a:latin typeface="휴먼모음T" panose="02030504000101010101" pitchFamily="18" charset="-127"/>
                 <a:ea typeface="휴먼모음T" panose="02030504000101010101" pitchFamily="18" charset="-127"/>
               </a:rPr>
-              <a:t>명이라면 몇 번째 만난 사람과 결혼을 해야 최적의 선택인가</a:t>
+              <a:t>명을 </a:t>
+            </a:r>
+            <a:r>
+              <a:rPr lang="ko-KR" altLang="ko-KR" sz="2000" dirty="0">
+                <a:latin typeface="휴먼모음T" panose="02030504000101010101" pitchFamily="18" charset="-127"/>
+                <a:ea typeface="휴먼모음T" panose="02030504000101010101" pitchFamily="18" charset="-127"/>
+              </a:rPr>
+              <a:t>뽑고</a:t>
+            </a:r>
+            <a:r>
+              <a:rPr lang="en-US" altLang="ko-KR" sz="2000" dirty="0">
+                <a:latin typeface="휴먼모음T" panose="02030504000101010101" pitchFamily="18" charset="-127"/>
+                <a:ea typeface="휴먼모음T" panose="02030504000101010101" pitchFamily="18" charset="-127"/>
+              </a:rPr>
+              <a:t> </a:t>
+            </a:r>
+            <a:r>
+              <a:rPr lang="ko-KR" altLang="en-US" sz="2000" dirty="0">
+                <a:latin typeface="휴먼모음T" panose="02030504000101010101" pitchFamily="18" charset="-127"/>
+                <a:ea typeface="휴먼모음T" panose="02030504000101010101" pitchFamily="18" charset="-127"/>
+              </a:rPr>
+              <a:t>선물을 주고</a:t>
+            </a:r>
+            <a:r>
+              <a:rPr lang="ko-KR" altLang="ko-KR" sz="2000" dirty="0">
+                <a:latin typeface="휴먼모음T" panose="02030504000101010101" pitchFamily="18" charset="-127"/>
+                <a:ea typeface="휴먼모음T" panose="02030504000101010101" pitchFamily="18" charset="-127"/>
+              </a:rPr>
+              <a:t>, </a:t>
+            </a:r>
+            <a:r>
+              <a:rPr lang="ko-KR" altLang="en-US" sz="2000" dirty="0">
+                <a:latin typeface="휴먼모음T" panose="02030504000101010101" pitchFamily="18" charset="-127"/>
+                <a:ea typeface="휴먼모음T" panose="02030504000101010101" pitchFamily="18" charset="-127"/>
+              </a:rPr>
+              <a:t>다시 전체 </a:t>
+            </a:r>
+            <a:r>
+              <a:rPr lang="en-US" altLang="ko-KR" sz="2000" dirty="0">
+                <a:latin typeface="휴먼모음T" panose="02030504000101010101" pitchFamily="18" charset="-127"/>
+                <a:ea typeface="휴먼모음T" panose="02030504000101010101" pitchFamily="18" charset="-127"/>
+              </a:rPr>
+              <a:t>100</a:t>
+            </a:r>
+            <a:r>
+              <a:rPr lang="ko-KR" altLang="en-US" sz="2000" dirty="0">
+                <a:latin typeface="휴먼모음T" panose="02030504000101010101" pitchFamily="18" charset="-127"/>
+                <a:ea typeface="휴먼모음T" panose="02030504000101010101" pitchFamily="18" charset="-127"/>
+              </a:rPr>
+              <a:t>명에서 </a:t>
+            </a:r>
+            <a:r>
+              <a:rPr lang="en-US" altLang="ko-KR" sz="2000" dirty="0">
+                <a:latin typeface="휴먼모음T" panose="02030504000101010101" pitchFamily="18" charset="-127"/>
+                <a:ea typeface="휴먼모음T" panose="02030504000101010101" pitchFamily="18" charset="-127"/>
+              </a:rPr>
+              <a:t>1</a:t>
+            </a:r>
+            <a:r>
+              <a:rPr lang="ko-KR" altLang="en-US" sz="2000" dirty="0">
+                <a:latin typeface="휴먼모음T" panose="02030504000101010101" pitchFamily="18" charset="-127"/>
+                <a:ea typeface="휴먼모음T" panose="02030504000101010101" pitchFamily="18" charset="-127"/>
+              </a:rPr>
+              <a:t>명을 뽑습니다</a:t>
+            </a:r>
+            <a:r>
+              <a:rPr lang="en-US" altLang="ko-KR" sz="2000" dirty="0">
+                <a:latin typeface="휴먼모음T" panose="02030504000101010101" pitchFamily="18" charset="-127"/>
+                <a:ea typeface="휴먼모음T" panose="02030504000101010101" pitchFamily="18" charset="-127"/>
+              </a:rPr>
+              <a:t>. </a:t>
+            </a:r>
+            <a:r>
+              <a:rPr lang="ko-KR" altLang="ko-KR" sz="2000" dirty="0">
+                <a:latin typeface="휴먼모음T" panose="02030504000101010101" pitchFamily="18" charset="-127"/>
+                <a:ea typeface="휴먼모음T" panose="02030504000101010101" pitchFamily="18" charset="-127"/>
+              </a:rPr>
+              <a:t>이 짓을 똑같이 100번 반복해서 </a:t>
+            </a:r>
+            <a:r>
+              <a:rPr lang="ko-KR" altLang="en-US" sz="2000" dirty="0">
+                <a:latin typeface="휴먼모음T" panose="02030504000101010101" pitchFamily="18" charset="-127"/>
+                <a:ea typeface="휴먼모음T" panose="02030504000101010101" pitchFamily="18" charset="-127"/>
+              </a:rPr>
+              <a:t>선물을 주게 될 경우 내가 선물을 못박을 확률은</a:t>
+            </a:r>
+            <a:r>
+              <a:rPr lang="en-US" altLang="ko-KR" sz="2000" dirty="0">
+                <a:latin typeface="휴먼모음T" panose="02030504000101010101" pitchFamily="18" charset="-127"/>
+                <a:ea typeface="휴먼모음T" panose="02030504000101010101" pitchFamily="18" charset="-127"/>
+              </a:rPr>
+              <a:t>?</a:t>
+            </a:r>
+          </a:p>
+          <a:p>
+            <a:pPr marL="285750" indent="-285750">
+              <a:lnSpc>
+                <a:spcPct val="150000"/>
+              </a:lnSpc>
+              <a:buFont typeface="Wingdings" panose="05000000000000000000" pitchFamily="2" charset="2"/>
+              <a:buChar char="v"/>
+            </a:pPr>
+            <a:r>
+              <a:rPr lang="en-US" altLang="ko-KR" sz="2000" dirty="0">
+                <a:latin typeface="휴먼모음T" panose="02030504000101010101" pitchFamily="18" charset="-127"/>
+                <a:ea typeface="휴먼모음T" panose="02030504000101010101" pitchFamily="18" charset="-127"/>
+              </a:rPr>
+              <a:t>200</a:t>
+            </a:r>
+            <a:r>
+              <a:rPr lang="ko-KR" altLang="en-US" sz="2000" dirty="0">
+                <a:latin typeface="휴먼모음T" panose="02030504000101010101" pitchFamily="18" charset="-127"/>
+                <a:ea typeface="휴먼모음T" panose="02030504000101010101" pitchFamily="18" charset="-127"/>
+              </a:rPr>
+              <a:t>번을 반복했는데 내가 못 받을 확률은</a:t>
+            </a:r>
+            <a:r>
+              <a:rPr lang="en-US" altLang="ko-KR" sz="2000" dirty="0">
+                <a:latin typeface="휴먼모음T" panose="02030504000101010101" pitchFamily="18" charset="-127"/>
+                <a:ea typeface="휴먼모음T" panose="02030504000101010101" pitchFamily="18" charset="-127"/>
+              </a:rPr>
+              <a:t>?</a:t>
+            </a:r>
+          </a:p>
+          <a:p>
+            <a:pPr marL="285750" indent="-285750">
+              <a:lnSpc>
+                <a:spcPct val="150000"/>
+              </a:lnSpc>
+              <a:buFont typeface="Wingdings" panose="05000000000000000000" pitchFamily="2" charset="2"/>
+              <a:buChar char="v"/>
+            </a:pPr>
+            <a:r>
+              <a:rPr lang="en-US" altLang="ko-KR" sz="2000" dirty="0">
+                <a:latin typeface="휴먼모음T" panose="02030504000101010101" pitchFamily="18" charset="-127"/>
+                <a:ea typeface="휴먼모음T" panose="02030504000101010101" pitchFamily="18" charset="-127"/>
+              </a:rPr>
+              <a:t>300</a:t>
+            </a:r>
+            <a:r>
+              <a:rPr lang="ko-KR" altLang="en-US" sz="2000" dirty="0">
+                <a:latin typeface="휴먼모음T" panose="02030504000101010101" pitchFamily="18" charset="-127"/>
+                <a:ea typeface="휴먼모음T" panose="02030504000101010101" pitchFamily="18" charset="-127"/>
+              </a:rPr>
+              <a:t>번을 반복했는데 내가 못 받을 확률은</a:t>
             </a:r>
             <a:r>
               <a:rPr lang="en-US" altLang="ko-KR" sz="2000" dirty="0">
@@ -7935,6 +8867,190 @@
         <p:cNvPr id="1" name="">
           <a:extLst>
             <a:ext uri="{FF2B5EF4-FFF2-40B4-BE49-F238E27FC236}">
+              <a16:creationId xmlns:a16="http://schemas.microsoft.com/office/drawing/2014/main" id="{FD863252-33CE-8BCC-AD7B-FF64CEC04133}"/>
+            </a:ext>
+          </a:extLst>
+        </p:cNvPr>
+        <p:cNvGrpSpPr/>
+        <p:nvPr/>
+      </p:nvGrpSpPr>
+      <p:grpSpPr>
+        <a:xfrm>
+          <a:off x="0" y="0"/>
+          <a:ext cx="0" cy="0"/>
+          <a:chOff x="0" y="0"/>
+          <a:chExt cx="0" cy="0"/>
+        </a:xfrm>
+      </p:grpSpPr>
+      <p:sp>
+        <p:nvSpPr>
+          <p:cNvPr id="2" name="슬라이드 번호 개체 틀 1">
+            <a:extLst>
+              <a:ext uri="{FF2B5EF4-FFF2-40B4-BE49-F238E27FC236}">
+                <a16:creationId xmlns:a16="http://schemas.microsoft.com/office/drawing/2014/main" id="{92BE835A-B5F4-F995-40C3-C7E940E4052B}"/>
+              </a:ext>
+            </a:extLst>
+          </p:cNvPr>
+          <p:cNvSpPr>
+            <a:spLocks noGrp="1"/>
+          </p:cNvSpPr>
+          <p:nvPr>
+            <p:ph type="sldNum" sz="quarter" idx="12"/>
+          </p:nvPr>
+        </p:nvSpPr>
+        <p:spPr/>
+        <p:txBody>
+          <a:bodyPr/>
+          <a:lstStyle/>
+          <a:p>
+            <a:pPr rtl="0"/>
+            <a:fld id="{A3F31473-23EB-4724-8B59-FE6D21D89FA4}" type="slidenum">
+              <a:rPr lang="en-US" altLang="ko-KR" noProof="0" smtClean="0"/>
+              <a:t>8</a:t>
+            </a:fld>
+            <a:endParaRPr lang="en-US" altLang="ko-KR" noProof="0" dirty="0"/>
+          </a:p>
+        </p:txBody>
+      </p:sp>
+      <p:sp>
+        <p:nvSpPr>
+          <p:cNvPr id="4" name="TextBox 3">
+            <a:extLst>
+              <a:ext uri="{FF2B5EF4-FFF2-40B4-BE49-F238E27FC236}">
+                <a16:creationId xmlns:a16="http://schemas.microsoft.com/office/drawing/2014/main" id="{4B91CA6F-D833-6140-6621-352A7531D611}"/>
+              </a:ext>
+            </a:extLst>
+          </p:cNvPr>
+          <p:cNvSpPr txBox="1"/>
+          <p:nvPr/>
+        </p:nvSpPr>
+        <p:spPr>
+          <a:xfrm>
+            <a:off x="765820" y="1196752"/>
+            <a:ext cx="11233248" cy="509178"/>
+          </a:xfrm>
+          <a:prstGeom prst="rect">
+            <a:avLst/>
+          </a:prstGeom>
+          <a:solidFill>
+            <a:schemeClr val="tx1">
+              <a:lumMod val="20000"/>
+              <a:lumOff val="80000"/>
+            </a:schemeClr>
+          </a:solidFill>
+        </p:spPr>
+        <p:txBody>
+          <a:bodyPr wrap="square" rtlCol="0">
+            <a:spAutoFit/>
+          </a:bodyPr>
+          <a:lstStyle/>
+          <a:p>
+            <a:pPr marL="285750" indent="-285750">
+              <a:lnSpc>
+                <a:spcPct val="150000"/>
+              </a:lnSpc>
+              <a:buFont typeface="Wingdings" panose="05000000000000000000" pitchFamily="2" charset="2"/>
+              <a:buChar char="v"/>
+            </a:pPr>
+            <a:r>
+              <a:rPr lang="ko-KR" altLang="en-US" sz="2000" dirty="0">
+                <a:latin typeface="휴먼모음T" panose="02030504000101010101" pitchFamily="18" charset="-127"/>
+                <a:ea typeface="휴먼모음T" panose="02030504000101010101" pitchFamily="18" charset="-127"/>
+              </a:rPr>
+              <a:t>평생 미팅하는 상대방이 </a:t>
+            </a:r>
+            <a:r>
+              <a:rPr lang="en-US" altLang="ko-KR" sz="2000" dirty="0">
+                <a:latin typeface="휴먼모음T" panose="02030504000101010101" pitchFamily="18" charset="-127"/>
+                <a:ea typeface="휴먼모음T" panose="02030504000101010101" pitchFamily="18" charset="-127"/>
+              </a:rPr>
+              <a:t>N</a:t>
+            </a:r>
+            <a:r>
+              <a:rPr lang="ko-KR" altLang="en-US" sz="2000" dirty="0">
+                <a:latin typeface="휴먼모음T" panose="02030504000101010101" pitchFamily="18" charset="-127"/>
+                <a:ea typeface="휴먼모음T" panose="02030504000101010101" pitchFamily="18" charset="-127"/>
+              </a:rPr>
+              <a:t>명이라면 몇 번째 만난 사람과 결혼을 해야 최적의 선택인가</a:t>
+            </a:r>
+            <a:r>
+              <a:rPr lang="en-US" altLang="ko-KR" sz="2000" dirty="0">
+                <a:latin typeface="휴먼모음T" panose="02030504000101010101" pitchFamily="18" charset="-127"/>
+                <a:ea typeface="휴먼모음T" panose="02030504000101010101" pitchFamily="18" charset="-127"/>
+              </a:rPr>
+              <a:t>?</a:t>
+            </a:r>
+          </a:p>
+        </p:txBody>
+      </p:sp>
+      <p:sp>
+        <p:nvSpPr>
+          <p:cNvPr id="9" name="TextBox 8">
+            <a:extLst>
+              <a:ext uri="{FF2B5EF4-FFF2-40B4-BE49-F238E27FC236}">
+                <a16:creationId xmlns:a16="http://schemas.microsoft.com/office/drawing/2014/main" id="{D5A0FD1C-8CA9-3906-1CAB-19D923D4C28D}"/>
+              </a:ext>
+            </a:extLst>
+          </p:cNvPr>
+          <p:cNvSpPr txBox="1"/>
+          <p:nvPr/>
+        </p:nvSpPr>
+        <p:spPr>
+          <a:xfrm>
+            <a:off x="117748" y="260648"/>
+            <a:ext cx="2592288" cy="584775"/>
+          </a:xfrm>
+          <a:prstGeom prst="rect">
+            <a:avLst/>
+          </a:prstGeom>
+          <a:noFill/>
+        </p:spPr>
+        <p:txBody>
+          <a:bodyPr wrap="square" rtlCol="0">
+            <a:spAutoFit/>
+          </a:bodyPr>
+          <a:lstStyle/>
+          <a:p>
+            <a:r>
+              <a:rPr lang="ko-KR" altLang="en-US" sz="3200" b="1"/>
+              <a:t>문제 풀이</a:t>
+            </a:r>
+          </a:p>
+        </p:txBody>
+      </p:sp>
+    </p:spTree>
+    <p:extLst>
+      <p:ext uri="{BB962C8B-B14F-4D97-AF65-F5344CB8AC3E}">
+        <p14:creationId xmlns:p14="http://schemas.microsoft.com/office/powerpoint/2010/main" val="2479132389"/>
+      </p:ext>
+    </p:extLst>
+  </p:cSld>
+  <p:clrMapOvr>
+    <a:masterClrMapping/>
+  </p:clrMapOvr>
+  <mc:AlternateContent xmlns:mc="http://schemas.openxmlformats.org/markup-compatibility/2006" xmlns:p14="http://schemas.microsoft.com/office/powerpoint/2010/main">
+    <mc:Choice Requires="p14">
+      <p:transition spd="med" p14:dur="700">
+        <p:fade/>
+      </p:transition>
+    </mc:Choice>
+    <mc:Fallback xmlns="">
+      <p:transition spd="med">
+        <p:fade/>
+      </p:transition>
+    </mc:Fallback>
+  </mc:AlternateContent>
+</p:sld>
+</file>
+
+<file path=ppt/slides/slide9.xml><?xml version="1.0" encoding="utf-8"?>
+<p:sld xmlns:a="http://schemas.openxmlformats.org/drawingml/2006/main" xmlns:r="http://schemas.openxmlformats.org/officeDocument/2006/relationships" xmlns:p="http://schemas.openxmlformats.org/presentationml/2006/main">
+  <p:cSld>
+    <p:spTree>
+      <p:nvGrpSpPr>
+        <p:cNvPr id="1" name="">
+          <a:extLst>
+            <a:ext uri="{FF2B5EF4-FFF2-40B4-BE49-F238E27FC236}">
               <a16:creationId xmlns:a16="http://schemas.microsoft.com/office/drawing/2014/main" id="{D82F35E0-A8BA-9E25-DCE5-002AF8EF7215}"/>
             </a:ext>
           </a:extLst>
@@ -7974,7 +9090,7 @@
             <a:pPr rtl="0"/>
             <a:fld id="{A3F31473-23EB-4724-8B59-FE6D21D89FA4}" type="slidenum">
               <a:rPr lang="en-US" altLang="ko-KR" noProof="0" smtClean="0"/>
-              <a:t>8</a:t>
+              <a:t>9</a:t>
             </a:fld>
             <a:endParaRPr lang="en-US" altLang="ko-KR" noProof="0" dirty="0"/>
           </a:p>
@@ -8463,628 +9579,6 @@
     <p:extLst>
       <p:ext uri="{BB962C8B-B14F-4D97-AF65-F5344CB8AC3E}">
         <p14:creationId xmlns:p14="http://schemas.microsoft.com/office/powerpoint/2010/main" val="2060882861"/>
-      </p:ext>
-    </p:extLst>
-  </p:cSld>
-  <p:clrMapOvr>
-    <a:masterClrMapping/>
-  </p:clrMapOvr>
-  <mc:AlternateContent xmlns:mc="http://schemas.openxmlformats.org/markup-compatibility/2006" xmlns:p14="http://schemas.microsoft.com/office/powerpoint/2010/main">
-    <mc:Choice Requires="p14">
-      <p:transition spd="med" p14:dur="700">
-        <p:fade/>
-      </p:transition>
-    </mc:Choice>
-    <mc:Fallback xmlns="">
-      <p:transition spd="med">
-        <p:fade/>
-      </p:transition>
-    </mc:Fallback>
-  </mc:AlternateContent>
-</p:sld>
-</file>
-
-<file path=ppt/slides/slide9.xml><?xml version="1.0" encoding="utf-8"?>
-<p:sld xmlns:a="http://schemas.openxmlformats.org/drawingml/2006/main" xmlns:r="http://schemas.openxmlformats.org/officeDocument/2006/relationships" xmlns:p="http://schemas.openxmlformats.org/presentationml/2006/main">
-  <p:cSld>
-    <p:spTree>
-      <p:nvGrpSpPr>
-        <p:cNvPr id="1" name="">
-          <a:extLst>
-            <a:ext uri="{FF2B5EF4-FFF2-40B4-BE49-F238E27FC236}">
-              <a16:creationId xmlns:a16="http://schemas.microsoft.com/office/drawing/2014/main" id="{014016E6-4DF5-97F6-9486-23E46F5C4A36}"/>
-            </a:ext>
-          </a:extLst>
-        </p:cNvPr>
-        <p:cNvGrpSpPr/>
-        <p:nvPr/>
-      </p:nvGrpSpPr>
-      <p:grpSpPr>
-        <a:xfrm>
-          <a:off x="0" y="0"/>
-          <a:ext cx="0" cy="0"/>
-          <a:chOff x="0" y="0"/>
-          <a:chExt cx="0" cy="0"/>
-        </a:xfrm>
-      </p:grpSpPr>
-      <p:sp>
-        <p:nvSpPr>
-          <p:cNvPr id="2" name="슬라이드 번호 개체 틀 1">
-            <a:extLst>
-              <a:ext uri="{FF2B5EF4-FFF2-40B4-BE49-F238E27FC236}">
-                <a16:creationId xmlns:a16="http://schemas.microsoft.com/office/drawing/2014/main" id="{A39D4B50-D754-79A0-CD51-823002DF348F}"/>
-              </a:ext>
-            </a:extLst>
-          </p:cNvPr>
-          <p:cNvSpPr>
-            <a:spLocks noGrp="1"/>
-          </p:cNvSpPr>
-          <p:nvPr>
-            <p:ph type="sldNum" sz="quarter" idx="12"/>
-          </p:nvPr>
-        </p:nvSpPr>
-        <p:spPr/>
-        <p:txBody>
-          <a:bodyPr/>
-          <a:lstStyle/>
-          <a:p>
-            <a:pPr rtl="0"/>
-            <a:fld id="{A3F31473-23EB-4724-8B59-FE6D21D89FA4}" type="slidenum">
-              <a:rPr lang="en-US" altLang="ko-KR" noProof="0" smtClean="0"/>
-              <a:t>9</a:t>
-            </a:fld>
-            <a:endParaRPr lang="en-US" altLang="ko-KR" noProof="0" dirty="0"/>
-          </a:p>
-        </p:txBody>
-      </p:sp>
-      <p:sp>
-        <p:nvSpPr>
-          <p:cNvPr id="4" name="TextBox 3">
-            <a:extLst>
-              <a:ext uri="{FF2B5EF4-FFF2-40B4-BE49-F238E27FC236}">
-                <a16:creationId xmlns:a16="http://schemas.microsoft.com/office/drawing/2014/main" id="{6843735A-526C-E0D0-66F8-62A3BD4EC82F}"/>
-              </a:ext>
-            </a:extLst>
-          </p:cNvPr>
-          <p:cNvSpPr txBox="1"/>
-          <p:nvPr/>
-        </p:nvSpPr>
-        <p:spPr>
-          <a:xfrm>
-            <a:off x="693812" y="2276872"/>
-            <a:ext cx="11233248" cy="3606821"/>
-          </a:xfrm>
-          <a:prstGeom prst="rect">
-            <a:avLst/>
-          </a:prstGeom>
-          <a:solidFill>
-            <a:schemeClr val="tx1">
-              <a:lumMod val="20000"/>
-              <a:lumOff val="80000"/>
-            </a:schemeClr>
-          </a:solidFill>
-        </p:spPr>
-        <p:txBody>
-          <a:bodyPr wrap="square" rtlCol="0">
-            <a:spAutoFit/>
-          </a:bodyPr>
-          <a:lstStyle/>
-          <a:p>
-            <a:pPr marL="285750" indent="-285750">
-              <a:lnSpc>
-                <a:spcPct val="150000"/>
-              </a:lnSpc>
-              <a:buFont typeface="Wingdings" panose="05000000000000000000" pitchFamily="2" charset="2"/>
-              <a:buChar char="v"/>
-            </a:pPr>
-            <a:r>
-              <a:rPr lang="ko-KR" altLang="en-US" dirty="0">
-                <a:latin typeface="휴먼모음T" panose="02030504000101010101" pitchFamily="18" charset="-127"/>
-                <a:ea typeface="휴먼모음T" panose="02030504000101010101" pitchFamily="18" charset="-127"/>
-              </a:rPr>
-              <a:t>모델 학습의 안정성 확보”</a:t>
-            </a:r>
-            <a:endParaRPr lang="en-US" altLang="ko-KR" dirty="0">
-              <a:latin typeface="휴먼모음T" panose="02030504000101010101" pitchFamily="18" charset="-127"/>
-              <a:ea typeface="휴먼모음T" panose="02030504000101010101" pitchFamily="18" charset="-127"/>
-            </a:endParaRPr>
-          </a:p>
-          <a:p>
-            <a:pPr marL="742950" lvl="1" indent="-285750">
-              <a:lnSpc>
-                <a:spcPct val="150000"/>
-              </a:lnSpc>
-              <a:buFont typeface="Wingdings" panose="05000000000000000000" pitchFamily="2" charset="2"/>
-              <a:buChar char="v"/>
-            </a:pPr>
-            <a:r>
-              <a:rPr lang="en-US" altLang="ko-KR" sz="1600" dirty="0">
-                <a:latin typeface="휴먼모음T" panose="02030504000101010101" pitchFamily="18" charset="-127"/>
-                <a:ea typeface="휴먼모음T" panose="02030504000101010101" pitchFamily="18" charset="-127"/>
-              </a:rPr>
-              <a:t>MSE , Cross-Entropy, Log-loss </a:t>
-            </a:r>
-            <a:endParaRPr lang="en-US" altLang="ko-KR" dirty="0">
-              <a:latin typeface="휴먼모음T" panose="02030504000101010101" pitchFamily="18" charset="-127"/>
-              <a:ea typeface="휴먼모음T" panose="02030504000101010101" pitchFamily="18" charset="-127"/>
-            </a:endParaRPr>
-          </a:p>
-          <a:p>
-            <a:pPr marL="285750" indent="-285750">
-              <a:lnSpc>
-                <a:spcPct val="150000"/>
-              </a:lnSpc>
-              <a:buFont typeface="Wingdings" panose="05000000000000000000" pitchFamily="2" charset="2"/>
-              <a:buChar char="v"/>
-            </a:pPr>
-            <a:r>
-              <a:rPr lang="en-US" altLang="ko-KR" dirty="0">
-                <a:latin typeface="휴먼모음T" panose="02030504000101010101" pitchFamily="18" charset="-127"/>
-                <a:ea typeface="휴먼모음T" panose="02030504000101010101" pitchFamily="18" charset="-127"/>
-              </a:rPr>
-              <a:t>Mini-batch </a:t>
-            </a:r>
-            <a:r>
-              <a:rPr lang="ko-KR" altLang="en-US" dirty="0">
-                <a:latin typeface="휴먼모음T" panose="02030504000101010101" pitchFamily="18" charset="-127"/>
-                <a:ea typeface="휴먼모음T" panose="02030504000101010101" pitchFamily="18" charset="-127"/>
-              </a:rPr>
-              <a:t>학습이 가능한 이유”</a:t>
-            </a:r>
-            <a:endParaRPr lang="en-US" altLang="ko-KR" dirty="0">
-              <a:latin typeface="휴먼모음T" panose="02030504000101010101" pitchFamily="18" charset="-127"/>
-              <a:ea typeface="휴먼모음T" panose="02030504000101010101" pitchFamily="18" charset="-127"/>
-            </a:endParaRPr>
-          </a:p>
-          <a:p>
-            <a:pPr marL="742950" lvl="1" indent="-285750">
-              <a:lnSpc>
-                <a:spcPct val="150000"/>
-              </a:lnSpc>
-              <a:buFont typeface="Wingdings" panose="05000000000000000000" pitchFamily="2" charset="2"/>
-              <a:buChar char="v"/>
-            </a:pPr>
-            <a:r>
-              <a:rPr lang="en-US" altLang="ko-KR" sz="1600" dirty="0">
-                <a:latin typeface="휴먼모음T" panose="02030504000101010101" pitchFamily="18" charset="-127"/>
-                <a:ea typeface="휴먼모음T" panose="02030504000101010101" pitchFamily="18" charset="-127"/>
-              </a:rPr>
-              <a:t>Mini-batch = </a:t>
-            </a:r>
-            <a:r>
-              <a:rPr lang="ko-KR" altLang="en-US" sz="1600" dirty="0">
-                <a:latin typeface="휴먼모음T" panose="02030504000101010101" pitchFamily="18" charset="-127"/>
-                <a:ea typeface="휴먼모음T" panose="02030504000101010101" pitchFamily="18" charset="-127"/>
-              </a:rPr>
-              <a:t>작은 샘플 평균</a:t>
-            </a:r>
-            <a:r>
-              <a:rPr lang="en-US" altLang="ko-KR" sz="1600" dirty="0">
-                <a:latin typeface="휴먼모음T" panose="02030504000101010101" pitchFamily="18" charset="-127"/>
-                <a:ea typeface="휴먼모음T" panose="02030504000101010101" pitchFamily="18" charset="-127"/>
-              </a:rPr>
-              <a:t>, CLT</a:t>
-            </a:r>
-            <a:r>
-              <a:rPr lang="ko-KR" altLang="en-US" sz="1600" dirty="0">
-                <a:latin typeface="휴먼모음T" panose="02030504000101010101" pitchFamily="18" charset="-127"/>
-                <a:ea typeface="휴먼모음T" panose="02030504000101010101" pitchFamily="18" charset="-127"/>
-              </a:rPr>
-              <a:t>없이는 </a:t>
-            </a:r>
-            <a:r>
-              <a:rPr lang="en-US" altLang="ko-KR" sz="1600" dirty="0">
-                <a:latin typeface="휴먼모음T" panose="02030504000101010101" pitchFamily="18" charset="-127"/>
-                <a:ea typeface="휴먼모음T" panose="02030504000101010101" pitchFamily="18" charset="-127"/>
-              </a:rPr>
-              <a:t>mini</a:t>
-            </a:r>
-            <a:r>
-              <a:rPr lang="ko-KR" altLang="en-US" sz="1600" dirty="0">
-                <a:latin typeface="휴먼모음T" panose="02030504000101010101" pitchFamily="18" charset="-127"/>
-                <a:ea typeface="휴먼모음T" panose="02030504000101010101" pitchFamily="18" charset="-127"/>
-              </a:rPr>
-              <a:t> </a:t>
-            </a:r>
-            <a:r>
-              <a:rPr lang="en-US" altLang="ko-KR" sz="1600" dirty="0">
-                <a:latin typeface="휴먼모음T" panose="02030504000101010101" pitchFamily="18" charset="-127"/>
-                <a:ea typeface="휴먼모음T" panose="02030504000101010101" pitchFamily="18" charset="-127"/>
-              </a:rPr>
-              <a:t>batch </a:t>
-            </a:r>
-            <a:r>
-              <a:rPr lang="ko-KR" altLang="en-US" sz="1600" dirty="0">
-                <a:latin typeface="휴먼모음T" panose="02030504000101010101" pitchFamily="18" charset="-127"/>
-                <a:ea typeface="휴먼모음T" panose="02030504000101010101" pitchFamily="18" charset="-127"/>
-              </a:rPr>
-              <a:t>도 없음</a:t>
-            </a:r>
-            <a:endParaRPr lang="en-US" altLang="ko-KR" dirty="0">
-              <a:latin typeface="휴먼모음T" panose="02030504000101010101" pitchFamily="18" charset="-127"/>
-              <a:ea typeface="휴먼모음T" panose="02030504000101010101" pitchFamily="18" charset="-127"/>
-            </a:endParaRPr>
-          </a:p>
-          <a:p>
-            <a:pPr marL="285750" indent="-285750">
-              <a:lnSpc>
-                <a:spcPct val="150000"/>
-              </a:lnSpc>
-              <a:buFont typeface="Wingdings" panose="05000000000000000000" pitchFamily="2" charset="2"/>
-              <a:buChar char="v"/>
-            </a:pPr>
-            <a:r>
-              <a:rPr lang="ko-KR" altLang="en-US" dirty="0">
-                <a:latin typeface="휴먼모음T" panose="02030504000101010101" pitchFamily="18" charset="-127"/>
-                <a:ea typeface="휴먼모음T" panose="02030504000101010101" pitchFamily="18" charset="-127"/>
-              </a:rPr>
-              <a:t>교차검증을 통한 모델의 평가</a:t>
-            </a:r>
-            <a:endParaRPr lang="en-US" altLang="ko-KR" dirty="0">
-              <a:latin typeface="휴먼모음T" panose="02030504000101010101" pitchFamily="18" charset="-127"/>
-              <a:ea typeface="휴먼모음T" panose="02030504000101010101" pitchFamily="18" charset="-127"/>
-            </a:endParaRPr>
-          </a:p>
-          <a:p>
-            <a:pPr marL="742950" lvl="1" indent="-285750">
-              <a:lnSpc>
-                <a:spcPct val="150000"/>
-              </a:lnSpc>
-              <a:buFont typeface="Wingdings" panose="05000000000000000000" pitchFamily="2" charset="2"/>
-              <a:buChar char="v"/>
-            </a:pPr>
-            <a:r>
-              <a:rPr lang="ko-KR" altLang="en-US" sz="1600" dirty="0">
-                <a:latin typeface="휴먼모음T" panose="02030504000101010101" pitchFamily="18" charset="-127"/>
-                <a:ea typeface="휴먼모음T" panose="02030504000101010101" pitchFamily="18" charset="-127"/>
-              </a:rPr>
-              <a:t>평균 </a:t>
-            </a:r>
-            <a:r>
-              <a:rPr lang="en-US" altLang="ko-KR" sz="1600" dirty="0">
-                <a:latin typeface="휴먼모음T" panose="02030504000101010101" pitchFamily="18" charset="-127"/>
-                <a:ea typeface="휴먼모음T" panose="02030504000101010101" pitchFamily="18" charset="-127"/>
-              </a:rPr>
-              <a:t>accuracy/loss, </a:t>
-            </a:r>
-            <a:r>
-              <a:rPr lang="ko-KR" altLang="en-US" sz="1600" dirty="0">
-                <a:latin typeface="휴먼모음T" panose="02030504000101010101" pitchFamily="18" charset="-127"/>
-                <a:ea typeface="휴먼모음T" panose="02030504000101010101" pitchFamily="18" charset="-127"/>
-              </a:rPr>
-              <a:t>교차검증 평균 등 </a:t>
-            </a:r>
-            <a:r>
-              <a:rPr lang="en-US" altLang="ko-KR" sz="1600" dirty="0">
-                <a:latin typeface="휴먼모음T" panose="02030504000101010101" pitchFamily="18" charset="-127"/>
-                <a:ea typeface="휴먼모음T" panose="02030504000101010101" pitchFamily="18" charset="-127"/>
-              </a:rPr>
-              <a:t>CLT </a:t>
-            </a:r>
-            <a:r>
-              <a:rPr lang="ko-KR" altLang="en-US" sz="1600" dirty="0">
-                <a:latin typeface="휴먼모음T" panose="02030504000101010101" pitchFamily="18" charset="-127"/>
-                <a:ea typeface="휴먼모음T" panose="02030504000101010101" pitchFamily="18" charset="-127"/>
-              </a:rPr>
-              <a:t>적용으로 이  평균들은 → 정규분포 근사</a:t>
-            </a:r>
-            <a:r>
-              <a:rPr lang="en-US" altLang="ko-KR" sz="1600" dirty="0">
-                <a:latin typeface="휴먼모음T" panose="02030504000101010101" pitchFamily="18" charset="-127"/>
-                <a:ea typeface="휴먼모음T" panose="02030504000101010101" pitchFamily="18" charset="-127"/>
-              </a:rPr>
-              <a:t> </a:t>
-            </a:r>
-            <a:r>
-              <a:rPr lang="ko-KR" altLang="en-US" sz="1600" dirty="0">
-                <a:latin typeface="휴먼모음T" panose="02030504000101010101" pitchFamily="18" charset="-127"/>
-                <a:ea typeface="휴먼모음T" panose="02030504000101010101" pitchFamily="18" charset="-127"/>
-              </a:rPr>
-              <a:t>→ 신뢰구간</a:t>
-            </a:r>
-            <a:r>
-              <a:rPr lang="en-US" altLang="ko-KR" sz="1600" dirty="0">
-                <a:latin typeface="휴먼모음T" panose="02030504000101010101" pitchFamily="18" charset="-127"/>
-                <a:ea typeface="휴먼모음T" panose="02030504000101010101" pitchFamily="18" charset="-127"/>
-              </a:rPr>
-              <a:t> </a:t>
-            </a:r>
-            <a:r>
-              <a:rPr lang="ko-KR" altLang="en-US" sz="1600" dirty="0">
-                <a:latin typeface="휴먼모음T" panose="02030504000101010101" pitchFamily="18" charset="-127"/>
-                <a:ea typeface="휴먼모음T" panose="02030504000101010101" pitchFamily="18" charset="-127"/>
-              </a:rPr>
-              <a:t>→</a:t>
-            </a:r>
-            <a:r>
-              <a:rPr lang="en-US" altLang="ko-KR" sz="1600" dirty="0">
-                <a:latin typeface="휴먼모음T" panose="02030504000101010101" pitchFamily="18" charset="-127"/>
-                <a:ea typeface="휴먼모음T" panose="02030504000101010101" pitchFamily="18" charset="-127"/>
-              </a:rPr>
-              <a:t> </a:t>
-            </a:r>
-            <a:r>
-              <a:rPr lang="ko-KR" altLang="en-US" sz="1600" dirty="0">
-                <a:latin typeface="휴먼모음T" panose="02030504000101010101" pitchFamily="18" charset="-127"/>
-                <a:ea typeface="휴먼모음T" panose="02030504000101010101" pitchFamily="18" charset="-127"/>
-              </a:rPr>
-              <a:t>통계적 비교 가능</a:t>
-            </a:r>
-            <a:endParaRPr lang="en-US" altLang="ko-KR" dirty="0">
-              <a:latin typeface="휴먼모음T" panose="02030504000101010101" pitchFamily="18" charset="-127"/>
-              <a:ea typeface="휴먼모음T" panose="02030504000101010101" pitchFamily="18" charset="-127"/>
-            </a:endParaRPr>
-          </a:p>
-          <a:p>
-            <a:pPr marL="285750" indent="-285750">
-              <a:lnSpc>
-                <a:spcPct val="150000"/>
-              </a:lnSpc>
-              <a:buFont typeface="Wingdings" panose="05000000000000000000" pitchFamily="2" charset="2"/>
-              <a:buChar char="v"/>
-            </a:pPr>
-            <a:r>
-              <a:rPr lang="en-US" altLang="ko-KR" dirty="0">
-                <a:latin typeface="휴먼모음T" panose="02030504000101010101" pitchFamily="18" charset="-127"/>
-                <a:ea typeface="휴먼모음T" panose="02030504000101010101" pitchFamily="18" charset="-127"/>
-              </a:rPr>
-              <a:t>A/B </a:t>
-            </a:r>
-            <a:r>
-              <a:rPr lang="ko-KR" altLang="en-US" dirty="0">
-                <a:latin typeface="휴먼모음T" panose="02030504000101010101" pitchFamily="18" charset="-127"/>
-                <a:ea typeface="휴먼모음T" panose="02030504000101010101" pitchFamily="18" charset="-127"/>
-              </a:rPr>
-              <a:t>테스트와 실험 설계의 핵심</a:t>
-            </a:r>
-            <a:endParaRPr lang="en-US" altLang="ko-KR" dirty="0">
-              <a:latin typeface="휴먼모음T" panose="02030504000101010101" pitchFamily="18" charset="-127"/>
-              <a:ea typeface="휴먼모음T" panose="02030504000101010101" pitchFamily="18" charset="-127"/>
-            </a:endParaRPr>
-          </a:p>
-          <a:p>
-            <a:pPr marL="742950" lvl="1" indent="-285750">
-              <a:lnSpc>
-                <a:spcPct val="150000"/>
-              </a:lnSpc>
-              <a:buFont typeface="Wingdings" panose="05000000000000000000" pitchFamily="2" charset="2"/>
-              <a:buChar char="v"/>
-            </a:pPr>
-            <a:r>
-              <a:rPr lang="ko-KR" altLang="en-US" sz="1600" dirty="0">
-                <a:latin typeface="휴먼모음T" panose="02030504000101010101" pitchFamily="18" charset="-127"/>
-                <a:ea typeface="휴먼모음T" panose="02030504000101010101" pitchFamily="18" charset="-127"/>
-              </a:rPr>
-              <a:t>광고 효과 비교</a:t>
-            </a:r>
-            <a:r>
-              <a:rPr lang="en-US" altLang="ko-KR" sz="1600" dirty="0">
-                <a:latin typeface="휴먼모음T" panose="02030504000101010101" pitchFamily="18" charset="-127"/>
-                <a:ea typeface="휴먼모음T" panose="02030504000101010101" pitchFamily="18" charset="-127"/>
-              </a:rPr>
-              <a:t>, </a:t>
-            </a:r>
-            <a:r>
-              <a:rPr lang="ko-KR" altLang="en-US" sz="1600" dirty="0">
-                <a:latin typeface="휴먼모음T" panose="02030504000101010101" pitchFamily="18" charset="-127"/>
-                <a:ea typeface="휴먼모음T" panose="02030504000101010101" pitchFamily="18" charset="-127"/>
-              </a:rPr>
-              <a:t>추천 알고리즘 비교</a:t>
-            </a:r>
-            <a:r>
-              <a:rPr lang="en-US" altLang="ko-KR" sz="1600" dirty="0">
-                <a:latin typeface="휴먼모음T" panose="02030504000101010101" pitchFamily="18" charset="-127"/>
-                <a:ea typeface="휴먼모음T" panose="02030504000101010101" pitchFamily="18" charset="-127"/>
-              </a:rPr>
-              <a:t>, UI </a:t>
-            </a:r>
-            <a:r>
-              <a:rPr lang="ko-KR" altLang="en-US" sz="1600" dirty="0">
-                <a:latin typeface="휴먼모음T" panose="02030504000101010101" pitchFamily="18" charset="-127"/>
-                <a:ea typeface="휴먼모음T" panose="02030504000101010101" pitchFamily="18" charset="-127"/>
-              </a:rPr>
-              <a:t>개선 효과 측정  등 전부 평균 비교 문제로 </a:t>
-            </a:r>
-            <a:r>
-              <a:rPr lang="en-US" altLang="ko-KR" sz="1600" dirty="0">
-                <a:latin typeface="휴먼모음T" panose="02030504000101010101" pitchFamily="18" charset="-127"/>
-                <a:ea typeface="휴먼모음T" panose="02030504000101010101" pitchFamily="18" charset="-127"/>
-              </a:rPr>
-              <a:t>CLT </a:t>
-            </a:r>
-            <a:r>
-              <a:rPr lang="ko-KR" altLang="en-US" sz="1600" dirty="0">
-                <a:latin typeface="휴먼모음T" panose="02030504000101010101" pitchFamily="18" charset="-127"/>
-                <a:ea typeface="휴먼모음T" panose="02030504000101010101" pitchFamily="18" charset="-127"/>
-              </a:rPr>
-              <a:t>덕분에</a:t>
-            </a:r>
-            <a:r>
-              <a:rPr lang="en-US" altLang="ko-KR" sz="1600" dirty="0">
-                <a:latin typeface="휴먼모음T" panose="02030504000101010101" pitchFamily="18" charset="-127"/>
-                <a:ea typeface="휴먼모음T" panose="02030504000101010101" pitchFamily="18" charset="-127"/>
-              </a:rPr>
-              <a:t> </a:t>
-            </a:r>
-            <a:r>
-              <a:rPr lang="ko-KR" altLang="en-US" sz="1600" dirty="0">
-                <a:latin typeface="휴먼모음T" panose="02030504000101010101" pitchFamily="18" charset="-127"/>
-                <a:ea typeface="휴먼모음T" panose="02030504000101010101" pitchFamily="18" charset="-127"/>
-              </a:rPr>
-              <a:t>두 평균 차이 → 정규분포 근사 → </a:t>
-            </a:r>
-            <a:r>
-              <a:rPr lang="en-US" altLang="ko-KR" sz="1600" dirty="0">
-                <a:latin typeface="휴먼모음T" panose="02030504000101010101" pitchFamily="18" charset="-127"/>
-                <a:ea typeface="휴먼모음T" panose="02030504000101010101" pitchFamily="18" charset="-127"/>
-              </a:rPr>
-              <a:t>p-value </a:t>
-            </a:r>
-            <a:r>
-              <a:rPr lang="ko-KR" altLang="en-US" sz="1600" dirty="0">
-                <a:latin typeface="휴먼모음T" panose="02030504000101010101" pitchFamily="18" charset="-127"/>
-                <a:ea typeface="휴먼모음T" panose="02030504000101010101" pitchFamily="18" charset="-127"/>
-              </a:rPr>
-              <a:t>계산 가능</a:t>
-            </a:r>
-            <a:r>
-              <a:rPr lang="ko-KR" altLang="en-US" dirty="0">
-                <a:latin typeface="휴먼모음T" panose="02030504000101010101" pitchFamily="18" charset="-127"/>
-                <a:ea typeface="휴먼모음T" panose="02030504000101010101" pitchFamily="18" charset="-127"/>
-              </a:rPr>
-              <a:t> </a:t>
-            </a:r>
-            <a:endParaRPr lang="en-US" altLang="ko-KR" sz="2000" dirty="0">
-              <a:latin typeface="휴먼모음T" panose="02030504000101010101" pitchFamily="18" charset="-127"/>
-              <a:ea typeface="휴먼모음T" panose="02030504000101010101" pitchFamily="18" charset="-127"/>
-            </a:endParaRPr>
-          </a:p>
-        </p:txBody>
-      </p:sp>
-      <p:sp>
-        <p:nvSpPr>
-          <p:cNvPr id="9" name="TextBox 8">
-            <a:extLst>
-              <a:ext uri="{FF2B5EF4-FFF2-40B4-BE49-F238E27FC236}">
-                <a16:creationId xmlns:a16="http://schemas.microsoft.com/office/drawing/2014/main" id="{185A9784-515E-A3E4-8F67-F24BA80B28DC}"/>
-              </a:ext>
-            </a:extLst>
-          </p:cNvPr>
-          <p:cNvSpPr txBox="1"/>
-          <p:nvPr/>
-        </p:nvSpPr>
-        <p:spPr>
-          <a:xfrm>
-            <a:off x="117748" y="260648"/>
-            <a:ext cx="2592288" cy="584775"/>
-          </a:xfrm>
-          <a:prstGeom prst="rect">
-            <a:avLst/>
-          </a:prstGeom>
-          <a:noFill/>
-        </p:spPr>
-        <p:txBody>
-          <a:bodyPr wrap="square" rtlCol="0">
-            <a:spAutoFit/>
-          </a:bodyPr>
-          <a:lstStyle/>
-          <a:p>
-            <a:r>
-              <a:rPr lang="ko-KR" altLang="en-US" sz="3200" b="1"/>
-              <a:t>문제 풀이</a:t>
-            </a:r>
-          </a:p>
-        </p:txBody>
-      </p:sp>
-      <p:sp>
-        <p:nvSpPr>
-          <p:cNvPr id="5" name="TextBox 4">
-            <a:extLst>
-              <a:ext uri="{FF2B5EF4-FFF2-40B4-BE49-F238E27FC236}">
-                <a16:creationId xmlns:a16="http://schemas.microsoft.com/office/drawing/2014/main" id="{52039815-B66C-C01C-F725-1707E5711FCB}"/>
-              </a:ext>
-            </a:extLst>
-          </p:cNvPr>
-          <p:cNvSpPr txBox="1"/>
-          <p:nvPr/>
-        </p:nvSpPr>
-        <p:spPr>
-          <a:xfrm>
-            <a:off x="549796" y="858989"/>
-            <a:ext cx="11377264" cy="970843"/>
-          </a:xfrm>
-          <a:prstGeom prst="rect">
-            <a:avLst/>
-          </a:prstGeom>
-          <a:noFill/>
-        </p:spPr>
-        <p:txBody>
-          <a:bodyPr wrap="square">
-            <a:spAutoFit/>
-          </a:bodyPr>
-          <a:lstStyle/>
-          <a:p>
-            <a:pPr marL="285750" indent="-285750">
-              <a:lnSpc>
-                <a:spcPct val="150000"/>
-              </a:lnSpc>
-              <a:buFont typeface="Wingdings" panose="05000000000000000000" pitchFamily="2" charset="2"/>
-              <a:buChar char="v"/>
-            </a:pPr>
-            <a:r>
-              <a:rPr lang="ko-KR" altLang="en-US" sz="2000" dirty="0">
-                <a:latin typeface="휴먼모음T" panose="02030504000101010101" pitchFamily="18" charset="-127"/>
-                <a:ea typeface="휴먼모음T" panose="02030504000101010101" pitchFamily="18" charset="-127"/>
-              </a:rPr>
-              <a:t>중심극한정리</a:t>
-            </a:r>
-            <a:r>
-              <a:rPr lang="en-US" altLang="ko-KR" sz="2000" dirty="0">
-                <a:latin typeface="휴먼모음T" panose="02030504000101010101" pitchFamily="18" charset="-127"/>
-                <a:ea typeface="휴먼모음T" panose="02030504000101010101" pitchFamily="18" charset="-127"/>
-              </a:rPr>
-              <a:t>(</a:t>
-            </a:r>
-            <a:r>
-              <a:rPr lang="ko-KR" altLang="en-US" sz="2000" dirty="0">
-                <a:latin typeface="휴먼모음T" panose="02030504000101010101" pitchFamily="18" charset="-127"/>
-                <a:ea typeface="휴먼모음T" panose="02030504000101010101" pitchFamily="18" charset="-127"/>
-              </a:rPr>
-              <a:t>데이터는 불규칙하지만</a:t>
-            </a:r>
-            <a:r>
-              <a:rPr lang="en-US" altLang="ko-KR" sz="2000" dirty="0">
-                <a:latin typeface="휴먼모음T" panose="02030504000101010101" pitchFamily="18" charset="-127"/>
-                <a:ea typeface="휴먼모음T" panose="02030504000101010101" pitchFamily="18" charset="-127"/>
-              </a:rPr>
-              <a:t>, </a:t>
-            </a:r>
-            <a:r>
-              <a:rPr lang="ko-KR" altLang="en-US" sz="2000" dirty="0">
-                <a:latin typeface="휴먼모음T" panose="02030504000101010101" pitchFamily="18" charset="-127"/>
-                <a:ea typeface="휴먼모음T" panose="02030504000101010101" pitchFamily="18" charset="-127"/>
-              </a:rPr>
-              <a:t>평균은 예측 가능하다 → 그래서 학습이 가능하다</a:t>
-            </a:r>
-            <a:r>
-              <a:rPr lang="en-US" altLang="ko-KR" sz="2000" dirty="0">
-                <a:latin typeface="휴먼모음T" panose="02030504000101010101" pitchFamily="18" charset="-127"/>
-                <a:ea typeface="휴먼모음T" panose="02030504000101010101" pitchFamily="18" charset="-127"/>
-              </a:rPr>
-              <a:t>)</a:t>
-            </a:r>
-            <a:r>
-              <a:rPr lang="ko-KR" altLang="en-US" sz="2000" dirty="0">
-                <a:latin typeface="휴먼모음T" panose="02030504000101010101" pitchFamily="18" charset="-127"/>
-                <a:ea typeface="휴먼모음T" panose="02030504000101010101" pitchFamily="18" charset="-127"/>
-              </a:rPr>
-              <a:t>가 </a:t>
-            </a:r>
-            <a:r>
-              <a:rPr lang="ko-KR" altLang="en-US" sz="2000" dirty="0" err="1">
-                <a:latin typeface="휴먼모음T" panose="02030504000101010101" pitchFamily="18" charset="-127"/>
-                <a:ea typeface="휴먼모음T" panose="02030504000101010101" pitchFamily="18" charset="-127"/>
-              </a:rPr>
-              <a:t>머신러닝에</a:t>
-            </a:r>
-            <a:r>
-              <a:rPr lang="ko-KR" altLang="en-US" sz="2000" dirty="0">
-                <a:latin typeface="휴먼모음T" panose="02030504000101010101" pitchFamily="18" charset="-127"/>
-                <a:ea typeface="휴먼모음T" panose="02030504000101010101" pitchFamily="18" charset="-127"/>
-              </a:rPr>
-              <a:t> 접목하는 내용을 모의실험으로 파이썬 코드로 제시하라</a:t>
-            </a:r>
-            <a:endParaRPr lang="en-US" altLang="ko-KR" sz="2000" dirty="0">
-              <a:latin typeface="휴먼모음T" panose="02030504000101010101" pitchFamily="18" charset="-127"/>
-              <a:ea typeface="휴먼모음T" panose="02030504000101010101" pitchFamily="18" charset="-127"/>
-            </a:endParaRPr>
-          </a:p>
-        </p:txBody>
-      </p:sp>
-    </p:spTree>
-    <p:extLst>
-      <p:ext uri="{BB962C8B-B14F-4D97-AF65-F5344CB8AC3E}">
-        <p14:creationId xmlns:p14="http://schemas.microsoft.com/office/powerpoint/2010/main" val="2559646205"/>
       </p:ext>
     </p:extLst>
   </p:cSld>
@@ -9907,6 +10401,26 @@
 </file>
 
 <file path=customXml/item1.xml><?xml version="1.0" encoding="utf-8"?>
+<p:properties xmlns:p="http://schemas.microsoft.com/office/2006/metadata/properties" xmlns:xsi="http://www.w3.org/2001/XMLSchema-instance" xmlns:pc="http://schemas.microsoft.com/office/infopath/2007/PartnerControls">
+  <documentManagement>
+    <VSO_x0020_item_x0020_id xmlns="40262f94-9f35-4ac3-9a90-690165a166b7" xsi:nil="true"/>
+    <Assetid_x0020_ xmlns="40262f94-9f35-4ac3-9a90-690165a166b7" xsi:nil="true"/>
+    <Item_x0020_Details xmlns="40262f94-9f35-4ac3-9a90-690165a166b7" xsi:nil="true"/>
+    <Template_x0020_details xmlns="40262f94-9f35-4ac3-9a90-690165a166b7" xsi:nil="true"/>
+  </documentManagement>
+</p:properties>
+</file>
+
+<file path=customXml/item2.xml><?xml version="1.0" encoding="utf-8"?>
+<?mso-contentType ?>
+<FormTemplates xmlns="http://schemas.microsoft.com/sharepoint/v3/contenttype/forms">
+  <Display>DocumentLibraryForm</Display>
+  <Edit>DocumentLibraryForm</Edit>
+  <New>DocumentLibraryForm</New>
+</FormTemplates>
+</file>
+
+<file path=customXml/item3.xml><?xml version="1.0" encoding="utf-8"?>
 <ct:contentTypeSchema xmlns:ct="http://schemas.microsoft.com/office/2006/metadata/contentType" xmlns:ma="http://schemas.microsoft.com/office/2006/metadata/properties/metaAttributes" ct:_="" ma:_="" ma:contentTypeName="Document" ma:contentTypeID="0x010100AA3F7D94069FF64A86F7DFF56D60E3BE" ma:contentTypeVersion="6" ma:contentTypeDescription="Create a new document." ma:contentTypeScope="" ma:versionID="c32302c77d4085ecf495bdddb7f5e889">
   <xsd:schema xmlns:xsd="http://www.w3.org/2001/XMLSchema" xmlns:xs="http://www.w3.org/2001/XMLSchema" xmlns:p="http://schemas.microsoft.com/office/2006/metadata/properties" xmlns:ns2="a4f35948-e619-41b3-aa29-22878b09cfd2" xmlns:ns3="40262f94-9f35-4ac3-9a90-690165a166b7" targetNamespace="http://schemas.microsoft.com/office/2006/metadata/properties" ma:root="true" ma:fieldsID="4ab5ae46be95f9d0be6107e8200be7a2" ns2:_="" ns3:_="">
     <xsd:import namespace="a4f35948-e619-41b3-aa29-22878b09cfd2"/>
@@ -10087,27 +10601,32 @@
 </ct:contentTypeSchema>
 </file>
 
-<file path=customXml/item2.xml><?xml version="1.0" encoding="utf-8"?>
-<?mso-contentType ?>
-<FormTemplates xmlns="http://schemas.microsoft.com/sharepoint/v3/contenttype/forms">
-  <Display>DocumentLibraryForm</Display>
-  <Edit>DocumentLibraryForm</Edit>
-  <New>DocumentLibraryForm</New>
-</FormTemplates>
+<file path=customXml/itemProps1.xml><?xml version="1.0" encoding="utf-8"?>
+<ds:datastoreItem xmlns:ds="http://schemas.openxmlformats.org/officeDocument/2006/customXml" ds:itemID="{50AACE6D-8EB6-447A-8DFD-C2C0C52916AC}">
+  <ds:schemaRefs>
+    <ds:schemaRef ds:uri="a4f35948-e619-41b3-aa29-22878b09cfd2"/>
+    <ds:schemaRef ds:uri="http://purl.org/dc/elements/1.1/"/>
+    <ds:schemaRef ds:uri="http://schemas.microsoft.com/office/infopath/2007/PartnerControls"/>
+    <ds:schemaRef ds:uri="40262f94-9f35-4ac3-9a90-690165a166b7"/>
+    <ds:schemaRef ds:uri="http://purl.org/dc/dcmitype/"/>
+    <ds:schemaRef ds:uri="http://schemas.microsoft.com/office/2006/documentManagement/types"/>
+    <ds:schemaRef ds:uri="http://schemas.microsoft.com/office/2006/metadata/properties"/>
+    <ds:schemaRef ds:uri="http://schemas.openxmlformats.org/package/2006/metadata/core-properties"/>
+    <ds:schemaRef ds:uri="http://www.w3.org/XML/1998/namespace"/>
+    <ds:schemaRef ds:uri="http://purl.org/dc/terms/"/>
+  </ds:schemaRefs>
+</ds:datastoreItem>
 </file>
 
-<file path=customXml/item3.xml><?xml version="1.0" encoding="utf-8"?>
-<p:properties xmlns:p="http://schemas.microsoft.com/office/2006/metadata/properties" xmlns:xsi="http://www.w3.org/2001/XMLSchema-instance" xmlns:pc="http://schemas.microsoft.com/office/infopath/2007/PartnerControls">
-  <documentManagement>
-    <VSO_x0020_item_x0020_id xmlns="40262f94-9f35-4ac3-9a90-690165a166b7" xsi:nil="true"/>
-    <Assetid_x0020_ xmlns="40262f94-9f35-4ac3-9a90-690165a166b7" xsi:nil="true"/>
-    <Item_x0020_Details xmlns="40262f94-9f35-4ac3-9a90-690165a166b7" xsi:nil="true"/>
-    <Template_x0020_details xmlns="40262f94-9f35-4ac3-9a90-690165a166b7" xsi:nil="true"/>
-  </documentManagement>
-</p:properties>
+<file path=customXml/itemProps2.xml><?xml version="1.0" encoding="utf-8"?>
+<ds:datastoreItem xmlns:ds="http://schemas.openxmlformats.org/officeDocument/2006/customXml" ds:itemID="{7F9B8BCC-BF24-4800-92E1-9F891BBB27E6}">
+  <ds:schemaRefs>
+    <ds:schemaRef ds:uri="http://schemas.microsoft.com/sharepoint/v3/contenttype/forms"/>
+  </ds:schemaRefs>
+</ds:datastoreItem>
 </file>
 
-<file path=customXml/itemProps1.xml><?xml version="1.0" encoding="utf-8"?>
+<file path=customXml/itemProps3.xml><?xml version="1.0" encoding="utf-8"?>
 <ds:datastoreItem xmlns:ds="http://schemas.openxmlformats.org/officeDocument/2006/customXml" ds:itemID="{5CCB2C71-1ED8-4540-B003-293B5E75C71F}">
   <ds:schemaRefs>
     <ds:schemaRef ds:uri="http://schemas.microsoft.com/office/2006/metadata/contentType"/>
@@ -10124,29 +10643,4 @@
     <ds:schemaRef ds:uri="http://schemas.microsoft.com/internal/obd"/>
   </ds:schemaRefs>
 </ds:datastoreItem>
-</file>
-
-<file path=customXml/itemProps2.xml><?xml version="1.0" encoding="utf-8"?>
-<ds:datastoreItem xmlns:ds="http://schemas.openxmlformats.org/officeDocument/2006/customXml" ds:itemID="{7F9B8BCC-BF24-4800-92E1-9F891BBB27E6}">
-  <ds:schemaRefs>
-    <ds:schemaRef ds:uri="http://schemas.microsoft.com/sharepoint/v3/contenttype/forms"/>
-  </ds:schemaRefs>
-</ds:datastoreItem>
-</file>
-
-<file path=customXml/itemProps3.xml><?xml version="1.0" encoding="utf-8"?>
-<ds:datastoreItem xmlns:ds="http://schemas.openxmlformats.org/officeDocument/2006/customXml" ds:itemID="{50AACE6D-8EB6-447A-8DFD-C2C0C52916AC}">
-  <ds:schemaRefs>
-    <ds:schemaRef ds:uri="a4f35948-e619-41b3-aa29-22878b09cfd2"/>
-    <ds:schemaRef ds:uri="http://purl.org/dc/elements/1.1/"/>
-    <ds:schemaRef ds:uri="http://schemas.microsoft.com/office/infopath/2007/PartnerControls"/>
-    <ds:schemaRef ds:uri="40262f94-9f35-4ac3-9a90-690165a166b7"/>
-    <ds:schemaRef ds:uri="http://purl.org/dc/dcmitype/"/>
-    <ds:schemaRef ds:uri="http://schemas.microsoft.com/office/2006/documentManagement/types"/>
-    <ds:schemaRef ds:uri="http://schemas.microsoft.com/office/2006/metadata/properties"/>
-    <ds:schemaRef ds:uri="http://schemas.openxmlformats.org/package/2006/metadata/core-properties"/>
-    <ds:schemaRef ds:uri="http://www.w3.org/XML/1998/namespace"/>
-    <ds:schemaRef ds:uri="http://purl.org/dc/terms/"/>
-  </ds:schemaRefs>
-</ds:datastoreItem>
 </file>